--- a/deliverables/exathon-india-2026-pitch.pptx
+++ b/deliverables/exathon-india-2026-pitch.pptx
@@ -2,17 +2,17 @@
 <file path=ppt/presentation.xml><?xml version="1.0" encoding="utf-8"?>
 <p:presentation xmlns:p="http://schemas.openxmlformats.org/presentationml/2006/main">
   <p:sldMasterIdLst>
-    <p:sldMasterId xmlns:r="http://schemas.openxmlformats.org/officeDocument/2006/relationships" id="2147483648" r:id="R09908b0f9a044e9f"/>
+    <p:sldMasterId xmlns:r="http://schemas.openxmlformats.org/officeDocument/2006/relationships" id="2147483648" r:id="R11971df894d445c8"/>
   </p:sldMasterIdLst>
   <p:notesMasterIdLst>
-    <p:notesMasterId xmlns:r="http://schemas.openxmlformats.org/officeDocument/2006/relationships" r:id="R8e6e12b4de8b4afb"/>
+    <p:notesMasterId xmlns:r="http://schemas.openxmlformats.org/officeDocument/2006/relationships" r:id="Rf69a5fcfd2644346"/>
   </p:notesMasterIdLst>
   <p:sldIdLst>
-    <p:sldId xmlns:r="http://schemas.openxmlformats.org/officeDocument/2006/relationships" id="256" r:id="Radf613a2ff3d4e22"/>
-    <p:sldId xmlns:r="http://schemas.openxmlformats.org/officeDocument/2006/relationships" id="257" r:id="Rfb1b273978ac45a7"/>
-    <p:sldId xmlns:r="http://schemas.openxmlformats.org/officeDocument/2006/relationships" id="258" r:id="R767c4a01a32b46ae"/>
-    <p:sldId xmlns:r="http://schemas.openxmlformats.org/officeDocument/2006/relationships" id="259" r:id="Reda06c4885ce4591"/>
-    <p:sldId xmlns:r="http://schemas.openxmlformats.org/officeDocument/2006/relationships" id="260" r:id="Raa5fec4f550e4999"/>
+    <p:sldId xmlns:r="http://schemas.openxmlformats.org/officeDocument/2006/relationships" id="256" r:id="Refafeefd17844a56"/>
+    <p:sldId xmlns:r="http://schemas.openxmlformats.org/officeDocument/2006/relationships" id="257" r:id="Reee0d2fa003c47c6"/>
+    <p:sldId xmlns:r="http://schemas.openxmlformats.org/officeDocument/2006/relationships" id="258" r:id="Rc71eaa69154f4828"/>
+    <p:sldId xmlns:r="http://schemas.openxmlformats.org/officeDocument/2006/relationships" id="259" r:id="Rdb9d3a239b2f4f03"/>
+    <p:sldId xmlns:r="http://schemas.openxmlformats.org/officeDocument/2006/relationships" id="260" r:id="R9227f92faeb74691"/>
   </p:sldIdLst>
   <p:sldSz cx="12192000" cy="6858000"/>
   <p:notesSz cx="6858000" cy="9144000"/>
@@ -449,6 +449,11 @@
               <a:t>Open by reading the problem statement exactly. The wording is preserved from the project brief.</a:t>
             </a:r>
           </a:p>
+          <a:p xmlns:a="http://schemas.openxmlformats.org/drawingml/2006/main">
+            <a:r>
+              <a:t>Solo project by Kushagra Gupta.</a:t>
+            </a:r>
+          </a:p>
         </p:txBody>
       </p:sp>
       <p:sp>
@@ -3179,12 +3184,12 @@
   </p:cSld>
   <p:clrMap bg1="lt1" tx1="dk1" bg2="lt2" tx2="dk2" accent1="accent1" accent2="accent2" accent3="accent3" accent4="accent4" accent5="accent5" accent6="accent6" hlink="hlink" folHlink="folHlink"/>
   <p:sldLayoutIdLst>
-    <p:sldLayoutId xmlns:r="http://schemas.openxmlformats.org/officeDocument/2006/relationships" id="2147483649" r:id="Rbb9bd62a60a542fa"/>
-    <p:sldLayoutId xmlns:r="http://schemas.openxmlformats.org/officeDocument/2006/relationships" id="2147483650" r:id="R914779c90ae7478b"/>
-    <p:sldLayoutId xmlns:r="http://schemas.openxmlformats.org/officeDocument/2006/relationships" id="2147483651" r:id="R4b77a0ab7b9f45d9"/>
-    <p:sldLayoutId xmlns:r="http://schemas.openxmlformats.org/officeDocument/2006/relationships" id="2147483652" r:id="Ra931f495b3c54f38"/>
-    <p:sldLayoutId xmlns:r="http://schemas.openxmlformats.org/officeDocument/2006/relationships" id="2147483653" r:id="R714fc3f2ffdf4148"/>
-    <p:sldLayoutId xmlns:r="http://schemas.openxmlformats.org/officeDocument/2006/relationships" id="2147483654" r:id="Rdc660f818f2540fa"/>
+    <p:sldLayoutId xmlns:r="http://schemas.openxmlformats.org/officeDocument/2006/relationships" id="2147483649" r:id="Rd6370313429543da"/>
+    <p:sldLayoutId xmlns:r="http://schemas.openxmlformats.org/officeDocument/2006/relationships" id="2147483650" r:id="R337fb4ca6ee44e13"/>
+    <p:sldLayoutId xmlns:r="http://schemas.openxmlformats.org/officeDocument/2006/relationships" id="2147483651" r:id="Re177ed01ce9347a9"/>
+    <p:sldLayoutId xmlns:r="http://schemas.openxmlformats.org/officeDocument/2006/relationships" id="2147483652" r:id="R4871d7be281447f0"/>
+    <p:sldLayoutId xmlns:r="http://schemas.openxmlformats.org/officeDocument/2006/relationships" id="2147483653" r:id="Red3a4dcc1a184c5f"/>
+    <p:sldLayoutId xmlns:r="http://schemas.openxmlformats.org/officeDocument/2006/relationships" id="2147483654" r:id="R777631df3d024fa4"/>
   </p:sldLayoutIdLst>
   <p:txStyles>
     <p:titleStyle>
@@ -3774,6 +3779,7 @@
               </a:defRPr>
             </a:defPPr>
             <a:lvl1pPr algn="l">
+              <a:buNone/>
               <a:defRPr sz="1050" b="1">
                 <a:solidFill>
                   <a:srgbClr val="63E6BE"/>
@@ -3784,6 +3790,7 @@
               </a:defRPr>
             </a:lvl1pPr>
             <a:lvl2pPr algn="l">
+              <a:buNone/>
               <a:defRPr sz="1050" b="1">
                 <a:solidFill>
                   <a:srgbClr val="63E6BE"/>
@@ -3794,6 +3801,7 @@
               </a:defRPr>
             </a:lvl2pPr>
             <a:lvl3pPr algn="l">
+              <a:buNone/>
               <a:defRPr sz="1050" b="1">
                 <a:solidFill>
                   <a:srgbClr val="63E6BE"/>
@@ -3804,6 +3812,7 @@
               </a:defRPr>
             </a:lvl3pPr>
             <a:lvl4pPr algn="l">
+              <a:buNone/>
               <a:defRPr sz="1050" b="1">
                 <a:solidFill>
                   <a:srgbClr val="63E6BE"/>
@@ -3814,6 +3823,7 @@
               </a:defRPr>
             </a:lvl4pPr>
             <a:lvl5pPr algn="l">
+              <a:buNone/>
               <a:defRPr sz="1050" b="1">
                 <a:solidFill>
                   <a:srgbClr val="63E6BE"/>
@@ -3824,6 +3834,7 @@
               </a:defRPr>
             </a:lvl5pPr>
             <a:lvl6pPr algn="l">
+              <a:buNone/>
               <a:defRPr sz="1050" b="1">
                 <a:solidFill>
                   <a:srgbClr val="63E6BE"/>
@@ -3834,6 +3845,7 @@
               </a:defRPr>
             </a:lvl6pPr>
             <a:lvl7pPr algn="l">
+              <a:buNone/>
               <a:defRPr sz="1050" b="1">
                 <a:solidFill>
                   <a:srgbClr val="63E6BE"/>
@@ -3844,6 +3856,7 @@
               </a:defRPr>
             </a:lvl7pPr>
             <a:lvl8pPr algn="l">
+              <a:buNone/>
               <a:defRPr sz="1050" b="1">
                 <a:solidFill>
                   <a:srgbClr val="63E6BE"/>
@@ -3854,6 +3867,7 @@
               </a:defRPr>
             </a:lvl8pPr>
             <a:lvl9pPr algn="l">
+              <a:buNone/>
               <a:defRPr sz="1050" b="1">
                 <a:solidFill>
                   <a:srgbClr val="63E6BE"/>
@@ -3968,6 +3982,7 @@
               </a:defRPr>
             </a:defPPr>
             <a:lvl1pPr algn="l">
+              <a:buNone/>
               <a:defRPr sz="2925" b="1">
                 <a:solidFill>
                   <a:srgbClr val="F5F7FA"/>
@@ -3978,6 +3993,7 @@
               </a:defRPr>
             </a:lvl1pPr>
             <a:lvl2pPr algn="l">
+              <a:buNone/>
               <a:defRPr sz="2925" b="1">
                 <a:solidFill>
                   <a:srgbClr val="F5F7FA"/>
@@ -3988,6 +4004,7 @@
               </a:defRPr>
             </a:lvl2pPr>
             <a:lvl3pPr algn="l">
+              <a:buNone/>
               <a:defRPr sz="2925" b="1">
                 <a:solidFill>
                   <a:srgbClr val="F5F7FA"/>
@@ -3998,6 +4015,7 @@
               </a:defRPr>
             </a:lvl3pPr>
             <a:lvl4pPr algn="l">
+              <a:buNone/>
               <a:defRPr sz="2925" b="1">
                 <a:solidFill>
                   <a:srgbClr val="F5F7FA"/>
@@ -4008,6 +4026,7 @@
               </a:defRPr>
             </a:lvl4pPr>
             <a:lvl5pPr algn="l">
+              <a:buNone/>
               <a:defRPr sz="2925" b="1">
                 <a:solidFill>
                   <a:srgbClr val="F5F7FA"/>
@@ -4018,6 +4037,7 @@
               </a:defRPr>
             </a:lvl5pPr>
             <a:lvl6pPr algn="l">
+              <a:buNone/>
               <a:defRPr sz="2925" b="1">
                 <a:solidFill>
                   <a:srgbClr val="F5F7FA"/>
@@ -4028,6 +4048,7 @@
               </a:defRPr>
             </a:lvl6pPr>
             <a:lvl7pPr algn="l">
+              <a:buNone/>
               <a:defRPr sz="2925" b="1">
                 <a:solidFill>
                   <a:srgbClr val="F5F7FA"/>
@@ -4038,6 +4059,7 @@
               </a:defRPr>
             </a:lvl7pPr>
             <a:lvl8pPr algn="l">
+              <a:buNone/>
               <a:defRPr sz="2925" b="1">
                 <a:solidFill>
                   <a:srgbClr val="F5F7FA"/>
@@ -4048,6 +4070,7 @@
               </a:defRPr>
             </a:lvl8pPr>
             <a:lvl9pPr algn="l">
+              <a:buNone/>
               <a:defRPr sz="2925" b="1">
                 <a:solidFill>
                   <a:srgbClr val="F5F7FA"/>
@@ -4131,6 +4154,7 @@
               </a:defRPr>
             </a:defPPr>
             <a:lvl1pPr algn="l">
+              <a:buNone/>
               <a:defRPr sz="900" b="1">
                 <a:solidFill>
                   <a:srgbClr val="A8B5C8"/>
@@ -4141,6 +4165,7 @@
               </a:defRPr>
             </a:lvl1pPr>
             <a:lvl2pPr algn="l">
+              <a:buNone/>
               <a:defRPr sz="900" b="1">
                 <a:solidFill>
                   <a:srgbClr val="A8B5C8"/>
@@ -4151,6 +4176,7 @@
               </a:defRPr>
             </a:lvl2pPr>
             <a:lvl3pPr algn="l">
+              <a:buNone/>
               <a:defRPr sz="900" b="1">
                 <a:solidFill>
                   <a:srgbClr val="A8B5C8"/>
@@ -4161,6 +4187,7 @@
               </a:defRPr>
             </a:lvl3pPr>
             <a:lvl4pPr algn="l">
+              <a:buNone/>
               <a:defRPr sz="900" b="1">
                 <a:solidFill>
                   <a:srgbClr val="A8B5C8"/>
@@ -4171,6 +4198,7 @@
               </a:defRPr>
             </a:lvl4pPr>
             <a:lvl5pPr algn="l">
+              <a:buNone/>
               <a:defRPr sz="900" b="1">
                 <a:solidFill>
                   <a:srgbClr val="A8B5C8"/>
@@ -4181,6 +4209,7 @@
               </a:defRPr>
             </a:lvl5pPr>
             <a:lvl6pPr algn="l">
+              <a:buNone/>
               <a:defRPr sz="900" b="1">
                 <a:solidFill>
                   <a:srgbClr val="A8B5C8"/>
@@ -4191,6 +4220,7 @@
               </a:defRPr>
             </a:lvl6pPr>
             <a:lvl7pPr algn="l">
+              <a:buNone/>
               <a:defRPr sz="900" b="1">
                 <a:solidFill>
                   <a:srgbClr val="A8B5C8"/>
@@ -4201,6 +4231,7 @@
               </a:defRPr>
             </a:lvl7pPr>
             <a:lvl8pPr algn="l">
+              <a:buNone/>
               <a:defRPr sz="900" b="1">
                 <a:solidFill>
                   <a:srgbClr val="A8B5C8"/>
@@ -4211,6 +4242,7 @@
               </a:defRPr>
             </a:lvl8pPr>
             <a:lvl9pPr algn="l">
+              <a:buNone/>
               <a:defRPr sz="900" b="1">
                 <a:solidFill>
                   <a:srgbClr val="A8B5C8"/>
@@ -4245,7 +4277,7 @@
                 <a:ea typeface="Arial"/>
                 <a:cs typeface="Arial"/>
               </a:rPr>
-              <a:t>EXATHON INDIA 2026</a:t>
+              <a:t>EXATHON INDIA 2026  /  SOLO PROJECT BY KUSHAGRA GUPTA</a:t>
             </a:r>
           </a:p>
         </p:txBody>
@@ -4323,6 +4355,7 @@
               </a:defRPr>
             </a:defPPr>
             <a:lvl1pPr algn="l">
+              <a:buNone/>
               <a:defRPr sz="1050" b="1">
                 <a:solidFill>
                   <a:srgbClr val="63E6BE"/>
@@ -4333,6 +4366,7 @@
               </a:defRPr>
             </a:lvl1pPr>
             <a:lvl2pPr algn="l">
+              <a:buNone/>
               <a:defRPr sz="1050" b="1">
                 <a:solidFill>
                   <a:srgbClr val="63E6BE"/>
@@ -4343,6 +4377,7 @@
               </a:defRPr>
             </a:lvl2pPr>
             <a:lvl3pPr algn="l">
+              <a:buNone/>
               <a:defRPr sz="1050" b="1">
                 <a:solidFill>
                   <a:srgbClr val="63E6BE"/>
@@ -4353,6 +4388,7 @@
               </a:defRPr>
             </a:lvl3pPr>
             <a:lvl4pPr algn="l">
+              <a:buNone/>
               <a:defRPr sz="1050" b="1">
                 <a:solidFill>
                   <a:srgbClr val="63E6BE"/>
@@ -4363,6 +4399,7 @@
               </a:defRPr>
             </a:lvl4pPr>
             <a:lvl5pPr algn="l">
+              <a:buNone/>
               <a:defRPr sz="1050" b="1">
                 <a:solidFill>
                   <a:srgbClr val="63E6BE"/>
@@ -4373,6 +4410,7 @@
               </a:defRPr>
             </a:lvl5pPr>
             <a:lvl6pPr algn="l">
+              <a:buNone/>
               <a:defRPr sz="1050" b="1">
                 <a:solidFill>
                   <a:srgbClr val="63E6BE"/>
@@ -4383,6 +4421,7 @@
               </a:defRPr>
             </a:lvl6pPr>
             <a:lvl7pPr algn="l">
+              <a:buNone/>
               <a:defRPr sz="1050" b="1">
                 <a:solidFill>
                   <a:srgbClr val="63E6BE"/>
@@ -4393,6 +4432,7 @@
               </a:defRPr>
             </a:lvl7pPr>
             <a:lvl8pPr algn="l">
+              <a:buNone/>
               <a:defRPr sz="1050" b="1">
                 <a:solidFill>
                   <a:srgbClr val="63E6BE"/>
@@ -4403,6 +4443,7 @@
               </a:defRPr>
             </a:lvl8pPr>
             <a:lvl9pPr algn="l">
+              <a:buNone/>
               <a:defRPr sz="1050" b="1">
                 <a:solidFill>
                   <a:srgbClr val="63E6BE"/>
@@ -4486,6 +4527,7 @@
               </a:defRPr>
             </a:defPPr>
             <a:lvl1pPr algn="l">
+              <a:buNone/>
               <a:defRPr sz="2850" b="1">
                 <a:solidFill>
                   <a:srgbClr val="F5F7FA"/>
@@ -4496,6 +4538,7 @@
               </a:defRPr>
             </a:lvl1pPr>
             <a:lvl2pPr algn="l">
+              <a:buNone/>
               <a:defRPr sz="2850" b="1">
                 <a:solidFill>
                   <a:srgbClr val="F5F7FA"/>
@@ -4506,6 +4549,7 @@
               </a:defRPr>
             </a:lvl2pPr>
             <a:lvl3pPr algn="l">
+              <a:buNone/>
               <a:defRPr sz="2850" b="1">
                 <a:solidFill>
                   <a:srgbClr val="F5F7FA"/>
@@ -4516,6 +4560,7 @@
               </a:defRPr>
             </a:lvl3pPr>
             <a:lvl4pPr algn="l">
+              <a:buNone/>
               <a:defRPr sz="2850" b="1">
                 <a:solidFill>
                   <a:srgbClr val="F5F7FA"/>
@@ -4526,6 +4571,7 @@
               </a:defRPr>
             </a:lvl4pPr>
             <a:lvl5pPr algn="l">
+              <a:buNone/>
               <a:defRPr sz="2850" b="1">
                 <a:solidFill>
                   <a:srgbClr val="F5F7FA"/>
@@ -4536,6 +4582,7 @@
               </a:defRPr>
             </a:lvl5pPr>
             <a:lvl6pPr algn="l">
+              <a:buNone/>
               <a:defRPr sz="2850" b="1">
                 <a:solidFill>
                   <a:srgbClr val="F5F7FA"/>
@@ -4546,6 +4593,7 @@
               </a:defRPr>
             </a:lvl6pPr>
             <a:lvl7pPr algn="l">
+              <a:buNone/>
               <a:defRPr sz="2850" b="1">
                 <a:solidFill>
                   <a:srgbClr val="F5F7FA"/>
@@ -4556,6 +4604,7 @@
               </a:defRPr>
             </a:lvl7pPr>
             <a:lvl8pPr algn="l">
+              <a:buNone/>
               <a:defRPr sz="2850" b="1">
                 <a:solidFill>
                   <a:srgbClr val="F5F7FA"/>
@@ -4566,6 +4615,7 @@
               </a:defRPr>
             </a:lvl8pPr>
             <a:lvl9pPr algn="l">
+              <a:buNone/>
               <a:defRPr sz="2850" b="1">
                 <a:solidFill>
                   <a:srgbClr val="F5F7FA"/>
@@ -4680,6 +4730,7 @@
               </a:defRPr>
             </a:defPPr>
             <a:lvl1pPr algn="l">
+              <a:buNone/>
               <a:defRPr sz="825" b="1">
                 <a:solidFill>
                   <a:srgbClr val="A8B5C8"/>
@@ -4690,6 +4741,7 @@
               </a:defRPr>
             </a:lvl1pPr>
             <a:lvl2pPr algn="l">
+              <a:buNone/>
               <a:defRPr sz="825" b="1">
                 <a:solidFill>
                   <a:srgbClr val="A8B5C8"/>
@@ -4700,6 +4752,7 @@
               </a:defRPr>
             </a:lvl2pPr>
             <a:lvl3pPr algn="l">
+              <a:buNone/>
               <a:defRPr sz="825" b="1">
                 <a:solidFill>
                   <a:srgbClr val="A8B5C8"/>
@@ -4710,6 +4763,7 @@
               </a:defRPr>
             </a:lvl3pPr>
             <a:lvl4pPr algn="l">
+              <a:buNone/>
               <a:defRPr sz="825" b="1">
                 <a:solidFill>
                   <a:srgbClr val="A8B5C8"/>
@@ -4720,6 +4774,7 @@
               </a:defRPr>
             </a:lvl4pPr>
             <a:lvl5pPr algn="l">
+              <a:buNone/>
               <a:defRPr sz="825" b="1">
                 <a:solidFill>
                   <a:srgbClr val="A8B5C8"/>
@@ -4730,6 +4785,7 @@
               </a:defRPr>
             </a:lvl5pPr>
             <a:lvl6pPr algn="l">
+              <a:buNone/>
               <a:defRPr sz="825" b="1">
                 <a:solidFill>
                   <a:srgbClr val="A8B5C8"/>
@@ -4740,6 +4796,7 @@
               </a:defRPr>
             </a:lvl6pPr>
             <a:lvl7pPr algn="l">
+              <a:buNone/>
               <a:defRPr sz="825" b="1">
                 <a:solidFill>
                   <a:srgbClr val="A8B5C8"/>
@@ -4750,6 +4807,7 @@
               </a:defRPr>
             </a:lvl7pPr>
             <a:lvl8pPr algn="l">
+              <a:buNone/>
               <a:defRPr sz="825" b="1">
                 <a:solidFill>
                   <a:srgbClr val="A8B5C8"/>
@@ -4760,6 +4818,7 @@
               </a:defRPr>
             </a:lvl8pPr>
             <a:lvl9pPr algn="l">
+              <a:buNone/>
               <a:defRPr sz="825" b="1">
                 <a:solidFill>
                   <a:srgbClr val="A8B5C8"/>
@@ -4843,6 +4902,7 @@
               </a:defRPr>
             </a:defPPr>
             <a:lvl1pPr algn="r">
+              <a:buNone/>
               <a:defRPr sz="825" b="1">
                 <a:solidFill>
                   <a:srgbClr val="A8B5C8"/>
@@ -4853,6 +4913,7 @@
               </a:defRPr>
             </a:lvl1pPr>
             <a:lvl2pPr algn="r">
+              <a:buNone/>
               <a:defRPr sz="825" b="1">
                 <a:solidFill>
                   <a:srgbClr val="A8B5C8"/>
@@ -4863,6 +4924,7 @@
               </a:defRPr>
             </a:lvl2pPr>
             <a:lvl3pPr algn="r">
+              <a:buNone/>
               <a:defRPr sz="825" b="1">
                 <a:solidFill>
                   <a:srgbClr val="A8B5C8"/>
@@ -4873,6 +4935,7 @@
               </a:defRPr>
             </a:lvl3pPr>
             <a:lvl4pPr algn="r">
+              <a:buNone/>
               <a:defRPr sz="825" b="1">
                 <a:solidFill>
                   <a:srgbClr val="A8B5C8"/>
@@ -4883,6 +4946,7 @@
               </a:defRPr>
             </a:lvl4pPr>
             <a:lvl5pPr algn="r">
+              <a:buNone/>
               <a:defRPr sz="825" b="1">
                 <a:solidFill>
                   <a:srgbClr val="A8B5C8"/>
@@ -4893,6 +4957,7 @@
               </a:defRPr>
             </a:lvl5pPr>
             <a:lvl6pPr algn="r">
+              <a:buNone/>
               <a:defRPr sz="825" b="1">
                 <a:solidFill>
                   <a:srgbClr val="A8B5C8"/>
@@ -4903,6 +4968,7 @@
               </a:defRPr>
             </a:lvl6pPr>
             <a:lvl7pPr algn="r">
+              <a:buNone/>
               <a:defRPr sz="825" b="1">
                 <a:solidFill>
                   <a:srgbClr val="A8B5C8"/>
@@ -4913,6 +4979,7 @@
               </a:defRPr>
             </a:lvl7pPr>
             <a:lvl8pPr algn="r">
+              <a:buNone/>
               <a:defRPr sz="825" b="1">
                 <a:solidFill>
                   <a:srgbClr val="A8B5C8"/>
@@ -4923,6 +4990,7 @@
               </a:defRPr>
             </a:lvl8pPr>
             <a:lvl9pPr algn="r">
+              <a:buNone/>
               <a:defRPr sz="825" b="1">
                 <a:solidFill>
                   <a:srgbClr val="A8B5C8"/>
@@ -5039,6 +5107,7 @@
               </a:defRPr>
             </a:defPPr>
             <a:lvl1pPr algn="l">
+              <a:buNone/>
               <a:defRPr sz="975" b="1">
                 <a:solidFill>
                   <a:srgbClr val="F2C879"/>
@@ -5049,6 +5118,7 @@
               </a:defRPr>
             </a:lvl1pPr>
             <a:lvl2pPr algn="l">
+              <a:buNone/>
               <a:defRPr sz="975" b="1">
                 <a:solidFill>
                   <a:srgbClr val="F2C879"/>
@@ -5059,6 +5129,7 @@
               </a:defRPr>
             </a:lvl2pPr>
             <a:lvl3pPr algn="l">
+              <a:buNone/>
               <a:defRPr sz="975" b="1">
                 <a:solidFill>
                   <a:srgbClr val="F2C879"/>
@@ -5069,6 +5140,7 @@
               </a:defRPr>
             </a:lvl3pPr>
             <a:lvl4pPr algn="l">
+              <a:buNone/>
               <a:defRPr sz="975" b="1">
                 <a:solidFill>
                   <a:srgbClr val="F2C879"/>
@@ -5079,6 +5151,7 @@
               </a:defRPr>
             </a:lvl4pPr>
             <a:lvl5pPr algn="l">
+              <a:buNone/>
               <a:defRPr sz="975" b="1">
                 <a:solidFill>
                   <a:srgbClr val="F2C879"/>
@@ -5089,6 +5162,7 @@
               </a:defRPr>
             </a:lvl5pPr>
             <a:lvl6pPr algn="l">
+              <a:buNone/>
               <a:defRPr sz="975" b="1">
                 <a:solidFill>
                   <a:srgbClr val="F2C879"/>
@@ -5099,6 +5173,7 @@
               </a:defRPr>
             </a:lvl6pPr>
             <a:lvl7pPr algn="l">
+              <a:buNone/>
               <a:defRPr sz="975" b="1">
                 <a:solidFill>
                   <a:srgbClr val="F2C879"/>
@@ -5109,6 +5184,7 @@
               </a:defRPr>
             </a:lvl7pPr>
             <a:lvl8pPr algn="l">
+              <a:buNone/>
               <a:defRPr sz="975" b="1">
                 <a:solidFill>
                   <a:srgbClr val="F2C879"/>
@@ -5119,6 +5195,7 @@
               </a:defRPr>
             </a:lvl8pPr>
             <a:lvl9pPr algn="l">
+              <a:buNone/>
               <a:defRPr sz="975" b="1">
                 <a:solidFill>
                   <a:srgbClr val="F2C879"/>
@@ -5202,6 +5279,7 @@
               </a:defRPr>
             </a:defPPr>
             <a:lvl1pPr algn="l">
+              <a:buNone/>
               <a:defRPr sz="900" b="1">
                 <a:solidFill>
                   <a:srgbClr val="A8B5C8"/>
@@ -5212,6 +5290,7 @@
               </a:defRPr>
             </a:lvl1pPr>
             <a:lvl2pPr algn="l">
+              <a:buNone/>
               <a:defRPr sz="900" b="1">
                 <a:solidFill>
                   <a:srgbClr val="A8B5C8"/>
@@ -5222,6 +5301,7 @@
               </a:defRPr>
             </a:lvl2pPr>
             <a:lvl3pPr algn="l">
+              <a:buNone/>
               <a:defRPr sz="900" b="1">
                 <a:solidFill>
                   <a:srgbClr val="A8B5C8"/>
@@ -5232,6 +5312,7 @@
               </a:defRPr>
             </a:lvl3pPr>
             <a:lvl4pPr algn="l">
+              <a:buNone/>
               <a:defRPr sz="900" b="1">
                 <a:solidFill>
                   <a:srgbClr val="A8B5C8"/>
@@ -5242,6 +5323,7 @@
               </a:defRPr>
             </a:lvl4pPr>
             <a:lvl5pPr algn="l">
+              <a:buNone/>
               <a:defRPr sz="900" b="1">
                 <a:solidFill>
                   <a:srgbClr val="A8B5C8"/>
@@ -5252,6 +5334,7 @@
               </a:defRPr>
             </a:lvl5pPr>
             <a:lvl6pPr algn="l">
+              <a:buNone/>
               <a:defRPr sz="900" b="1">
                 <a:solidFill>
                   <a:srgbClr val="A8B5C8"/>
@@ -5262,6 +5345,7 @@
               </a:defRPr>
             </a:lvl6pPr>
             <a:lvl7pPr algn="l">
+              <a:buNone/>
               <a:defRPr sz="900" b="1">
                 <a:solidFill>
                   <a:srgbClr val="A8B5C8"/>
@@ -5272,6 +5356,7 @@
               </a:defRPr>
             </a:lvl7pPr>
             <a:lvl8pPr algn="l">
+              <a:buNone/>
               <a:defRPr sz="900" b="1">
                 <a:solidFill>
                   <a:srgbClr val="A8B5C8"/>
@@ -5282,6 +5367,7 @@
               </a:defRPr>
             </a:lvl8pPr>
             <a:lvl9pPr algn="l">
+              <a:buNone/>
               <a:defRPr sz="900" b="1">
                 <a:solidFill>
                   <a:srgbClr val="A8B5C8"/>
@@ -5365,6 +5451,7 @@
               </a:defRPr>
             </a:defPPr>
             <a:lvl1pPr algn="l">
+              <a:buNone/>
               <a:defRPr sz="1500" b="1">
                 <a:solidFill>
                   <a:srgbClr val="F5F7FA"/>
@@ -5375,6 +5462,7 @@
               </a:defRPr>
             </a:lvl1pPr>
             <a:lvl2pPr algn="l">
+              <a:buNone/>
               <a:defRPr sz="1500" b="1">
                 <a:solidFill>
                   <a:srgbClr val="F5F7FA"/>
@@ -5385,6 +5473,7 @@
               </a:defRPr>
             </a:lvl2pPr>
             <a:lvl3pPr algn="l">
+              <a:buNone/>
               <a:defRPr sz="1500" b="1">
                 <a:solidFill>
                   <a:srgbClr val="F5F7FA"/>
@@ -5395,6 +5484,7 @@
               </a:defRPr>
             </a:lvl3pPr>
             <a:lvl4pPr algn="l">
+              <a:buNone/>
               <a:defRPr sz="1500" b="1">
                 <a:solidFill>
                   <a:srgbClr val="F5F7FA"/>
@@ -5405,6 +5495,7 @@
               </a:defRPr>
             </a:lvl4pPr>
             <a:lvl5pPr algn="l">
+              <a:buNone/>
               <a:defRPr sz="1500" b="1">
                 <a:solidFill>
                   <a:srgbClr val="F5F7FA"/>
@@ -5415,6 +5506,7 @@
               </a:defRPr>
             </a:lvl5pPr>
             <a:lvl6pPr algn="l">
+              <a:buNone/>
               <a:defRPr sz="1500" b="1">
                 <a:solidFill>
                   <a:srgbClr val="F5F7FA"/>
@@ -5425,6 +5517,7 @@
               </a:defRPr>
             </a:lvl6pPr>
             <a:lvl7pPr algn="l">
+              <a:buNone/>
               <a:defRPr sz="1500" b="1">
                 <a:solidFill>
                   <a:srgbClr val="F5F7FA"/>
@@ -5435,6 +5528,7 @@
               </a:defRPr>
             </a:lvl7pPr>
             <a:lvl8pPr algn="l">
+              <a:buNone/>
               <a:defRPr sz="1500" b="1">
                 <a:solidFill>
                   <a:srgbClr val="F5F7FA"/>
@@ -5445,6 +5539,7 @@
               </a:defRPr>
             </a:lvl8pPr>
             <a:lvl9pPr algn="l">
+              <a:buNone/>
               <a:defRPr sz="1500" b="1">
                 <a:solidFill>
                   <a:srgbClr val="F5F7FA"/>
@@ -5528,6 +5623,7 @@
               </a:defRPr>
             </a:defPPr>
             <a:lvl1pPr algn="l">
+              <a:buNone/>
               <a:defRPr sz="975" b="0">
                 <a:solidFill>
                   <a:srgbClr val="A8B5C8"/>
@@ -5538,6 +5634,7 @@
               </a:defRPr>
             </a:lvl1pPr>
             <a:lvl2pPr algn="l">
+              <a:buNone/>
               <a:defRPr sz="975" b="0">
                 <a:solidFill>
                   <a:srgbClr val="A8B5C8"/>
@@ -5548,6 +5645,7 @@
               </a:defRPr>
             </a:lvl2pPr>
             <a:lvl3pPr algn="l">
+              <a:buNone/>
               <a:defRPr sz="975" b="0">
                 <a:solidFill>
                   <a:srgbClr val="A8B5C8"/>
@@ -5558,6 +5656,7 @@
               </a:defRPr>
             </a:lvl3pPr>
             <a:lvl4pPr algn="l">
+              <a:buNone/>
               <a:defRPr sz="975" b="0">
                 <a:solidFill>
                   <a:srgbClr val="A8B5C8"/>
@@ -5568,6 +5667,7 @@
               </a:defRPr>
             </a:lvl4pPr>
             <a:lvl5pPr algn="l">
+              <a:buNone/>
               <a:defRPr sz="975" b="0">
                 <a:solidFill>
                   <a:srgbClr val="A8B5C8"/>
@@ -5578,6 +5678,7 @@
               </a:defRPr>
             </a:lvl5pPr>
             <a:lvl6pPr algn="l">
+              <a:buNone/>
               <a:defRPr sz="975" b="0">
                 <a:solidFill>
                   <a:srgbClr val="A8B5C8"/>
@@ -5588,6 +5689,7 @@
               </a:defRPr>
             </a:lvl6pPr>
             <a:lvl7pPr algn="l">
+              <a:buNone/>
               <a:defRPr sz="975" b="0">
                 <a:solidFill>
                   <a:srgbClr val="A8B5C8"/>
@@ -5598,6 +5700,7 @@
               </a:defRPr>
             </a:lvl7pPr>
             <a:lvl8pPr algn="l">
+              <a:buNone/>
               <a:defRPr sz="975" b="0">
                 <a:solidFill>
                   <a:srgbClr val="A8B5C8"/>
@@ -5608,6 +5711,7 @@
               </a:defRPr>
             </a:lvl8pPr>
             <a:lvl9pPr algn="l">
+              <a:buNone/>
               <a:defRPr sz="975" b="0">
                 <a:solidFill>
                   <a:srgbClr val="A8B5C8"/>
@@ -5724,6 +5828,7 @@
               </a:defRPr>
             </a:defPPr>
             <a:lvl1pPr algn="l">
+              <a:buNone/>
               <a:defRPr sz="975" b="1">
                 <a:solidFill>
                   <a:srgbClr val="63E6BE"/>
@@ -5734,6 +5839,7 @@
               </a:defRPr>
             </a:lvl1pPr>
             <a:lvl2pPr algn="l">
+              <a:buNone/>
               <a:defRPr sz="975" b="1">
                 <a:solidFill>
                   <a:srgbClr val="63E6BE"/>
@@ -5744,6 +5850,7 @@
               </a:defRPr>
             </a:lvl2pPr>
             <a:lvl3pPr algn="l">
+              <a:buNone/>
               <a:defRPr sz="975" b="1">
                 <a:solidFill>
                   <a:srgbClr val="63E6BE"/>
@@ -5754,6 +5861,7 @@
               </a:defRPr>
             </a:lvl3pPr>
             <a:lvl4pPr algn="l">
+              <a:buNone/>
               <a:defRPr sz="975" b="1">
                 <a:solidFill>
                   <a:srgbClr val="63E6BE"/>
@@ -5764,6 +5872,7 @@
               </a:defRPr>
             </a:lvl4pPr>
             <a:lvl5pPr algn="l">
+              <a:buNone/>
               <a:defRPr sz="975" b="1">
                 <a:solidFill>
                   <a:srgbClr val="63E6BE"/>
@@ -5774,6 +5883,7 @@
               </a:defRPr>
             </a:lvl5pPr>
             <a:lvl6pPr algn="l">
+              <a:buNone/>
               <a:defRPr sz="975" b="1">
                 <a:solidFill>
                   <a:srgbClr val="63E6BE"/>
@@ -5784,6 +5894,7 @@
               </a:defRPr>
             </a:lvl6pPr>
             <a:lvl7pPr algn="l">
+              <a:buNone/>
               <a:defRPr sz="975" b="1">
                 <a:solidFill>
                   <a:srgbClr val="63E6BE"/>
@@ -5794,6 +5905,7 @@
               </a:defRPr>
             </a:lvl7pPr>
             <a:lvl8pPr algn="l">
+              <a:buNone/>
               <a:defRPr sz="975" b="1">
                 <a:solidFill>
                   <a:srgbClr val="63E6BE"/>
@@ -5804,6 +5916,7 @@
               </a:defRPr>
             </a:lvl8pPr>
             <a:lvl9pPr algn="l">
+              <a:buNone/>
               <a:defRPr sz="975" b="1">
                 <a:solidFill>
                   <a:srgbClr val="63E6BE"/>
@@ -5887,6 +6000,7 @@
               </a:defRPr>
             </a:defPPr>
             <a:lvl1pPr algn="l">
+              <a:buNone/>
               <a:defRPr sz="900" b="1">
                 <a:solidFill>
                   <a:srgbClr val="A8B5C8"/>
@@ -5897,6 +6011,7 @@
               </a:defRPr>
             </a:lvl1pPr>
             <a:lvl2pPr algn="l">
+              <a:buNone/>
               <a:defRPr sz="900" b="1">
                 <a:solidFill>
                   <a:srgbClr val="A8B5C8"/>
@@ -5907,6 +6022,7 @@
               </a:defRPr>
             </a:lvl2pPr>
             <a:lvl3pPr algn="l">
+              <a:buNone/>
               <a:defRPr sz="900" b="1">
                 <a:solidFill>
                   <a:srgbClr val="A8B5C8"/>
@@ -5917,6 +6033,7 @@
               </a:defRPr>
             </a:lvl3pPr>
             <a:lvl4pPr algn="l">
+              <a:buNone/>
               <a:defRPr sz="900" b="1">
                 <a:solidFill>
                   <a:srgbClr val="A8B5C8"/>
@@ -5927,6 +6044,7 @@
               </a:defRPr>
             </a:lvl4pPr>
             <a:lvl5pPr algn="l">
+              <a:buNone/>
               <a:defRPr sz="900" b="1">
                 <a:solidFill>
                   <a:srgbClr val="A8B5C8"/>
@@ -5937,6 +6055,7 @@
               </a:defRPr>
             </a:lvl5pPr>
             <a:lvl6pPr algn="l">
+              <a:buNone/>
               <a:defRPr sz="900" b="1">
                 <a:solidFill>
                   <a:srgbClr val="A8B5C8"/>
@@ -5947,6 +6066,7 @@
               </a:defRPr>
             </a:lvl6pPr>
             <a:lvl7pPr algn="l">
+              <a:buNone/>
               <a:defRPr sz="900" b="1">
                 <a:solidFill>
                   <a:srgbClr val="A8B5C8"/>
@@ -5957,6 +6077,7 @@
               </a:defRPr>
             </a:lvl7pPr>
             <a:lvl8pPr algn="l">
+              <a:buNone/>
               <a:defRPr sz="900" b="1">
                 <a:solidFill>
                   <a:srgbClr val="A8B5C8"/>
@@ -5967,6 +6088,7 @@
               </a:defRPr>
             </a:lvl8pPr>
             <a:lvl9pPr algn="l">
+              <a:buNone/>
               <a:defRPr sz="900" b="1">
                 <a:solidFill>
                   <a:srgbClr val="A8B5C8"/>
@@ -6050,6 +6172,7 @@
               </a:defRPr>
             </a:defPPr>
             <a:lvl1pPr algn="l">
+              <a:buNone/>
               <a:defRPr sz="1500" b="1">
                 <a:solidFill>
                   <a:srgbClr val="F5F7FA"/>
@@ -6060,6 +6183,7 @@
               </a:defRPr>
             </a:lvl1pPr>
             <a:lvl2pPr algn="l">
+              <a:buNone/>
               <a:defRPr sz="1500" b="1">
                 <a:solidFill>
                   <a:srgbClr val="F5F7FA"/>
@@ -6070,6 +6194,7 @@
               </a:defRPr>
             </a:lvl2pPr>
             <a:lvl3pPr algn="l">
+              <a:buNone/>
               <a:defRPr sz="1500" b="1">
                 <a:solidFill>
                   <a:srgbClr val="F5F7FA"/>
@@ -6080,6 +6205,7 @@
               </a:defRPr>
             </a:lvl3pPr>
             <a:lvl4pPr algn="l">
+              <a:buNone/>
               <a:defRPr sz="1500" b="1">
                 <a:solidFill>
                   <a:srgbClr val="F5F7FA"/>
@@ -6090,6 +6216,7 @@
               </a:defRPr>
             </a:lvl4pPr>
             <a:lvl5pPr algn="l">
+              <a:buNone/>
               <a:defRPr sz="1500" b="1">
                 <a:solidFill>
                   <a:srgbClr val="F5F7FA"/>
@@ -6100,6 +6227,7 @@
               </a:defRPr>
             </a:lvl5pPr>
             <a:lvl6pPr algn="l">
+              <a:buNone/>
               <a:defRPr sz="1500" b="1">
                 <a:solidFill>
                   <a:srgbClr val="F5F7FA"/>
@@ -6110,6 +6238,7 @@
               </a:defRPr>
             </a:lvl6pPr>
             <a:lvl7pPr algn="l">
+              <a:buNone/>
               <a:defRPr sz="1500" b="1">
                 <a:solidFill>
                   <a:srgbClr val="F5F7FA"/>
@@ -6120,6 +6249,7 @@
               </a:defRPr>
             </a:lvl7pPr>
             <a:lvl8pPr algn="l">
+              <a:buNone/>
               <a:defRPr sz="1500" b="1">
                 <a:solidFill>
                   <a:srgbClr val="F5F7FA"/>
@@ -6130,6 +6260,7 @@
               </a:defRPr>
             </a:lvl8pPr>
             <a:lvl9pPr algn="l">
+              <a:buNone/>
               <a:defRPr sz="1500" b="1">
                 <a:solidFill>
                   <a:srgbClr val="F5F7FA"/>
@@ -6213,6 +6344,7 @@
               </a:defRPr>
             </a:defPPr>
             <a:lvl1pPr algn="l">
+              <a:buNone/>
               <a:defRPr sz="975" b="0">
                 <a:solidFill>
                   <a:srgbClr val="A8B5C8"/>
@@ -6223,6 +6355,7 @@
               </a:defRPr>
             </a:lvl1pPr>
             <a:lvl2pPr algn="l">
+              <a:buNone/>
               <a:defRPr sz="975" b="0">
                 <a:solidFill>
                   <a:srgbClr val="A8B5C8"/>
@@ -6233,6 +6366,7 @@
               </a:defRPr>
             </a:lvl2pPr>
             <a:lvl3pPr algn="l">
+              <a:buNone/>
               <a:defRPr sz="975" b="0">
                 <a:solidFill>
                   <a:srgbClr val="A8B5C8"/>
@@ -6243,6 +6377,7 @@
               </a:defRPr>
             </a:lvl3pPr>
             <a:lvl4pPr algn="l">
+              <a:buNone/>
               <a:defRPr sz="975" b="0">
                 <a:solidFill>
                   <a:srgbClr val="A8B5C8"/>
@@ -6253,6 +6388,7 @@
               </a:defRPr>
             </a:lvl4pPr>
             <a:lvl5pPr algn="l">
+              <a:buNone/>
               <a:defRPr sz="975" b="0">
                 <a:solidFill>
                   <a:srgbClr val="A8B5C8"/>
@@ -6263,6 +6399,7 @@
               </a:defRPr>
             </a:lvl5pPr>
             <a:lvl6pPr algn="l">
+              <a:buNone/>
               <a:defRPr sz="975" b="0">
                 <a:solidFill>
                   <a:srgbClr val="A8B5C8"/>
@@ -6273,6 +6410,7 @@
               </a:defRPr>
             </a:lvl6pPr>
             <a:lvl7pPr algn="l">
+              <a:buNone/>
               <a:defRPr sz="975" b="0">
                 <a:solidFill>
                   <a:srgbClr val="A8B5C8"/>
@@ -6283,6 +6421,7 @@
               </a:defRPr>
             </a:lvl7pPr>
             <a:lvl8pPr algn="l">
+              <a:buNone/>
               <a:defRPr sz="975" b="0">
                 <a:solidFill>
                   <a:srgbClr val="A8B5C8"/>
@@ -6293,6 +6432,7 @@
               </a:defRPr>
             </a:lvl8pPr>
             <a:lvl9pPr algn="l">
+              <a:buNone/>
               <a:defRPr sz="975" b="0">
                 <a:solidFill>
                   <a:srgbClr val="A8B5C8"/>
@@ -6409,6 +6549,7 @@
               </a:defRPr>
             </a:defPPr>
             <a:lvl1pPr algn="l">
+              <a:buNone/>
               <a:defRPr sz="975" b="1">
                 <a:solidFill>
                   <a:srgbClr val="63E6BE"/>
@@ -6419,6 +6560,7 @@
               </a:defRPr>
             </a:lvl1pPr>
             <a:lvl2pPr algn="l">
+              <a:buNone/>
               <a:defRPr sz="975" b="1">
                 <a:solidFill>
                   <a:srgbClr val="63E6BE"/>
@@ -6429,6 +6571,7 @@
               </a:defRPr>
             </a:lvl2pPr>
             <a:lvl3pPr algn="l">
+              <a:buNone/>
               <a:defRPr sz="975" b="1">
                 <a:solidFill>
                   <a:srgbClr val="63E6BE"/>
@@ -6439,6 +6582,7 @@
               </a:defRPr>
             </a:lvl3pPr>
             <a:lvl4pPr algn="l">
+              <a:buNone/>
               <a:defRPr sz="975" b="1">
                 <a:solidFill>
                   <a:srgbClr val="63E6BE"/>
@@ -6449,6 +6593,7 @@
               </a:defRPr>
             </a:lvl4pPr>
             <a:lvl5pPr algn="l">
+              <a:buNone/>
               <a:defRPr sz="975" b="1">
                 <a:solidFill>
                   <a:srgbClr val="63E6BE"/>
@@ -6459,6 +6604,7 @@
               </a:defRPr>
             </a:lvl5pPr>
             <a:lvl6pPr algn="l">
+              <a:buNone/>
               <a:defRPr sz="975" b="1">
                 <a:solidFill>
                   <a:srgbClr val="63E6BE"/>
@@ -6469,6 +6615,7 @@
               </a:defRPr>
             </a:lvl6pPr>
             <a:lvl7pPr algn="l">
+              <a:buNone/>
               <a:defRPr sz="975" b="1">
                 <a:solidFill>
                   <a:srgbClr val="63E6BE"/>
@@ -6479,6 +6626,7 @@
               </a:defRPr>
             </a:lvl7pPr>
             <a:lvl8pPr algn="l">
+              <a:buNone/>
               <a:defRPr sz="975" b="1">
                 <a:solidFill>
                   <a:srgbClr val="63E6BE"/>
@@ -6489,6 +6637,7 @@
               </a:defRPr>
             </a:lvl8pPr>
             <a:lvl9pPr algn="l">
+              <a:buNone/>
               <a:defRPr sz="975" b="1">
                 <a:solidFill>
                   <a:srgbClr val="63E6BE"/>
@@ -6572,6 +6721,7 @@
               </a:defRPr>
             </a:defPPr>
             <a:lvl1pPr algn="l">
+              <a:buNone/>
               <a:defRPr sz="900" b="1">
                 <a:solidFill>
                   <a:srgbClr val="A8B5C8"/>
@@ -6582,6 +6732,7 @@
               </a:defRPr>
             </a:lvl1pPr>
             <a:lvl2pPr algn="l">
+              <a:buNone/>
               <a:defRPr sz="900" b="1">
                 <a:solidFill>
                   <a:srgbClr val="A8B5C8"/>
@@ -6592,6 +6743,7 @@
               </a:defRPr>
             </a:lvl2pPr>
             <a:lvl3pPr algn="l">
+              <a:buNone/>
               <a:defRPr sz="900" b="1">
                 <a:solidFill>
                   <a:srgbClr val="A8B5C8"/>
@@ -6602,6 +6754,7 @@
               </a:defRPr>
             </a:lvl3pPr>
             <a:lvl4pPr algn="l">
+              <a:buNone/>
               <a:defRPr sz="900" b="1">
                 <a:solidFill>
                   <a:srgbClr val="A8B5C8"/>
@@ -6612,6 +6765,7 @@
               </a:defRPr>
             </a:lvl4pPr>
             <a:lvl5pPr algn="l">
+              <a:buNone/>
               <a:defRPr sz="900" b="1">
                 <a:solidFill>
                   <a:srgbClr val="A8B5C8"/>
@@ -6622,6 +6776,7 @@
               </a:defRPr>
             </a:lvl5pPr>
             <a:lvl6pPr algn="l">
+              <a:buNone/>
               <a:defRPr sz="900" b="1">
                 <a:solidFill>
                   <a:srgbClr val="A8B5C8"/>
@@ -6632,6 +6787,7 @@
               </a:defRPr>
             </a:lvl6pPr>
             <a:lvl7pPr algn="l">
+              <a:buNone/>
               <a:defRPr sz="900" b="1">
                 <a:solidFill>
                   <a:srgbClr val="A8B5C8"/>
@@ -6642,6 +6798,7 @@
               </a:defRPr>
             </a:lvl7pPr>
             <a:lvl8pPr algn="l">
+              <a:buNone/>
               <a:defRPr sz="900" b="1">
                 <a:solidFill>
                   <a:srgbClr val="A8B5C8"/>
@@ -6652,6 +6809,7 @@
               </a:defRPr>
             </a:lvl8pPr>
             <a:lvl9pPr algn="l">
+              <a:buNone/>
               <a:defRPr sz="900" b="1">
                 <a:solidFill>
                   <a:srgbClr val="A8B5C8"/>
@@ -6735,6 +6893,7 @@
               </a:defRPr>
             </a:defPPr>
             <a:lvl1pPr algn="l">
+              <a:buNone/>
               <a:defRPr sz="1500" b="1">
                 <a:solidFill>
                   <a:srgbClr val="F5F7FA"/>
@@ -6745,6 +6904,7 @@
               </a:defRPr>
             </a:lvl1pPr>
             <a:lvl2pPr algn="l">
+              <a:buNone/>
               <a:defRPr sz="1500" b="1">
                 <a:solidFill>
                   <a:srgbClr val="F5F7FA"/>
@@ -6755,6 +6915,7 @@
               </a:defRPr>
             </a:lvl2pPr>
             <a:lvl3pPr algn="l">
+              <a:buNone/>
               <a:defRPr sz="1500" b="1">
                 <a:solidFill>
                   <a:srgbClr val="F5F7FA"/>
@@ -6765,6 +6926,7 @@
               </a:defRPr>
             </a:lvl3pPr>
             <a:lvl4pPr algn="l">
+              <a:buNone/>
               <a:defRPr sz="1500" b="1">
                 <a:solidFill>
                   <a:srgbClr val="F5F7FA"/>
@@ -6775,6 +6937,7 @@
               </a:defRPr>
             </a:lvl4pPr>
             <a:lvl5pPr algn="l">
+              <a:buNone/>
               <a:defRPr sz="1500" b="1">
                 <a:solidFill>
                   <a:srgbClr val="F5F7FA"/>
@@ -6785,6 +6948,7 @@
               </a:defRPr>
             </a:lvl5pPr>
             <a:lvl6pPr algn="l">
+              <a:buNone/>
               <a:defRPr sz="1500" b="1">
                 <a:solidFill>
                   <a:srgbClr val="F5F7FA"/>
@@ -6795,6 +6959,7 @@
               </a:defRPr>
             </a:lvl6pPr>
             <a:lvl7pPr algn="l">
+              <a:buNone/>
               <a:defRPr sz="1500" b="1">
                 <a:solidFill>
                   <a:srgbClr val="F5F7FA"/>
@@ -6805,6 +6970,7 @@
               </a:defRPr>
             </a:lvl7pPr>
             <a:lvl8pPr algn="l">
+              <a:buNone/>
               <a:defRPr sz="1500" b="1">
                 <a:solidFill>
                   <a:srgbClr val="F5F7FA"/>
@@ -6815,6 +6981,7 @@
               </a:defRPr>
             </a:lvl8pPr>
             <a:lvl9pPr algn="l">
+              <a:buNone/>
               <a:defRPr sz="1500" b="1">
                 <a:solidFill>
                   <a:srgbClr val="F5F7FA"/>
@@ -6898,6 +7065,7 @@
               </a:defRPr>
             </a:defPPr>
             <a:lvl1pPr algn="l">
+              <a:buNone/>
               <a:defRPr sz="975" b="0">
                 <a:solidFill>
                   <a:srgbClr val="A8B5C8"/>
@@ -6908,6 +7076,7 @@
               </a:defRPr>
             </a:lvl1pPr>
             <a:lvl2pPr algn="l">
+              <a:buNone/>
               <a:defRPr sz="975" b="0">
                 <a:solidFill>
                   <a:srgbClr val="A8B5C8"/>
@@ -6918,6 +7087,7 @@
               </a:defRPr>
             </a:lvl2pPr>
             <a:lvl3pPr algn="l">
+              <a:buNone/>
               <a:defRPr sz="975" b="0">
                 <a:solidFill>
                   <a:srgbClr val="A8B5C8"/>
@@ -6928,6 +7098,7 @@
               </a:defRPr>
             </a:lvl3pPr>
             <a:lvl4pPr algn="l">
+              <a:buNone/>
               <a:defRPr sz="975" b="0">
                 <a:solidFill>
                   <a:srgbClr val="A8B5C8"/>
@@ -6938,6 +7109,7 @@
               </a:defRPr>
             </a:lvl4pPr>
             <a:lvl5pPr algn="l">
+              <a:buNone/>
               <a:defRPr sz="975" b="0">
                 <a:solidFill>
                   <a:srgbClr val="A8B5C8"/>
@@ -6948,6 +7120,7 @@
               </a:defRPr>
             </a:lvl5pPr>
             <a:lvl6pPr algn="l">
+              <a:buNone/>
               <a:defRPr sz="975" b="0">
                 <a:solidFill>
                   <a:srgbClr val="A8B5C8"/>
@@ -6958,6 +7131,7 @@
               </a:defRPr>
             </a:lvl6pPr>
             <a:lvl7pPr algn="l">
+              <a:buNone/>
               <a:defRPr sz="975" b="0">
                 <a:solidFill>
                   <a:srgbClr val="A8B5C8"/>
@@ -6968,6 +7142,7 @@
               </a:defRPr>
             </a:lvl7pPr>
             <a:lvl8pPr algn="l">
+              <a:buNone/>
               <a:defRPr sz="975" b="0">
                 <a:solidFill>
                   <a:srgbClr val="A8B5C8"/>
@@ -6978,6 +7153,7 @@
               </a:defRPr>
             </a:lvl8pPr>
             <a:lvl9pPr algn="l">
+              <a:buNone/>
               <a:defRPr sz="975" b="0">
                 <a:solidFill>
                   <a:srgbClr val="A8B5C8"/>
@@ -7094,6 +7270,7 @@
               </a:defRPr>
             </a:defPPr>
             <a:lvl1pPr algn="l">
+              <a:buNone/>
               <a:defRPr sz="975" b="1">
                 <a:solidFill>
                   <a:srgbClr val="63E6BE"/>
@@ -7104,6 +7281,7 @@
               </a:defRPr>
             </a:lvl1pPr>
             <a:lvl2pPr algn="l">
+              <a:buNone/>
               <a:defRPr sz="975" b="1">
                 <a:solidFill>
                   <a:srgbClr val="63E6BE"/>
@@ -7114,6 +7292,7 @@
               </a:defRPr>
             </a:lvl2pPr>
             <a:lvl3pPr algn="l">
+              <a:buNone/>
               <a:defRPr sz="975" b="1">
                 <a:solidFill>
                   <a:srgbClr val="63E6BE"/>
@@ -7124,6 +7303,7 @@
               </a:defRPr>
             </a:lvl3pPr>
             <a:lvl4pPr algn="l">
+              <a:buNone/>
               <a:defRPr sz="975" b="1">
                 <a:solidFill>
                   <a:srgbClr val="63E6BE"/>
@@ -7134,6 +7314,7 @@
               </a:defRPr>
             </a:lvl4pPr>
             <a:lvl5pPr algn="l">
+              <a:buNone/>
               <a:defRPr sz="975" b="1">
                 <a:solidFill>
                   <a:srgbClr val="63E6BE"/>
@@ -7144,6 +7325,7 @@
               </a:defRPr>
             </a:lvl5pPr>
             <a:lvl6pPr algn="l">
+              <a:buNone/>
               <a:defRPr sz="975" b="1">
                 <a:solidFill>
                   <a:srgbClr val="63E6BE"/>
@@ -7154,6 +7336,7 @@
               </a:defRPr>
             </a:lvl6pPr>
             <a:lvl7pPr algn="l">
+              <a:buNone/>
               <a:defRPr sz="975" b="1">
                 <a:solidFill>
                   <a:srgbClr val="63E6BE"/>
@@ -7164,6 +7347,7 @@
               </a:defRPr>
             </a:lvl7pPr>
             <a:lvl8pPr algn="l">
+              <a:buNone/>
               <a:defRPr sz="975" b="1">
                 <a:solidFill>
                   <a:srgbClr val="63E6BE"/>
@@ -7174,6 +7358,7 @@
               </a:defRPr>
             </a:lvl8pPr>
             <a:lvl9pPr algn="l">
+              <a:buNone/>
               <a:defRPr sz="975" b="1">
                 <a:solidFill>
                   <a:srgbClr val="63E6BE"/>
@@ -7257,6 +7442,7 @@
               </a:defRPr>
             </a:defPPr>
             <a:lvl1pPr algn="l">
+              <a:buNone/>
               <a:defRPr sz="900" b="1">
                 <a:solidFill>
                   <a:srgbClr val="A8B5C8"/>
@@ -7267,6 +7453,7 @@
               </a:defRPr>
             </a:lvl1pPr>
             <a:lvl2pPr algn="l">
+              <a:buNone/>
               <a:defRPr sz="900" b="1">
                 <a:solidFill>
                   <a:srgbClr val="A8B5C8"/>
@@ -7277,6 +7464,7 @@
               </a:defRPr>
             </a:lvl2pPr>
             <a:lvl3pPr algn="l">
+              <a:buNone/>
               <a:defRPr sz="900" b="1">
                 <a:solidFill>
                   <a:srgbClr val="A8B5C8"/>
@@ -7287,6 +7475,7 @@
               </a:defRPr>
             </a:lvl3pPr>
             <a:lvl4pPr algn="l">
+              <a:buNone/>
               <a:defRPr sz="900" b="1">
                 <a:solidFill>
                   <a:srgbClr val="A8B5C8"/>
@@ -7297,6 +7486,7 @@
               </a:defRPr>
             </a:lvl4pPr>
             <a:lvl5pPr algn="l">
+              <a:buNone/>
               <a:defRPr sz="900" b="1">
                 <a:solidFill>
                   <a:srgbClr val="A8B5C8"/>
@@ -7307,6 +7497,7 @@
               </a:defRPr>
             </a:lvl5pPr>
             <a:lvl6pPr algn="l">
+              <a:buNone/>
               <a:defRPr sz="900" b="1">
                 <a:solidFill>
                   <a:srgbClr val="A8B5C8"/>
@@ -7317,6 +7508,7 @@
               </a:defRPr>
             </a:lvl6pPr>
             <a:lvl7pPr algn="l">
+              <a:buNone/>
               <a:defRPr sz="900" b="1">
                 <a:solidFill>
                   <a:srgbClr val="A8B5C8"/>
@@ -7327,6 +7519,7 @@
               </a:defRPr>
             </a:lvl7pPr>
             <a:lvl8pPr algn="l">
+              <a:buNone/>
               <a:defRPr sz="900" b="1">
                 <a:solidFill>
                   <a:srgbClr val="A8B5C8"/>
@@ -7337,6 +7530,7 @@
               </a:defRPr>
             </a:lvl8pPr>
             <a:lvl9pPr algn="l">
+              <a:buNone/>
               <a:defRPr sz="900" b="1">
                 <a:solidFill>
                   <a:srgbClr val="A8B5C8"/>
@@ -7420,6 +7614,7 @@
               </a:defRPr>
             </a:defPPr>
             <a:lvl1pPr algn="l">
+              <a:buNone/>
               <a:defRPr sz="1500" b="1">
                 <a:solidFill>
                   <a:srgbClr val="F5F7FA"/>
@@ -7430,6 +7625,7 @@
               </a:defRPr>
             </a:lvl1pPr>
             <a:lvl2pPr algn="l">
+              <a:buNone/>
               <a:defRPr sz="1500" b="1">
                 <a:solidFill>
                   <a:srgbClr val="F5F7FA"/>
@@ -7440,6 +7636,7 @@
               </a:defRPr>
             </a:lvl2pPr>
             <a:lvl3pPr algn="l">
+              <a:buNone/>
               <a:defRPr sz="1500" b="1">
                 <a:solidFill>
                   <a:srgbClr val="F5F7FA"/>
@@ -7450,6 +7647,7 @@
               </a:defRPr>
             </a:lvl3pPr>
             <a:lvl4pPr algn="l">
+              <a:buNone/>
               <a:defRPr sz="1500" b="1">
                 <a:solidFill>
                   <a:srgbClr val="F5F7FA"/>
@@ -7460,6 +7658,7 @@
               </a:defRPr>
             </a:lvl4pPr>
             <a:lvl5pPr algn="l">
+              <a:buNone/>
               <a:defRPr sz="1500" b="1">
                 <a:solidFill>
                   <a:srgbClr val="F5F7FA"/>
@@ -7470,6 +7669,7 @@
               </a:defRPr>
             </a:lvl5pPr>
             <a:lvl6pPr algn="l">
+              <a:buNone/>
               <a:defRPr sz="1500" b="1">
                 <a:solidFill>
                   <a:srgbClr val="F5F7FA"/>
@@ -7480,6 +7680,7 @@
               </a:defRPr>
             </a:lvl6pPr>
             <a:lvl7pPr algn="l">
+              <a:buNone/>
               <a:defRPr sz="1500" b="1">
                 <a:solidFill>
                   <a:srgbClr val="F5F7FA"/>
@@ -7490,6 +7691,7 @@
               </a:defRPr>
             </a:lvl7pPr>
             <a:lvl8pPr algn="l">
+              <a:buNone/>
               <a:defRPr sz="1500" b="1">
                 <a:solidFill>
                   <a:srgbClr val="F5F7FA"/>
@@ -7500,6 +7702,7 @@
               </a:defRPr>
             </a:lvl8pPr>
             <a:lvl9pPr algn="l">
+              <a:buNone/>
               <a:defRPr sz="1500" b="1">
                 <a:solidFill>
                   <a:srgbClr val="F5F7FA"/>
@@ -7583,6 +7786,7 @@
               </a:defRPr>
             </a:defPPr>
             <a:lvl1pPr algn="l">
+              <a:buNone/>
               <a:defRPr sz="975" b="0">
                 <a:solidFill>
                   <a:srgbClr val="A8B5C8"/>
@@ -7593,6 +7797,7 @@
               </a:defRPr>
             </a:lvl1pPr>
             <a:lvl2pPr algn="l">
+              <a:buNone/>
               <a:defRPr sz="975" b="0">
                 <a:solidFill>
                   <a:srgbClr val="A8B5C8"/>
@@ -7603,6 +7808,7 @@
               </a:defRPr>
             </a:lvl2pPr>
             <a:lvl3pPr algn="l">
+              <a:buNone/>
               <a:defRPr sz="975" b="0">
                 <a:solidFill>
                   <a:srgbClr val="A8B5C8"/>
@@ -7613,6 +7819,7 @@
               </a:defRPr>
             </a:lvl3pPr>
             <a:lvl4pPr algn="l">
+              <a:buNone/>
               <a:defRPr sz="975" b="0">
                 <a:solidFill>
                   <a:srgbClr val="A8B5C8"/>
@@ -7623,6 +7830,7 @@
               </a:defRPr>
             </a:lvl4pPr>
             <a:lvl5pPr algn="l">
+              <a:buNone/>
               <a:defRPr sz="975" b="0">
                 <a:solidFill>
                   <a:srgbClr val="A8B5C8"/>
@@ -7633,6 +7841,7 @@
               </a:defRPr>
             </a:lvl5pPr>
             <a:lvl6pPr algn="l">
+              <a:buNone/>
               <a:defRPr sz="975" b="0">
                 <a:solidFill>
                   <a:srgbClr val="A8B5C8"/>
@@ -7643,6 +7852,7 @@
               </a:defRPr>
             </a:lvl6pPr>
             <a:lvl7pPr algn="l">
+              <a:buNone/>
               <a:defRPr sz="975" b="0">
                 <a:solidFill>
                   <a:srgbClr val="A8B5C8"/>
@@ -7653,6 +7863,7 @@
               </a:defRPr>
             </a:lvl7pPr>
             <a:lvl8pPr algn="l">
+              <a:buNone/>
               <a:defRPr sz="975" b="0">
                 <a:solidFill>
                   <a:srgbClr val="A8B5C8"/>
@@ -7663,6 +7874,7 @@
               </a:defRPr>
             </a:lvl8pPr>
             <a:lvl9pPr algn="l">
+              <a:buNone/>
               <a:defRPr sz="975" b="0">
                 <a:solidFill>
                   <a:srgbClr val="A8B5C8"/>
@@ -7779,6 +7991,7 @@
               </a:defRPr>
             </a:defPPr>
             <a:lvl1pPr algn="l">
+              <a:buNone/>
               <a:defRPr sz="975" b="1">
                 <a:solidFill>
                   <a:srgbClr val="63E6BE"/>
@@ -7789,6 +8002,7 @@
               </a:defRPr>
             </a:lvl1pPr>
             <a:lvl2pPr algn="l">
+              <a:buNone/>
               <a:defRPr sz="975" b="1">
                 <a:solidFill>
                   <a:srgbClr val="63E6BE"/>
@@ -7799,6 +8013,7 @@
               </a:defRPr>
             </a:lvl2pPr>
             <a:lvl3pPr algn="l">
+              <a:buNone/>
               <a:defRPr sz="975" b="1">
                 <a:solidFill>
                   <a:srgbClr val="63E6BE"/>
@@ -7809,6 +8024,7 @@
               </a:defRPr>
             </a:lvl3pPr>
             <a:lvl4pPr algn="l">
+              <a:buNone/>
               <a:defRPr sz="975" b="1">
                 <a:solidFill>
                   <a:srgbClr val="63E6BE"/>
@@ -7819,6 +8035,7 @@
               </a:defRPr>
             </a:lvl4pPr>
             <a:lvl5pPr algn="l">
+              <a:buNone/>
               <a:defRPr sz="975" b="1">
                 <a:solidFill>
                   <a:srgbClr val="63E6BE"/>
@@ -7829,6 +8046,7 @@
               </a:defRPr>
             </a:lvl5pPr>
             <a:lvl6pPr algn="l">
+              <a:buNone/>
               <a:defRPr sz="975" b="1">
                 <a:solidFill>
                   <a:srgbClr val="63E6BE"/>
@@ -7839,6 +8057,7 @@
               </a:defRPr>
             </a:lvl6pPr>
             <a:lvl7pPr algn="l">
+              <a:buNone/>
               <a:defRPr sz="975" b="1">
                 <a:solidFill>
                   <a:srgbClr val="63E6BE"/>
@@ -7849,6 +8068,7 @@
               </a:defRPr>
             </a:lvl7pPr>
             <a:lvl8pPr algn="l">
+              <a:buNone/>
               <a:defRPr sz="975" b="1">
                 <a:solidFill>
                   <a:srgbClr val="63E6BE"/>
@@ -7859,6 +8079,7 @@
               </a:defRPr>
             </a:lvl8pPr>
             <a:lvl9pPr algn="l">
+              <a:buNone/>
               <a:defRPr sz="975" b="1">
                 <a:solidFill>
                   <a:srgbClr val="63E6BE"/>
@@ -7942,6 +8163,7 @@
               </a:defRPr>
             </a:defPPr>
             <a:lvl1pPr algn="l">
+              <a:buNone/>
               <a:defRPr sz="900" b="1">
                 <a:solidFill>
                   <a:srgbClr val="A8B5C8"/>
@@ -7952,6 +8174,7 @@
               </a:defRPr>
             </a:lvl1pPr>
             <a:lvl2pPr algn="l">
+              <a:buNone/>
               <a:defRPr sz="900" b="1">
                 <a:solidFill>
                   <a:srgbClr val="A8B5C8"/>
@@ -7962,6 +8185,7 @@
               </a:defRPr>
             </a:lvl2pPr>
             <a:lvl3pPr algn="l">
+              <a:buNone/>
               <a:defRPr sz="900" b="1">
                 <a:solidFill>
                   <a:srgbClr val="A8B5C8"/>
@@ -7972,6 +8196,7 @@
               </a:defRPr>
             </a:lvl3pPr>
             <a:lvl4pPr algn="l">
+              <a:buNone/>
               <a:defRPr sz="900" b="1">
                 <a:solidFill>
                   <a:srgbClr val="A8B5C8"/>
@@ -7982,6 +8207,7 @@
               </a:defRPr>
             </a:lvl4pPr>
             <a:lvl5pPr algn="l">
+              <a:buNone/>
               <a:defRPr sz="900" b="1">
                 <a:solidFill>
                   <a:srgbClr val="A8B5C8"/>
@@ -7992,6 +8218,7 @@
               </a:defRPr>
             </a:lvl5pPr>
             <a:lvl6pPr algn="l">
+              <a:buNone/>
               <a:defRPr sz="900" b="1">
                 <a:solidFill>
                   <a:srgbClr val="A8B5C8"/>
@@ -8002,6 +8229,7 @@
               </a:defRPr>
             </a:lvl6pPr>
             <a:lvl7pPr algn="l">
+              <a:buNone/>
               <a:defRPr sz="900" b="1">
                 <a:solidFill>
                   <a:srgbClr val="A8B5C8"/>
@@ -8012,6 +8240,7 @@
               </a:defRPr>
             </a:lvl7pPr>
             <a:lvl8pPr algn="l">
+              <a:buNone/>
               <a:defRPr sz="900" b="1">
                 <a:solidFill>
                   <a:srgbClr val="A8B5C8"/>
@@ -8022,6 +8251,7 @@
               </a:defRPr>
             </a:lvl8pPr>
             <a:lvl9pPr algn="l">
+              <a:buNone/>
               <a:defRPr sz="900" b="1">
                 <a:solidFill>
                   <a:srgbClr val="A8B5C8"/>
@@ -8105,6 +8335,7 @@
               </a:defRPr>
             </a:defPPr>
             <a:lvl1pPr algn="l">
+              <a:buNone/>
               <a:defRPr sz="1500" b="1">
                 <a:solidFill>
                   <a:srgbClr val="F5F7FA"/>
@@ -8115,6 +8346,7 @@
               </a:defRPr>
             </a:lvl1pPr>
             <a:lvl2pPr algn="l">
+              <a:buNone/>
               <a:defRPr sz="1500" b="1">
                 <a:solidFill>
                   <a:srgbClr val="F5F7FA"/>
@@ -8125,6 +8357,7 @@
               </a:defRPr>
             </a:lvl2pPr>
             <a:lvl3pPr algn="l">
+              <a:buNone/>
               <a:defRPr sz="1500" b="1">
                 <a:solidFill>
                   <a:srgbClr val="F5F7FA"/>
@@ -8135,6 +8368,7 @@
               </a:defRPr>
             </a:lvl3pPr>
             <a:lvl4pPr algn="l">
+              <a:buNone/>
               <a:defRPr sz="1500" b="1">
                 <a:solidFill>
                   <a:srgbClr val="F5F7FA"/>
@@ -8145,6 +8379,7 @@
               </a:defRPr>
             </a:lvl4pPr>
             <a:lvl5pPr algn="l">
+              <a:buNone/>
               <a:defRPr sz="1500" b="1">
                 <a:solidFill>
                   <a:srgbClr val="F5F7FA"/>
@@ -8155,6 +8390,7 @@
               </a:defRPr>
             </a:lvl5pPr>
             <a:lvl6pPr algn="l">
+              <a:buNone/>
               <a:defRPr sz="1500" b="1">
                 <a:solidFill>
                   <a:srgbClr val="F5F7FA"/>
@@ -8165,6 +8401,7 @@
               </a:defRPr>
             </a:lvl6pPr>
             <a:lvl7pPr algn="l">
+              <a:buNone/>
               <a:defRPr sz="1500" b="1">
                 <a:solidFill>
                   <a:srgbClr val="F5F7FA"/>
@@ -8175,6 +8412,7 @@
               </a:defRPr>
             </a:lvl7pPr>
             <a:lvl8pPr algn="l">
+              <a:buNone/>
               <a:defRPr sz="1500" b="1">
                 <a:solidFill>
                   <a:srgbClr val="F5F7FA"/>
@@ -8185,6 +8423,7 @@
               </a:defRPr>
             </a:lvl8pPr>
             <a:lvl9pPr algn="l">
+              <a:buNone/>
               <a:defRPr sz="1500" b="1">
                 <a:solidFill>
                   <a:srgbClr val="F5F7FA"/>
@@ -8268,6 +8507,7 @@
               </a:defRPr>
             </a:defPPr>
             <a:lvl1pPr algn="l">
+              <a:buNone/>
               <a:defRPr sz="975" b="0">
                 <a:solidFill>
                   <a:srgbClr val="A8B5C8"/>
@@ -8278,6 +8518,7 @@
               </a:defRPr>
             </a:lvl1pPr>
             <a:lvl2pPr algn="l">
+              <a:buNone/>
               <a:defRPr sz="975" b="0">
                 <a:solidFill>
                   <a:srgbClr val="A8B5C8"/>
@@ -8288,6 +8529,7 @@
               </a:defRPr>
             </a:lvl2pPr>
             <a:lvl3pPr algn="l">
+              <a:buNone/>
               <a:defRPr sz="975" b="0">
                 <a:solidFill>
                   <a:srgbClr val="A8B5C8"/>
@@ -8298,6 +8540,7 @@
               </a:defRPr>
             </a:lvl3pPr>
             <a:lvl4pPr algn="l">
+              <a:buNone/>
               <a:defRPr sz="975" b="0">
                 <a:solidFill>
                   <a:srgbClr val="A8B5C8"/>
@@ -8308,6 +8551,7 @@
               </a:defRPr>
             </a:lvl4pPr>
             <a:lvl5pPr algn="l">
+              <a:buNone/>
               <a:defRPr sz="975" b="0">
                 <a:solidFill>
                   <a:srgbClr val="A8B5C8"/>
@@ -8318,6 +8562,7 @@
               </a:defRPr>
             </a:lvl5pPr>
             <a:lvl6pPr algn="l">
+              <a:buNone/>
               <a:defRPr sz="975" b="0">
                 <a:solidFill>
                   <a:srgbClr val="A8B5C8"/>
@@ -8328,6 +8573,7 @@
               </a:defRPr>
             </a:lvl6pPr>
             <a:lvl7pPr algn="l">
+              <a:buNone/>
               <a:defRPr sz="975" b="0">
                 <a:solidFill>
                   <a:srgbClr val="A8B5C8"/>
@@ -8338,6 +8584,7 @@
               </a:defRPr>
             </a:lvl7pPr>
             <a:lvl8pPr algn="l">
+              <a:buNone/>
               <a:defRPr sz="975" b="0">
                 <a:solidFill>
                   <a:srgbClr val="A8B5C8"/>
@@ -8348,6 +8595,7 @@
               </a:defRPr>
             </a:lvl8pPr>
             <a:lvl9pPr algn="l">
+              <a:buNone/>
               <a:defRPr sz="975" b="0">
                 <a:solidFill>
                   <a:srgbClr val="A8B5C8"/>
@@ -8495,6 +8743,7 @@
               </a:defRPr>
             </a:defPPr>
             <a:lvl1pPr algn="l">
+              <a:buNone/>
               <a:defRPr sz="1050" b="1">
                 <a:solidFill>
                   <a:srgbClr val="63E6BE"/>
@@ -8505,6 +8754,7 @@
               </a:defRPr>
             </a:lvl1pPr>
             <a:lvl2pPr algn="l">
+              <a:buNone/>
               <a:defRPr sz="1050" b="1">
                 <a:solidFill>
                   <a:srgbClr val="63E6BE"/>
@@ -8515,6 +8765,7 @@
               </a:defRPr>
             </a:lvl2pPr>
             <a:lvl3pPr algn="l">
+              <a:buNone/>
               <a:defRPr sz="1050" b="1">
                 <a:solidFill>
                   <a:srgbClr val="63E6BE"/>
@@ -8525,6 +8776,7 @@
               </a:defRPr>
             </a:lvl3pPr>
             <a:lvl4pPr algn="l">
+              <a:buNone/>
               <a:defRPr sz="1050" b="1">
                 <a:solidFill>
                   <a:srgbClr val="63E6BE"/>
@@ -8535,6 +8787,7 @@
               </a:defRPr>
             </a:lvl4pPr>
             <a:lvl5pPr algn="l">
+              <a:buNone/>
               <a:defRPr sz="1050" b="1">
                 <a:solidFill>
                   <a:srgbClr val="63E6BE"/>
@@ -8545,6 +8798,7 @@
               </a:defRPr>
             </a:lvl5pPr>
             <a:lvl6pPr algn="l">
+              <a:buNone/>
               <a:defRPr sz="1050" b="1">
                 <a:solidFill>
                   <a:srgbClr val="63E6BE"/>
@@ -8555,6 +8809,7 @@
               </a:defRPr>
             </a:lvl6pPr>
             <a:lvl7pPr algn="l">
+              <a:buNone/>
               <a:defRPr sz="1050" b="1">
                 <a:solidFill>
                   <a:srgbClr val="63E6BE"/>
@@ -8565,6 +8820,7 @@
               </a:defRPr>
             </a:lvl7pPr>
             <a:lvl8pPr algn="l">
+              <a:buNone/>
               <a:defRPr sz="1050" b="1">
                 <a:solidFill>
                   <a:srgbClr val="63E6BE"/>
@@ -8575,6 +8831,7 @@
               </a:defRPr>
             </a:lvl8pPr>
             <a:lvl9pPr algn="l">
+              <a:buNone/>
               <a:defRPr sz="1050" b="1">
                 <a:solidFill>
                   <a:srgbClr val="63E6BE"/>
@@ -8658,6 +8915,7 @@
               </a:defRPr>
             </a:defPPr>
             <a:lvl1pPr algn="l">
+              <a:buNone/>
               <a:defRPr sz="1500" b="1">
                 <a:solidFill>
                   <a:srgbClr val="F5F7FA"/>
@@ -8668,6 +8926,7 @@
               </a:defRPr>
             </a:lvl1pPr>
             <a:lvl2pPr algn="l">
+              <a:buNone/>
               <a:defRPr sz="1500" b="1">
                 <a:solidFill>
                   <a:srgbClr val="F5F7FA"/>
@@ -8678,6 +8937,7 @@
               </a:defRPr>
             </a:lvl2pPr>
             <a:lvl3pPr algn="l">
+              <a:buNone/>
               <a:defRPr sz="1500" b="1">
                 <a:solidFill>
                   <a:srgbClr val="F5F7FA"/>
@@ -8688,6 +8948,7 @@
               </a:defRPr>
             </a:lvl3pPr>
             <a:lvl4pPr algn="l">
+              <a:buNone/>
               <a:defRPr sz="1500" b="1">
                 <a:solidFill>
                   <a:srgbClr val="F5F7FA"/>
@@ -8698,6 +8959,7 @@
               </a:defRPr>
             </a:lvl4pPr>
             <a:lvl5pPr algn="l">
+              <a:buNone/>
               <a:defRPr sz="1500" b="1">
                 <a:solidFill>
                   <a:srgbClr val="F5F7FA"/>
@@ -8708,6 +8970,7 @@
               </a:defRPr>
             </a:lvl5pPr>
             <a:lvl6pPr algn="l">
+              <a:buNone/>
               <a:defRPr sz="1500" b="1">
                 <a:solidFill>
                   <a:srgbClr val="F5F7FA"/>
@@ -8718,6 +8981,7 @@
               </a:defRPr>
             </a:lvl6pPr>
             <a:lvl7pPr algn="l">
+              <a:buNone/>
               <a:defRPr sz="1500" b="1">
                 <a:solidFill>
                   <a:srgbClr val="F5F7FA"/>
@@ -8728,6 +8992,7 @@
               </a:defRPr>
             </a:lvl7pPr>
             <a:lvl8pPr algn="l">
+              <a:buNone/>
               <a:defRPr sz="1500" b="1">
                 <a:solidFill>
                   <a:srgbClr val="F5F7FA"/>
@@ -8738,6 +9003,7 @@
               </a:defRPr>
             </a:lvl8pPr>
             <a:lvl9pPr algn="l">
+              <a:buNone/>
               <a:defRPr sz="1500" b="1">
                 <a:solidFill>
                   <a:srgbClr val="F5F7FA"/>
@@ -8821,6 +9087,7 @@
               </a:defRPr>
             </a:defPPr>
             <a:lvl1pPr algn="l">
+              <a:buNone/>
               <a:defRPr sz="1650" b="1">
                 <a:solidFill>
                   <a:srgbClr val="F5F7FA"/>
@@ -8831,6 +9098,7 @@
               </a:defRPr>
             </a:lvl1pPr>
             <a:lvl2pPr algn="l">
+              <a:buNone/>
               <a:defRPr sz="1650" b="1">
                 <a:solidFill>
                   <a:srgbClr val="F5F7FA"/>
@@ -8841,6 +9109,7 @@
               </a:defRPr>
             </a:lvl2pPr>
             <a:lvl3pPr algn="l">
+              <a:buNone/>
               <a:defRPr sz="1650" b="1">
                 <a:solidFill>
                   <a:srgbClr val="F5F7FA"/>
@@ -8851,6 +9120,7 @@
               </a:defRPr>
             </a:lvl3pPr>
             <a:lvl4pPr algn="l">
+              <a:buNone/>
               <a:defRPr sz="1650" b="1">
                 <a:solidFill>
                   <a:srgbClr val="F5F7FA"/>
@@ -8861,6 +9131,7 @@
               </a:defRPr>
             </a:lvl4pPr>
             <a:lvl5pPr algn="l">
+              <a:buNone/>
               <a:defRPr sz="1650" b="1">
                 <a:solidFill>
                   <a:srgbClr val="F5F7FA"/>
@@ -8871,6 +9142,7 @@
               </a:defRPr>
             </a:lvl5pPr>
             <a:lvl6pPr algn="l">
+              <a:buNone/>
               <a:defRPr sz="1650" b="1">
                 <a:solidFill>
                   <a:srgbClr val="F5F7FA"/>
@@ -8881,6 +9153,7 @@
               </a:defRPr>
             </a:lvl6pPr>
             <a:lvl7pPr algn="l">
+              <a:buNone/>
               <a:defRPr sz="1650" b="1">
                 <a:solidFill>
                   <a:srgbClr val="F5F7FA"/>
@@ -8891,6 +9164,7 @@
               </a:defRPr>
             </a:lvl7pPr>
             <a:lvl8pPr algn="l">
+              <a:buNone/>
               <a:defRPr sz="1650" b="1">
                 <a:solidFill>
                   <a:srgbClr val="F5F7FA"/>
@@ -8901,6 +9175,7 @@
               </a:defRPr>
             </a:lvl8pPr>
             <a:lvl9pPr algn="l">
+              <a:buNone/>
               <a:defRPr sz="1650" b="1">
                 <a:solidFill>
                   <a:srgbClr val="F5F7FA"/>
@@ -8984,6 +9259,7 @@
               </a:defRPr>
             </a:defPPr>
             <a:lvl1pPr algn="l">
+              <a:buNone/>
               <a:defRPr sz="1125" b="0">
                 <a:solidFill>
                   <a:srgbClr val="A8B5C8"/>
@@ -8994,6 +9270,7 @@
               </a:defRPr>
             </a:lvl1pPr>
             <a:lvl2pPr algn="l">
+              <a:buNone/>
               <a:defRPr sz="1125" b="0">
                 <a:solidFill>
                   <a:srgbClr val="A8B5C8"/>
@@ -9004,6 +9281,7 @@
               </a:defRPr>
             </a:lvl2pPr>
             <a:lvl3pPr algn="l">
+              <a:buNone/>
               <a:defRPr sz="1125" b="0">
                 <a:solidFill>
                   <a:srgbClr val="A8B5C8"/>
@@ -9014,6 +9292,7 @@
               </a:defRPr>
             </a:lvl3pPr>
             <a:lvl4pPr algn="l">
+              <a:buNone/>
               <a:defRPr sz="1125" b="0">
                 <a:solidFill>
                   <a:srgbClr val="A8B5C8"/>
@@ -9024,6 +9303,7 @@
               </a:defRPr>
             </a:lvl4pPr>
             <a:lvl5pPr algn="l">
+              <a:buNone/>
               <a:defRPr sz="1125" b="0">
                 <a:solidFill>
                   <a:srgbClr val="A8B5C8"/>
@@ -9034,6 +9314,7 @@
               </a:defRPr>
             </a:lvl5pPr>
             <a:lvl6pPr algn="l">
+              <a:buNone/>
               <a:defRPr sz="1125" b="0">
                 <a:solidFill>
                   <a:srgbClr val="A8B5C8"/>
@@ -9044,6 +9325,7 @@
               </a:defRPr>
             </a:lvl6pPr>
             <a:lvl7pPr algn="l">
+              <a:buNone/>
               <a:defRPr sz="1125" b="0">
                 <a:solidFill>
                   <a:srgbClr val="A8B5C8"/>
@@ -9054,6 +9336,7 @@
               </a:defRPr>
             </a:lvl7pPr>
             <a:lvl8pPr algn="l">
+              <a:buNone/>
               <a:defRPr sz="1125" b="0">
                 <a:solidFill>
                   <a:srgbClr val="A8B5C8"/>
@@ -9064,6 +9347,7 @@
               </a:defRPr>
             </a:lvl8pPr>
             <a:lvl9pPr algn="l">
+              <a:buNone/>
               <a:defRPr sz="1125" b="0">
                 <a:solidFill>
                   <a:srgbClr val="A8B5C8"/>
@@ -9176,6 +9460,7 @@
               </a:defRPr>
             </a:defPPr>
             <a:lvl1pPr algn="l">
+              <a:buNone/>
               <a:defRPr sz="1050" b="1">
                 <a:solidFill>
                   <a:srgbClr val="63E6BE"/>
@@ -9186,6 +9471,7 @@
               </a:defRPr>
             </a:lvl1pPr>
             <a:lvl2pPr algn="l">
+              <a:buNone/>
               <a:defRPr sz="1050" b="1">
                 <a:solidFill>
                   <a:srgbClr val="63E6BE"/>
@@ -9196,6 +9482,7 @@
               </a:defRPr>
             </a:lvl2pPr>
             <a:lvl3pPr algn="l">
+              <a:buNone/>
               <a:defRPr sz="1050" b="1">
                 <a:solidFill>
                   <a:srgbClr val="63E6BE"/>
@@ -9206,6 +9493,7 @@
               </a:defRPr>
             </a:lvl3pPr>
             <a:lvl4pPr algn="l">
+              <a:buNone/>
               <a:defRPr sz="1050" b="1">
                 <a:solidFill>
                   <a:srgbClr val="63E6BE"/>
@@ -9216,6 +9504,7 @@
               </a:defRPr>
             </a:lvl4pPr>
             <a:lvl5pPr algn="l">
+              <a:buNone/>
               <a:defRPr sz="1050" b="1">
                 <a:solidFill>
                   <a:srgbClr val="63E6BE"/>
@@ -9226,6 +9515,7 @@
               </a:defRPr>
             </a:lvl5pPr>
             <a:lvl6pPr algn="l">
+              <a:buNone/>
               <a:defRPr sz="1050" b="1">
                 <a:solidFill>
                   <a:srgbClr val="63E6BE"/>
@@ -9236,6 +9526,7 @@
               </a:defRPr>
             </a:lvl6pPr>
             <a:lvl7pPr algn="l">
+              <a:buNone/>
               <a:defRPr sz="1050" b="1">
                 <a:solidFill>
                   <a:srgbClr val="63E6BE"/>
@@ -9246,6 +9537,7 @@
               </a:defRPr>
             </a:lvl7pPr>
             <a:lvl8pPr algn="l">
+              <a:buNone/>
               <a:defRPr sz="1050" b="1">
                 <a:solidFill>
                   <a:srgbClr val="63E6BE"/>
@@ -9256,6 +9548,7 @@
               </a:defRPr>
             </a:lvl8pPr>
             <a:lvl9pPr algn="l">
+              <a:buNone/>
               <a:defRPr sz="1050" b="1">
                 <a:solidFill>
                   <a:srgbClr val="63E6BE"/>
@@ -9339,6 +9632,7 @@
               </a:defRPr>
             </a:defPPr>
             <a:lvl1pPr algn="l">
+              <a:buNone/>
               <a:defRPr sz="2850" b="1">
                 <a:solidFill>
                   <a:srgbClr val="F5F7FA"/>
@@ -9349,6 +9643,7 @@
               </a:defRPr>
             </a:lvl1pPr>
             <a:lvl2pPr algn="l">
+              <a:buNone/>
               <a:defRPr sz="2850" b="1">
                 <a:solidFill>
                   <a:srgbClr val="F5F7FA"/>
@@ -9359,6 +9654,7 @@
               </a:defRPr>
             </a:lvl2pPr>
             <a:lvl3pPr algn="l">
+              <a:buNone/>
               <a:defRPr sz="2850" b="1">
                 <a:solidFill>
                   <a:srgbClr val="F5F7FA"/>
@@ -9369,6 +9665,7 @@
               </a:defRPr>
             </a:lvl3pPr>
             <a:lvl4pPr algn="l">
+              <a:buNone/>
               <a:defRPr sz="2850" b="1">
                 <a:solidFill>
                   <a:srgbClr val="F5F7FA"/>
@@ -9379,6 +9676,7 @@
               </a:defRPr>
             </a:lvl4pPr>
             <a:lvl5pPr algn="l">
+              <a:buNone/>
               <a:defRPr sz="2850" b="1">
                 <a:solidFill>
                   <a:srgbClr val="F5F7FA"/>
@@ -9389,6 +9687,7 @@
               </a:defRPr>
             </a:lvl5pPr>
             <a:lvl6pPr algn="l">
+              <a:buNone/>
               <a:defRPr sz="2850" b="1">
                 <a:solidFill>
                   <a:srgbClr val="F5F7FA"/>
@@ -9399,6 +9698,7 @@
               </a:defRPr>
             </a:lvl6pPr>
             <a:lvl7pPr algn="l">
+              <a:buNone/>
               <a:defRPr sz="2850" b="1">
                 <a:solidFill>
                   <a:srgbClr val="F5F7FA"/>
@@ -9409,6 +9709,7 @@
               </a:defRPr>
             </a:lvl7pPr>
             <a:lvl8pPr algn="l">
+              <a:buNone/>
               <a:defRPr sz="2850" b="1">
                 <a:solidFill>
                   <a:srgbClr val="F5F7FA"/>
@@ -9419,6 +9720,7 @@
               </a:defRPr>
             </a:lvl8pPr>
             <a:lvl9pPr algn="l">
+              <a:buNone/>
               <a:defRPr sz="2850" b="1">
                 <a:solidFill>
                   <a:srgbClr val="F5F7FA"/>
@@ -9533,6 +9835,7 @@
               </a:defRPr>
             </a:defPPr>
             <a:lvl1pPr algn="l">
+              <a:buNone/>
               <a:defRPr sz="825" b="1">
                 <a:solidFill>
                   <a:srgbClr val="A8B5C8"/>
@@ -9543,6 +9846,7 @@
               </a:defRPr>
             </a:lvl1pPr>
             <a:lvl2pPr algn="l">
+              <a:buNone/>
               <a:defRPr sz="825" b="1">
                 <a:solidFill>
                   <a:srgbClr val="A8B5C8"/>
@@ -9553,6 +9857,7 @@
               </a:defRPr>
             </a:lvl2pPr>
             <a:lvl3pPr algn="l">
+              <a:buNone/>
               <a:defRPr sz="825" b="1">
                 <a:solidFill>
                   <a:srgbClr val="A8B5C8"/>
@@ -9563,6 +9868,7 @@
               </a:defRPr>
             </a:lvl3pPr>
             <a:lvl4pPr algn="l">
+              <a:buNone/>
               <a:defRPr sz="825" b="1">
                 <a:solidFill>
                   <a:srgbClr val="A8B5C8"/>
@@ -9573,6 +9879,7 @@
               </a:defRPr>
             </a:lvl4pPr>
             <a:lvl5pPr algn="l">
+              <a:buNone/>
               <a:defRPr sz="825" b="1">
                 <a:solidFill>
                   <a:srgbClr val="A8B5C8"/>
@@ -9583,6 +9890,7 @@
               </a:defRPr>
             </a:lvl5pPr>
             <a:lvl6pPr algn="l">
+              <a:buNone/>
               <a:defRPr sz="825" b="1">
                 <a:solidFill>
                   <a:srgbClr val="A8B5C8"/>
@@ -9593,6 +9901,7 @@
               </a:defRPr>
             </a:lvl6pPr>
             <a:lvl7pPr algn="l">
+              <a:buNone/>
               <a:defRPr sz="825" b="1">
                 <a:solidFill>
                   <a:srgbClr val="A8B5C8"/>
@@ -9603,6 +9912,7 @@
               </a:defRPr>
             </a:lvl7pPr>
             <a:lvl8pPr algn="l">
+              <a:buNone/>
               <a:defRPr sz="825" b="1">
                 <a:solidFill>
                   <a:srgbClr val="A8B5C8"/>
@@ -9613,6 +9923,7 @@
               </a:defRPr>
             </a:lvl8pPr>
             <a:lvl9pPr algn="l">
+              <a:buNone/>
               <a:defRPr sz="825" b="1">
                 <a:solidFill>
                   <a:srgbClr val="A8B5C8"/>
@@ -9696,6 +10007,7 @@
               </a:defRPr>
             </a:defPPr>
             <a:lvl1pPr algn="r">
+              <a:buNone/>
               <a:defRPr sz="825" b="1">
                 <a:solidFill>
                   <a:srgbClr val="A8B5C8"/>
@@ -9706,6 +10018,7 @@
               </a:defRPr>
             </a:lvl1pPr>
             <a:lvl2pPr algn="r">
+              <a:buNone/>
               <a:defRPr sz="825" b="1">
                 <a:solidFill>
                   <a:srgbClr val="A8B5C8"/>
@@ -9716,6 +10029,7 @@
               </a:defRPr>
             </a:lvl2pPr>
             <a:lvl3pPr algn="r">
+              <a:buNone/>
               <a:defRPr sz="825" b="1">
                 <a:solidFill>
                   <a:srgbClr val="A8B5C8"/>
@@ -9726,6 +10040,7 @@
               </a:defRPr>
             </a:lvl3pPr>
             <a:lvl4pPr algn="r">
+              <a:buNone/>
               <a:defRPr sz="825" b="1">
                 <a:solidFill>
                   <a:srgbClr val="A8B5C8"/>
@@ -9736,6 +10051,7 @@
               </a:defRPr>
             </a:lvl4pPr>
             <a:lvl5pPr algn="r">
+              <a:buNone/>
               <a:defRPr sz="825" b="1">
                 <a:solidFill>
                   <a:srgbClr val="A8B5C8"/>
@@ -9746,6 +10062,7 @@
               </a:defRPr>
             </a:lvl5pPr>
             <a:lvl6pPr algn="r">
+              <a:buNone/>
               <a:defRPr sz="825" b="1">
                 <a:solidFill>
                   <a:srgbClr val="A8B5C8"/>
@@ -9756,6 +10073,7 @@
               </a:defRPr>
             </a:lvl6pPr>
             <a:lvl7pPr algn="r">
+              <a:buNone/>
               <a:defRPr sz="825" b="1">
                 <a:solidFill>
                   <a:srgbClr val="A8B5C8"/>
@@ -9766,6 +10084,7 @@
               </a:defRPr>
             </a:lvl7pPr>
             <a:lvl8pPr algn="r">
+              <a:buNone/>
               <a:defRPr sz="825" b="1">
                 <a:solidFill>
                   <a:srgbClr val="A8B5C8"/>
@@ -9776,6 +10095,7 @@
               </a:defRPr>
             </a:lvl8pPr>
             <a:lvl9pPr algn="r">
+              <a:buNone/>
               <a:defRPr sz="825" b="1">
                 <a:solidFill>
                   <a:srgbClr val="A8B5C8"/>
@@ -9892,6 +10212,7 @@
               </a:defRPr>
             </a:defPPr>
             <a:lvl1pPr algn="l">
+              <a:buNone/>
               <a:defRPr sz="1050" b="1">
                 <a:solidFill>
                   <a:srgbClr val="63E6BE"/>
@@ -9902,6 +10223,7 @@
               </a:defRPr>
             </a:lvl1pPr>
             <a:lvl2pPr algn="l">
+              <a:buNone/>
               <a:defRPr sz="1050" b="1">
                 <a:solidFill>
                   <a:srgbClr val="63E6BE"/>
@@ -9912,6 +10234,7 @@
               </a:defRPr>
             </a:lvl2pPr>
             <a:lvl3pPr algn="l">
+              <a:buNone/>
               <a:defRPr sz="1050" b="1">
                 <a:solidFill>
                   <a:srgbClr val="63E6BE"/>
@@ -9922,6 +10245,7 @@
               </a:defRPr>
             </a:lvl3pPr>
             <a:lvl4pPr algn="l">
+              <a:buNone/>
               <a:defRPr sz="1050" b="1">
                 <a:solidFill>
                   <a:srgbClr val="63E6BE"/>
@@ -9932,6 +10256,7 @@
               </a:defRPr>
             </a:lvl4pPr>
             <a:lvl5pPr algn="l">
+              <a:buNone/>
               <a:defRPr sz="1050" b="1">
                 <a:solidFill>
                   <a:srgbClr val="63E6BE"/>
@@ -9942,6 +10267,7 @@
               </a:defRPr>
             </a:lvl5pPr>
             <a:lvl6pPr algn="l">
+              <a:buNone/>
               <a:defRPr sz="1050" b="1">
                 <a:solidFill>
                   <a:srgbClr val="63E6BE"/>
@@ -9952,6 +10278,7 @@
               </a:defRPr>
             </a:lvl6pPr>
             <a:lvl7pPr algn="l">
+              <a:buNone/>
               <a:defRPr sz="1050" b="1">
                 <a:solidFill>
                   <a:srgbClr val="63E6BE"/>
@@ -9962,6 +10289,7 @@
               </a:defRPr>
             </a:lvl7pPr>
             <a:lvl8pPr algn="l">
+              <a:buNone/>
               <a:defRPr sz="1050" b="1">
                 <a:solidFill>
                   <a:srgbClr val="63E6BE"/>
@@ -9972,6 +10300,7 @@
               </a:defRPr>
             </a:lvl8pPr>
             <a:lvl9pPr algn="l">
+              <a:buNone/>
               <a:defRPr sz="1050" b="1">
                 <a:solidFill>
                   <a:srgbClr val="63E6BE"/>
@@ -10055,6 +10384,7 @@
               </a:defRPr>
             </a:defPPr>
             <a:lvl1pPr algn="l">
+              <a:buNone/>
               <a:defRPr sz="1500" b="1">
                 <a:solidFill>
                   <a:srgbClr val="F5F7FA"/>
@@ -10065,6 +10395,7 @@
               </a:defRPr>
             </a:lvl1pPr>
             <a:lvl2pPr algn="l">
+              <a:buNone/>
               <a:defRPr sz="1500" b="1">
                 <a:solidFill>
                   <a:srgbClr val="F5F7FA"/>
@@ -10075,6 +10406,7 @@
               </a:defRPr>
             </a:lvl2pPr>
             <a:lvl3pPr algn="l">
+              <a:buNone/>
               <a:defRPr sz="1500" b="1">
                 <a:solidFill>
                   <a:srgbClr val="F5F7FA"/>
@@ -10085,6 +10417,7 @@
               </a:defRPr>
             </a:lvl3pPr>
             <a:lvl4pPr algn="l">
+              <a:buNone/>
               <a:defRPr sz="1500" b="1">
                 <a:solidFill>
                   <a:srgbClr val="F5F7FA"/>
@@ -10095,6 +10428,7 @@
               </a:defRPr>
             </a:lvl4pPr>
             <a:lvl5pPr algn="l">
+              <a:buNone/>
               <a:defRPr sz="1500" b="1">
                 <a:solidFill>
                   <a:srgbClr val="F5F7FA"/>
@@ -10105,6 +10439,7 @@
               </a:defRPr>
             </a:lvl5pPr>
             <a:lvl6pPr algn="l">
+              <a:buNone/>
               <a:defRPr sz="1500" b="1">
                 <a:solidFill>
                   <a:srgbClr val="F5F7FA"/>
@@ -10115,6 +10450,7 @@
               </a:defRPr>
             </a:lvl6pPr>
             <a:lvl7pPr algn="l">
+              <a:buNone/>
               <a:defRPr sz="1500" b="1">
                 <a:solidFill>
                   <a:srgbClr val="F5F7FA"/>
@@ -10125,6 +10461,7 @@
               </a:defRPr>
             </a:lvl7pPr>
             <a:lvl8pPr algn="l">
+              <a:buNone/>
               <a:defRPr sz="1500" b="1">
                 <a:solidFill>
                   <a:srgbClr val="F5F7FA"/>
@@ -10135,6 +10472,7 @@
               </a:defRPr>
             </a:lvl8pPr>
             <a:lvl9pPr algn="l">
+              <a:buNone/>
               <a:defRPr sz="1500" b="1">
                 <a:solidFill>
                   <a:srgbClr val="F5F7FA"/>
@@ -10218,6 +10556,7 @@
               </a:defRPr>
             </a:defPPr>
             <a:lvl1pPr algn="l">
+              <a:buNone/>
               <a:defRPr sz="1050" b="0">
                 <a:solidFill>
                   <a:srgbClr val="A8B5C8"/>
@@ -10228,6 +10567,7 @@
               </a:defRPr>
             </a:lvl1pPr>
             <a:lvl2pPr algn="l">
+              <a:buNone/>
               <a:defRPr sz="1050" b="0">
                 <a:solidFill>
                   <a:srgbClr val="A8B5C8"/>
@@ -10238,6 +10578,7 @@
               </a:defRPr>
             </a:lvl2pPr>
             <a:lvl3pPr algn="l">
+              <a:buNone/>
               <a:defRPr sz="1050" b="0">
                 <a:solidFill>
                   <a:srgbClr val="A8B5C8"/>
@@ -10248,6 +10589,7 @@
               </a:defRPr>
             </a:lvl3pPr>
             <a:lvl4pPr algn="l">
+              <a:buNone/>
               <a:defRPr sz="1050" b="0">
                 <a:solidFill>
                   <a:srgbClr val="A8B5C8"/>
@@ -10258,6 +10600,7 @@
               </a:defRPr>
             </a:lvl4pPr>
             <a:lvl5pPr algn="l">
+              <a:buNone/>
               <a:defRPr sz="1050" b="0">
                 <a:solidFill>
                   <a:srgbClr val="A8B5C8"/>
@@ -10268,6 +10611,7 @@
               </a:defRPr>
             </a:lvl5pPr>
             <a:lvl6pPr algn="l">
+              <a:buNone/>
               <a:defRPr sz="1050" b="0">
                 <a:solidFill>
                   <a:srgbClr val="A8B5C8"/>
@@ -10278,6 +10622,7 @@
               </a:defRPr>
             </a:lvl6pPr>
             <a:lvl7pPr algn="l">
+              <a:buNone/>
               <a:defRPr sz="1050" b="0">
                 <a:solidFill>
                   <a:srgbClr val="A8B5C8"/>
@@ -10288,6 +10633,7 @@
               </a:defRPr>
             </a:lvl7pPr>
             <a:lvl8pPr algn="l">
+              <a:buNone/>
               <a:defRPr sz="1050" b="0">
                 <a:solidFill>
                   <a:srgbClr val="A8B5C8"/>
@@ -10298,6 +10644,7 @@
               </a:defRPr>
             </a:lvl8pPr>
             <a:lvl9pPr algn="l">
+              <a:buNone/>
               <a:defRPr sz="1050" b="0">
                 <a:solidFill>
                   <a:srgbClr val="A8B5C8"/>
@@ -10414,6 +10761,7 @@
               </a:defRPr>
             </a:defPPr>
             <a:lvl1pPr algn="l">
+              <a:buNone/>
               <a:defRPr sz="1050" b="1">
                 <a:solidFill>
                   <a:srgbClr val="63E6BE"/>
@@ -10424,6 +10772,7 @@
               </a:defRPr>
             </a:lvl1pPr>
             <a:lvl2pPr algn="l">
+              <a:buNone/>
               <a:defRPr sz="1050" b="1">
                 <a:solidFill>
                   <a:srgbClr val="63E6BE"/>
@@ -10434,6 +10783,7 @@
               </a:defRPr>
             </a:lvl2pPr>
             <a:lvl3pPr algn="l">
+              <a:buNone/>
               <a:defRPr sz="1050" b="1">
                 <a:solidFill>
                   <a:srgbClr val="63E6BE"/>
@@ -10444,6 +10794,7 @@
               </a:defRPr>
             </a:lvl3pPr>
             <a:lvl4pPr algn="l">
+              <a:buNone/>
               <a:defRPr sz="1050" b="1">
                 <a:solidFill>
                   <a:srgbClr val="63E6BE"/>
@@ -10454,6 +10805,7 @@
               </a:defRPr>
             </a:lvl4pPr>
             <a:lvl5pPr algn="l">
+              <a:buNone/>
               <a:defRPr sz="1050" b="1">
                 <a:solidFill>
                   <a:srgbClr val="63E6BE"/>
@@ -10464,6 +10816,7 @@
               </a:defRPr>
             </a:lvl5pPr>
             <a:lvl6pPr algn="l">
+              <a:buNone/>
               <a:defRPr sz="1050" b="1">
                 <a:solidFill>
                   <a:srgbClr val="63E6BE"/>
@@ -10474,6 +10827,7 @@
               </a:defRPr>
             </a:lvl6pPr>
             <a:lvl7pPr algn="l">
+              <a:buNone/>
               <a:defRPr sz="1050" b="1">
                 <a:solidFill>
                   <a:srgbClr val="63E6BE"/>
@@ -10484,6 +10838,7 @@
               </a:defRPr>
             </a:lvl7pPr>
             <a:lvl8pPr algn="l">
+              <a:buNone/>
               <a:defRPr sz="1050" b="1">
                 <a:solidFill>
                   <a:srgbClr val="63E6BE"/>
@@ -10494,6 +10849,7 @@
               </a:defRPr>
             </a:lvl8pPr>
             <a:lvl9pPr algn="l">
+              <a:buNone/>
               <a:defRPr sz="1050" b="1">
                 <a:solidFill>
                   <a:srgbClr val="63E6BE"/>
@@ -10577,6 +10933,7 @@
               </a:defRPr>
             </a:defPPr>
             <a:lvl1pPr algn="l">
+              <a:buNone/>
               <a:defRPr sz="1500" b="1">
                 <a:solidFill>
                   <a:srgbClr val="F5F7FA"/>
@@ -10587,6 +10944,7 @@
               </a:defRPr>
             </a:lvl1pPr>
             <a:lvl2pPr algn="l">
+              <a:buNone/>
               <a:defRPr sz="1500" b="1">
                 <a:solidFill>
                   <a:srgbClr val="F5F7FA"/>
@@ -10597,6 +10955,7 @@
               </a:defRPr>
             </a:lvl2pPr>
             <a:lvl3pPr algn="l">
+              <a:buNone/>
               <a:defRPr sz="1500" b="1">
                 <a:solidFill>
                   <a:srgbClr val="F5F7FA"/>
@@ -10607,6 +10966,7 @@
               </a:defRPr>
             </a:lvl3pPr>
             <a:lvl4pPr algn="l">
+              <a:buNone/>
               <a:defRPr sz="1500" b="1">
                 <a:solidFill>
                   <a:srgbClr val="F5F7FA"/>
@@ -10617,6 +10977,7 @@
               </a:defRPr>
             </a:lvl4pPr>
             <a:lvl5pPr algn="l">
+              <a:buNone/>
               <a:defRPr sz="1500" b="1">
                 <a:solidFill>
                   <a:srgbClr val="F5F7FA"/>
@@ -10627,6 +10988,7 @@
               </a:defRPr>
             </a:lvl5pPr>
             <a:lvl6pPr algn="l">
+              <a:buNone/>
               <a:defRPr sz="1500" b="1">
                 <a:solidFill>
                   <a:srgbClr val="F5F7FA"/>
@@ -10637,6 +10999,7 @@
               </a:defRPr>
             </a:lvl6pPr>
             <a:lvl7pPr algn="l">
+              <a:buNone/>
               <a:defRPr sz="1500" b="1">
                 <a:solidFill>
                   <a:srgbClr val="F5F7FA"/>
@@ -10647,6 +11010,7 @@
               </a:defRPr>
             </a:lvl7pPr>
             <a:lvl8pPr algn="l">
+              <a:buNone/>
               <a:defRPr sz="1500" b="1">
                 <a:solidFill>
                   <a:srgbClr val="F5F7FA"/>
@@ -10657,6 +11021,7 @@
               </a:defRPr>
             </a:lvl8pPr>
             <a:lvl9pPr algn="l">
+              <a:buNone/>
               <a:defRPr sz="1500" b="1">
                 <a:solidFill>
                   <a:srgbClr val="F5F7FA"/>
@@ -10740,6 +11105,7 @@
               </a:defRPr>
             </a:defPPr>
             <a:lvl1pPr algn="l">
+              <a:buNone/>
               <a:defRPr sz="1050" b="0">
                 <a:solidFill>
                   <a:srgbClr val="A8B5C8"/>
@@ -10750,6 +11116,7 @@
               </a:defRPr>
             </a:lvl1pPr>
             <a:lvl2pPr algn="l">
+              <a:buNone/>
               <a:defRPr sz="1050" b="0">
                 <a:solidFill>
                   <a:srgbClr val="A8B5C8"/>
@@ -10760,6 +11127,7 @@
               </a:defRPr>
             </a:lvl2pPr>
             <a:lvl3pPr algn="l">
+              <a:buNone/>
               <a:defRPr sz="1050" b="0">
                 <a:solidFill>
                   <a:srgbClr val="A8B5C8"/>
@@ -10770,6 +11138,7 @@
               </a:defRPr>
             </a:lvl3pPr>
             <a:lvl4pPr algn="l">
+              <a:buNone/>
               <a:defRPr sz="1050" b="0">
                 <a:solidFill>
                   <a:srgbClr val="A8B5C8"/>
@@ -10780,6 +11149,7 @@
               </a:defRPr>
             </a:lvl4pPr>
             <a:lvl5pPr algn="l">
+              <a:buNone/>
               <a:defRPr sz="1050" b="0">
                 <a:solidFill>
                   <a:srgbClr val="A8B5C8"/>
@@ -10790,6 +11160,7 @@
               </a:defRPr>
             </a:lvl5pPr>
             <a:lvl6pPr algn="l">
+              <a:buNone/>
               <a:defRPr sz="1050" b="0">
                 <a:solidFill>
                   <a:srgbClr val="A8B5C8"/>
@@ -10800,6 +11171,7 @@
               </a:defRPr>
             </a:lvl6pPr>
             <a:lvl7pPr algn="l">
+              <a:buNone/>
               <a:defRPr sz="1050" b="0">
                 <a:solidFill>
                   <a:srgbClr val="A8B5C8"/>
@@ -10810,6 +11182,7 @@
               </a:defRPr>
             </a:lvl7pPr>
             <a:lvl8pPr algn="l">
+              <a:buNone/>
               <a:defRPr sz="1050" b="0">
                 <a:solidFill>
                   <a:srgbClr val="A8B5C8"/>
@@ -10820,6 +11193,7 @@
               </a:defRPr>
             </a:lvl8pPr>
             <a:lvl9pPr algn="l">
+              <a:buNone/>
               <a:defRPr sz="1050" b="0">
                 <a:solidFill>
                   <a:srgbClr val="A8B5C8"/>
@@ -10936,6 +11310,7 @@
               </a:defRPr>
             </a:defPPr>
             <a:lvl1pPr algn="l">
+              <a:buNone/>
               <a:defRPr sz="1050" b="1">
                 <a:solidFill>
                   <a:srgbClr val="63E6BE"/>
@@ -10946,6 +11321,7 @@
               </a:defRPr>
             </a:lvl1pPr>
             <a:lvl2pPr algn="l">
+              <a:buNone/>
               <a:defRPr sz="1050" b="1">
                 <a:solidFill>
                   <a:srgbClr val="63E6BE"/>
@@ -10956,6 +11332,7 @@
               </a:defRPr>
             </a:lvl2pPr>
             <a:lvl3pPr algn="l">
+              <a:buNone/>
               <a:defRPr sz="1050" b="1">
                 <a:solidFill>
                   <a:srgbClr val="63E6BE"/>
@@ -10966,6 +11343,7 @@
               </a:defRPr>
             </a:lvl3pPr>
             <a:lvl4pPr algn="l">
+              <a:buNone/>
               <a:defRPr sz="1050" b="1">
                 <a:solidFill>
                   <a:srgbClr val="63E6BE"/>
@@ -10976,6 +11354,7 @@
               </a:defRPr>
             </a:lvl4pPr>
             <a:lvl5pPr algn="l">
+              <a:buNone/>
               <a:defRPr sz="1050" b="1">
                 <a:solidFill>
                   <a:srgbClr val="63E6BE"/>
@@ -10986,6 +11365,7 @@
               </a:defRPr>
             </a:lvl5pPr>
             <a:lvl6pPr algn="l">
+              <a:buNone/>
               <a:defRPr sz="1050" b="1">
                 <a:solidFill>
                   <a:srgbClr val="63E6BE"/>
@@ -10996,6 +11376,7 @@
               </a:defRPr>
             </a:lvl6pPr>
             <a:lvl7pPr algn="l">
+              <a:buNone/>
               <a:defRPr sz="1050" b="1">
                 <a:solidFill>
                   <a:srgbClr val="63E6BE"/>
@@ -11006,6 +11387,7 @@
               </a:defRPr>
             </a:lvl7pPr>
             <a:lvl8pPr algn="l">
+              <a:buNone/>
               <a:defRPr sz="1050" b="1">
                 <a:solidFill>
                   <a:srgbClr val="63E6BE"/>
@@ -11016,6 +11398,7 @@
               </a:defRPr>
             </a:lvl8pPr>
             <a:lvl9pPr algn="l">
+              <a:buNone/>
               <a:defRPr sz="1050" b="1">
                 <a:solidFill>
                   <a:srgbClr val="63E6BE"/>
@@ -11099,6 +11482,7 @@
               </a:defRPr>
             </a:defPPr>
             <a:lvl1pPr algn="l">
+              <a:buNone/>
               <a:defRPr sz="1500" b="1">
                 <a:solidFill>
                   <a:srgbClr val="F5F7FA"/>
@@ -11109,6 +11493,7 @@
               </a:defRPr>
             </a:lvl1pPr>
             <a:lvl2pPr algn="l">
+              <a:buNone/>
               <a:defRPr sz="1500" b="1">
                 <a:solidFill>
                   <a:srgbClr val="F5F7FA"/>
@@ -11119,6 +11504,7 @@
               </a:defRPr>
             </a:lvl2pPr>
             <a:lvl3pPr algn="l">
+              <a:buNone/>
               <a:defRPr sz="1500" b="1">
                 <a:solidFill>
                   <a:srgbClr val="F5F7FA"/>
@@ -11129,6 +11515,7 @@
               </a:defRPr>
             </a:lvl3pPr>
             <a:lvl4pPr algn="l">
+              <a:buNone/>
               <a:defRPr sz="1500" b="1">
                 <a:solidFill>
                   <a:srgbClr val="F5F7FA"/>
@@ -11139,6 +11526,7 @@
               </a:defRPr>
             </a:lvl4pPr>
             <a:lvl5pPr algn="l">
+              <a:buNone/>
               <a:defRPr sz="1500" b="1">
                 <a:solidFill>
                   <a:srgbClr val="F5F7FA"/>
@@ -11149,6 +11537,7 @@
               </a:defRPr>
             </a:lvl5pPr>
             <a:lvl6pPr algn="l">
+              <a:buNone/>
               <a:defRPr sz="1500" b="1">
                 <a:solidFill>
                   <a:srgbClr val="F5F7FA"/>
@@ -11159,6 +11548,7 @@
               </a:defRPr>
             </a:lvl6pPr>
             <a:lvl7pPr algn="l">
+              <a:buNone/>
               <a:defRPr sz="1500" b="1">
                 <a:solidFill>
                   <a:srgbClr val="F5F7FA"/>
@@ -11169,6 +11559,7 @@
               </a:defRPr>
             </a:lvl7pPr>
             <a:lvl8pPr algn="l">
+              <a:buNone/>
               <a:defRPr sz="1500" b="1">
                 <a:solidFill>
                   <a:srgbClr val="F5F7FA"/>
@@ -11179,6 +11570,7 @@
               </a:defRPr>
             </a:lvl8pPr>
             <a:lvl9pPr algn="l">
+              <a:buNone/>
               <a:defRPr sz="1500" b="1">
                 <a:solidFill>
                   <a:srgbClr val="F5F7FA"/>
@@ -11262,6 +11654,7 @@
               </a:defRPr>
             </a:defPPr>
             <a:lvl1pPr algn="l">
+              <a:buNone/>
               <a:defRPr sz="1050" b="0">
                 <a:solidFill>
                   <a:srgbClr val="A8B5C8"/>
@@ -11272,6 +11665,7 @@
               </a:defRPr>
             </a:lvl1pPr>
             <a:lvl2pPr algn="l">
+              <a:buNone/>
               <a:defRPr sz="1050" b="0">
                 <a:solidFill>
                   <a:srgbClr val="A8B5C8"/>
@@ -11282,6 +11676,7 @@
               </a:defRPr>
             </a:lvl2pPr>
             <a:lvl3pPr algn="l">
+              <a:buNone/>
               <a:defRPr sz="1050" b="0">
                 <a:solidFill>
                   <a:srgbClr val="A8B5C8"/>
@@ -11292,6 +11687,7 @@
               </a:defRPr>
             </a:lvl3pPr>
             <a:lvl4pPr algn="l">
+              <a:buNone/>
               <a:defRPr sz="1050" b="0">
                 <a:solidFill>
                   <a:srgbClr val="A8B5C8"/>
@@ -11302,6 +11698,7 @@
               </a:defRPr>
             </a:lvl4pPr>
             <a:lvl5pPr algn="l">
+              <a:buNone/>
               <a:defRPr sz="1050" b="0">
                 <a:solidFill>
                   <a:srgbClr val="A8B5C8"/>
@@ -11312,6 +11709,7 @@
               </a:defRPr>
             </a:lvl5pPr>
             <a:lvl6pPr algn="l">
+              <a:buNone/>
               <a:defRPr sz="1050" b="0">
                 <a:solidFill>
                   <a:srgbClr val="A8B5C8"/>
@@ -11322,6 +11720,7 @@
               </a:defRPr>
             </a:lvl6pPr>
             <a:lvl7pPr algn="l">
+              <a:buNone/>
               <a:defRPr sz="1050" b="0">
                 <a:solidFill>
                   <a:srgbClr val="A8B5C8"/>
@@ -11332,6 +11731,7 @@
               </a:defRPr>
             </a:lvl7pPr>
             <a:lvl8pPr algn="l">
+              <a:buNone/>
               <a:defRPr sz="1050" b="0">
                 <a:solidFill>
                   <a:srgbClr val="A8B5C8"/>
@@ -11342,6 +11742,7 @@
               </a:defRPr>
             </a:lvl8pPr>
             <a:lvl9pPr algn="l">
+              <a:buNone/>
               <a:defRPr sz="1050" b="0">
                 <a:solidFill>
                   <a:srgbClr val="A8B5C8"/>
@@ -11458,6 +11859,7 @@
               </a:defRPr>
             </a:defPPr>
             <a:lvl1pPr algn="l">
+              <a:buNone/>
               <a:defRPr sz="1050" b="1">
                 <a:solidFill>
                   <a:srgbClr val="63E6BE"/>
@@ -11468,6 +11870,7 @@
               </a:defRPr>
             </a:lvl1pPr>
             <a:lvl2pPr algn="l">
+              <a:buNone/>
               <a:defRPr sz="1050" b="1">
                 <a:solidFill>
                   <a:srgbClr val="63E6BE"/>
@@ -11478,6 +11881,7 @@
               </a:defRPr>
             </a:lvl2pPr>
             <a:lvl3pPr algn="l">
+              <a:buNone/>
               <a:defRPr sz="1050" b="1">
                 <a:solidFill>
                   <a:srgbClr val="63E6BE"/>
@@ -11488,6 +11892,7 @@
               </a:defRPr>
             </a:lvl3pPr>
             <a:lvl4pPr algn="l">
+              <a:buNone/>
               <a:defRPr sz="1050" b="1">
                 <a:solidFill>
                   <a:srgbClr val="63E6BE"/>
@@ -11498,6 +11903,7 @@
               </a:defRPr>
             </a:lvl4pPr>
             <a:lvl5pPr algn="l">
+              <a:buNone/>
               <a:defRPr sz="1050" b="1">
                 <a:solidFill>
                   <a:srgbClr val="63E6BE"/>
@@ -11508,6 +11914,7 @@
               </a:defRPr>
             </a:lvl5pPr>
             <a:lvl6pPr algn="l">
+              <a:buNone/>
               <a:defRPr sz="1050" b="1">
                 <a:solidFill>
                   <a:srgbClr val="63E6BE"/>
@@ -11518,6 +11925,7 @@
               </a:defRPr>
             </a:lvl6pPr>
             <a:lvl7pPr algn="l">
+              <a:buNone/>
               <a:defRPr sz="1050" b="1">
                 <a:solidFill>
                   <a:srgbClr val="63E6BE"/>
@@ -11528,6 +11936,7 @@
               </a:defRPr>
             </a:lvl7pPr>
             <a:lvl8pPr algn="l">
+              <a:buNone/>
               <a:defRPr sz="1050" b="1">
                 <a:solidFill>
                   <a:srgbClr val="63E6BE"/>
@@ -11538,6 +11947,7 @@
               </a:defRPr>
             </a:lvl8pPr>
             <a:lvl9pPr algn="l">
+              <a:buNone/>
               <a:defRPr sz="1050" b="1">
                 <a:solidFill>
                   <a:srgbClr val="63E6BE"/>
@@ -11621,6 +12031,7 @@
               </a:defRPr>
             </a:defPPr>
             <a:lvl1pPr algn="l">
+              <a:buNone/>
               <a:defRPr sz="1500" b="1">
                 <a:solidFill>
                   <a:srgbClr val="F5F7FA"/>
@@ -11631,6 +12042,7 @@
               </a:defRPr>
             </a:lvl1pPr>
             <a:lvl2pPr algn="l">
+              <a:buNone/>
               <a:defRPr sz="1500" b="1">
                 <a:solidFill>
                   <a:srgbClr val="F5F7FA"/>
@@ -11641,6 +12053,7 @@
               </a:defRPr>
             </a:lvl2pPr>
             <a:lvl3pPr algn="l">
+              <a:buNone/>
               <a:defRPr sz="1500" b="1">
                 <a:solidFill>
                   <a:srgbClr val="F5F7FA"/>
@@ -11651,6 +12064,7 @@
               </a:defRPr>
             </a:lvl3pPr>
             <a:lvl4pPr algn="l">
+              <a:buNone/>
               <a:defRPr sz="1500" b="1">
                 <a:solidFill>
                   <a:srgbClr val="F5F7FA"/>
@@ -11661,6 +12075,7 @@
               </a:defRPr>
             </a:lvl4pPr>
             <a:lvl5pPr algn="l">
+              <a:buNone/>
               <a:defRPr sz="1500" b="1">
                 <a:solidFill>
                   <a:srgbClr val="F5F7FA"/>
@@ -11671,6 +12086,7 @@
               </a:defRPr>
             </a:lvl5pPr>
             <a:lvl6pPr algn="l">
+              <a:buNone/>
               <a:defRPr sz="1500" b="1">
                 <a:solidFill>
                   <a:srgbClr val="F5F7FA"/>
@@ -11681,6 +12097,7 @@
               </a:defRPr>
             </a:lvl6pPr>
             <a:lvl7pPr algn="l">
+              <a:buNone/>
               <a:defRPr sz="1500" b="1">
                 <a:solidFill>
                   <a:srgbClr val="F5F7FA"/>
@@ -11691,6 +12108,7 @@
               </a:defRPr>
             </a:lvl7pPr>
             <a:lvl8pPr algn="l">
+              <a:buNone/>
               <a:defRPr sz="1500" b="1">
                 <a:solidFill>
                   <a:srgbClr val="F5F7FA"/>
@@ -11701,6 +12119,7 @@
               </a:defRPr>
             </a:lvl8pPr>
             <a:lvl9pPr algn="l">
+              <a:buNone/>
               <a:defRPr sz="1500" b="1">
                 <a:solidFill>
                   <a:srgbClr val="F5F7FA"/>
@@ -11784,6 +12203,7 @@
               </a:defRPr>
             </a:defPPr>
             <a:lvl1pPr algn="l">
+              <a:buNone/>
               <a:defRPr sz="1050" b="0">
                 <a:solidFill>
                   <a:srgbClr val="A8B5C8"/>
@@ -11794,6 +12214,7 @@
               </a:defRPr>
             </a:lvl1pPr>
             <a:lvl2pPr algn="l">
+              <a:buNone/>
               <a:defRPr sz="1050" b="0">
                 <a:solidFill>
                   <a:srgbClr val="A8B5C8"/>
@@ -11804,6 +12225,7 @@
               </a:defRPr>
             </a:lvl2pPr>
             <a:lvl3pPr algn="l">
+              <a:buNone/>
               <a:defRPr sz="1050" b="0">
                 <a:solidFill>
                   <a:srgbClr val="A8B5C8"/>
@@ -11814,6 +12236,7 @@
               </a:defRPr>
             </a:lvl3pPr>
             <a:lvl4pPr algn="l">
+              <a:buNone/>
               <a:defRPr sz="1050" b="0">
                 <a:solidFill>
                   <a:srgbClr val="A8B5C8"/>
@@ -11824,6 +12247,7 @@
               </a:defRPr>
             </a:lvl4pPr>
             <a:lvl5pPr algn="l">
+              <a:buNone/>
               <a:defRPr sz="1050" b="0">
                 <a:solidFill>
                   <a:srgbClr val="A8B5C8"/>
@@ -11834,6 +12258,7 @@
               </a:defRPr>
             </a:lvl5pPr>
             <a:lvl6pPr algn="l">
+              <a:buNone/>
               <a:defRPr sz="1050" b="0">
                 <a:solidFill>
                   <a:srgbClr val="A8B5C8"/>
@@ -11844,6 +12269,7 @@
               </a:defRPr>
             </a:lvl6pPr>
             <a:lvl7pPr algn="l">
+              <a:buNone/>
               <a:defRPr sz="1050" b="0">
                 <a:solidFill>
                   <a:srgbClr val="A8B5C8"/>
@@ -11854,6 +12280,7 @@
               </a:defRPr>
             </a:lvl7pPr>
             <a:lvl8pPr algn="l">
+              <a:buNone/>
               <a:defRPr sz="1050" b="0">
                 <a:solidFill>
                   <a:srgbClr val="A8B5C8"/>
@@ -11864,6 +12291,7 @@
               </a:defRPr>
             </a:lvl8pPr>
             <a:lvl9pPr algn="l">
+              <a:buNone/>
               <a:defRPr sz="1050" b="0">
                 <a:solidFill>
                   <a:srgbClr val="A8B5C8"/>
@@ -11980,6 +12408,7 @@
               </a:defRPr>
             </a:defPPr>
             <a:lvl1pPr algn="l">
+              <a:buNone/>
               <a:defRPr sz="1125" b="1">
                 <a:solidFill>
                   <a:srgbClr val="F2C879"/>
@@ -11990,6 +12419,7 @@
               </a:defRPr>
             </a:lvl1pPr>
             <a:lvl2pPr algn="l">
+              <a:buNone/>
               <a:defRPr sz="1125" b="1">
                 <a:solidFill>
                   <a:srgbClr val="F2C879"/>
@@ -12000,6 +12430,7 @@
               </a:defRPr>
             </a:lvl2pPr>
             <a:lvl3pPr algn="l">
+              <a:buNone/>
               <a:defRPr sz="1125" b="1">
                 <a:solidFill>
                   <a:srgbClr val="F2C879"/>
@@ -12010,6 +12441,7 @@
               </a:defRPr>
             </a:lvl3pPr>
             <a:lvl4pPr algn="l">
+              <a:buNone/>
               <a:defRPr sz="1125" b="1">
                 <a:solidFill>
                   <a:srgbClr val="F2C879"/>
@@ -12020,6 +12452,7 @@
               </a:defRPr>
             </a:lvl4pPr>
             <a:lvl5pPr algn="l">
+              <a:buNone/>
               <a:defRPr sz="1125" b="1">
                 <a:solidFill>
                   <a:srgbClr val="F2C879"/>
@@ -12030,6 +12463,7 @@
               </a:defRPr>
             </a:lvl5pPr>
             <a:lvl6pPr algn="l">
+              <a:buNone/>
               <a:defRPr sz="1125" b="1">
                 <a:solidFill>
                   <a:srgbClr val="F2C879"/>
@@ -12040,6 +12474,7 @@
               </a:defRPr>
             </a:lvl6pPr>
             <a:lvl7pPr algn="l">
+              <a:buNone/>
               <a:defRPr sz="1125" b="1">
                 <a:solidFill>
                   <a:srgbClr val="F2C879"/>
@@ -12050,6 +12485,7 @@
               </a:defRPr>
             </a:lvl7pPr>
             <a:lvl8pPr algn="l">
+              <a:buNone/>
               <a:defRPr sz="1125" b="1">
                 <a:solidFill>
                   <a:srgbClr val="F2C879"/>
@@ -12060,6 +12496,7 @@
               </a:defRPr>
             </a:lvl8pPr>
             <a:lvl9pPr algn="l">
+              <a:buNone/>
               <a:defRPr sz="1125" b="1">
                 <a:solidFill>
                   <a:srgbClr val="F2C879"/>
@@ -12143,6 +12580,7 @@
               </a:defRPr>
             </a:defPPr>
             <a:lvl1pPr algn="l">
+              <a:buNone/>
               <a:defRPr sz="1125" b="0">
                 <a:solidFill>
                   <a:srgbClr val="F5F7FA"/>
@@ -12153,6 +12591,7 @@
               </a:defRPr>
             </a:lvl1pPr>
             <a:lvl2pPr algn="l">
+              <a:buNone/>
               <a:defRPr sz="1125" b="0">
                 <a:solidFill>
                   <a:srgbClr val="F5F7FA"/>
@@ -12163,6 +12602,7 @@
               </a:defRPr>
             </a:lvl2pPr>
             <a:lvl3pPr algn="l">
+              <a:buNone/>
               <a:defRPr sz="1125" b="0">
                 <a:solidFill>
                   <a:srgbClr val="F5F7FA"/>
@@ -12173,6 +12613,7 @@
               </a:defRPr>
             </a:lvl3pPr>
             <a:lvl4pPr algn="l">
+              <a:buNone/>
               <a:defRPr sz="1125" b="0">
                 <a:solidFill>
                   <a:srgbClr val="F5F7FA"/>
@@ -12183,6 +12624,7 @@
               </a:defRPr>
             </a:lvl4pPr>
             <a:lvl5pPr algn="l">
+              <a:buNone/>
               <a:defRPr sz="1125" b="0">
                 <a:solidFill>
                   <a:srgbClr val="F5F7FA"/>
@@ -12193,6 +12635,7 @@
               </a:defRPr>
             </a:lvl5pPr>
             <a:lvl6pPr algn="l">
+              <a:buNone/>
               <a:defRPr sz="1125" b="0">
                 <a:solidFill>
                   <a:srgbClr val="F5F7FA"/>
@@ -12203,6 +12646,7 @@
               </a:defRPr>
             </a:lvl6pPr>
             <a:lvl7pPr algn="l">
+              <a:buNone/>
               <a:defRPr sz="1125" b="0">
                 <a:solidFill>
                   <a:srgbClr val="F5F7FA"/>
@@ -12213,6 +12657,7 @@
               </a:defRPr>
             </a:lvl7pPr>
             <a:lvl8pPr algn="l">
+              <a:buNone/>
               <a:defRPr sz="1125" b="0">
                 <a:solidFill>
                   <a:srgbClr val="F5F7FA"/>
@@ -12223,6 +12668,7 @@
               </a:defRPr>
             </a:lvl8pPr>
             <a:lvl9pPr algn="l">
+              <a:buNone/>
               <a:defRPr sz="1125" b="0">
                 <a:solidFill>
                   <a:srgbClr val="F5F7FA"/>
@@ -12370,6 +12816,7 @@
               </a:defRPr>
             </a:defPPr>
             <a:lvl1pPr algn="l">
+              <a:buNone/>
               <a:defRPr sz="1050" b="1">
                 <a:solidFill>
                   <a:srgbClr val="63E6BE"/>
@@ -12380,6 +12827,7 @@
               </a:defRPr>
             </a:lvl1pPr>
             <a:lvl2pPr algn="l">
+              <a:buNone/>
               <a:defRPr sz="1050" b="1">
                 <a:solidFill>
                   <a:srgbClr val="63E6BE"/>
@@ -12390,6 +12838,7 @@
               </a:defRPr>
             </a:lvl2pPr>
             <a:lvl3pPr algn="l">
+              <a:buNone/>
               <a:defRPr sz="1050" b="1">
                 <a:solidFill>
                   <a:srgbClr val="63E6BE"/>
@@ -12400,6 +12849,7 @@
               </a:defRPr>
             </a:lvl3pPr>
             <a:lvl4pPr algn="l">
+              <a:buNone/>
               <a:defRPr sz="1050" b="1">
                 <a:solidFill>
                   <a:srgbClr val="63E6BE"/>
@@ -12410,6 +12860,7 @@
               </a:defRPr>
             </a:lvl4pPr>
             <a:lvl5pPr algn="l">
+              <a:buNone/>
               <a:defRPr sz="1050" b="1">
                 <a:solidFill>
                   <a:srgbClr val="63E6BE"/>
@@ -12420,6 +12871,7 @@
               </a:defRPr>
             </a:lvl5pPr>
             <a:lvl6pPr algn="l">
+              <a:buNone/>
               <a:defRPr sz="1050" b="1">
                 <a:solidFill>
                   <a:srgbClr val="63E6BE"/>
@@ -12430,6 +12882,7 @@
               </a:defRPr>
             </a:lvl6pPr>
             <a:lvl7pPr algn="l">
+              <a:buNone/>
               <a:defRPr sz="1050" b="1">
                 <a:solidFill>
                   <a:srgbClr val="63E6BE"/>
@@ -12440,6 +12893,7 @@
               </a:defRPr>
             </a:lvl7pPr>
             <a:lvl8pPr algn="l">
+              <a:buNone/>
               <a:defRPr sz="1050" b="1">
                 <a:solidFill>
                   <a:srgbClr val="63E6BE"/>
@@ -12450,6 +12904,7 @@
               </a:defRPr>
             </a:lvl8pPr>
             <a:lvl9pPr algn="l">
+              <a:buNone/>
               <a:defRPr sz="1050" b="1">
                 <a:solidFill>
                   <a:srgbClr val="63E6BE"/>
@@ -12533,6 +12988,7 @@
               </a:defRPr>
             </a:defPPr>
             <a:lvl1pPr algn="l">
+              <a:buNone/>
               <a:defRPr sz="975" b="0">
                 <a:solidFill>
                   <a:srgbClr val="F5F7FA"/>
@@ -12543,6 +12999,7 @@
               </a:defRPr>
             </a:lvl1pPr>
             <a:lvl2pPr algn="l">
+              <a:buNone/>
               <a:defRPr sz="975" b="0">
                 <a:solidFill>
                   <a:srgbClr val="F5F7FA"/>
@@ -12553,6 +13010,7 @@
               </a:defRPr>
             </a:lvl2pPr>
             <a:lvl3pPr algn="l">
+              <a:buNone/>
               <a:defRPr sz="975" b="0">
                 <a:solidFill>
                   <a:srgbClr val="F5F7FA"/>
@@ -12563,6 +13021,7 @@
               </a:defRPr>
             </a:lvl3pPr>
             <a:lvl4pPr algn="l">
+              <a:buNone/>
               <a:defRPr sz="975" b="0">
                 <a:solidFill>
                   <a:srgbClr val="F5F7FA"/>
@@ -12573,6 +13032,7 @@
               </a:defRPr>
             </a:lvl4pPr>
             <a:lvl5pPr algn="l">
+              <a:buNone/>
               <a:defRPr sz="975" b="0">
                 <a:solidFill>
                   <a:srgbClr val="F5F7FA"/>
@@ -12583,6 +13043,7 @@
               </a:defRPr>
             </a:lvl5pPr>
             <a:lvl6pPr algn="l">
+              <a:buNone/>
               <a:defRPr sz="975" b="0">
                 <a:solidFill>
                   <a:srgbClr val="F5F7FA"/>
@@ -12593,6 +13054,7 @@
               </a:defRPr>
             </a:lvl6pPr>
             <a:lvl7pPr algn="l">
+              <a:buNone/>
               <a:defRPr sz="975" b="0">
                 <a:solidFill>
                   <a:srgbClr val="F5F7FA"/>
@@ -12603,6 +13065,7 @@
               </a:defRPr>
             </a:lvl7pPr>
             <a:lvl8pPr algn="l">
+              <a:buNone/>
               <a:defRPr sz="975" b="0">
                 <a:solidFill>
                   <a:srgbClr val="F5F7FA"/>
@@ -12613,6 +13076,7 @@
               </a:defRPr>
             </a:lvl8pPr>
             <a:lvl9pPr algn="l">
+              <a:buNone/>
               <a:defRPr sz="975" b="0">
                 <a:solidFill>
                   <a:srgbClr val="F5F7FA"/>
@@ -12725,6 +13189,7 @@
               </a:defRPr>
             </a:defPPr>
             <a:lvl1pPr algn="l">
+              <a:buNone/>
               <a:defRPr sz="1050" b="1">
                 <a:solidFill>
                   <a:srgbClr val="63E6BE"/>
@@ -12735,6 +13200,7 @@
               </a:defRPr>
             </a:lvl1pPr>
             <a:lvl2pPr algn="l">
+              <a:buNone/>
               <a:defRPr sz="1050" b="1">
                 <a:solidFill>
                   <a:srgbClr val="63E6BE"/>
@@ -12745,6 +13211,7 @@
               </a:defRPr>
             </a:lvl2pPr>
             <a:lvl3pPr algn="l">
+              <a:buNone/>
               <a:defRPr sz="1050" b="1">
                 <a:solidFill>
                   <a:srgbClr val="63E6BE"/>
@@ -12755,6 +13222,7 @@
               </a:defRPr>
             </a:lvl3pPr>
             <a:lvl4pPr algn="l">
+              <a:buNone/>
               <a:defRPr sz="1050" b="1">
                 <a:solidFill>
                   <a:srgbClr val="63E6BE"/>
@@ -12765,6 +13233,7 @@
               </a:defRPr>
             </a:lvl4pPr>
             <a:lvl5pPr algn="l">
+              <a:buNone/>
               <a:defRPr sz="1050" b="1">
                 <a:solidFill>
                   <a:srgbClr val="63E6BE"/>
@@ -12775,6 +13244,7 @@
               </a:defRPr>
             </a:lvl5pPr>
             <a:lvl6pPr algn="l">
+              <a:buNone/>
               <a:defRPr sz="1050" b="1">
                 <a:solidFill>
                   <a:srgbClr val="63E6BE"/>
@@ -12785,6 +13255,7 @@
               </a:defRPr>
             </a:lvl6pPr>
             <a:lvl7pPr algn="l">
+              <a:buNone/>
               <a:defRPr sz="1050" b="1">
                 <a:solidFill>
                   <a:srgbClr val="63E6BE"/>
@@ -12795,6 +13266,7 @@
               </a:defRPr>
             </a:lvl7pPr>
             <a:lvl8pPr algn="l">
+              <a:buNone/>
               <a:defRPr sz="1050" b="1">
                 <a:solidFill>
                   <a:srgbClr val="63E6BE"/>
@@ -12805,6 +13277,7 @@
               </a:defRPr>
             </a:lvl8pPr>
             <a:lvl9pPr algn="l">
+              <a:buNone/>
               <a:defRPr sz="1050" b="1">
                 <a:solidFill>
                   <a:srgbClr val="63E6BE"/>
@@ -12888,6 +13361,7 @@
               </a:defRPr>
             </a:defPPr>
             <a:lvl1pPr algn="l">
+              <a:buNone/>
               <a:defRPr sz="2850" b="1">
                 <a:solidFill>
                   <a:srgbClr val="F5F7FA"/>
@@ -12898,6 +13372,7 @@
               </a:defRPr>
             </a:lvl1pPr>
             <a:lvl2pPr algn="l">
+              <a:buNone/>
               <a:defRPr sz="2850" b="1">
                 <a:solidFill>
                   <a:srgbClr val="F5F7FA"/>
@@ -12908,6 +13383,7 @@
               </a:defRPr>
             </a:lvl2pPr>
             <a:lvl3pPr algn="l">
+              <a:buNone/>
               <a:defRPr sz="2850" b="1">
                 <a:solidFill>
                   <a:srgbClr val="F5F7FA"/>
@@ -12918,6 +13394,7 @@
               </a:defRPr>
             </a:lvl3pPr>
             <a:lvl4pPr algn="l">
+              <a:buNone/>
               <a:defRPr sz="2850" b="1">
                 <a:solidFill>
                   <a:srgbClr val="F5F7FA"/>
@@ -12928,6 +13405,7 @@
               </a:defRPr>
             </a:lvl4pPr>
             <a:lvl5pPr algn="l">
+              <a:buNone/>
               <a:defRPr sz="2850" b="1">
                 <a:solidFill>
                   <a:srgbClr val="F5F7FA"/>
@@ -12938,6 +13416,7 @@
               </a:defRPr>
             </a:lvl5pPr>
             <a:lvl6pPr algn="l">
+              <a:buNone/>
               <a:defRPr sz="2850" b="1">
                 <a:solidFill>
                   <a:srgbClr val="F5F7FA"/>
@@ -12948,6 +13427,7 @@
               </a:defRPr>
             </a:lvl6pPr>
             <a:lvl7pPr algn="l">
+              <a:buNone/>
               <a:defRPr sz="2850" b="1">
                 <a:solidFill>
                   <a:srgbClr val="F5F7FA"/>
@@ -12958,6 +13438,7 @@
               </a:defRPr>
             </a:lvl7pPr>
             <a:lvl8pPr algn="l">
+              <a:buNone/>
               <a:defRPr sz="2850" b="1">
                 <a:solidFill>
                   <a:srgbClr val="F5F7FA"/>
@@ -12968,6 +13449,7 @@
               </a:defRPr>
             </a:lvl8pPr>
             <a:lvl9pPr algn="l">
+              <a:buNone/>
               <a:defRPr sz="2850" b="1">
                 <a:solidFill>
                   <a:srgbClr val="F5F7FA"/>
@@ -13082,6 +13564,7 @@
               </a:defRPr>
             </a:defPPr>
             <a:lvl1pPr algn="l">
+              <a:buNone/>
               <a:defRPr sz="825" b="1">
                 <a:solidFill>
                   <a:srgbClr val="A8B5C8"/>
@@ -13092,6 +13575,7 @@
               </a:defRPr>
             </a:lvl1pPr>
             <a:lvl2pPr algn="l">
+              <a:buNone/>
               <a:defRPr sz="825" b="1">
                 <a:solidFill>
                   <a:srgbClr val="A8B5C8"/>
@@ -13102,6 +13586,7 @@
               </a:defRPr>
             </a:lvl2pPr>
             <a:lvl3pPr algn="l">
+              <a:buNone/>
               <a:defRPr sz="825" b="1">
                 <a:solidFill>
                   <a:srgbClr val="A8B5C8"/>
@@ -13112,6 +13597,7 @@
               </a:defRPr>
             </a:lvl3pPr>
             <a:lvl4pPr algn="l">
+              <a:buNone/>
               <a:defRPr sz="825" b="1">
                 <a:solidFill>
                   <a:srgbClr val="A8B5C8"/>
@@ -13122,6 +13608,7 @@
               </a:defRPr>
             </a:lvl4pPr>
             <a:lvl5pPr algn="l">
+              <a:buNone/>
               <a:defRPr sz="825" b="1">
                 <a:solidFill>
                   <a:srgbClr val="A8B5C8"/>
@@ -13132,6 +13619,7 @@
               </a:defRPr>
             </a:lvl5pPr>
             <a:lvl6pPr algn="l">
+              <a:buNone/>
               <a:defRPr sz="825" b="1">
                 <a:solidFill>
                   <a:srgbClr val="A8B5C8"/>
@@ -13142,6 +13630,7 @@
               </a:defRPr>
             </a:lvl6pPr>
             <a:lvl7pPr algn="l">
+              <a:buNone/>
               <a:defRPr sz="825" b="1">
                 <a:solidFill>
                   <a:srgbClr val="A8B5C8"/>
@@ -13152,6 +13641,7 @@
               </a:defRPr>
             </a:lvl7pPr>
             <a:lvl8pPr algn="l">
+              <a:buNone/>
               <a:defRPr sz="825" b="1">
                 <a:solidFill>
                   <a:srgbClr val="A8B5C8"/>
@@ -13162,6 +13652,7 @@
               </a:defRPr>
             </a:lvl8pPr>
             <a:lvl9pPr algn="l">
+              <a:buNone/>
               <a:defRPr sz="825" b="1">
                 <a:solidFill>
                   <a:srgbClr val="A8B5C8"/>
@@ -13245,6 +13736,7 @@
               </a:defRPr>
             </a:defPPr>
             <a:lvl1pPr algn="r">
+              <a:buNone/>
               <a:defRPr sz="825" b="1">
                 <a:solidFill>
                   <a:srgbClr val="A8B5C8"/>
@@ -13255,6 +13747,7 @@
               </a:defRPr>
             </a:lvl1pPr>
             <a:lvl2pPr algn="r">
+              <a:buNone/>
               <a:defRPr sz="825" b="1">
                 <a:solidFill>
                   <a:srgbClr val="A8B5C8"/>
@@ -13265,6 +13758,7 @@
               </a:defRPr>
             </a:lvl2pPr>
             <a:lvl3pPr algn="r">
+              <a:buNone/>
               <a:defRPr sz="825" b="1">
                 <a:solidFill>
                   <a:srgbClr val="A8B5C8"/>
@@ -13275,6 +13769,7 @@
               </a:defRPr>
             </a:lvl3pPr>
             <a:lvl4pPr algn="r">
+              <a:buNone/>
               <a:defRPr sz="825" b="1">
                 <a:solidFill>
                   <a:srgbClr val="A8B5C8"/>
@@ -13285,6 +13780,7 @@
               </a:defRPr>
             </a:lvl4pPr>
             <a:lvl5pPr algn="r">
+              <a:buNone/>
               <a:defRPr sz="825" b="1">
                 <a:solidFill>
                   <a:srgbClr val="A8B5C8"/>
@@ -13295,6 +13791,7 @@
               </a:defRPr>
             </a:lvl5pPr>
             <a:lvl6pPr algn="r">
+              <a:buNone/>
               <a:defRPr sz="825" b="1">
                 <a:solidFill>
                   <a:srgbClr val="A8B5C8"/>
@@ -13305,6 +13802,7 @@
               </a:defRPr>
             </a:lvl6pPr>
             <a:lvl7pPr algn="r">
+              <a:buNone/>
               <a:defRPr sz="825" b="1">
                 <a:solidFill>
                   <a:srgbClr val="A8B5C8"/>
@@ -13315,6 +13813,7 @@
               </a:defRPr>
             </a:lvl7pPr>
             <a:lvl8pPr algn="r">
+              <a:buNone/>
               <a:defRPr sz="825" b="1">
                 <a:solidFill>
                   <a:srgbClr val="A8B5C8"/>
@@ -13325,6 +13824,7 @@
               </a:defRPr>
             </a:lvl8pPr>
             <a:lvl9pPr algn="r">
+              <a:buNone/>
               <a:defRPr sz="825" b="1">
                 <a:solidFill>
                   <a:srgbClr val="A8B5C8"/>
@@ -13441,6 +13941,7 @@
               </a:defRPr>
             </a:defPPr>
             <a:lvl1pPr algn="l">
+              <a:buNone/>
               <a:defRPr sz="3150" b="1">
                 <a:solidFill>
                   <a:srgbClr val="63E6BE"/>
@@ -13451,6 +13952,7 @@
               </a:defRPr>
             </a:lvl1pPr>
             <a:lvl2pPr algn="l">
+              <a:buNone/>
               <a:defRPr sz="3150" b="1">
                 <a:solidFill>
                   <a:srgbClr val="63E6BE"/>
@@ -13461,6 +13963,7 @@
               </a:defRPr>
             </a:lvl2pPr>
             <a:lvl3pPr algn="l">
+              <a:buNone/>
               <a:defRPr sz="3150" b="1">
                 <a:solidFill>
                   <a:srgbClr val="63E6BE"/>
@@ -13471,6 +13974,7 @@
               </a:defRPr>
             </a:lvl3pPr>
             <a:lvl4pPr algn="l">
+              <a:buNone/>
               <a:defRPr sz="3150" b="1">
                 <a:solidFill>
                   <a:srgbClr val="63E6BE"/>
@@ -13481,6 +13985,7 @@
               </a:defRPr>
             </a:lvl4pPr>
             <a:lvl5pPr algn="l">
+              <a:buNone/>
               <a:defRPr sz="3150" b="1">
                 <a:solidFill>
                   <a:srgbClr val="63E6BE"/>
@@ -13491,6 +13996,7 @@
               </a:defRPr>
             </a:lvl5pPr>
             <a:lvl6pPr algn="l">
+              <a:buNone/>
               <a:defRPr sz="3150" b="1">
                 <a:solidFill>
                   <a:srgbClr val="63E6BE"/>
@@ -13501,6 +14007,7 @@
               </a:defRPr>
             </a:lvl6pPr>
             <a:lvl7pPr algn="l">
+              <a:buNone/>
               <a:defRPr sz="3150" b="1">
                 <a:solidFill>
                   <a:srgbClr val="63E6BE"/>
@@ -13511,6 +14018,7 @@
               </a:defRPr>
             </a:lvl7pPr>
             <a:lvl8pPr algn="l">
+              <a:buNone/>
               <a:defRPr sz="3150" b="1">
                 <a:solidFill>
                   <a:srgbClr val="63E6BE"/>
@@ -13521,6 +14029,7 @@
               </a:defRPr>
             </a:lvl8pPr>
             <a:lvl9pPr algn="l">
+              <a:buNone/>
               <a:defRPr sz="3150" b="1">
                 <a:solidFill>
                   <a:srgbClr val="63E6BE"/>
@@ -13604,6 +14113,7 @@
               </a:defRPr>
             </a:defPPr>
             <a:lvl1pPr algn="l">
+              <a:buNone/>
               <a:defRPr sz="1200" b="1">
                 <a:solidFill>
                   <a:srgbClr val="F5F7FA"/>
@@ -13614,6 +14124,7 @@
               </a:defRPr>
             </a:lvl1pPr>
             <a:lvl2pPr algn="l">
+              <a:buNone/>
               <a:defRPr sz="1200" b="1">
                 <a:solidFill>
                   <a:srgbClr val="F5F7FA"/>
@@ -13624,6 +14135,7 @@
               </a:defRPr>
             </a:lvl2pPr>
             <a:lvl3pPr algn="l">
+              <a:buNone/>
               <a:defRPr sz="1200" b="1">
                 <a:solidFill>
                   <a:srgbClr val="F5F7FA"/>
@@ -13634,6 +14146,7 @@
               </a:defRPr>
             </a:lvl3pPr>
             <a:lvl4pPr algn="l">
+              <a:buNone/>
               <a:defRPr sz="1200" b="1">
                 <a:solidFill>
                   <a:srgbClr val="F5F7FA"/>
@@ -13644,6 +14157,7 @@
               </a:defRPr>
             </a:lvl4pPr>
             <a:lvl5pPr algn="l">
+              <a:buNone/>
               <a:defRPr sz="1200" b="1">
                 <a:solidFill>
                   <a:srgbClr val="F5F7FA"/>
@@ -13654,6 +14168,7 @@
               </a:defRPr>
             </a:lvl5pPr>
             <a:lvl6pPr algn="l">
+              <a:buNone/>
               <a:defRPr sz="1200" b="1">
                 <a:solidFill>
                   <a:srgbClr val="F5F7FA"/>
@@ -13664,6 +14179,7 @@
               </a:defRPr>
             </a:lvl6pPr>
             <a:lvl7pPr algn="l">
+              <a:buNone/>
               <a:defRPr sz="1200" b="1">
                 <a:solidFill>
                   <a:srgbClr val="F5F7FA"/>
@@ -13674,6 +14190,7 @@
               </a:defRPr>
             </a:lvl7pPr>
             <a:lvl8pPr algn="l">
+              <a:buNone/>
               <a:defRPr sz="1200" b="1">
                 <a:solidFill>
                   <a:srgbClr val="F5F7FA"/>
@@ -13684,6 +14201,7 @@
               </a:defRPr>
             </a:lvl8pPr>
             <a:lvl9pPr algn="l">
+              <a:buNone/>
               <a:defRPr sz="1200" b="1">
                 <a:solidFill>
                   <a:srgbClr val="F5F7FA"/>
@@ -13767,6 +14285,7 @@
               </a:defRPr>
             </a:defPPr>
             <a:lvl1pPr algn="l">
+              <a:buNone/>
               <a:defRPr sz="900" b="0">
                 <a:solidFill>
                   <a:srgbClr val="A8B5C8"/>
@@ -13777,6 +14296,7 @@
               </a:defRPr>
             </a:lvl1pPr>
             <a:lvl2pPr algn="l">
+              <a:buNone/>
               <a:defRPr sz="900" b="0">
                 <a:solidFill>
                   <a:srgbClr val="A8B5C8"/>
@@ -13787,6 +14307,7 @@
               </a:defRPr>
             </a:lvl2pPr>
             <a:lvl3pPr algn="l">
+              <a:buNone/>
               <a:defRPr sz="900" b="0">
                 <a:solidFill>
                   <a:srgbClr val="A8B5C8"/>
@@ -13797,6 +14318,7 @@
               </a:defRPr>
             </a:lvl3pPr>
             <a:lvl4pPr algn="l">
+              <a:buNone/>
               <a:defRPr sz="900" b="0">
                 <a:solidFill>
                   <a:srgbClr val="A8B5C8"/>
@@ -13807,6 +14329,7 @@
               </a:defRPr>
             </a:lvl4pPr>
             <a:lvl5pPr algn="l">
+              <a:buNone/>
               <a:defRPr sz="900" b="0">
                 <a:solidFill>
                   <a:srgbClr val="A8B5C8"/>
@@ -13817,6 +14340,7 @@
               </a:defRPr>
             </a:lvl5pPr>
             <a:lvl6pPr algn="l">
+              <a:buNone/>
               <a:defRPr sz="900" b="0">
                 <a:solidFill>
                   <a:srgbClr val="A8B5C8"/>
@@ -13827,6 +14351,7 @@
               </a:defRPr>
             </a:lvl6pPr>
             <a:lvl7pPr algn="l">
+              <a:buNone/>
               <a:defRPr sz="900" b="0">
                 <a:solidFill>
                   <a:srgbClr val="A8B5C8"/>
@@ -13837,6 +14362,7 @@
               </a:defRPr>
             </a:lvl7pPr>
             <a:lvl8pPr algn="l">
+              <a:buNone/>
               <a:defRPr sz="900" b="0">
                 <a:solidFill>
                   <a:srgbClr val="A8B5C8"/>
@@ -13847,6 +14373,7 @@
               </a:defRPr>
             </a:lvl8pPr>
             <a:lvl9pPr algn="l">
+              <a:buNone/>
               <a:defRPr sz="900" b="0">
                 <a:solidFill>
                   <a:srgbClr val="A8B5C8"/>
@@ -13963,6 +14490,7 @@
               </a:defRPr>
             </a:defPPr>
             <a:lvl1pPr algn="l">
+              <a:buNone/>
               <a:defRPr sz="3150" b="1">
                 <a:solidFill>
                   <a:srgbClr val="F2C879"/>
@@ -13973,6 +14501,7 @@
               </a:defRPr>
             </a:lvl1pPr>
             <a:lvl2pPr algn="l">
+              <a:buNone/>
               <a:defRPr sz="3150" b="1">
                 <a:solidFill>
                   <a:srgbClr val="F2C879"/>
@@ -13983,6 +14512,7 @@
               </a:defRPr>
             </a:lvl2pPr>
             <a:lvl3pPr algn="l">
+              <a:buNone/>
               <a:defRPr sz="3150" b="1">
                 <a:solidFill>
                   <a:srgbClr val="F2C879"/>
@@ -13993,6 +14523,7 @@
               </a:defRPr>
             </a:lvl3pPr>
             <a:lvl4pPr algn="l">
+              <a:buNone/>
               <a:defRPr sz="3150" b="1">
                 <a:solidFill>
                   <a:srgbClr val="F2C879"/>
@@ -14003,6 +14534,7 @@
               </a:defRPr>
             </a:lvl4pPr>
             <a:lvl5pPr algn="l">
+              <a:buNone/>
               <a:defRPr sz="3150" b="1">
                 <a:solidFill>
                   <a:srgbClr val="F2C879"/>
@@ -14013,6 +14545,7 @@
               </a:defRPr>
             </a:lvl5pPr>
             <a:lvl6pPr algn="l">
+              <a:buNone/>
               <a:defRPr sz="3150" b="1">
                 <a:solidFill>
                   <a:srgbClr val="F2C879"/>
@@ -14023,6 +14556,7 @@
               </a:defRPr>
             </a:lvl6pPr>
             <a:lvl7pPr algn="l">
+              <a:buNone/>
               <a:defRPr sz="3150" b="1">
                 <a:solidFill>
                   <a:srgbClr val="F2C879"/>
@@ -14033,6 +14567,7 @@
               </a:defRPr>
             </a:lvl7pPr>
             <a:lvl8pPr algn="l">
+              <a:buNone/>
               <a:defRPr sz="3150" b="1">
                 <a:solidFill>
                   <a:srgbClr val="F2C879"/>
@@ -14043,6 +14578,7 @@
               </a:defRPr>
             </a:lvl8pPr>
             <a:lvl9pPr algn="l">
+              <a:buNone/>
               <a:defRPr sz="3150" b="1">
                 <a:solidFill>
                   <a:srgbClr val="F2C879"/>
@@ -14126,6 +14662,7 @@
               </a:defRPr>
             </a:defPPr>
             <a:lvl1pPr algn="l">
+              <a:buNone/>
               <a:defRPr sz="1200" b="1">
                 <a:solidFill>
                   <a:srgbClr val="F5F7FA"/>
@@ -14136,6 +14673,7 @@
               </a:defRPr>
             </a:lvl1pPr>
             <a:lvl2pPr algn="l">
+              <a:buNone/>
               <a:defRPr sz="1200" b="1">
                 <a:solidFill>
                   <a:srgbClr val="F5F7FA"/>
@@ -14146,6 +14684,7 @@
               </a:defRPr>
             </a:lvl2pPr>
             <a:lvl3pPr algn="l">
+              <a:buNone/>
               <a:defRPr sz="1200" b="1">
                 <a:solidFill>
                   <a:srgbClr val="F5F7FA"/>
@@ -14156,6 +14695,7 @@
               </a:defRPr>
             </a:lvl3pPr>
             <a:lvl4pPr algn="l">
+              <a:buNone/>
               <a:defRPr sz="1200" b="1">
                 <a:solidFill>
                   <a:srgbClr val="F5F7FA"/>
@@ -14166,6 +14706,7 @@
               </a:defRPr>
             </a:lvl4pPr>
             <a:lvl5pPr algn="l">
+              <a:buNone/>
               <a:defRPr sz="1200" b="1">
                 <a:solidFill>
                   <a:srgbClr val="F5F7FA"/>
@@ -14176,6 +14717,7 @@
               </a:defRPr>
             </a:lvl5pPr>
             <a:lvl6pPr algn="l">
+              <a:buNone/>
               <a:defRPr sz="1200" b="1">
                 <a:solidFill>
                   <a:srgbClr val="F5F7FA"/>
@@ -14186,6 +14728,7 @@
               </a:defRPr>
             </a:lvl6pPr>
             <a:lvl7pPr algn="l">
+              <a:buNone/>
               <a:defRPr sz="1200" b="1">
                 <a:solidFill>
                   <a:srgbClr val="F5F7FA"/>
@@ -14196,6 +14739,7 @@
               </a:defRPr>
             </a:lvl7pPr>
             <a:lvl8pPr algn="l">
+              <a:buNone/>
               <a:defRPr sz="1200" b="1">
                 <a:solidFill>
                   <a:srgbClr val="F5F7FA"/>
@@ -14206,6 +14750,7 @@
               </a:defRPr>
             </a:lvl8pPr>
             <a:lvl9pPr algn="l">
+              <a:buNone/>
               <a:defRPr sz="1200" b="1">
                 <a:solidFill>
                   <a:srgbClr val="F5F7FA"/>
@@ -14289,6 +14834,7 @@
               </a:defRPr>
             </a:defPPr>
             <a:lvl1pPr algn="l">
+              <a:buNone/>
               <a:defRPr sz="900" b="0">
                 <a:solidFill>
                   <a:srgbClr val="A8B5C8"/>
@@ -14299,6 +14845,7 @@
               </a:defRPr>
             </a:lvl1pPr>
             <a:lvl2pPr algn="l">
+              <a:buNone/>
               <a:defRPr sz="900" b="0">
                 <a:solidFill>
                   <a:srgbClr val="A8B5C8"/>
@@ -14309,6 +14856,7 @@
               </a:defRPr>
             </a:lvl2pPr>
             <a:lvl3pPr algn="l">
+              <a:buNone/>
               <a:defRPr sz="900" b="0">
                 <a:solidFill>
                   <a:srgbClr val="A8B5C8"/>
@@ -14319,6 +14867,7 @@
               </a:defRPr>
             </a:lvl3pPr>
             <a:lvl4pPr algn="l">
+              <a:buNone/>
               <a:defRPr sz="900" b="0">
                 <a:solidFill>
                   <a:srgbClr val="A8B5C8"/>
@@ -14329,6 +14878,7 @@
               </a:defRPr>
             </a:lvl4pPr>
             <a:lvl5pPr algn="l">
+              <a:buNone/>
               <a:defRPr sz="900" b="0">
                 <a:solidFill>
                   <a:srgbClr val="A8B5C8"/>
@@ -14339,6 +14889,7 @@
               </a:defRPr>
             </a:lvl5pPr>
             <a:lvl6pPr algn="l">
+              <a:buNone/>
               <a:defRPr sz="900" b="0">
                 <a:solidFill>
                   <a:srgbClr val="A8B5C8"/>
@@ -14349,6 +14900,7 @@
               </a:defRPr>
             </a:lvl6pPr>
             <a:lvl7pPr algn="l">
+              <a:buNone/>
               <a:defRPr sz="900" b="0">
                 <a:solidFill>
                   <a:srgbClr val="A8B5C8"/>
@@ -14359,6 +14911,7 @@
               </a:defRPr>
             </a:lvl7pPr>
             <a:lvl8pPr algn="l">
+              <a:buNone/>
               <a:defRPr sz="900" b="0">
                 <a:solidFill>
                   <a:srgbClr val="A8B5C8"/>
@@ -14369,6 +14922,7 @@
               </a:defRPr>
             </a:lvl8pPr>
             <a:lvl9pPr algn="l">
+              <a:buNone/>
               <a:defRPr sz="900" b="0">
                 <a:solidFill>
                   <a:srgbClr val="A8B5C8"/>
@@ -14485,6 +15039,7 @@
               </a:defRPr>
             </a:defPPr>
             <a:lvl1pPr algn="l">
+              <a:buNone/>
               <a:defRPr sz="3150" b="1">
                 <a:solidFill>
                   <a:srgbClr val="F5F7FA"/>
@@ -14495,6 +15050,7 @@
               </a:defRPr>
             </a:lvl1pPr>
             <a:lvl2pPr algn="l">
+              <a:buNone/>
               <a:defRPr sz="3150" b="1">
                 <a:solidFill>
                   <a:srgbClr val="F5F7FA"/>
@@ -14505,6 +15061,7 @@
               </a:defRPr>
             </a:lvl2pPr>
             <a:lvl3pPr algn="l">
+              <a:buNone/>
               <a:defRPr sz="3150" b="1">
                 <a:solidFill>
                   <a:srgbClr val="F5F7FA"/>
@@ -14515,6 +15072,7 @@
               </a:defRPr>
             </a:lvl3pPr>
             <a:lvl4pPr algn="l">
+              <a:buNone/>
               <a:defRPr sz="3150" b="1">
                 <a:solidFill>
                   <a:srgbClr val="F5F7FA"/>
@@ -14525,6 +15083,7 @@
               </a:defRPr>
             </a:lvl4pPr>
             <a:lvl5pPr algn="l">
+              <a:buNone/>
               <a:defRPr sz="3150" b="1">
                 <a:solidFill>
                   <a:srgbClr val="F5F7FA"/>
@@ -14535,6 +15094,7 @@
               </a:defRPr>
             </a:lvl5pPr>
             <a:lvl6pPr algn="l">
+              <a:buNone/>
               <a:defRPr sz="3150" b="1">
                 <a:solidFill>
                   <a:srgbClr val="F5F7FA"/>
@@ -14545,6 +15105,7 @@
               </a:defRPr>
             </a:lvl6pPr>
             <a:lvl7pPr algn="l">
+              <a:buNone/>
               <a:defRPr sz="3150" b="1">
                 <a:solidFill>
                   <a:srgbClr val="F5F7FA"/>
@@ -14555,6 +15116,7 @@
               </a:defRPr>
             </a:lvl7pPr>
             <a:lvl8pPr algn="l">
+              <a:buNone/>
               <a:defRPr sz="3150" b="1">
                 <a:solidFill>
                   <a:srgbClr val="F5F7FA"/>
@@ -14565,6 +15127,7 @@
               </a:defRPr>
             </a:lvl8pPr>
             <a:lvl9pPr algn="l">
+              <a:buNone/>
               <a:defRPr sz="3150" b="1">
                 <a:solidFill>
                   <a:srgbClr val="F5F7FA"/>
@@ -14648,6 +15211,7 @@
               </a:defRPr>
             </a:defPPr>
             <a:lvl1pPr algn="l">
+              <a:buNone/>
               <a:defRPr sz="1200" b="1">
                 <a:solidFill>
                   <a:srgbClr val="F5F7FA"/>
@@ -14658,6 +15222,7 @@
               </a:defRPr>
             </a:lvl1pPr>
             <a:lvl2pPr algn="l">
+              <a:buNone/>
               <a:defRPr sz="1200" b="1">
                 <a:solidFill>
                   <a:srgbClr val="F5F7FA"/>
@@ -14668,6 +15233,7 @@
               </a:defRPr>
             </a:lvl2pPr>
             <a:lvl3pPr algn="l">
+              <a:buNone/>
               <a:defRPr sz="1200" b="1">
                 <a:solidFill>
                   <a:srgbClr val="F5F7FA"/>
@@ -14678,6 +15244,7 @@
               </a:defRPr>
             </a:lvl3pPr>
             <a:lvl4pPr algn="l">
+              <a:buNone/>
               <a:defRPr sz="1200" b="1">
                 <a:solidFill>
                   <a:srgbClr val="F5F7FA"/>
@@ -14688,6 +15255,7 @@
               </a:defRPr>
             </a:lvl4pPr>
             <a:lvl5pPr algn="l">
+              <a:buNone/>
               <a:defRPr sz="1200" b="1">
                 <a:solidFill>
                   <a:srgbClr val="F5F7FA"/>
@@ -14698,6 +15266,7 @@
               </a:defRPr>
             </a:lvl5pPr>
             <a:lvl6pPr algn="l">
+              <a:buNone/>
               <a:defRPr sz="1200" b="1">
                 <a:solidFill>
                   <a:srgbClr val="F5F7FA"/>
@@ -14708,6 +15277,7 @@
               </a:defRPr>
             </a:lvl6pPr>
             <a:lvl7pPr algn="l">
+              <a:buNone/>
               <a:defRPr sz="1200" b="1">
                 <a:solidFill>
                   <a:srgbClr val="F5F7FA"/>
@@ -14718,6 +15288,7 @@
               </a:defRPr>
             </a:lvl7pPr>
             <a:lvl8pPr algn="l">
+              <a:buNone/>
               <a:defRPr sz="1200" b="1">
                 <a:solidFill>
                   <a:srgbClr val="F5F7FA"/>
@@ -14728,6 +15299,7 @@
               </a:defRPr>
             </a:lvl8pPr>
             <a:lvl9pPr algn="l">
+              <a:buNone/>
               <a:defRPr sz="1200" b="1">
                 <a:solidFill>
                   <a:srgbClr val="F5F7FA"/>
@@ -14811,6 +15383,7 @@
               </a:defRPr>
             </a:defPPr>
             <a:lvl1pPr algn="l">
+              <a:buNone/>
               <a:defRPr sz="900" b="0">
                 <a:solidFill>
                   <a:srgbClr val="A8B5C8"/>
@@ -14821,6 +15394,7 @@
               </a:defRPr>
             </a:lvl1pPr>
             <a:lvl2pPr algn="l">
+              <a:buNone/>
               <a:defRPr sz="900" b="0">
                 <a:solidFill>
                   <a:srgbClr val="A8B5C8"/>
@@ -14831,6 +15405,7 @@
               </a:defRPr>
             </a:lvl2pPr>
             <a:lvl3pPr algn="l">
+              <a:buNone/>
               <a:defRPr sz="900" b="0">
                 <a:solidFill>
                   <a:srgbClr val="A8B5C8"/>
@@ -14841,6 +15416,7 @@
               </a:defRPr>
             </a:lvl3pPr>
             <a:lvl4pPr algn="l">
+              <a:buNone/>
               <a:defRPr sz="900" b="0">
                 <a:solidFill>
                   <a:srgbClr val="A8B5C8"/>
@@ -14851,6 +15427,7 @@
               </a:defRPr>
             </a:lvl4pPr>
             <a:lvl5pPr algn="l">
+              <a:buNone/>
               <a:defRPr sz="900" b="0">
                 <a:solidFill>
                   <a:srgbClr val="A8B5C8"/>
@@ -14861,6 +15438,7 @@
               </a:defRPr>
             </a:lvl5pPr>
             <a:lvl6pPr algn="l">
+              <a:buNone/>
               <a:defRPr sz="900" b="0">
                 <a:solidFill>
                   <a:srgbClr val="A8B5C8"/>
@@ -14871,6 +15449,7 @@
               </a:defRPr>
             </a:lvl6pPr>
             <a:lvl7pPr algn="l">
+              <a:buNone/>
               <a:defRPr sz="900" b="0">
                 <a:solidFill>
                   <a:srgbClr val="A8B5C8"/>
@@ -14881,6 +15460,7 @@
               </a:defRPr>
             </a:lvl7pPr>
             <a:lvl8pPr algn="l">
+              <a:buNone/>
               <a:defRPr sz="900" b="0">
                 <a:solidFill>
                   <a:srgbClr val="A8B5C8"/>
@@ -14891,6 +15471,7 @@
               </a:defRPr>
             </a:lvl8pPr>
             <a:lvl9pPr algn="l">
+              <a:buNone/>
               <a:defRPr sz="900" b="0">
                 <a:solidFill>
                   <a:srgbClr val="A8B5C8"/>
@@ -14974,6 +15555,7 @@
               </a:defRPr>
             </a:defPPr>
             <a:lvl1pPr algn="l">
+              <a:buNone/>
               <a:defRPr sz="975" b="1">
                 <a:solidFill>
                   <a:srgbClr val="63E6BE"/>
@@ -14984,6 +15566,7 @@
               </a:defRPr>
             </a:lvl1pPr>
             <a:lvl2pPr algn="l">
+              <a:buNone/>
               <a:defRPr sz="975" b="1">
                 <a:solidFill>
                   <a:srgbClr val="63E6BE"/>
@@ -14994,6 +15577,7 @@
               </a:defRPr>
             </a:lvl2pPr>
             <a:lvl3pPr algn="l">
+              <a:buNone/>
               <a:defRPr sz="975" b="1">
                 <a:solidFill>
                   <a:srgbClr val="63E6BE"/>
@@ -15004,6 +15588,7 @@
               </a:defRPr>
             </a:lvl3pPr>
             <a:lvl4pPr algn="l">
+              <a:buNone/>
               <a:defRPr sz="975" b="1">
                 <a:solidFill>
                   <a:srgbClr val="63E6BE"/>
@@ -15014,6 +15599,7 @@
               </a:defRPr>
             </a:lvl4pPr>
             <a:lvl5pPr algn="l">
+              <a:buNone/>
               <a:defRPr sz="975" b="1">
                 <a:solidFill>
                   <a:srgbClr val="63E6BE"/>
@@ -15024,6 +15610,7 @@
               </a:defRPr>
             </a:lvl5pPr>
             <a:lvl6pPr algn="l">
+              <a:buNone/>
               <a:defRPr sz="975" b="1">
                 <a:solidFill>
                   <a:srgbClr val="63E6BE"/>
@@ -15034,6 +15621,7 @@
               </a:defRPr>
             </a:lvl6pPr>
             <a:lvl7pPr algn="l">
+              <a:buNone/>
               <a:defRPr sz="975" b="1">
                 <a:solidFill>
                   <a:srgbClr val="63E6BE"/>
@@ -15044,6 +15632,7 @@
               </a:defRPr>
             </a:lvl7pPr>
             <a:lvl8pPr algn="l">
+              <a:buNone/>
               <a:defRPr sz="975" b="1">
                 <a:solidFill>
                   <a:srgbClr val="63E6BE"/>
@@ -15054,6 +15643,7 @@
               </a:defRPr>
             </a:lvl8pPr>
             <a:lvl9pPr algn="l">
+              <a:buNone/>
               <a:defRPr sz="975" b="1">
                 <a:solidFill>
                   <a:srgbClr val="63E6BE"/>
@@ -15137,6 +15727,7 @@
               </a:defRPr>
             </a:defPPr>
             <a:lvl1pPr algn="l">
+              <a:buNone/>
               <a:defRPr sz="1875" b="1">
                 <a:solidFill>
                   <a:srgbClr val="F5F7FA"/>
@@ -15147,6 +15738,7 @@
               </a:defRPr>
             </a:lvl1pPr>
             <a:lvl2pPr algn="l">
+              <a:buNone/>
               <a:defRPr sz="1875" b="1">
                 <a:solidFill>
                   <a:srgbClr val="F5F7FA"/>
@@ -15157,6 +15749,7 @@
               </a:defRPr>
             </a:lvl2pPr>
             <a:lvl3pPr algn="l">
+              <a:buNone/>
               <a:defRPr sz="1875" b="1">
                 <a:solidFill>
                   <a:srgbClr val="F5F7FA"/>
@@ -15167,6 +15760,7 @@
               </a:defRPr>
             </a:lvl3pPr>
             <a:lvl4pPr algn="l">
+              <a:buNone/>
               <a:defRPr sz="1875" b="1">
                 <a:solidFill>
                   <a:srgbClr val="F5F7FA"/>
@@ -15177,6 +15771,7 @@
               </a:defRPr>
             </a:lvl4pPr>
             <a:lvl5pPr algn="l">
+              <a:buNone/>
               <a:defRPr sz="1875" b="1">
                 <a:solidFill>
                   <a:srgbClr val="F5F7FA"/>
@@ -15187,6 +15782,7 @@
               </a:defRPr>
             </a:lvl5pPr>
             <a:lvl6pPr algn="l">
+              <a:buNone/>
               <a:defRPr sz="1875" b="1">
                 <a:solidFill>
                   <a:srgbClr val="F5F7FA"/>
@@ -15197,6 +15793,7 @@
               </a:defRPr>
             </a:lvl6pPr>
             <a:lvl7pPr algn="l">
+              <a:buNone/>
               <a:defRPr sz="1875" b="1">
                 <a:solidFill>
                   <a:srgbClr val="F5F7FA"/>
@@ -15207,6 +15804,7 @@
               </a:defRPr>
             </a:lvl7pPr>
             <a:lvl8pPr algn="l">
+              <a:buNone/>
               <a:defRPr sz="1875" b="1">
                 <a:solidFill>
                   <a:srgbClr val="F5F7FA"/>
@@ -15217,6 +15815,7 @@
               </a:defRPr>
             </a:lvl8pPr>
             <a:lvl9pPr algn="l">
+              <a:buNone/>
               <a:defRPr sz="1875" b="1">
                 <a:solidFill>
                   <a:srgbClr val="F5F7FA"/>
@@ -15300,6 +15899,7 @@
               </a:defRPr>
             </a:defPPr>
             <a:lvl1pPr algn="l">
+              <a:buNone/>
               <a:defRPr sz="1500" b="1">
                 <a:solidFill>
                   <a:srgbClr val="F5F7FA"/>
@@ -15310,6 +15910,7 @@
               </a:defRPr>
             </a:lvl1pPr>
             <a:lvl2pPr algn="l">
+              <a:buNone/>
               <a:defRPr sz="1500" b="1">
                 <a:solidFill>
                   <a:srgbClr val="F5F7FA"/>
@@ -15320,6 +15921,7 @@
               </a:defRPr>
             </a:lvl2pPr>
             <a:lvl3pPr algn="l">
+              <a:buNone/>
               <a:defRPr sz="1500" b="1">
                 <a:solidFill>
                   <a:srgbClr val="F5F7FA"/>
@@ -15330,6 +15932,7 @@
               </a:defRPr>
             </a:lvl3pPr>
             <a:lvl4pPr algn="l">
+              <a:buNone/>
               <a:defRPr sz="1500" b="1">
                 <a:solidFill>
                   <a:srgbClr val="F5F7FA"/>
@@ -15340,6 +15943,7 @@
               </a:defRPr>
             </a:lvl4pPr>
             <a:lvl5pPr algn="l">
+              <a:buNone/>
               <a:defRPr sz="1500" b="1">
                 <a:solidFill>
                   <a:srgbClr val="F5F7FA"/>
@@ -15350,6 +15954,7 @@
               </a:defRPr>
             </a:lvl5pPr>
             <a:lvl6pPr algn="l">
+              <a:buNone/>
               <a:defRPr sz="1500" b="1">
                 <a:solidFill>
                   <a:srgbClr val="F5F7FA"/>
@@ -15360,6 +15965,7 @@
               </a:defRPr>
             </a:lvl6pPr>
             <a:lvl7pPr algn="l">
+              <a:buNone/>
               <a:defRPr sz="1500" b="1">
                 <a:solidFill>
                   <a:srgbClr val="F5F7FA"/>
@@ -15370,6 +15976,7 @@
               </a:defRPr>
             </a:lvl7pPr>
             <a:lvl8pPr algn="l">
+              <a:buNone/>
               <a:defRPr sz="1500" b="1">
                 <a:solidFill>
                   <a:srgbClr val="F5F7FA"/>
@@ -15380,6 +15987,7 @@
               </a:defRPr>
             </a:lvl8pPr>
             <a:lvl9pPr algn="l">
+              <a:buNone/>
               <a:defRPr sz="1500" b="1">
                 <a:solidFill>
                   <a:srgbClr val="F5F7FA"/>
@@ -15463,6 +16071,7 @@
               </a:defRPr>
             </a:defPPr>
             <a:lvl1pPr algn="l">
+              <a:buNone/>
               <a:defRPr sz="1500" b="1">
                 <a:solidFill>
                   <a:srgbClr val="F5F7FA"/>
@@ -15473,6 +16082,7 @@
               </a:defRPr>
             </a:lvl1pPr>
             <a:lvl2pPr algn="l">
+              <a:buNone/>
               <a:defRPr sz="1500" b="1">
                 <a:solidFill>
                   <a:srgbClr val="F5F7FA"/>
@@ -15483,6 +16093,7 @@
               </a:defRPr>
             </a:lvl2pPr>
             <a:lvl3pPr algn="l">
+              <a:buNone/>
               <a:defRPr sz="1500" b="1">
                 <a:solidFill>
                   <a:srgbClr val="F5F7FA"/>
@@ -15493,6 +16104,7 @@
               </a:defRPr>
             </a:lvl3pPr>
             <a:lvl4pPr algn="l">
+              <a:buNone/>
               <a:defRPr sz="1500" b="1">
                 <a:solidFill>
                   <a:srgbClr val="F5F7FA"/>
@@ -15503,6 +16115,7 @@
               </a:defRPr>
             </a:lvl4pPr>
             <a:lvl5pPr algn="l">
+              <a:buNone/>
               <a:defRPr sz="1500" b="1">
                 <a:solidFill>
                   <a:srgbClr val="F5F7FA"/>
@@ -15513,6 +16126,7 @@
               </a:defRPr>
             </a:lvl5pPr>
             <a:lvl6pPr algn="l">
+              <a:buNone/>
               <a:defRPr sz="1500" b="1">
                 <a:solidFill>
                   <a:srgbClr val="F5F7FA"/>
@@ -15523,6 +16137,7 @@
               </a:defRPr>
             </a:lvl6pPr>
             <a:lvl7pPr algn="l">
+              <a:buNone/>
               <a:defRPr sz="1500" b="1">
                 <a:solidFill>
                   <a:srgbClr val="F5F7FA"/>
@@ -15533,6 +16148,7 @@
               </a:defRPr>
             </a:lvl7pPr>
             <a:lvl8pPr algn="l">
+              <a:buNone/>
               <a:defRPr sz="1500" b="1">
                 <a:solidFill>
                   <a:srgbClr val="F5F7FA"/>
@@ -15543,6 +16159,7 @@
               </a:defRPr>
             </a:lvl8pPr>
             <a:lvl9pPr algn="l">
+              <a:buNone/>
               <a:defRPr sz="1500" b="1">
                 <a:solidFill>
                   <a:srgbClr val="F5F7FA"/>
@@ -15659,6 +16276,7 @@
               </a:defRPr>
             </a:defPPr>
             <a:lvl1pPr algn="l">
+              <a:buNone/>
               <a:defRPr sz="975" b="1">
                 <a:solidFill>
                   <a:srgbClr val="63E6BE"/>
@@ -15669,6 +16287,7 @@
               </a:defRPr>
             </a:lvl1pPr>
             <a:lvl2pPr algn="l">
+              <a:buNone/>
               <a:defRPr sz="975" b="1">
                 <a:solidFill>
                   <a:srgbClr val="63E6BE"/>
@@ -15679,6 +16298,7 @@
               </a:defRPr>
             </a:lvl2pPr>
             <a:lvl3pPr algn="l">
+              <a:buNone/>
               <a:defRPr sz="975" b="1">
                 <a:solidFill>
                   <a:srgbClr val="63E6BE"/>
@@ -15689,6 +16309,7 @@
               </a:defRPr>
             </a:lvl3pPr>
             <a:lvl4pPr algn="l">
+              <a:buNone/>
               <a:defRPr sz="975" b="1">
                 <a:solidFill>
                   <a:srgbClr val="63E6BE"/>
@@ -15699,6 +16320,7 @@
               </a:defRPr>
             </a:lvl4pPr>
             <a:lvl5pPr algn="l">
+              <a:buNone/>
               <a:defRPr sz="975" b="1">
                 <a:solidFill>
                   <a:srgbClr val="63E6BE"/>
@@ -15709,6 +16331,7 @@
               </a:defRPr>
             </a:lvl5pPr>
             <a:lvl6pPr algn="l">
+              <a:buNone/>
               <a:defRPr sz="975" b="1">
                 <a:solidFill>
                   <a:srgbClr val="63E6BE"/>
@@ -15719,6 +16342,7 @@
               </a:defRPr>
             </a:lvl6pPr>
             <a:lvl7pPr algn="l">
+              <a:buNone/>
               <a:defRPr sz="975" b="1">
                 <a:solidFill>
                   <a:srgbClr val="63E6BE"/>
@@ -15729,6 +16353,7 @@
               </a:defRPr>
             </a:lvl7pPr>
             <a:lvl8pPr algn="l">
+              <a:buNone/>
               <a:defRPr sz="975" b="1">
                 <a:solidFill>
                   <a:srgbClr val="63E6BE"/>
@@ -15739,6 +16364,7 @@
               </a:defRPr>
             </a:lvl8pPr>
             <a:lvl9pPr algn="l">
+              <a:buNone/>
               <a:defRPr sz="975" b="1">
                 <a:solidFill>
                   <a:srgbClr val="63E6BE"/>
@@ -15822,6 +16448,7 @@
               </a:defRPr>
             </a:defPPr>
             <a:lvl1pPr algn="l">
+              <a:buNone/>
               <a:defRPr sz="975" b="0">
                 <a:solidFill>
                   <a:srgbClr val="A8B5C8"/>
@@ -15832,6 +16459,7 @@
               </a:defRPr>
             </a:lvl1pPr>
             <a:lvl2pPr algn="l">
+              <a:buNone/>
               <a:defRPr sz="975" b="0">
                 <a:solidFill>
                   <a:srgbClr val="A8B5C8"/>
@@ -15842,6 +16470,7 @@
               </a:defRPr>
             </a:lvl2pPr>
             <a:lvl3pPr algn="l">
+              <a:buNone/>
               <a:defRPr sz="975" b="0">
                 <a:solidFill>
                   <a:srgbClr val="A8B5C8"/>
@@ -15852,6 +16481,7 @@
               </a:defRPr>
             </a:lvl3pPr>
             <a:lvl4pPr algn="l">
+              <a:buNone/>
               <a:defRPr sz="975" b="0">
                 <a:solidFill>
                   <a:srgbClr val="A8B5C8"/>
@@ -15862,6 +16492,7 @@
               </a:defRPr>
             </a:lvl4pPr>
             <a:lvl5pPr algn="l">
+              <a:buNone/>
               <a:defRPr sz="975" b="0">
                 <a:solidFill>
                   <a:srgbClr val="A8B5C8"/>
@@ -15872,6 +16503,7 @@
               </a:defRPr>
             </a:lvl5pPr>
             <a:lvl6pPr algn="l">
+              <a:buNone/>
               <a:defRPr sz="975" b="0">
                 <a:solidFill>
                   <a:srgbClr val="A8B5C8"/>
@@ -15882,6 +16514,7 @@
               </a:defRPr>
             </a:lvl6pPr>
             <a:lvl7pPr algn="l">
+              <a:buNone/>
               <a:defRPr sz="975" b="0">
                 <a:solidFill>
                   <a:srgbClr val="A8B5C8"/>
@@ -15892,6 +16525,7 @@
               </a:defRPr>
             </a:lvl7pPr>
             <a:lvl8pPr algn="l">
+              <a:buNone/>
               <a:defRPr sz="975" b="0">
                 <a:solidFill>
                   <a:srgbClr val="A8B5C8"/>
@@ -15902,6 +16536,7 @@
               </a:defRPr>
             </a:lvl8pPr>
             <a:lvl9pPr algn="l">
+              <a:buNone/>
               <a:defRPr sz="975" b="0">
                 <a:solidFill>
                   <a:srgbClr val="A8B5C8"/>
@@ -15985,6 +16620,7 @@
               </a:defRPr>
             </a:defPPr>
             <a:lvl1pPr algn="r">
+              <a:buNone/>
               <a:defRPr sz="975" b="1">
                 <a:solidFill>
                   <a:srgbClr val="F5F7FA"/>
@@ -15995,6 +16631,7 @@
               </a:defRPr>
             </a:lvl1pPr>
             <a:lvl2pPr algn="r">
+              <a:buNone/>
               <a:defRPr sz="975" b="1">
                 <a:solidFill>
                   <a:srgbClr val="F5F7FA"/>
@@ -16005,6 +16642,7 @@
               </a:defRPr>
             </a:lvl2pPr>
             <a:lvl3pPr algn="r">
+              <a:buNone/>
               <a:defRPr sz="975" b="1">
                 <a:solidFill>
                   <a:srgbClr val="F5F7FA"/>
@@ -16015,6 +16653,7 @@
               </a:defRPr>
             </a:lvl3pPr>
             <a:lvl4pPr algn="r">
+              <a:buNone/>
               <a:defRPr sz="975" b="1">
                 <a:solidFill>
                   <a:srgbClr val="F5F7FA"/>
@@ -16025,6 +16664,7 @@
               </a:defRPr>
             </a:lvl4pPr>
             <a:lvl5pPr algn="r">
+              <a:buNone/>
               <a:defRPr sz="975" b="1">
                 <a:solidFill>
                   <a:srgbClr val="F5F7FA"/>
@@ -16035,6 +16675,7 @@
               </a:defRPr>
             </a:lvl5pPr>
             <a:lvl6pPr algn="r">
+              <a:buNone/>
               <a:defRPr sz="975" b="1">
                 <a:solidFill>
                   <a:srgbClr val="F5F7FA"/>
@@ -16045,6 +16686,7 @@
               </a:defRPr>
             </a:lvl6pPr>
             <a:lvl7pPr algn="r">
+              <a:buNone/>
               <a:defRPr sz="975" b="1">
                 <a:solidFill>
                   <a:srgbClr val="F5F7FA"/>
@@ -16055,6 +16697,7 @@
               </a:defRPr>
             </a:lvl7pPr>
             <a:lvl8pPr algn="r">
+              <a:buNone/>
               <a:defRPr sz="975" b="1">
                 <a:solidFill>
                   <a:srgbClr val="F5F7FA"/>
@@ -16065,6 +16708,7 @@
               </a:defRPr>
             </a:lvl8pPr>
             <a:lvl9pPr algn="r">
+              <a:buNone/>
               <a:defRPr sz="975" b="1">
                 <a:solidFill>
                   <a:srgbClr val="F5F7FA"/>
@@ -16148,6 +16792,7 @@
               </a:defRPr>
             </a:defPPr>
             <a:lvl1pPr algn="l">
+              <a:buNone/>
               <a:defRPr sz="975" b="0">
                 <a:solidFill>
                   <a:srgbClr val="A8B5C8"/>
@@ -16158,6 +16803,7 @@
               </a:defRPr>
             </a:lvl1pPr>
             <a:lvl2pPr algn="l">
+              <a:buNone/>
               <a:defRPr sz="975" b="0">
                 <a:solidFill>
                   <a:srgbClr val="A8B5C8"/>
@@ -16168,6 +16814,7 @@
               </a:defRPr>
             </a:lvl2pPr>
             <a:lvl3pPr algn="l">
+              <a:buNone/>
               <a:defRPr sz="975" b="0">
                 <a:solidFill>
                   <a:srgbClr val="A8B5C8"/>
@@ -16178,6 +16825,7 @@
               </a:defRPr>
             </a:lvl3pPr>
             <a:lvl4pPr algn="l">
+              <a:buNone/>
               <a:defRPr sz="975" b="0">
                 <a:solidFill>
                   <a:srgbClr val="A8B5C8"/>
@@ -16188,6 +16836,7 @@
               </a:defRPr>
             </a:lvl4pPr>
             <a:lvl5pPr algn="l">
+              <a:buNone/>
               <a:defRPr sz="975" b="0">
                 <a:solidFill>
                   <a:srgbClr val="A8B5C8"/>
@@ -16198,6 +16847,7 @@
               </a:defRPr>
             </a:lvl5pPr>
             <a:lvl6pPr algn="l">
+              <a:buNone/>
               <a:defRPr sz="975" b="0">
                 <a:solidFill>
                   <a:srgbClr val="A8B5C8"/>
@@ -16208,6 +16858,7 @@
               </a:defRPr>
             </a:lvl6pPr>
             <a:lvl7pPr algn="l">
+              <a:buNone/>
               <a:defRPr sz="975" b="0">
                 <a:solidFill>
                   <a:srgbClr val="A8B5C8"/>
@@ -16218,6 +16869,7 @@
               </a:defRPr>
             </a:lvl7pPr>
             <a:lvl8pPr algn="l">
+              <a:buNone/>
               <a:defRPr sz="975" b="0">
                 <a:solidFill>
                   <a:srgbClr val="A8B5C8"/>
@@ -16228,6 +16880,7 @@
               </a:defRPr>
             </a:lvl8pPr>
             <a:lvl9pPr algn="l">
+              <a:buNone/>
               <a:defRPr sz="975" b="0">
                 <a:solidFill>
                   <a:srgbClr val="A8B5C8"/>
@@ -16311,6 +16964,7 @@
               </a:defRPr>
             </a:defPPr>
             <a:lvl1pPr algn="r">
+              <a:buNone/>
               <a:defRPr sz="975" b="1">
                 <a:solidFill>
                   <a:srgbClr val="F5F7FA"/>
@@ -16321,6 +16975,7 @@
               </a:defRPr>
             </a:lvl1pPr>
             <a:lvl2pPr algn="r">
+              <a:buNone/>
               <a:defRPr sz="975" b="1">
                 <a:solidFill>
                   <a:srgbClr val="F5F7FA"/>
@@ -16331,6 +16986,7 @@
               </a:defRPr>
             </a:lvl2pPr>
             <a:lvl3pPr algn="r">
+              <a:buNone/>
               <a:defRPr sz="975" b="1">
                 <a:solidFill>
                   <a:srgbClr val="F5F7FA"/>
@@ -16341,6 +16997,7 @@
               </a:defRPr>
             </a:lvl3pPr>
             <a:lvl4pPr algn="r">
+              <a:buNone/>
               <a:defRPr sz="975" b="1">
                 <a:solidFill>
                   <a:srgbClr val="F5F7FA"/>
@@ -16351,6 +17008,7 @@
               </a:defRPr>
             </a:lvl4pPr>
             <a:lvl5pPr algn="r">
+              <a:buNone/>
               <a:defRPr sz="975" b="1">
                 <a:solidFill>
                   <a:srgbClr val="F5F7FA"/>
@@ -16361,6 +17019,7 @@
               </a:defRPr>
             </a:lvl5pPr>
             <a:lvl6pPr algn="r">
+              <a:buNone/>
               <a:defRPr sz="975" b="1">
                 <a:solidFill>
                   <a:srgbClr val="F5F7FA"/>
@@ -16371,6 +17030,7 @@
               </a:defRPr>
             </a:lvl6pPr>
             <a:lvl7pPr algn="r">
+              <a:buNone/>
               <a:defRPr sz="975" b="1">
                 <a:solidFill>
                   <a:srgbClr val="F5F7FA"/>
@@ -16381,6 +17041,7 @@
               </a:defRPr>
             </a:lvl7pPr>
             <a:lvl8pPr algn="r">
+              <a:buNone/>
               <a:defRPr sz="975" b="1">
                 <a:solidFill>
                   <a:srgbClr val="F5F7FA"/>
@@ -16391,6 +17052,7 @@
               </a:defRPr>
             </a:lvl8pPr>
             <a:lvl9pPr algn="r">
+              <a:buNone/>
               <a:defRPr sz="975" b="1">
                 <a:solidFill>
                   <a:srgbClr val="F5F7FA"/>
@@ -16474,6 +17136,7 @@
               </a:defRPr>
             </a:defPPr>
             <a:lvl1pPr algn="l">
+              <a:buNone/>
               <a:defRPr sz="975" b="0">
                 <a:solidFill>
                   <a:srgbClr val="A8B5C8"/>
@@ -16484,6 +17147,7 @@
               </a:defRPr>
             </a:lvl1pPr>
             <a:lvl2pPr algn="l">
+              <a:buNone/>
               <a:defRPr sz="975" b="0">
                 <a:solidFill>
                   <a:srgbClr val="A8B5C8"/>
@@ -16494,6 +17158,7 @@
               </a:defRPr>
             </a:lvl2pPr>
             <a:lvl3pPr algn="l">
+              <a:buNone/>
               <a:defRPr sz="975" b="0">
                 <a:solidFill>
                   <a:srgbClr val="A8B5C8"/>
@@ -16504,6 +17169,7 @@
               </a:defRPr>
             </a:lvl3pPr>
             <a:lvl4pPr algn="l">
+              <a:buNone/>
               <a:defRPr sz="975" b="0">
                 <a:solidFill>
                   <a:srgbClr val="A8B5C8"/>
@@ -16514,6 +17180,7 @@
               </a:defRPr>
             </a:lvl4pPr>
             <a:lvl5pPr algn="l">
+              <a:buNone/>
               <a:defRPr sz="975" b="0">
                 <a:solidFill>
                   <a:srgbClr val="A8B5C8"/>
@@ -16524,6 +17191,7 @@
               </a:defRPr>
             </a:lvl5pPr>
             <a:lvl6pPr algn="l">
+              <a:buNone/>
               <a:defRPr sz="975" b="0">
                 <a:solidFill>
                   <a:srgbClr val="A8B5C8"/>
@@ -16534,6 +17202,7 @@
               </a:defRPr>
             </a:lvl6pPr>
             <a:lvl7pPr algn="l">
+              <a:buNone/>
               <a:defRPr sz="975" b="0">
                 <a:solidFill>
                   <a:srgbClr val="A8B5C8"/>
@@ -16544,6 +17213,7 @@
               </a:defRPr>
             </a:lvl7pPr>
             <a:lvl8pPr algn="l">
+              <a:buNone/>
               <a:defRPr sz="975" b="0">
                 <a:solidFill>
                   <a:srgbClr val="A8B5C8"/>
@@ -16554,6 +17224,7 @@
               </a:defRPr>
             </a:lvl8pPr>
             <a:lvl9pPr algn="l">
+              <a:buNone/>
               <a:defRPr sz="975" b="0">
                 <a:solidFill>
                   <a:srgbClr val="A8B5C8"/>
@@ -16637,6 +17308,7 @@
               </a:defRPr>
             </a:defPPr>
             <a:lvl1pPr algn="r">
+              <a:buNone/>
               <a:defRPr sz="975" b="1">
                 <a:solidFill>
                   <a:srgbClr val="F5F7FA"/>
@@ -16647,6 +17319,7 @@
               </a:defRPr>
             </a:lvl1pPr>
             <a:lvl2pPr algn="r">
+              <a:buNone/>
               <a:defRPr sz="975" b="1">
                 <a:solidFill>
                   <a:srgbClr val="F5F7FA"/>
@@ -16657,6 +17330,7 @@
               </a:defRPr>
             </a:lvl2pPr>
             <a:lvl3pPr algn="r">
+              <a:buNone/>
               <a:defRPr sz="975" b="1">
                 <a:solidFill>
                   <a:srgbClr val="F5F7FA"/>
@@ -16667,6 +17341,7 @@
               </a:defRPr>
             </a:lvl3pPr>
             <a:lvl4pPr algn="r">
+              <a:buNone/>
               <a:defRPr sz="975" b="1">
                 <a:solidFill>
                   <a:srgbClr val="F5F7FA"/>
@@ -16677,6 +17352,7 @@
               </a:defRPr>
             </a:lvl4pPr>
             <a:lvl5pPr algn="r">
+              <a:buNone/>
               <a:defRPr sz="975" b="1">
                 <a:solidFill>
                   <a:srgbClr val="F5F7FA"/>
@@ -16687,6 +17363,7 @@
               </a:defRPr>
             </a:lvl5pPr>
             <a:lvl6pPr algn="r">
+              <a:buNone/>
               <a:defRPr sz="975" b="1">
                 <a:solidFill>
                   <a:srgbClr val="F5F7FA"/>
@@ -16697,6 +17374,7 @@
               </a:defRPr>
             </a:lvl6pPr>
             <a:lvl7pPr algn="r">
+              <a:buNone/>
               <a:defRPr sz="975" b="1">
                 <a:solidFill>
                   <a:srgbClr val="F5F7FA"/>
@@ -16707,6 +17385,7 @@
               </a:defRPr>
             </a:lvl7pPr>
             <a:lvl8pPr algn="r">
+              <a:buNone/>
               <a:defRPr sz="975" b="1">
                 <a:solidFill>
                   <a:srgbClr val="F5F7FA"/>
@@ -16717,6 +17396,7 @@
               </a:defRPr>
             </a:lvl8pPr>
             <a:lvl9pPr algn="r">
+              <a:buNone/>
               <a:defRPr sz="975" b="1">
                 <a:solidFill>
                   <a:srgbClr val="F5F7FA"/>
@@ -16800,6 +17480,7 @@
               </a:defRPr>
             </a:defPPr>
             <a:lvl1pPr algn="l">
+              <a:buNone/>
               <a:defRPr sz="975" b="0">
                 <a:solidFill>
                   <a:srgbClr val="A8B5C8"/>
@@ -16810,6 +17491,7 @@
               </a:defRPr>
             </a:lvl1pPr>
             <a:lvl2pPr algn="l">
+              <a:buNone/>
               <a:defRPr sz="975" b="0">
                 <a:solidFill>
                   <a:srgbClr val="A8B5C8"/>
@@ -16820,6 +17502,7 @@
               </a:defRPr>
             </a:lvl2pPr>
             <a:lvl3pPr algn="l">
+              <a:buNone/>
               <a:defRPr sz="975" b="0">
                 <a:solidFill>
                   <a:srgbClr val="A8B5C8"/>
@@ -16830,6 +17513,7 @@
               </a:defRPr>
             </a:lvl3pPr>
             <a:lvl4pPr algn="l">
+              <a:buNone/>
               <a:defRPr sz="975" b="0">
                 <a:solidFill>
                   <a:srgbClr val="A8B5C8"/>
@@ -16840,6 +17524,7 @@
               </a:defRPr>
             </a:lvl4pPr>
             <a:lvl5pPr algn="l">
+              <a:buNone/>
               <a:defRPr sz="975" b="0">
                 <a:solidFill>
                   <a:srgbClr val="A8B5C8"/>
@@ -16850,6 +17535,7 @@
               </a:defRPr>
             </a:lvl5pPr>
             <a:lvl6pPr algn="l">
+              <a:buNone/>
               <a:defRPr sz="975" b="0">
                 <a:solidFill>
                   <a:srgbClr val="A8B5C8"/>
@@ -16860,6 +17546,7 @@
               </a:defRPr>
             </a:lvl6pPr>
             <a:lvl7pPr algn="l">
+              <a:buNone/>
               <a:defRPr sz="975" b="0">
                 <a:solidFill>
                   <a:srgbClr val="A8B5C8"/>
@@ -16870,6 +17557,7 @@
               </a:defRPr>
             </a:lvl7pPr>
             <a:lvl8pPr algn="l">
+              <a:buNone/>
               <a:defRPr sz="975" b="0">
                 <a:solidFill>
                   <a:srgbClr val="A8B5C8"/>
@@ -16880,6 +17568,7 @@
               </a:defRPr>
             </a:lvl8pPr>
             <a:lvl9pPr algn="l">
+              <a:buNone/>
               <a:defRPr sz="975" b="0">
                 <a:solidFill>
                   <a:srgbClr val="A8B5C8"/>
@@ -16963,6 +17652,7 @@
               </a:defRPr>
             </a:defPPr>
             <a:lvl1pPr algn="r">
+              <a:buNone/>
               <a:defRPr sz="975" b="1">
                 <a:solidFill>
                   <a:srgbClr val="F5F7FA"/>
@@ -16973,6 +17663,7 @@
               </a:defRPr>
             </a:lvl1pPr>
             <a:lvl2pPr algn="r">
+              <a:buNone/>
               <a:defRPr sz="975" b="1">
                 <a:solidFill>
                   <a:srgbClr val="F5F7FA"/>
@@ -16983,6 +17674,7 @@
               </a:defRPr>
             </a:lvl2pPr>
             <a:lvl3pPr algn="r">
+              <a:buNone/>
               <a:defRPr sz="975" b="1">
                 <a:solidFill>
                   <a:srgbClr val="F5F7FA"/>
@@ -16993,6 +17685,7 @@
               </a:defRPr>
             </a:lvl3pPr>
             <a:lvl4pPr algn="r">
+              <a:buNone/>
               <a:defRPr sz="975" b="1">
                 <a:solidFill>
                   <a:srgbClr val="F5F7FA"/>
@@ -17003,6 +17696,7 @@
               </a:defRPr>
             </a:lvl4pPr>
             <a:lvl5pPr algn="r">
+              <a:buNone/>
               <a:defRPr sz="975" b="1">
                 <a:solidFill>
                   <a:srgbClr val="F5F7FA"/>
@@ -17013,6 +17707,7 @@
               </a:defRPr>
             </a:lvl5pPr>
             <a:lvl6pPr algn="r">
+              <a:buNone/>
               <a:defRPr sz="975" b="1">
                 <a:solidFill>
                   <a:srgbClr val="F5F7FA"/>
@@ -17023,6 +17718,7 @@
               </a:defRPr>
             </a:lvl6pPr>
             <a:lvl7pPr algn="r">
+              <a:buNone/>
               <a:defRPr sz="975" b="1">
                 <a:solidFill>
                   <a:srgbClr val="F5F7FA"/>
@@ -17033,6 +17729,7 @@
               </a:defRPr>
             </a:lvl7pPr>
             <a:lvl8pPr algn="r">
+              <a:buNone/>
               <a:defRPr sz="975" b="1">
                 <a:solidFill>
                   <a:srgbClr val="F5F7FA"/>
@@ -17043,6 +17740,7 @@
               </a:defRPr>
             </a:lvl8pPr>
             <a:lvl9pPr algn="r">
+              <a:buNone/>
               <a:defRPr sz="975" b="1">
                 <a:solidFill>
                   <a:srgbClr val="F5F7FA"/>
@@ -17126,6 +17824,7 @@
               </a:defRPr>
             </a:defPPr>
             <a:lvl1pPr algn="l">
+              <a:buNone/>
               <a:defRPr sz="975" b="0">
                 <a:solidFill>
                   <a:srgbClr val="A8B5C8"/>
@@ -17136,6 +17835,7 @@
               </a:defRPr>
             </a:lvl1pPr>
             <a:lvl2pPr algn="l">
+              <a:buNone/>
               <a:defRPr sz="975" b="0">
                 <a:solidFill>
                   <a:srgbClr val="A8B5C8"/>
@@ -17146,6 +17846,7 @@
               </a:defRPr>
             </a:lvl2pPr>
             <a:lvl3pPr algn="l">
+              <a:buNone/>
               <a:defRPr sz="975" b="0">
                 <a:solidFill>
                   <a:srgbClr val="A8B5C8"/>
@@ -17156,6 +17857,7 @@
               </a:defRPr>
             </a:lvl3pPr>
             <a:lvl4pPr algn="l">
+              <a:buNone/>
               <a:defRPr sz="975" b="0">
                 <a:solidFill>
                   <a:srgbClr val="A8B5C8"/>
@@ -17166,6 +17868,7 @@
               </a:defRPr>
             </a:lvl4pPr>
             <a:lvl5pPr algn="l">
+              <a:buNone/>
               <a:defRPr sz="975" b="0">
                 <a:solidFill>
                   <a:srgbClr val="A8B5C8"/>
@@ -17176,6 +17879,7 @@
               </a:defRPr>
             </a:lvl5pPr>
             <a:lvl6pPr algn="l">
+              <a:buNone/>
               <a:defRPr sz="975" b="0">
                 <a:solidFill>
                   <a:srgbClr val="A8B5C8"/>
@@ -17186,6 +17890,7 @@
               </a:defRPr>
             </a:lvl6pPr>
             <a:lvl7pPr algn="l">
+              <a:buNone/>
               <a:defRPr sz="975" b="0">
                 <a:solidFill>
                   <a:srgbClr val="A8B5C8"/>
@@ -17196,6 +17901,7 @@
               </a:defRPr>
             </a:lvl7pPr>
             <a:lvl8pPr algn="l">
+              <a:buNone/>
               <a:defRPr sz="975" b="0">
                 <a:solidFill>
                   <a:srgbClr val="A8B5C8"/>
@@ -17206,6 +17912,7 @@
               </a:defRPr>
             </a:lvl8pPr>
             <a:lvl9pPr algn="l">
+              <a:buNone/>
               <a:defRPr sz="975" b="0">
                 <a:solidFill>
                   <a:srgbClr val="A8B5C8"/>
@@ -17289,6 +17996,7 @@
               </a:defRPr>
             </a:defPPr>
             <a:lvl1pPr algn="r">
+              <a:buNone/>
               <a:defRPr sz="975" b="1">
                 <a:solidFill>
                   <a:srgbClr val="F5F7FA"/>
@@ -17299,6 +18007,7 @@
               </a:defRPr>
             </a:lvl1pPr>
             <a:lvl2pPr algn="r">
+              <a:buNone/>
               <a:defRPr sz="975" b="1">
                 <a:solidFill>
                   <a:srgbClr val="F5F7FA"/>
@@ -17309,6 +18018,7 @@
               </a:defRPr>
             </a:lvl2pPr>
             <a:lvl3pPr algn="r">
+              <a:buNone/>
               <a:defRPr sz="975" b="1">
                 <a:solidFill>
                   <a:srgbClr val="F5F7FA"/>
@@ -17319,6 +18029,7 @@
               </a:defRPr>
             </a:lvl3pPr>
             <a:lvl4pPr algn="r">
+              <a:buNone/>
               <a:defRPr sz="975" b="1">
                 <a:solidFill>
                   <a:srgbClr val="F5F7FA"/>
@@ -17329,6 +18040,7 @@
               </a:defRPr>
             </a:lvl4pPr>
             <a:lvl5pPr algn="r">
+              <a:buNone/>
               <a:defRPr sz="975" b="1">
                 <a:solidFill>
                   <a:srgbClr val="F5F7FA"/>
@@ -17339,6 +18051,7 @@
               </a:defRPr>
             </a:lvl5pPr>
             <a:lvl6pPr algn="r">
+              <a:buNone/>
               <a:defRPr sz="975" b="1">
                 <a:solidFill>
                   <a:srgbClr val="F5F7FA"/>
@@ -17349,6 +18062,7 @@
               </a:defRPr>
             </a:lvl6pPr>
             <a:lvl7pPr algn="r">
+              <a:buNone/>
               <a:defRPr sz="975" b="1">
                 <a:solidFill>
                   <a:srgbClr val="F5F7FA"/>
@@ -17359,6 +18073,7 @@
               </a:defRPr>
             </a:lvl7pPr>
             <a:lvl8pPr algn="r">
+              <a:buNone/>
               <a:defRPr sz="975" b="1">
                 <a:solidFill>
                   <a:srgbClr val="F5F7FA"/>
@@ -17369,6 +18084,7 @@
               </a:defRPr>
             </a:lvl8pPr>
             <a:lvl9pPr algn="r">
+              <a:buNone/>
               <a:defRPr sz="975" b="1">
                 <a:solidFill>
                   <a:srgbClr val="F5F7FA"/>
@@ -17452,6 +18168,7 @@
               </a:defRPr>
             </a:defPPr>
             <a:lvl1pPr algn="l">
+              <a:buNone/>
               <a:defRPr sz="900" b="0">
                 <a:solidFill>
                   <a:srgbClr val="A8B5C8"/>
@@ -17462,6 +18179,7 @@
               </a:defRPr>
             </a:lvl1pPr>
             <a:lvl2pPr algn="l">
+              <a:buNone/>
               <a:defRPr sz="900" b="0">
                 <a:solidFill>
                   <a:srgbClr val="A8B5C8"/>
@@ -17472,6 +18190,7 @@
               </a:defRPr>
             </a:lvl2pPr>
             <a:lvl3pPr algn="l">
+              <a:buNone/>
               <a:defRPr sz="900" b="0">
                 <a:solidFill>
                   <a:srgbClr val="A8B5C8"/>
@@ -17482,6 +18201,7 @@
               </a:defRPr>
             </a:lvl3pPr>
             <a:lvl4pPr algn="l">
+              <a:buNone/>
               <a:defRPr sz="900" b="0">
                 <a:solidFill>
                   <a:srgbClr val="A8B5C8"/>
@@ -17492,6 +18212,7 @@
               </a:defRPr>
             </a:lvl4pPr>
             <a:lvl5pPr algn="l">
+              <a:buNone/>
               <a:defRPr sz="900" b="0">
                 <a:solidFill>
                   <a:srgbClr val="A8B5C8"/>
@@ -17502,6 +18223,7 @@
               </a:defRPr>
             </a:lvl5pPr>
             <a:lvl6pPr algn="l">
+              <a:buNone/>
               <a:defRPr sz="900" b="0">
                 <a:solidFill>
                   <a:srgbClr val="A8B5C8"/>
@@ -17512,6 +18234,7 @@
               </a:defRPr>
             </a:lvl6pPr>
             <a:lvl7pPr algn="l">
+              <a:buNone/>
               <a:defRPr sz="900" b="0">
                 <a:solidFill>
                   <a:srgbClr val="A8B5C8"/>
@@ -17522,6 +18245,7 @@
               </a:defRPr>
             </a:lvl7pPr>
             <a:lvl8pPr algn="l">
+              <a:buNone/>
               <a:defRPr sz="900" b="0">
                 <a:solidFill>
                   <a:srgbClr val="A8B5C8"/>
@@ -17532,6 +18256,7 @@
               </a:defRPr>
             </a:lvl8pPr>
             <a:lvl9pPr algn="l">
+              <a:buNone/>
               <a:defRPr sz="900" b="0">
                 <a:solidFill>
                   <a:srgbClr val="A8B5C8"/>
@@ -17644,6 +18369,7 @@
               </a:defRPr>
             </a:defPPr>
             <a:lvl1pPr algn="l">
+              <a:buNone/>
               <a:defRPr sz="1050" b="1">
                 <a:solidFill>
                   <a:srgbClr val="63E6BE"/>
@@ -17654,6 +18380,7 @@
               </a:defRPr>
             </a:lvl1pPr>
             <a:lvl2pPr algn="l">
+              <a:buNone/>
               <a:defRPr sz="1050" b="1">
                 <a:solidFill>
                   <a:srgbClr val="63E6BE"/>
@@ -17664,6 +18391,7 @@
               </a:defRPr>
             </a:lvl2pPr>
             <a:lvl3pPr algn="l">
+              <a:buNone/>
               <a:defRPr sz="1050" b="1">
                 <a:solidFill>
                   <a:srgbClr val="63E6BE"/>
@@ -17674,6 +18402,7 @@
               </a:defRPr>
             </a:lvl3pPr>
             <a:lvl4pPr algn="l">
+              <a:buNone/>
               <a:defRPr sz="1050" b="1">
                 <a:solidFill>
                   <a:srgbClr val="63E6BE"/>
@@ -17684,6 +18413,7 @@
               </a:defRPr>
             </a:lvl4pPr>
             <a:lvl5pPr algn="l">
+              <a:buNone/>
               <a:defRPr sz="1050" b="1">
                 <a:solidFill>
                   <a:srgbClr val="63E6BE"/>
@@ -17694,6 +18424,7 @@
               </a:defRPr>
             </a:lvl5pPr>
             <a:lvl6pPr algn="l">
+              <a:buNone/>
               <a:defRPr sz="1050" b="1">
                 <a:solidFill>
                   <a:srgbClr val="63E6BE"/>
@@ -17704,6 +18435,7 @@
               </a:defRPr>
             </a:lvl6pPr>
             <a:lvl7pPr algn="l">
+              <a:buNone/>
               <a:defRPr sz="1050" b="1">
                 <a:solidFill>
                   <a:srgbClr val="63E6BE"/>
@@ -17714,6 +18446,7 @@
               </a:defRPr>
             </a:lvl7pPr>
             <a:lvl8pPr algn="l">
+              <a:buNone/>
               <a:defRPr sz="1050" b="1">
                 <a:solidFill>
                   <a:srgbClr val="63E6BE"/>
@@ -17724,6 +18457,7 @@
               </a:defRPr>
             </a:lvl8pPr>
             <a:lvl9pPr algn="l">
+              <a:buNone/>
               <a:defRPr sz="1050" b="1">
                 <a:solidFill>
                   <a:srgbClr val="63E6BE"/>
@@ -17807,6 +18541,7 @@
               </a:defRPr>
             </a:defPPr>
             <a:lvl1pPr algn="l">
+              <a:buNone/>
               <a:defRPr sz="2850" b="1">
                 <a:solidFill>
                   <a:srgbClr val="F5F7FA"/>
@@ -17817,6 +18552,7 @@
               </a:defRPr>
             </a:lvl1pPr>
             <a:lvl2pPr algn="l">
+              <a:buNone/>
               <a:defRPr sz="2850" b="1">
                 <a:solidFill>
                   <a:srgbClr val="F5F7FA"/>
@@ -17827,6 +18563,7 @@
               </a:defRPr>
             </a:lvl2pPr>
             <a:lvl3pPr algn="l">
+              <a:buNone/>
               <a:defRPr sz="2850" b="1">
                 <a:solidFill>
                   <a:srgbClr val="F5F7FA"/>
@@ -17837,6 +18574,7 @@
               </a:defRPr>
             </a:lvl3pPr>
             <a:lvl4pPr algn="l">
+              <a:buNone/>
               <a:defRPr sz="2850" b="1">
                 <a:solidFill>
                   <a:srgbClr val="F5F7FA"/>
@@ -17847,6 +18585,7 @@
               </a:defRPr>
             </a:lvl4pPr>
             <a:lvl5pPr algn="l">
+              <a:buNone/>
               <a:defRPr sz="2850" b="1">
                 <a:solidFill>
                   <a:srgbClr val="F5F7FA"/>
@@ -17857,6 +18596,7 @@
               </a:defRPr>
             </a:lvl5pPr>
             <a:lvl6pPr algn="l">
+              <a:buNone/>
               <a:defRPr sz="2850" b="1">
                 <a:solidFill>
                   <a:srgbClr val="F5F7FA"/>
@@ -17867,6 +18607,7 @@
               </a:defRPr>
             </a:lvl6pPr>
             <a:lvl7pPr algn="l">
+              <a:buNone/>
               <a:defRPr sz="2850" b="1">
                 <a:solidFill>
                   <a:srgbClr val="F5F7FA"/>
@@ -17877,6 +18618,7 @@
               </a:defRPr>
             </a:lvl7pPr>
             <a:lvl8pPr algn="l">
+              <a:buNone/>
               <a:defRPr sz="2850" b="1">
                 <a:solidFill>
                   <a:srgbClr val="F5F7FA"/>
@@ -17887,6 +18629,7 @@
               </a:defRPr>
             </a:lvl8pPr>
             <a:lvl9pPr algn="l">
+              <a:buNone/>
               <a:defRPr sz="2850" b="1">
                 <a:solidFill>
                   <a:srgbClr val="F5F7FA"/>
@@ -18001,6 +18744,7 @@
               </a:defRPr>
             </a:defPPr>
             <a:lvl1pPr algn="l">
+              <a:buNone/>
               <a:defRPr sz="825" b="1">
                 <a:solidFill>
                   <a:srgbClr val="A8B5C8"/>
@@ -18011,6 +18755,7 @@
               </a:defRPr>
             </a:lvl1pPr>
             <a:lvl2pPr algn="l">
+              <a:buNone/>
               <a:defRPr sz="825" b="1">
                 <a:solidFill>
                   <a:srgbClr val="A8B5C8"/>
@@ -18021,6 +18766,7 @@
               </a:defRPr>
             </a:lvl2pPr>
             <a:lvl3pPr algn="l">
+              <a:buNone/>
               <a:defRPr sz="825" b="1">
                 <a:solidFill>
                   <a:srgbClr val="A8B5C8"/>
@@ -18031,6 +18777,7 @@
               </a:defRPr>
             </a:lvl3pPr>
             <a:lvl4pPr algn="l">
+              <a:buNone/>
               <a:defRPr sz="825" b="1">
                 <a:solidFill>
                   <a:srgbClr val="A8B5C8"/>
@@ -18041,6 +18788,7 @@
               </a:defRPr>
             </a:lvl4pPr>
             <a:lvl5pPr algn="l">
+              <a:buNone/>
               <a:defRPr sz="825" b="1">
                 <a:solidFill>
                   <a:srgbClr val="A8B5C8"/>
@@ -18051,6 +18799,7 @@
               </a:defRPr>
             </a:lvl5pPr>
             <a:lvl6pPr algn="l">
+              <a:buNone/>
               <a:defRPr sz="825" b="1">
                 <a:solidFill>
                   <a:srgbClr val="A8B5C8"/>
@@ -18061,6 +18810,7 @@
               </a:defRPr>
             </a:lvl6pPr>
             <a:lvl7pPr algn="l">
+              <a:buNone/>
               <a:defRPr sz="825" b="1">
                 <a:solidFill>
                   <a:srgbClr val="A8B5C8"/>
@@ -18071,6 +18821,7 @@
               </a:defRPr>
             </a:lvl7pPr>
             <a:lvl8pPr algn="l">
+              <a:buNone/>
               <a:defRPr sz="825" b="1">
                 <a:solidFill>
                   <a:srgbClr val="A8B5C8"/>
@@ -18081,6 +18832,7 @@
               </a:defRPr>
             </a:lvl8pPr>
             <a:lvl9pPr algn="l">
+              <a:buNone/>
               <a:defRPr sz="825" b="1">
                 <a:solidFill>
                   <a:srgbClr val="A8B5C8"/>
@@ -18164,6 +18916,7 @@
               </a:defRPr>
             </a:defPPr>
             <a:lvl1pPr algn="r">
+              <a:buNone/>
               <a:defRPr sz="825" b="1">
                 <a:solidFill>
                   <a:srgbClr val="A8B5C8"/>
@@ -18174,6 +18927,7 @@
               </a:defRPr>
             </a:lvl1pPr>
             <a:lvl2pPr algn="r">
+              <a:buNone/>
               <a:defRPr sz="825" b="1">
                 <a:solidFill>
                   <a:srgbClr val="A8B5C8"/>
@@ -18184,6 +18938,7 @@
               </a:defRPr>
             </a:lvl2pPr>
             <a:lvl3pPr algn="r">
+              <a:buNone/>
               <a:defRPr sz="825" b="1">
                 <a:solidFill>
                   <a:srgbClr val="A8B5C8"/>
@@ -18194,6 +18949,7 @@
               </a:defRPr>
             </a:lvl3pPr>
             <a:lvl4pPr algn="r">
+              <a:buNone/>
               <a:defRPr sz="825" b="1">
                 <a:solidFill>
                   <a:srgbClr val="A8B5C8"/>
@@ -18204,6 +18960,7 @@
               </a:defRPr>
             </a:lvl4pPr>
             <a:lvl5pPr algn="r">
+              <a:buNone/>
               <a:defRPr sz="825" b="1">
                 <a:solidFill>
                   <a:srgbClr val="A8B5C8"/>
@@ -18214,6 +18971,7 @@
               </a:defRPr>
             </a:lvl5pPr>
             <a:lvl6pPr algn="r">
+              <a:buNone/>
               <a:defRPr sz="825" b="1">
                 <a:solidFill>
                   <a:srgbClr val="A8B5C8"/>
@@ -18224,6 +18982,7 @@
               </a:defRPr>
             </a:lvl6pPr>
             <a:lvl7pPr algn="r">
+              <a:buNone/>
               <a:defRPr sz="825" b="1">
                 <a:solidFill>
                   <a:srgbClr val="A8B5C8"/>
@@ -18234,6 +18993,7 @@
               </a:defRPr>
             </a:lvl7pPr>
             <a:lvl8pPr algn="r">
+              <a:buNone/>
               <a:defRPr sz="825" b="1">
                 <a:solidFill>
                   <a:srgbClr val="A8B5C8"/>
@@ -18244,6 +19004,7 @@
               </a:defRPr>
             </a:lvl8pPr>
             <a:lvl9pPr algn="r">
+              <a:buNone/>
               <a:defRPr sz="825" b="1">
                 <a:solidFill>
                   <a:srgbClr val="A8B5C8"/>
@@ -18327,6 +19088,7 @@
               </a:defRPr>
             </a:defPPr>
             <a:lvl1pPr algn="l">
+              <a:buNone/>
               <a:defRPr sz="1725" b="1">
                 <a:solidFill>
                   <a:srgbClr val="F5F7FA"/>
@@ -18337,6 +19099,7 @@
               </a:defRPr>
             </a:lvl1pPr>
             <a:lvl2pPr algn="l">
+              <a:buNone/>
               <a:defRPr sz="1725" b="1">
                 <a:solidFill>
                   <a:srgbClr val="F5F7FA"/>
@@ -18347,6 +19110,7 @@
               </a:defRPr>
             </a:lvl2pPr>
             <a:lvl3pPr algn="l">
+              <a:buNone/>
               <a:defRPr sz="1725" b="1">
                 <a:solidFill>
                   <a:srgbClr val="F5F7FA"/>
@@ -18357,6 +19121,7 @@
               </a:defRPr>
             </a:lvl3pPr>
             <a:lvl4pPr algn="l">
+              <a:buNone/>
               <a:defRPr sz="1725" b="1">
                 <a:solidFill>
                   <a:srgbClr val="F5F7FA"/>
@@ -18367,6 +19132,7 @@
               </a:defRPr>
             </a:lvl4pPr>
             <a:lvl5pPr algn="l">
+              <a:buNone/>
               <a:defRPr sz="1725" b="1">
                 <a:solidFill>
                   <a:srgbClr val="F5F7FA"/>
@@ -18377,6 +19143,7 @@
               </a:defRPr>
             </a:lvl5pPr>
             <a:lvl6pPr algn="l">
+              <a:buNone/>
               <a:defRPr sz="1725" b="1">
                 <a:solidFill>
                   <a:srgbClr val="F5F7FA"/>
@@ -18387,6 +19154,7 @@
               </a:defRPr>
             </a:lvl6pPr>
             <a:lvl7pPr algn="l">
+              <a:buNone/>
               <a:defRPr sz="1725" b="1">
                 <a:solidFill>
                   <a:srgbClr val="F5F7FA"/>
@@ -18397,6 +19165,7 @@
               </a:defRPr>
             </a:lvl7pPr>
             <a:lvl8pPr algn="l">
+              <a:buNone/>
               <a:defRPr sz="1725" b="1">
                 <a:solidFill>
                   <a:srgbClr val="F5F7FA"/>
@@ -18407,6 +19176,7 @@
               </a:defRPr>
             </a:lvl8pPr>
             <a:lvl9pPr algn="l">
+              <a:buNone/>
               <a:defRPr sz="1725" b="1">
                 <a:solidFill>
                   <a:srgbClr val="F5F7FA"/>
@@ -18523,6 +19293,7 @@
               </a:defRPr>
             </a:defPPr>
             <a:lvl1pPr algn="ctr">
+              <a:buNone/>
               <a:defRPr sz="1500" b="1">
                 <a:solidFill>
                   <a:srgbClr val="63E6BE"/>
@@ -18533,6 +19304,7 @@
               </a:defRPr>
             </a:lvl1pPr>
             <a:lvl2pPr algn="ctr">
+              <a:buNone/>
               <a:defRPr sz="1500" b="1">
                 <a:solidFill>
                   <a:srgbClr val="63E6BE"/>
@@ -18543,6 +19315,7 @@
               </a:defRPr>
             </a:lvl2pPr>
             <a:lvl3pPr algn="ctr">
+              <a:buNone/>
               <a:defRPr sz="1500" b="1">
                 <a:solidFill>
                   <a:srgbClr val="63E6BE"/>
@@ -18553,6 +19326,7 @@
               </a:defRPr>
             </a:lvl3pPr>
             <a:lvl4pPr algn="ctr">
+              <a:buNone/>
               <a:defRPr sz="1500" b="1">
                 <a:solidFill>
                   <a:srgbClr val="63E6BE"/>
@@ -18563,6 +19337,7 @@
               </a:defRPr>
             </a:lvl4pPr>
             <a:lvl5pPr algn="ctr">
+              <a:buNone/>
               <a:defRPr sz="1500" b="1">
                 <a:solidFill>
                   <a:srgbClr val="63E6BE"/>
@@ -18573,6 +19348,7 @@
               </a:defRPr>
             </a:lvl5pPr>
             <a:lvl6pPr algn="ctr">
+              <a:buNone/>
               <a:defRPr sz="1500" b="1">
                 <a:solidFill>
                   <a:srgbClr val="63E6BE"/>
@@ -18583,6 +19359,7 @@
               </a:defRPr>
             </a:lvl6pPr>
             <a:lvl7pPr algn="ctr">
+              <a:buNone/>
               <a:defRPr sz="1500" b="1">
                 <a:solidFill>
                   <a:srgbClr val="63E6BE"/>
@@ -18593,6 +19370,7 @@
               </a:defRPr>
             </a:lvl7pPr>
             <a:lvl8pPr algn="ctr">
+              <a:buNone/>
               <a:defRPr sz="1500" b="1">
                 <a:solidFill>
                   <a:srgbClr val="63E6BE"/>
@@ -18603,6 +19381,7 @@
               </a:defRPr>
             </a:lvl8pPr>
             <a:lvl9pPr algn="ctr">
+              <a:buNone/>
               <a:defRPr sz="1500" b="1">
                 <a:solidFill>
                   <a:srgbClr val="63E6BE"/>
@@ -18686,6 +19465,7 @@
               </a:defRPr>
             </a:defPPr>
             <a:lvl1pPr algn="ctr">
+              <a:buNone/>
               <a:defRPr sz="1050" b="0">
                 <a:solidFill>
                   <a:srgbClr val="A8B5C8"/>
@@ -18696,6 +19476,7 @@
               </a:defRPr>
             </a:lvl1pPr>
             <a:lvl2pPr algn="ctr">
+              <a:buNone/>
               <a:defRPr sz="1050" b="0">
                 <a:solidFill>
                   <a:srgbClr val="A8B5C8"/>
@@ -18706,6 +19487,7 @@
               </a:defRPr>
             </a:lvl2pPr>
             <a:lvl3pPr algn="ctr">
+              <a:buNone/>
               <a:defRPr sz="1050" b="0">
                 <a:solidFill>
                   <a:srgbClr val="A8B5C8"/>
@@ -18716,6 +19498,7 @@
               </a:defRPr>
             </a:lvl3pPr>
             <a:lvl4pPr algn="ctr">
+              <a:buNone/>
               <a:defRPr sz="1050" b="0">
                 <a:solidFill>
                   <a:srgbClr val="A8B5C8"/>
@@ -18726,6 +19509,7 @@
               </a:defRPr>
             </a:lvl4pPr>
             <a:lvl5pPr algn="ctr">
+              <a:buNone/>
               <a:defRPr sz="1050" b="0">
                 <a:solidFill>
                   <a:srgbClr val="A8B5C8"/>
@@ -18736,6 +19520,7 @@
               </a:defRPr>
             </a:lvl5pPr>
             <a:lvl6pPr algn="ctr">
+              <a:buNone/>
               <a:defRPr sz="1050" b="0">
                 <a:solidFill>
                   <a:srgbClr val="A8B5C8"/>
@@ -18746,6 +19531,7 @@
               </a:defRPr>
             </a:lvl6pPr>
             <a:lvl7pPr algn="ctr">
+              <a:buNone/>
               <a:defRPr sz="1050" b="0">
                 <a:solidFill>
                   <a:srgbClr val="A8B5C8"/>
@@ -18756,6 +19542,7 @@
               </a:defRPr>
             </a:lvl7pPr>
             <a:lvl8pPr algn="ctr">
+              <a:buNone/>
               <a:defRPr sz="1050" b="0">
                 <a:solidFill>
                   <a:srgbClr val="A8B5C8"/>
@@ -18766,6 +19553,7 @@
               </a:defRPr>
             </a:lvl8pPr>
             <a:lvl9pPr algn="ctr">
+              <a:buNone/>
               <a:defRPr sz="1050" b="0">
                 <a:solidFill>
                   <a:srgbClr val="A8B5C8"/>
@@ -18882,6 +19670,7 @@
               </a:defRPr>
             </a:defPPr>
             <a:lvl1pPr algn="ctr">
+              <a:buNone/>
               <a:defRPr sz="1500" b="1">
                 <a:solidFill>
                   <a:srgbClr val="F2C879"/>
@@ -18892,6 +19681,7 @@
               </a:defRPr>
             </a:lvl1pPr>
             <a:lvl2pPr algn="ctr">
+              <a:buNone/>
               <a:defRPr sz="1500" b="1">
                 <a:solidFill>
                   <a:srgbClr val="F2C879"/>
@@ -18902,6 +19692,7 @@
               </a:defRPr>
             </a:lvl2pPr>
             <a:lvl3pPr algn="ctr">
+              <a:buNone/>
               <a:defRPr sz="1500" b="1">
                 <a:solidFill>
                   <a:srgbClr val="F2C879"/>
@@ -18912,6 +19703,7 @@
               </a:defRPr>
             </a:lvl3pPr>
             <a:lvl4pPr algn="ctr">
+              <a:buNone/>
               <a:defRPr sz="1500" b="1">
                 <a:solidFill>
                   <a:srgbClr val="F2C879"/>
@@ -18922,6 +19714,7 @@
               </a:defRPr>
             </a:lvl4pPr>
             <a:lvl5pPr algn="ctr">
+              <a:buNone/>
               <a:defRPr sz="1500" b="1">
                 <a:solidFill>
                   <a:srgbClr val="F2C879"/>
@@ -18932,6 +19725,7 @@
               </a:defRPr>
             </a:lvl5pPr>
             <a:lvl6pPr algn="ctr">
+              <a:buNone/>
               <a:defRPr sz="1500" b="1">
                 <a:solidFill>
                   <a:srgbClr val="F2C879"/>
@@ -18942,6 +19736,7 @@
               </a:defRPr>
             </a:lvl6pPr>
             <a:lvl7pPr algn="ctr">
+              <a:buNone/>
               <a:defRPr sz="1500" b="1">
                 <a:solidFill>
                   <a:srgbClr val="F2C879"/>
@@ -18952,6 +19747,7 @@
               </a:defRPr>
             </a:lvl7pPr>
             <a:lvl8pPr algn="ctr">
+              <a:buNone/>
               <a:defRPr sz="1500" b="1">
                 <a:solidFill>
                   <a:srgbClr val="F2C879"/>
@@ -18962,6 +19758,7 @@
               </a:defRPr>
             </a:lvl8pPr>
             <a:lvl9pPr algn="ctr">
+              <a:buNone/>
               <a:defRPr sz="1500" b="1">
                 <a:solidFill>
                   <a:srgbClr val="F2C879"/>
@@ -19045,6 +19842,7 @@
               </a:defRPr>
             </a:defPPr>
             <a:lvl1pPr algn="ctr">
+              <a:buNone/>
               <a:defRPr sz="1050" b="0">
                 <a:solidFill>
                   <a:srgbClr val="A8B5C8"/>
@@ -19055,6 +19853,7 @@
               </a:defRPr>
             </a:lvl1pPr>
             <a:lvl2pPr algn="ctr">
+              <a:buNone/>
               <a:defRPr sz="1050" b="0">
                 <a:solidFill>
                   <a:srgbClr val="A8B5C8"/>
@@ -19065,6 +19864,7 @@
               </a:defRPr>
             </a:lvl2pPr>
             <a:lvl3pPr algn="ctr">
+              <a:buNone/>
               <a:defRPr sz="1050" b="0">
                 <a:solidFill>
                   <a:srgbClr val="A8B5C8"/>
@@ -19075,6 +19875,7 @@
               </a:defRPr>
             </a:lvl3pPr>
             <a:lvl4pPr algn="ctr">
+              <a:buNone/>
               <a:defRPr sz="1050" b="0">
                 <a:solidFill>
                   <a:srgbClr val="A8B5C8"/>
@@ -19085,6 +19886,7 @@
               </a:defRPr>
             </a:lvl4pPr>
             <a:lvl5pPr algn="ctr">
+              <a:buNone/>
               <a:defRPr sz="1050" b="0">
                 <a:solidFill>
                   <a:srgbClr val="A8B5C8"/>
@@ -19095,6 +19897,7 @@
               </a:defRPr>
             </a:lvl5pPr>
             <a:lvl6pPr algn="ctr">
+              <a:buNone/>
               <a:defRPr sz="1050" b="0">
                 <a:solidFill>
                   <a:srgbClr val="A8B5C8"/>
@@ -19105,6 +19908,7 @@
               </a:defRPr>
             </a:lvl6pPr>
             <a:lvl7pPr algn="ctr">
+              <a:buNone/>
               <a:defRPr sz="1050" b="0">
                 <a:solidFill>
                   <a:srgbClr val="A8B5C8"/>
@@ -19115,6 +19919,7 @@
               </a:defRPr>
             </a:lvl7pPr>
             <a:lvl8pPr algn="ctr">
+              <a:buNone/>
               <a:defRPr sz="1050" b="0">
                 <a:solidFill>
                   <a:srgbClr val="A8B5C8"/>
@@ -19125,6 +19930,7 @@
               </a:defRPr>
             </a:lvl8pPr>
             <a:lvl9pPr algn="ctr">
+              <a:buNone/>
               <a:defRPr sz="1050" b="0">
                 <a:solidFill>
                   <a:srgbClr val="A8B5C8"/>
@@ -19241,6 +20047,7 @@
               </a:defRPr>
             </a:defPPr>
             <a:lvl1pPr algn="ctr">
+              <a:buNone/>
               <a:defRPr sz="1500" b="1">
                 <a:solidFill>
                   <a:srgbClr val="F48B8B"/>
@@ -19251,6 +20058,7 @@
               </a:defRPr>
             </a:lvl1pPr>
             <a:lvl2pPr algn="ctr">
+              <a:buNone/>
               <a:defRPr sz="1500" b="1">
                 <a:solidFill>
                   <a:srgbClr val="F48B8B"/>
@@ -19261,6 +20069,7 @@
               </a:defRPr>
             </a:lvl2pPr>
             <a:lvl3pPr algn="ctr">
+              <a:buNone/>
               <a:defRPr sz="1500" b="1">
                 <a:solidFill>
                   <a:srgbClr val="F48B8B"/>
@@ -19271,6 +20080,7 @@
               </a:defRPr>
             </a:lvl3pPr>
             <a:lvl4pPr algn="ctr">
+              <a:buNone/>
               <a:defRPr sz="1500" b="1">
                 <a:solidFill>
                   <a:srgbClr val="F48B8B"/>
@@ -19281,6 +20091,7 @@
               </a:defRPr>
             </a:lvl4pPr>
             <a:lvl5pPr algn="ctr">
+              <a:buNone/>
               <a:defRPr sz="1500" b="1">
                 <a:solidFill>
                   <a:srgbClr val="F48B8B"/>
@@ -19291,6 +20102,7 @@
               </a:defRPr>
             </a:lvl5pPr>
             <a:lvl6pPr algn="ctr">
+              <a:buNone/>
               <a:defRPr sz="1500" b="1">
                 <a:solidFill>
                   <a:srgbClr val="F48B8B"/>
@@ -19301,6 +20113,7 @@
               </a:defRPr>
             </a:lvl6pPr>
             <a:lvl7pPr algn="ctr">
+              <a:buNone/>
               <a:defRPr sz="1500" b="1">
                 <a:solidFill>
                   <a:srgbClr val="F48B8B"/>
@@ -19311,6 +20124,7 @@
               </a:defRPr>
             </a:lvl7pPr>
             <a:lvl8pPr algn="ctr">
+              <a:buNone/>
               <a:defRPr sz="1500" b="1">
                 <a:solidFill>
                   <a:srgbClr val="F48B8B"/>
@@ -19321,6 +20135,7 @@
               </a:defRPr>
             </a:lvl8pPr>
             <a:lvl9pPr algn="ctr">
+              <a:buNone/>
               <a:defRPr sz="1500" b="1">
                 <a:solidFill>
                   <a:srgbClr val="F48B8B"/>
@@ -19404,6 +20219,7 @@
               </a:defRPr>
             </a:defPPr>
             <a:lvl1pPr algn="ctr">
+              <a:buNone/>
               <a:defRPr sz="1050" b="0">
                 <a:solidFill>
                   <a:srgbClr val="A8B5C8"/>
@@ -19414,6 +20230,7 @@
               </a:defRPr>
             </a:lvl1pPr>
             <a:lvl2pPr algn="ctr">
+              <a:buNone/>
               <a:defRPr sz="1050" b="0">
                 <a:solidFill>
                   <a:srgbClr val="A8B5C8"/>
@@ -19424,6 +20241,7 @@
               </a:defRPr>
             </a:lvl2pPr>
             <a:lvl3pPr algn="ctr">
+              <a:buNone/>
               <a:defRPr sz="1050" b="0">
                 <a:solidFill>
                   <a:srgbClr val="A8B5C8"/>
@@ -19434,6 +20252,7 @@
               </a:defRPr>
             </a:lvl3pPr>
             <a:lvl4pPr algn="ctr">
+              <a:buNone/>
               <a:defRPr sz="1050" b="0">
                 <a:solidFill>
                   <a:srgbClr val="A8B5C8"/>
@@ -19444,6 +20263,7 @@
               </a:defRPr>
             </a:lvl4pPr>
             <a:lvl5pPr algn="ctr">
+              <a:buNone/>
               <a:defRPr sz="1050" b="0">
                 <a:solidFill>
                   <a:srgbClr val="A8B5C8"/>
@@ -19454,6 +20274,7 @@
               </a:defRPr>
             </a:lvl5pPr>
             <a:lvl6pPr algn="ctr">
+              <a:buNone/>
               <a:defRPr sz="1050" b="0">
                 <a:solidFill>
                   <a:srgbClr val="A8B5C8"/>
@@ -19464,6 +20285,7 @@
               </a:defRPr>
             </a:lvl6pPr>
             <a:lvl7pPr algn="ctr">
+              <a:buNone/>
               <a:defRPr sz="1050" b="0">
                 <a:solidFill>
                   <a:srgbClr val="A8B5C8"/>
@@ -19474,6 +20296,7 @@
               </a:defRPr>
             </a:lvl7pPr>
             <a:lvl8pPr algn="ctr">
+              <a:buNone/>
               <a:defRPr sz="1050" b="0">
                 <a:solidFill>
                   <a:srgbClr val="A8B5C8"/>
@@ -19484,6 +20307,7 @@
               </a:defRPr>
             </a:lvl8pPr>
             <a:lvl9pPr algn="ctr">
+              <a:buNone/>
               <a:defRPr sz="1050" b="0">
                 <a:solidFill>
                   <a:srgbClr val="A8B5C8"/>
@@ -19662,6 +20486,7 @@
               </a:defRPr>
             </a:defPPr>
             <a:lvl1pPr algn="l">
+              <a:buNone/>
               <a:defRPr sz="1350" b="1">
                 <a:solidFill>
                   <a:srgbClr val="F5F7FA"/>
@@ -19672,6 +20497,7 @@
               </a:defRPr>
             </a:lvl1pPr>
             <a:lvl2pPr algn="l">
+              <a:buNone/>
               <a:defRPr sz="1350" b="1">
                 <a:solidFill>
                   <a:srgbClr val="F5F7FA"/>
@@ -19682,6 +20508,7 @@
               </a:defRPr>
             </a:lvl2pPr>
             <a:lvl3pPr algn="l">
+              <a:buNone/>
               <a:defRPr sz="1350" b="1">
                 <a:solidFill>
                   <a:srgbClr val="F5F7FA"/>
@@ -19692,6 +20519,7 @@
               </a:defRPr>
             </a:lvl3pPr>
             <a:lvl4pPr algn="l">
+              <a:buNone/>
               <a:defRPr sz="1350" b="1">
                 <a:solidFill>
                   <a:srgbClr val="F5F7FA"/>
@@ -19702,6 +20530,7 @@
               </a:defRPr>
             </a:lvl4pPr>
             <a:lvl5pPr algn="l">
+              <a:buNone/>
               <a:defRPr sz="1350" b="1">
                 <a:solidFill>
                   <a:srgbClr val="F5F7FA"/>
@@ -19712,6 +20541,7 @@
               </a:defRPr>
             </a:lvl5pPr>
             <a:lvl6pPr algn="l">
+              <a:buNone/>
               <a:defRPr sz="1350" b="1">
                 <a:solidFill>
                   <a:srgbClr val="F5F7FA"/>
@@ -19722,6 +20552,7 @@
               </a:defRPr>
             </a:lvl6pPr>
             <a:lvl7pPr algn="l">
+              <a:buNone/>
               <a:defRPr sz="1350" b="1">
                 <a:solidFill>
                   <a:srgbClr val="F5F7FA"/>
@@ -19732,6 +20563,7 @@
               </a:defRPr>
             </a:lvl7pPr>
             <a:lvl8pPr algn="l">
+              <a:buNone/>
               <a:defRPr sz="1350" b="1">
                 <a:solidFill>
                   <a:srgbClr val="F5F7FA"/>
@@ -19742,6 +20574,7 @@
               </a:defRPr>
             </a:lvl8pPr>
             <a:lvl9pPr algn="l">
+              <a:buNone/>
               <a:defRPr sz="1350" b="1">
                 <a:solidFill>
                   <a:srgbClr val="F5F7FA"/>
@@ -19825,6 +20658,7 @@
               </a:defRPr>
             </a:defPPr>
             <a:lvl1pPr algn="l">
+              <a:buNone/>
               <a:defRPr sz="975" b="0">
                 <a:solidFill>
                   <a:srgbClr val="A8B5C8"/>
@@ -19835,6 +20669,7 @@
               </a:defRPr>
             </a:lvl1pPr>
             <a:lvl2pPr algn="l">
+              <a:buNone/>
               <a:defRPr sz="975" b="0">
                 <a:solidFill>
                   <a:srgbClr val="A8B5C8"/>
@@ -19845,6 +20680,7 @@
               </a:defRPr>
             </a:lvl2pPr>
             <a:lvl3pPr algn="l">
+              <a:buNone/>
               <a:defRPr sz="975" b="0">
                 <a:solidFill>
                   <a:srgbClr val="A8B5C8"/>
@@ -19855,6 +20691,7 @@
               </a:defRPr>
             </a:lvl3pPr>
             <a:lvl4pPr algn="l">
+              <a:buNone/>
               <a:defRPr sz="975" b="0">
                 <a:solidFill>
                   <a:srgbClr val="A8B5C8"/>
@@ -19865,6 +20702,7 @@
               </a:defRPr>
             </a:lvl4pPr>
             <a:lvl5pPr algn="l">
+              <a:buNone/>
               <a:defRPr sz="975" b="0">
                 <a:solidFill>
                   <a:srgbClr val="A8B5C8"/>
@@ -19875,6 +20713,7 @@
               </a:defRPr>
             </a:lvl5pPr>
             <a:lvl6pPr algn="l">
+              <a:buNone/>
               <a:defRPr sz="975" b="0">
                 <a:solidFill>
                   <a:srgbClr val="A8B5C8"/>
@@ -19885,6 +20724,7 @@
               </a:defRPr>
             </a:lvl6pPr>
             <a:lvl7pPr algn="l">
+              <a:buNone/>
               <a:defRPr sz="975" b="0">
                 <a:solidFill>
                   <a:srgbClr val="A8B5C8"/>
@@ -19895,6 +20735,7 @@
               </a:defRPr>
             </a:lvl7pPr>
             <a:lvl8pPr algn="l">
+              <a:buNone/>
               <a:defRPr sz="975" b="0">
                 <a:solidFill>
                   <a:srgbClr val="A8B5C8"/>
@@ -19905,6 +20746,7 @@
               </a:defRPr>
             </a:lvl8pPr>
             <a:lvl9pPr algn="l">
+              <a:buNone/>
               <a:defRPr sz="975" b="0">
                 <a:solidFill>
                   <a:srgbClr val="A8B5C8"/>
@@ -20021,6 +20863,7 @@
               </a:defRPr>
             </a:defPPr>
             <a:lvl1pPr algn="ctr">
+              <a:buNone/>
               <a:defRPr sz="900" b="1">
                 <a:solidFill>
                   <a:srgbClr val="63E6BE"/>
@@ -20031,6 +20874,7 @@
               </a:defRPr>
             </a:lvl1pPr>
             <a:lvl2pPr algn="ctr">
+              <a:buNone/>
               <a:defRPr sz="900" b="1">
                 <a:solidFill>
                   <a:srgbClr val="63E6BE"/>
@@ -20041,6 +20885,7 @@
               </a:defRPr>
             </a:lvl2pPr>
             <a:lvl3pPr algn="ctr">
+              <a:buNone/>
               <a:defRPr sz="900" b="1">
                 <a:solidFill>
                   <a:srgbClr val="63E6BE"/>
@@ -20051,6 +20896,7 @@
               </a:defRPr>
             </a:lvl3pPr>
             <a:lvl4pPr algn="ctr">
+              <a:buNone/>
               <a:defRPr sz="900" b="1">
                 <a:solidFill>
                   <a:srgbClr val="63E6BE"/>
@@ -20061,6 +20907,7 @@
               </a:defRPr>
             </a:lvl4pPr>
             <a:lvl5pPr algn="ctr">
+              <a:buNone/>
               <a:defRPr sz="900" b="1">
                 <a:solidFill>
                   <a:srgbClr val="63E6BE"/>
@@ -20071,6 +20918,7 @@
               </a:defRPr>
             </a:lvl5pPr>
             <a:lvl6pPr algn="ctr">
+              <a:buNone/>
               <a:defRPr sz="900" b="1">
                 <a:solidFill>
                   <a:srgbClr val="63E6BE"/>
@@ -20081,6 +20929,7 @@
               </a:defRPr>
             </a:lvl6pPr>
             <a:lvl7pPr algn="ctr">
+              <a:buNone/>
               <a:defRPr sz="900" b="1">
                 <a:solidFill>
                   <a:srgbClr val="63E6BE"/>
@@ -20091,6 +20940,7 @@
               </a:defRPr>
             </a:lvl7pPr>
             <a:lvl8pPr algn="ctr">
+              <a:buNone/>
               <a:defRPr sz="900" b="1">
                 <a:solidFill>
                   <a:srgbClr val="63E6BE"/>
@@ -20101,6 +20951,7 @@
               </a:defRPr>
             </a:lvl8pPr>
             <a:lvl9pPr algn="ctr">
+              <a:buNone/>
               <a:defRPr sz="900" b="1">
                 <a:solidFill>
                   <a:srgbClr val="63E6BE"/>

--- a/deliverables/exathon-india-2026-pitch.pptx
+++ b/deliverables/exathon-india-2026-pitch.pptx
@@ -2,17 +2,17 @@
 <file path=ppt/presentation.xml><?xml version="1.0" encoding="utf-8"?>
 <p:presentation xmlns:p="http://schemas.openxmlformats.org/presentationml/2006/main">
   <p:sldMasterIdLst>
-    <p:sldMasterId xmlns:r="http://schemas.openxmlformats.org/officeDocument/2006/relationships" id="2147483648" r:id="R11971df894d445c8"/>
+    <p:sldMasterId xmlns:r="http://schemas.openxmlformats.org/officeDocument/2006/relationships" id="2147483648" r:id="Rf12acca58e084478"/>
   </p:sldMasterIdLst>
   <p:notesMasterIdLst>
-    <p:notesMasterId xmlns:r="http://schemas.openxmlformats.org/officeDocument/2006/relationships" r:id="Rf69a5fcfd2644346"/>
+    <p:notesMasterId xmlns:r="http://schemas.openxmlformats.org/officeDocument/2006/relationships" r:id="R654489c704354f4f"/>
   </p:notesMasterIdLst>
   <p:sldIdLst>
-    <p:sldId xmlns:r="http://schemas.openxmlformats.org/officeDocument/2006/relationships" id="256" r:id="Refafeefd17844a56"/>
-    <p:sldId xmlns:r="http://schemas.openxmlformats.org/officeDocument/2006/relationships" id="257" r:id="Reee0d2fa003c47c6"/>
-    <p:sldId xmlns:r="http://schemas.openxmlformats.org/officeDocument/2006/relationships" id="258" r:id="Rc71eaa69154f4828"/>
-    <p:sldId xmlns:r="http://schemas.openxmlformats.org/officeDocument/2006/relationships" id="259" r:id="Rdb9d3a239b2f4f03"/>
-    <p:sldId xmlns:r="http://schemas.openxmlformats.org/officeDocument/2006/relationships" id="260" r:id="R9227f92faeb74691"/>
+    <p:sldId xmlns:r="http://schemas.openxmlformats.org/officeDocument/2006/relationships" id="256" r:id="Rb0298c7556494f0d"/>
+    <p:sldId xmlns:r="http://schemas.openxmlformats.org/officeDocument/2006/relationships" id="257" r:id="Rbf8bad221f204676"/>
+    <p:sldId xmlns:r="http://schemas.openxmlformats.org/officeDocument/2006/relationships" id="258" r:id="Ra63aaf4b420b4ae3"/>
+    <p:sldId xmlns:r="http://schemas.openxmlformats.org/officeDocument/2006/relationships" id="259" r:id="R90fddb03dc174fb9"/>
+    <p:sldId xmlns:r="http://schemas.openxmlformats.org/officeDocument/2006/relationships" id="260" r:id="Recfc93ef48724649"/>
   </p:sldIdLst>
   <p:sldSz cx="12192000" cy="6858000"/>
   <p:notesSz cx="6858000" cy="9144000"/>
@@ -661,7 +661,7 @@
           <a:lstStyle xmlns:a="http://schemas.openxmlformats.org/drawingml/2006/main"/>
           <a:p xmlns:a="http://schemas.openxmlformats.org/drawingml/2006/main">
             <a:r>
-              <a:t>Measured using the seeded large dataset on Exasol Personal local VM configured with 8 GB. Factory-level scoring counts a cheat or decoy once if any of its three months is prioritized. These synthetic results do not establish expected performance on real investigations.</a:t>
+              <a:t>Source: results.json. Factory-month intervals and subgroup results: reports/evaluation.md. This operating point is not suitable for automated taxpayer action. Monthly queues approximate weekly workload. Any-month annual aggregation inflates false positives.</a:t>
             </a:r>
           </a:p>
         </p:txBody>
@@ -731,17 +731,7 @@
           <a:lstStyle xmlns:a="http://schemas.openxmlformats.org/drawingml/2006/main"/>
           <a:p xmlns:a="http://schemas.openxmlformats.org/drawingml/2006/main">
             <a:r>
-              <a:t>Use this slide as a brief pattern comparison, not a legal equivalence claim.</a:t>
-            </a:r>
-          </a:p>
-          <a:p xmlns:a="http://schemas.openxmlformats.org/drawingml/2006/main">
-            <a:r>
-              <a:t>EPPO, “Germany: EPPO orders searches and arrest in probe into €18 million VAT fraud”, 13 May 2026: https://www.eppo.europa.eu/media/news/germany-eppo-orders-search-and-arrest-probe-eu18-million-vat-fraud-2026-05-13_en</a:t>
-            </a:r>
-          </a:p>
-          <a:p xmlns:a="http://schemas.openxmlformats.org/drawingml/2006/main">
-            <a:r>
-              <a:t>European Commission, “VAT carousel fraud”: https://taxation-customs.ec.europa.eu/taxation/vat/fight-against-vat-fraud/vat-carousel-fraud_en</a:t>
+              <a:t>A proposed future application, not a measured German deployment. No German statistics claimed.</a:t>
             </a:r>
           </a:p>
         </p:txBody>
@@ -3184,12 +3174,12 @@
   </p:cSld>
   <p:clrMap bg1="lt1" tx1="dk1" bg2="lt2" tx2="dk2" accent1="accent1" accent2="accent2" accent3="accent3" accent4="accent4" accent5="accent5" accent6="accent6" hlink="hlink" folHlink="folHlink"/>
   <p:sldLayoutIdLst>
-    <p:sldLayoutId xmlns:r="http://schemas.openxmlformats.org/officeDocument/2006/relationships" id="2147483649" r:id="Rd6370313429543da"/>
-    <p:sldLayoutId xmlns:r="http://schemas.openxmlformats.org/officeDocument/2006/relationships" id="2147483650" r:id="R337fb4ca6ee44e13"/>
-    <p:sldLayoutId xmlns:r="http://schemas.openxmlformats.org/officeDocument/2006/relationships" id="2147483651" r:id="Re177ed01ce9347a9"/>
-    <p:sldLayoutId xmlns:r="http://schemas.openxmlformats.org/officeDocument/2006/relationships" id="2147483652" r:id="R4871d7be281447f0"/>
-    <p:sldLayoutId xmlns:r="http://schemas.openxmlformats.org/officeDocument/2006/relationships" id="2147483653" r:id="Red3a4dcc1a184c5f"/>
-    <p:sldLayoutId xmlns:r="http://schemas.openxmlformats.org/officeDocument/2006/relationships" id="2147483654" r:id="R777631df3d024fa4"/>
+    <p:sldLayoutId xmlns:r="http://schemas.openxmlformats.org/officeDocument/2006/relationships" id="2147483649" r:id="Ra1655fe966be4c2b"/>
+    <p:sldLayoutId xmlns:r="http://schemas.openxmlformats.org/officeDocument/2006/relationships" id="2147483650" r:id="R14affdafc3db41e3"/>
+    <p:sldLayoutId xmlns:r="http://schemas.openxmlformats.org/officeDocument/2006/relationships" id="2147483651" r:id="Rb5dce4c675a640a2"/>
+    <p:sldLayoutId xmlns:r="http://schemas.openxmlformats.org/officeDocument/2006/relationships" id="2147483652" r:id="R2799cde0b3a54010"/>
+    <p:sldLayoutId xmlns:r="http://schemas.openxmlformats.org/officeDocument/2006/relationships" id="2147483653" r:id="R5e88bf51c0e1460a"/>
+    <p:sldLayoutId xmlns:r="http://schemas.openxmlformats.org/officeDocument/2006/relationships" id="2147483654" r:id="Rd8435d8ef51c422c"/>
   </p:sldLayoutIdLst>
   <p:txStyles>
     <p:titleStyle>
@@ -12531,7 +12521,7 @@
                 <a:ea typeface="Arial"/>
                 <a:cs typeface="Arial"/>
               </a:rPr>
-              <a:t>PRIORITISE ONLY WITH 2+ CHECK FAMILIES</a:t>
+              <a:t>PRIORITISE WITH 2+ DISTINCT SOURCE FAMILIES</a:t>
             </a:r>
           </a:p>
         </p:txBody>
@@ -12703,7 +12693,7 @@
                 <a:ea typeface="Arial"/>
                 <a:cs typeface="Arial"/>
               </a:rPr>
-              <a:t>One signal → human review   ·   no signal → clear</a:t>
+              <a:t>Single-source cases stay outside the priority queue</a:t>
             </a:r>
           </a:p>
         </p:txBody>
@@ -13484,7 +13474,7 @@
                 <a:ea typeface="Arial"/>
                 <a:cs typeface="Arial"/>
               </a:rPr>
-              <a:t>2.51 million rows, reconciled in Exasol Personal.</a:t>
+              <a:t>Held-out evaluation exposes the false-positive cost</a:t>
             </a:r>
           </a:p>
         </p:txBody>
@@ -14064,7 +14054,7 @@
                 <a:ea typeface="Arial"/>
                 <a:cs typeface="Arial"/>
               </a:rPr>
-              <a:t>100%</a:t>
+              <a:t>84.42%</a:t>
             </a:r>
           </a:p>
         </p:txBody>
@@ -14236,7 +14226,7 @@
                 <a:ea typeface="Arial"/>
                 <a:cs typeface="Arial"/>
               </a:rPr>
-              <a:t>cheats caught</a:t>
+              <a:t>monthly cheat recall</a:t>
             </a:r>
           </a:p>
         </p:txBody>
@@ -14408,7 +14398,7 @@
                 <a:ea typeface="Arial"/>
                 <a:cs typeface="Arial"/>
               </a:rPr>
-              <a:t>24,000 / 24,000 factories</a:t>
+              <a:t>3409 / 4038 active cheat months</a:t>
             </a:r>
           </a:p>
         </p:txBody>
@@ -14613,7 +14603,7 @@
                 <a:ea typeface="Arial"/>
                 <a:cs typeface="Arial"/>
               </a:rPr>
-              <a:t>0%</a:t>
+              <a:t>16.76%</a:t>
             </a:r>
           </a:p>
         </p:txBody>
@@ -14785,7 +14775,7 @@
                 <a:ea typeface="Arial"/>
                 <a:cs typeface="Arial"/>
               </a:rPr>
-              <a:t>decoys prioritised</a:t>
+              <a:t>monthly false-positive rate</a:t>
             </a:r>
           </a:p>
         </p:txBody>
@@ -14957,7 +14947,7 @@
                 <a:ea typeface="Arial"/>
                 <a:cs typeface="Arial"/>
               </a:rPr>
-              <a:t>0 / 24,000 honest decoys</a:t>
+              <a:t>4151 / 24762 negative months</a:t>
             </a:r>
           </a:p>
         </p:txBody>
@@ -15162,7 +15152,7 @@
                 <a:ea typeface="Arial"/>
                 <a:cs typeface="Arial"/>
               </a:rPr>
-              <a:t>1.407 s</a:t>
+              <a:t>629</a:t>
             </a:r>
           </a:p>
         </p:txBody>
@@ -15334,7 +15324,7 @@
                 <a:ea typeface="Arial"/>
                 <a:cs typeface="Arial"/>
               </a:rPr>
-              <a:t>priority query</a:t>
+              <a:t>active cheat months missed</a:t>
             </a:r>
           </a:p>
         </p:txBody>
@@ -15506,7 +15496,7 @@
                 <a:ea typeface="Arial"/>
                 <a:cs typeface="Arial"/>
               </a:rPr>
-              <a:t>72,000 factory-month cases</a:t>
+              <a:t>5 cheat factories never caught</a:t>
             </a:r>
           </a:p>
         </p:txBody>
@@ -15678,7 +15668,7 @@
                 <a:ea typeface="Arial"/>
                 <a:cs typeface="Arial"/>
               </a:rPr>
-              <a:t>FULL-SCALE DATASET</a:t>
+              <a:t>HELD-OUT SEED B</a:t>
             </a:r>
           </a:p>
         </p:txBody>
@@ -15850,7 +15840,7 @@
                 <a:ea typeface="Arial"/>
                 <a:cs typeface="Arial"/>
               </a:rPr>
-              <a:t>120,000 factories</a:t>
+              <a:t>2,400 factories</a:t>
             </a:r>
           </a:p>
         </p:txBody>
@@ -16022,7 +16012,7 @@
                 <a:ea typeface="Arial"/>
                 <a:cs typeface="Arial"/>
               </a:rPr>
-              <a:t>360,000 factory-months</a:t>
+              <a:t>28,800 factory-months</a:t>
             </a:r>
           </a:p>
         </p:txBody>
@@ -16194,7 +16184,7 @@
                 <a:ea typeface="Arial"/>
                 <a:cs typeface="Arial"/>
               </a:rPr>
-              <a:t>2,510,000 evidence rows</a:t>
+              <a:t>228,854 raw evidence rows</a:t>
             </a:r>
           </a:p>
         </p:txBody>
@@ -16399,7 +16389,7 @@
                 <a:ea typeface="Arial"/>
                 <a:cs typeface="Arial"/>
               </a:rPr>
-              <a:t>SQL VIEW TIMING</a:t>
+              <a:t>ANNUAL SCORES AND QUEUE PRECISION</a:t>
             </a:r>
           </a:p>
         </p:txBody>
@@ -16571,7 +16561,7 @@
                 <a:ea typeface="Arial"/>
                 <a:cs typeface="Arial"/>
               </a:rPr>
-              <a:t>Material / output</a:t>
+              <a:t>Factory recall</a:t>
             </a:r>
           </a:p>
         </p:txBody>
@@ -16743,7 +16733,7 @@
                 <a:ea typeface="Arial"/>
                 <a:cs typeface="Arial"/>
               </a:rPr>
-              <a:t>0.012 s</a:t>
+              <a:t>99.31%</a:t>
             </a:r>
           </a:p>
         </p:txBody>
@@ -16915,7 +16905,7 @@
                 <a:ea typeface="Arial"/>
                 <a:cs typeface="Arial"/>
               </a:rPr>
-              <a:t>Dispatch / invoice</a:t>
+              <a:t>Factory false-positive rate</a:t>
             </a:r>
           </a:p>
         </p:txBody>
@@ -17087,7 +17077,7 @@
                 <a:ea typeface="Arial"/>
                 <a:cs typeface="Arial"/>
               </a:rPr>
-              <a:t>1.004 s</a:t>
+              <a:t>84.17%</a:t>
             </a:r>
           </a:p>
         </p:txBody>
@@ -17259,7 +17249,7 @@
                 <a:ea typeface="Arial"/>
                 <a:cs typeface="Arial"/>
               </a:rPr>
-              <a:t>Stock roll-forward</a:t>
+              <a:t>Monthly queue precision @ 50</a:t>
             </a:r>
           </a:p>
         </p:txBody>
@@ -17431,7 +17421,7 @@
                 <a:ea typeface="Arial"/>
                 <a:cs typeface="Arial"/>
               </a:rPr>
-              <a:t>0.011 s</a:t>
+              <a:t>18.17%</a:t>
             </a:r>
           </a:p>
         </p:txBody>
@@ -17603,7 +17593,7 @@
                 <a:ea typeface="Arial"/>
                 <a:cs typeface="Arial"/>
               </a:rPr>
-              <a:t>Supplier loop</a:t>
+              <a:t>Monthly queue precision @ 200</a:t>
             </a:r>
           </a:p>
         </p:txBody>
@@ -17775,7 +17765,7 @@
                 <a:ea typeface="Arial"/>
                 <a:cs typeface="Arial"/>
               </a:rPr>
-              <a:t>0.729 s</a:t>
+              <a:t>51.58%</a:t>
             </a:r>
           </a:p>
         </p:txBody>
@@ -17947,7 +17937,7 @@
                 <a:ea typeface="Arial"/>
                 <a:cs typeface="Arial"/>
               </a:rPr>
-              <a:t>Ranked cases</a:t>
+              <a:t>Single-signal decoy months</a:t>
             </a:r>
           </a:p>
         </p:txBody>
@@ -18119,7 +18109,7 @@
                 <a:ea typeface="Arial"/>
                 <a:cs typeface="Arial"/>
               </a:rPr>
-              <a:t>1.299 s</a:t>
+              <a:t>6924</a:t>
             </a:r>
           </a:p>
         </p:txBody>
@@ -18291,7 +18281,7 @@
                 <a:ea typeface="Arial"/>
                 <a:cs typeface="Arial"/>
               </a:rPr>
-              <a:t>Seeded synthetic data · local 8 GB VM · one measured run · not a real-world fraud benchmark</a:t>
+              <a:t>Synthetic data only. Threshold selected on A. High FPR prevents operational use. CIs and misses in README.</a:t>
             </a:r>
           </a:p>
         </p:txBody>
@@ -19211,7 +19201,7 @@
                 <a:ea typeface="Arial"/>
                 <a:cs typeface="Arial"/>
               </a:rPr>
-              <a:t>The reconciliation idea travels. The tax rules do not.</a:t>
+              <a:t>A possible adaptation requiring local evidence and validation</a:t>
             </a:r>
           </a:p>
         </p:txBody>
@@ -20609,7 +20599,7 @@
                 <a:ea typeface="Arial"/>
                 <a:cs typeface="Arial"/>
               </a:rPr>
-              <a:t>EPPO reported a suspected Germany-linked €18m carousel VAT case in May 2026, involving missing traders and cross-border invoice chains.</a:t>
+              <a:t>A Germany adaptation would reconcile invoice chains, goods movements and payments under locally validated rules.</a:t>
             </a:r>
           </a:p>
         </p:txBody>

--- a/deliverables/exathon-india-2026-pitch.pptx
+++ b/deliverables/exathon-india-2026-pitch.pptx
@@ -2,17 +2,17 @@
 <file path=ppt/presentation.xml><?xml version="1.0" encoding="utf-8"?>
 <p:presentation xmlns:p="http://schemas.openxmlformats.org/presentationml/2006/main">
   <p:sldMasterIdLst>
-    <p:sldMasterId xmlns:r="http://schemas.openxmlformats.org/officeDocument/2006/relationships" id="2147483648" r:id="R81d15ffb1daf4fcb"/>
+    <p:sldMasterId xmlns:r="http://schemas.openxmlformats.org/officeDocument/2006/relationships" id="2147483648" r:id="R37e1428f1f0b44fe"/>
   </p:sldMasterIdLst>
   <p:notesMasterIdLst>
-    <p:notesMasterId xmlns:r="http://schemas.openxmlformats.org/officeDocument/2006/relationships" r:id="R54c249708c9241de"/>
+    <p:notesMasterId xmlns:r="http://schemas.openxmlformats.org/officeDocument/2006/relationships" r:id="R14298c7001ad436f"/>
   </p:notesMasterIdLst>
   <p:sldIdLst>
-    <p:sldId xmlns:r="http://schemas.openxmlformats.org/officeDocument/2006/relationships" id="256" r:id="Ra30d0d79f40342f8"/>
-    <p:sldId xmlns:r="http://schemas.openxmlformats.org/officeDocument/2006/relationships" id="257" r:id="R62894be3db924c54"/>
-    <p:sldId xmlns:r="http://schemas.openxmlformats.org/officeDocument/2006/relationships" id="258" r:id="Rb50e7a24ae964da1"/>
-    <p:sldId xmlns:r="http://schemas.openxmlformats.org/officeDocument/2006/relationships" id="259" r:id="R890ce624462f4726"/>
-    <p:sldId xmlns:r="http://schemas.openxmlformats.org/officeDocument/2006/relationships" id="260" r:id="R25b4ce06d014450f"/>
+    <p:sldId xmlns:r="http://schemas.openxmlformats.org/officeDocument/2006/relationships" id="256" r:id="Re761a870b30948da"/>
+    <p:sldId xmlns:r="http://schemas.openxmlformats.org/officeDocument/2006/relationships" id="257" r:id="Rf2311cae87684206"/>
+    <p:sldId xmlns:r="http://schemas.openxmlformats.org/officeDocument/2006/relationships" id="258" r:id="R786077136b4849d2"/>
+    <p:sldId xmlns:r="http://schemas.openxmlformats.org/officeDocument/2006/relationships" id="259" r:id="R50f25e51308346fa"/>
+    <p:sldId xmlns:r="http://schemas.openxmlformats.org/officeDocument/2006/relationships" id="260" r:id="R6b7f2959fd5f4d07"/>
   </p:sldIdLst>
   <p:sldSz cx="12192000" cy="6858000"/>
   <p:notesSz cx="6858000" cy="9144000"/>
@@ -444,7 +444,11 @@
         <p:txBody>
           <a:bodyPr xmlns:a="http://schemas.openxmlformats.org/drawingml/2006/main"/>
           <a:lstStyle xmlns:a="http://schemas.openxmlformats.org/drawingml/2006/main"/>
-          <a:p xmlns:a="http://schemas.openxmlformats.org/drawingml/2006/main"/>
+          <a:p xmlns:a="http://schemas.openxmlformats.org/drawingml/2006/main">
+            <a:r>
+              <a:t>Sources: results.json (V3-B); reports/v3_c_results.json (V3-C); reports/wrong_clear_bounds.json; reports/benchmark_current_reader.json; LIMITATIONS.md. Every dataset is synthetic. Author: Kushagra Gupta, solo participant. AI coding assistants helped. Public demo: https://kushagragupta2005.github.io/gst-evidence-reconciliation/. Slide 1. Existing source template: legacy/submission/pre_v3_pitch.pptx. Loop tracing is context, not a standalone trigger. Zero-event bound is approximate, conditional on independent factories. Top-50 means monthly snapshots, not a measured weekly queue; Jan–Mar contain no active cheat months in this generator.</a:t>
+            </a:r>
+          </a:p>
         </p:txBody>
       </p:sp>
       <p:sp>
@@ -510,7 +514,11 @@
         <p:txBody>
           <a:bodyPr xmlns:a="http://schemas.openxmlformats.org/drawingml/2006/main"/>
           <a:lstStyle xmlns:a="http://schemas.openxmlformats.org/drawingml/2006/main"/>
-          <a:p xmlns:a="http://schemas.openxmlformats.org/drawingml/2006/main"/>
+          <a:p xmlns:a="http://schemas.openxmlformats.org/drawingml/2006/main">
+            <a:r>
+              <a:t>Sources: results.json (V3-B); reports/v3_c_results.json (V3-C); reports/wrong_clear_bounds.json; reports/benchmark_current_reader.json; LIMITATIONS.md. Every dataset is synthetic. Author: Kushagra Gupta, solo participant. AI coding assistants helped. Public demo: https://kushagragupta2005.github.io/gst-evidence-reconciliation/. Slide 2. Existing source template: legacy/submission/pre_v3_pitch.pptx. Loop tracing is context, not a standalone trigger. Zero-event bound is approximate, conditional on independent factories. Top-50 means monthly snapshots, not a measured weekly queue; Jan–Mar contain no active cheat months in this generator.</a:t>
+            </a:r>
+          </a:p>
         </p:txBody>
       </p:sp>
       <p:sp>
@@ -576,7 +584,11 @@
         <p:txBody>
           <a:bodyPr xmlns:a="http://schemas.openxmlformats.org/drawingml/2006/main"/>
           <a:lstStyle xmlns:a="http://schemas.openxmlformats.org/drawingml/2006/main"/>
-          <a:p xmlns:a="http://schemas.openxmlformats.org/drawingml/2006/main"/>
+          <a:p xmlns:a="http://schemas.openxmlformats.org/drawingml/2006/main">
+            <a:r>
+              <a:t>Sources: results.json (V3-B); reports/v3_c_results.json (V3-C); reports/wrong_clear_bounds.json; reports/benchmark_current_reader.json; LIMITATIONS.md. Every dataset is synthetic. Author: Kushagra Gupta, solo participant. AI coding assistants helped. Public demo: https://kushagragupta2005.github.io/gst-evidence-reconciliation/. Slide 3. Existing source template: legacy/submission/pre_v3_pitch.pptx. Loop tracing is context, not a standalone trigger. Zero-event bound is approximate, conditional on independent factories. Top-50 means monthly snapshots, not a measured weekly queue; Jan–Mar contain no active cheat months in this generator.</a:t>
+            </a:r>
+          </a:p>
         </p:txBody>
       </p:sp>
       <p:sp>
@@ -642,7 +654,11 @@
         <p:txBody>
           <a:bodyPr xmlns:a="http://schemas.openxmlformats.org/drawingml/2006/main"/>
           <a:lstStyle xmlns:a="http://schemas.openxmlformats.org/drawingml/2006/main"/>
-          <a:p xmlns:a="http://schemas.openxmlformats.org/drawingml/2006/main"/>
+          <a:p xmlns:a="http://schemas.openxmlformats.org/drawingml/2006/main">
+            <a:r>
+              <a:t>Sources: results.json (V3-B); reports/v3_c_results.json (V3-C); reports/wrong_clear_bounds.json; reports/benchmark_current_reader.json; LIMITATIONS.md. Every dataset is synthetic. Author: Kushagra Gupta, solo participant. AI coding assistants helped. Public demo: https://kushagragupta2005.github.io/gst-evidence-reconciliation/. Slide 4. Existing source template: legacy/submission/pre_v3_pitch.pptx. Loop tracing is context, not a standalone trigger. Zero-event bound is approximate, conditional on independent factories. Top-50 means monthly snapshots, not a measured weekly queue; Jan–Mar contain no active cheat months in this generator.</a:t>
+            </a:r>
+          </a:p>
         </p:txBody>
       </p:sp>
       <p:sp>
@@ -708,7 +724,11 @@
         <p:txBody>
           <a:bodyPr xmlns:a="http://schemas.openxmlformats.org/drawingml/2006/main"/>
           <a:lstStyle xmlns:a="http://schemas.openxmlformats.org/drawingml/2006/main"/>
-          <a:p xmlns:a="http://schemas.openxmlformats.org/drawingml/2006/main"/>
+          <a:p xmlns:a="http://schemas.openxmlformats.org/drawingml/2006/main">
+            <a:r>
+              <a:t>Sources: results.json (V3-B); reports/v3_c_results.json (V3-C); reports/wrong_clear_bounds.json; reports/benchmark_current_reader.json; LIMITATIONS.md. Every dataset is synthetic. Author: Kushagra Gupta, solo participant. AI coding assistants helped. Public demo: https://kushagragupta2005.github.io/gst-evidence-reconciliation/. Slide 5. Existing source template: legacy/submission/pre_v3_pitch.pptx. Loop tracing is context, not a standalone trigger. Zero-event bound is approximate, conditional on independent factories. Top-50 means monthly snapshots, not a measured weekly queue; Jan–Mar contain no active cheat months in this generator.</a:t>
+            </a:r>
+          </a:p>
         </p:txBody>
       </p:sp>
       <p:sp>
@@ -3149,12 +3169,12 @@
   </p:cSld>
   <p:clrMap bg1="lt1" tx1="dk1" bg2="lt2" tx2="dk2" accent1="accent1" accent2="accent2" accent3="accent3" accent4="accent4" accent5="accent5" accent6="accent6" hlink="hlink" folHlink="folHlink"/>
   <p:sldLayoutIdLst>
-    <p:sldLayoutId xmlns:r="http://schemas.openxmlformats.org/officeDocument/2006/relationships" id="2147483649" r:id="R01af2a2896c54d41"/>
-    <p:sldLayoutId xmlns:r="http://schemas.openxmlformats.org/officeDocument/2006/relationships" id="2147483650" r:id="Rece1b2871725430f"/>
-    <p:sldLayoutId xmlns:r="http://schemas.openxmlformats.org/officeDocument/2006/relationships" id="2147483651" r:id="R7c8a54b6a45444df"/>
-    <p:sldLayoutId xmlns:r="http://schemas.openxmlformats.org/officeDocument/2006/relationships" id="2147483652" r:id="Rc978880423164201"/>
-    <p:sldLayoutId xmlns:r="http://schemas.openxmlformats.org/officeDocument/2006/relationships" id="2147483653" r:id="R9ca34de12c1b4696"/>
-    <p:sldLayoutId xmlns:r="http://schemas.openxmlformats.org/officeDocument/2006/relationships" id="2147483654" r:id="R0a7efda62ec14142"/>
+    <p:sldLayoutId xmlns:r="http://schemas.openxmlformats.org/officeDocument/2006/relationships" id="2147483649" r:id="R569eb3b4771446b7"/>
+    <p:sldLayoutId xmlns:r="http://schemas.openxmlformats.org/officeDocument/2006/relationships" id="2147483650" r:id="Ra73b1bd404ac4ac8"/>
+    <p:sldLayoutId xmlns:r="http://schemas.openxmlformats.org/officeDocument/2006/relationships" id="2147483651" r:id="Rd9a8a4875fc0478e"/>
+    <p:sldLayoutId xmlns:r="http://schemas.openxmlformats.org/officeDocument/2006/relationships" id="2147483652" r:id="R8355b698f243443b"/>
+    <p:sldLayoutId xmlns:r="http://schemas.openxmlformats.org/officeDocument/2006/relationships" id="2147483653" r:id="R87da2f2d3c8f408f"/>
+    <p:sldLayoutId xmlns:r="http://schemas.openxmlformats.org/officeDocument/2006/relationships" id="2147483654" r:id="Rd00b715ff8074129"/>
   </p:sldLayoutIdLst>
   <p:txStyles>
     <p:titleStyle>
@@ -3739,6 +3759,7 @@
               </a:defRPr>
             </a:defPPr>
             <a:lvl1pPr>
+              <a:buNone/>
               <a:defRPr sz="1050" b="1">
                 <a:solidFill>
                   <a:srgbClr val="B7D660"/>
@@ -3746,6 +3767,7 @@
               </a:defRPr>
             </a:lvl1pPr>
             <a:lvl2pPr>
+              <a:buNone/>
               <a:defRPr sz="1050" b="1">
                 <a:solidFill>
                   <a:srgbClr val="B7D660"/>
@@ -3753,6 +3775,7 @@
               </a:defRPr>
             </a:lvl2pPr>
             <a:lvl3pPr>
+              <a:buNone/>
               <a:defRPr sz="1050" b="1">
                 <a:solidFill>
                   <a:srgbClr val="B7D660"/>
@@ -3760,6 +3783,7 @@
               </a:defRPr>
             </a:lvl3pPr>
             <a:lvl4pPr>
+              <a:buNone/>
               <a:defRPr sz="1050" b="1">
                 <a:solidFill>
                   <a:srgbClr val="B7D660"/>
@@ -3767,6 +3791,7 @@
               </a:defRPr>
             </a:lvl4pPr>
             <a:lvl5pPr>
+              <a:buNone/>
               <a:defRPr sz="1050" b="1">
                 <a:solidFill>
                   <a:srgbClr val="B7D660"/>
@@ -3774,6 +3799,7 @@
               </a:defRPr>
             </a:lvl5pPr>
             <a:lvl6pPr>
+              <a:buNone/>
               <a:defRPr sz="1050" b="1">
                 <a:solidFill>
                   <a:srgbClr val="B7D660"/>
@@ -3781,6 +3807,7 @@
               </a:defRPr>
             </a:lvl6pPr>
             <a:lvl7pPr>
+              <a:buNone/>
               <a:defRPr sz="1050" b="1">
                 <a:solidFill>
                   <a:srgbClr val="B7D660"/>
@@ -3788,6 +3815,7 @@
               </a:defRPr>
             </a:lvl7pPr>
             <a:lvl8pPr>
+              <a:buNone/>
               <a:defRPr sz="1050" b="1">
                 <a:solidFill>
                   <a:srgbClr val="B7D660"/>
@@ -3795,6 +3823,7 @@
               </a:defRPr>
             </a:lvl8pPr>
             <a:lvl9pPr>
+              <a:buNone/>
               <a:defRPr sz="1050" b="1">
                 <a:solidFill>
                   <a:srgbClr val="B7D660"/>
@@ -3804,6 +3833,7 @@
           </a:lstStyle>
           <a:p xmlns:a="http://schemas.openxmlformats.org/drawingml/2006/main">
             <a:pPr>
+              <a:buNone/>
               <a:defRPr sz="1050" b="1">
                 <a:solidFill>
                   <a:srgbClr val="B7D660"/>
@@ -3860,6 +3890,7 @@
               </a:defRPr>
             </a:defPPr>
             <a:lvl1pPr>
+              <a:buNone/>
               <a:defRPr sz="3750" b="1">
                 <a:solidFill>
                   <a:srgbClr val="F6F1E8"/>
@@ -3867,6 +3898,7 @@
               </a:defRPr>
             </a:lvl1pPr>
             <a:lvl2pPr>
+              <a:buNone/>
               <a:defRPr sz="3750" b="1">
                 <a:solidFill>
                   <a:srgbClr val="F6F1E8"/>
@@ -3874,6 +3906,7 @@
               </a:defRPr>
             </a:lvl2pPr>
             <a:lvl3pPr>
+              <a:buNone/>
               <a:defRPr sz="3750" b="1">
                 <a:solidFill>
                   <a:srgbClr val="F6F1E8"/>
@@ -3881,6 +3914,7 @@
               </a:defRPr>
             </a:lvl3pPr>
             <a:lvl4pPr>
+              <a:buNone/>
               <a:defRPr sz="3750" b="1">
                 <a:solidFill>
                   <a:srgbClr val="F6F1E8"/>
@@ -3888,6 +3922,7 @@
               </a:defRPr>
             </a:lvl4pPr>
             <a:lvl5pPr>
+              <a:buNone/>
               <a:defRPr sz="3750" b="1">
                 <a:solidFill>
                   <a:srgbClr val="F6F1E8"/>
@@ -3895,6 +3930,7 @@
               </a:defRPr>
             </a:lvl5pPr>
             <a:lvl6pPr>
+              <a:buNone/>
               <a:defRPr sz="3750" b="1">
                 <a:solidFill>
                   <a:srgbClr val="F6F1E8"/>
@@ -3902,6 +3938,7 @@
               </a:defRPr>
             </a:lvl6pPr>
             <a:lvl7pPr>
+              <a:buNone/>
               <a:defRPr sz="3750" b="1">
                 <a:solidFill>
                   <a:srgbClr val="F6F1E8"/>
@@ -3909,6 +3946,7 @@
               </a:defRPr>
             </a:lvl7pPr>
             <a:lvl8pPr>
+              <a:buNone/>
               <a:defRPr sz="3750" b="1">
                 <a:solidFill>
                   <a:srgbClr val="F6F1E8"/>
@@ -3916,6 +3954,7 @@
               </a:defRPr>
             </a:lvl8pPr>
             <a:lvl9pPr>
+              <a:buNone/>
               <a:defRPr sz="3750" b="1">
                 <a:solidFill>
                   <a:srgbClr val="F6F1E8"/>
@@ -3925,6 +3964,7 @@
           </a:lstStyle>
           <a:p xmlns:a="http://schemas.openxmlformats.org/drawingml/2006/main">
             <a:pPr>
+              <a:buNone/>
               <a:defRPr sz="3750" b="1">
                 <a:solidFill>
                   <a:srgbClr val="F6F1E8"/>
@@ -3942,6 +3982,7 @@
           </a:p>
           <a:p xmlns:a="http://schemas.openxmlformats.org/drawingml/2006/main">
             <a:pPr>
+              <a:buNone/>
               <a:defRPr sz="3750" b="1">
                 <a:solidFill>
                   <a:srgbClr val="F6F1E8"/>
@@ -3998,6 +4039,7 @@
               </a:defRPr>
             </a:defPPr>
             <a:lvl1pPr>
+              <a:buNone/>
               <a:defRPr sz="1350" b="0">
                 <a:solidFill>
                   <a:srgbClr val="F6F1E8"/>
@@ -4005,6 +4047,7 @@
               </a:defRPr>
             </a:lvl1pPr>
             <a:lvl2pPr>
+              <a:buNone/>
               <a:defRPr sz="1350" b="0">
                 <a:solidFill>
                   <a:srgbClr val="F6F1E8"/>
@@ -4012,6 +4055,7 @@
               </a:defRPr>
             </a:lvl2pPr>
             <a:lvl3pPr>
+              <a:buNone/>
               <a:defRPr sz="1350" b="0">
                 <a:solidFill>
                   <a:srgbClr val="F6F1E8"/>
@@ -4019,6 +4063,7 @@
               </a:defRPr>
             </a:lvl3pPr>
             <a:lvl4pPr>
+              <a:buNone/>
               <a:defRPr sz="1350" b="0">
                 <a:solidFill>
                   <a:srgbClr val="F6F1E8"/>
@@ -4026,6 +4071,7 @@
               </a:defRPr>
             </a:lvl4pPr>
             <a:lvl5pPr>
+              <a:buNone/>
               <a:defRPr sz="1350" b="0">
                 <a:solidFill>
                   <a:srgbClr val="F6F1E8"/>
@@ -4033,6 +4079,7 @@
               </a:defRPr>
             </a:lvl5pPr>
             <a:lvl6pPr>
+              <a:buNone/>
               <a:defRPr sz="1350" b="0">
                 <a:solidFill>
                   <a:srgbClr val="F6F1E8"/>
@@ -4040,6 +4087,7 @@
               </a:defRPr>
             </a:lvl6pPr>
             <a:lvl7pPr>
+              <a:buNone/>
               <a:defRPr sz="1350" b="0">
                 <a:solidFill>
                   <a:srgbClr val="F6F1E8"/>
@@ -4047,6 +4095,7 @@
               </a:defRPr>
             </a:lvl7pPr>
             <a:lvl8pPr>
+              <a:buNone/>
               <a:defRPr sz="1350" b="0">
                 <a:solidFill>
                   <a:srgbClr val="F6F1E8"/>
@@ -4054,6 +4103,7 @@
               </a:defRPr>
             </a:lvl8pPr>
             <a:lvl9pPr>
+              <a:buNone/>
               <a:defRPr sz="1350" b="0">
                 <a:solidFill>
                   <a:srgbClr val="F6F1E8"/>
@@ -4063,6 +4113,7 @@
           </a:lstStyle>
           <a:p xmlns:a="http://schemas.openxmlformats.org/drawingml/2006/main">
             <a:pPr>
+              <a:buNone/>
               <a:defRPr sz="1350" b="0">
                 <a:solidFill>
                   <a:srgbClr val="F6F1E8"/>
@@ -4119,6 +4170,7 @@
               </a:defRPr>
             </a:defPPr>
             <a:lvl1pPr>
+              <a:buNone/>
               <a:defRPr sz="1350" b="1">
                 <a:solidFill>
                   <a:srgbClr val="E8418A"/>
@@ -4126,6 +4178,7 @@
               </a:defRPr>
             </a:lvl1pPr>
             <a:lvl2pPr>
+              <a:buNone/>
               <a:defRPr sz="1350" b="1">
                 <a:solidFill>
                   <a:srgbClr val="E8418A"/>
@@ -4133,6 +4186,7 @@
               </a:defRPr>
             </a:lvl2pPr>
             <a:lvl3pPr>
+              <a:buNone/>
               <a:defRPr sz="1350" b="1">
                 <a:solidFill>
                   <a:srgbClr val="E8418A"/>
@@ -4140,6 +4194,7 @@
               </a:defRPr>
             </a:lvl3pPr>
             <a:lvl4pPr>
+              <a:buNone/>
               <a:defRPr sz="1350" b="1">
                 <a:solidFill>
                   <a:srgbClr val="E8418A"/>
@@ -4147,6 +4202,7 @@
               </a:defRPr>
             </a:lvl4pPr>
             <a:lvl5pPr>
+              <a:buNone/>
               <a:defRPr sz="1350" b="1">
                 <a:solidFill>
                   <a:srgbClr val="E8418A"/>
@@ -4154,6 +4210,7 @@
               </a:defRPr>
             </a:lvl5pPr>
             <a:lvl6pPr>
+              <a:buNone/>
               <a:defRPr sz="1350" b="1">
                 <a:solidFill>
                   <a:srgbClr val="E8418A"/>
@@ -4161,6 +4218,7 @@
               </a:defRPr>
             </a:lvl6pPr>
             <a:lvl7pPr>
+              <a:buNone/>
               <a:defRPr sz="1350" b="1">
                 <a:solidFill>
                   <a:srgbClr val="E8418A"/>
@@ -4168,6 +4226,7 @@
               </a:defRPr>
             </a:lvl7pPr>
             <a:lvl8pPr>
+              <a:buNone/>
               <a:defRPr sz="1350" b="1">
                 <a:solidFill>
                   <a:srgbClr val="E8418A"/>
@@ -4175,6 +4234,7 @@
               </a:defRPr>
             </a:lvl8pPr>
             <a:lvl9pPr>
+              <a:buNone/>
               <a:defRPr sz="1350" b="1">
                 <a:solidFill>
                   <a:srgbClr val="E8418A"/>
@@ -4184,6 +4244,7 @@
           </a:lstStyle>
           <a:p xmlns:a="http://schemas.openxmlformats.org/drawingml/2006/main">
             <a:pPr>
+              <a:buNone/>
               <a:defRPr sz="1350" b="1">
                 <a:solidFill>
                   <a:srgbClr val="E8418A"/>
@@ -4240,6 +4301,7 @@
               </a:defRPr>
             </a:defPPr>
             <a:lvl1pPr>
+              <a:buNone/>
               <a:defRPr sz="750" b="1">
                 <a:solidFill>
                   <a:srgbClr val="9AA2AD"/>
@@ -4247,6 +4309,7 @@
               </a:defRPr>
             </a:lvl1pPr>
             <a:lvl2pPr>
+              <a:buNone/>
               <a:defRPr sz="750" b="1">
                 <a:solidFill>
                   <a:srgbClr val="9AA2AD"/>
@@ -4254,6 +4317,7 @@
               </a:defRPr>
             </a:lvl2pPr>
             <a:lvl3pPr>
+              <a:buNone/>
               <a:defRPr sz="750" b="1">
                 <a:solidFill>
                   <a:srgbClr val="9AA2AD"/>
@@ -4261,6 +4325,7 @@
               </a:defRPr>
             </a:lvl3pPr>
             <a:lvl4pPr>
+              <a:buNone/>
               <a:defRPr sz="750" b="1">
                 <a:solidFill>
                   <a:srgbClr val="9AA2AD"/>
@@ -4268,6 +4333,7 @@
               </a:defRPr>
             </a:lvl4pPr>
             <a:lvl5pPr>
+              <a:buNone/>
               <a:defRPr sz="750" b="1">
                 <a:solidFill>
                   <a:srgbClr val="9AA2AD"/>
@@ -4275,6 +4341,7 @@
               </a:defRPr>
             </a:lvl5pPr>
             <a:lvl6pPr>
+              <a:buNone/>
               <a:defRPr sz="750" b="1">
                 <a:solidFill>
                   <a:srgbClr val="9AA2AD"/>
@@ -4282,6 +4349,7 @@
               </a:defRPr>
             </a:lvl6pPr>
             <a:lvl7pPr>
+              <a:buNone/>
               <a:defRPr sz="750" b="1">
                 <a:solidFill>
                   <a:srgbClr val="9AA2AD"/>
@@ -4289,6 +4357,7 @@
               </a:defRPr>
             </a:lvl7pPr>
             <a:lvl8pPr>
+              <a:buNone/>
               <a:defRPr sz="750" b="1">
                 <a:solidFill>
                   <a:srgbClr val="9AA2AD"/>
@@ -4296,6 +4365,7 @@
               </a:defRPr>
             </a:lvl8pPr>
             <a:lvl9pPr>
+              <a:buNone/>
               <a:defRPr sz="750" b="1">
                 <a:solidFill>
                   <a:srgbClr val="9AA2AD"/>
@@ -4305,6 +4375,7 @@
           </a:lstStyle>
           <a:p xmlns:a="http://schemas.openxmlformats.org/drawingml/2006/main">
             <a:pPr>
+              <a:buNone/>
               <a:defRPr sz="750" b="1">
                 <a:solidFill>
                   <a:srgbClr val="9AA2AD"/>
@@ -4361,6 +4432,7 @@
               </a:defRPr>
             </a:defPPr>
             <a:lvl1pPr>
+              <a:buNone/>
               <a:defRPr sz="900" b="1">
                 <a:solidFill>
                   <a:srgbClr val="B7D660"/>
@@ -4368,6 +4440,7 @@
               </a:defRPr>
             </a:lvl1pPr>
             <a:lvl2pPr>
+              <a:buNone/>
               <a:defRPr sz="900" b="1">
                 <a:solidFill>
                   <a:srgbClr val="B7D660"/>
@@ -4375,6 +4448,7 @@
               </a:defRPr>
             </a:lvl2pPr>
             <a:lvl3pPr>
+              <a:buNone/>
               <a:defRPr sz="900" b="1">
                 <a:solidFill>
                   <a:srgbClr val="B7D660"/>
@@ -4382,6 +4456,7 @@
               </a:defRPr>
             </a:lvl3pPr>
             <a:lvl4pPr>
+              <a:buNone/>
               <a:defRPr sz="900" b="1">
                 <a:solidFill>
                   <a:srgbClr val="B7D660"/>
@@ -4389,6 +4464,7 @@
               </a:defRPr>
             </a:lvl4pPr>
             <a:lvl5pPr>
+              <a:buNone/>
               <a:defRPr sz="900" b="1">
                 <a:solidFill>
                   <a:srgbClr val="B7D660"/>
@@ -4396,6 +4472,7 @@
               </a:defRPr>
             </a:lvl5pPr>
             <a:lvl6pPr>
+              <a:buNone/>
               <a:defRPr sz="900" b="1">
                 <a:solidFill>
                   <a:srgbClr val="B7D660"/>
@@ -4403,6 +4480,7 @@
               </a:defRPr>
             </a:lvl6pPr>
             <a:lvl7pPr>
+              <a:buNone/>
               <a:defRPr sz="900" b="1">
                 <a:solidFill>
                   <a:srgbClr val="B7D660"/>
@@ -4410,6 +4488,7 @@
               </a:defRPr>
             </a:lvl7pPr>
             <a:lvl8pPr>
+              <a:buNone/>
               <a:defRPr sz="900" b="1">
                 <a:solidFill>
                   <a:srgbClr val="B7D660"/>
@@ -4417,6 +4496,7 @@
               </a:defRPr>
             </a:lvl8pPr>
             <a:lvl9pPr>
+              <a:buNone/>
               <a:defRPr sz="900" b="1">
                 <a:solidFill>
                   <a:srgbClr val="B7D660"/>
@@ -4426,6 +4506,7 @@
           </a:lstStyle>
           <a:p xmlns:a="http://schemas.openxmlformats.org/drawingml/2006/main">
             <a:pPr>
+              <a:buNone/>
               <a:defRPr sz="900" b="1">
                 <a:solidFill>
                   <a:srgbClr val="B7D660"/>
@@ -4511,6 +4592,7 @@
               </a:defRPr>
             </a:defPPr>
             <a:lvl1pPr>
+              <a:buNone/>
               <a:defRPr sz="900" b="1">
                 <a:solidFill>
                   <a:srgbClr val="B7D660"/>
@@ -4518,6 +4600,7 @@
               </a:defRPr>
             </a:lvl1pPr>
             <a:lvl2pPr>
+              <a:buNone/>
               <a:defRPr sz="900" b="1">
                 <a:solidFill>
                   <a:srgbClr val="B7D660"/>
@@ -4525,6 +4608,7 @@
               </a:defRPr>
             </a:lvl2pPr>
             <a:lvl3pPr>
+              <a:buNone/>
               <a:defRPr sz="900" b="1">
                 <a:solidFill>
                   <a:srgbClr val="B7D660"/>
@@ -4532,6 +4616,7 @@
               </a:defRPr>
             </a:lvl3pPr>
             <a:lvl4pPr>
+              <a:buNone/>
               <a:defRPr sz="900" b="1">
                 <a:solidFill>
                   <a:srgbClr val="B7D660"/>
@@ -4539,6 +4624,7 @@
               </a:defRPr>
             </a:lvl4pPr>
             <a:lvl5pPr>
+              <a:buNone/>
               <a:defRPr sz="900" b="1">
                 <a:solidFill>
                   <a:srgbClr val="B7D660"/>
@@ -4546,6 +4632,7 @@
               </a:defRPr>
             </a:lvl5pPr>
             <a:lvl6pPr>
+              <a:buNone/>
               <a:defRPr sz="900" b="1">
                 <a:solidFill>
                   <a:srgbClr val="B7D660"/>
@@ -4553,6 +4640,7 @@
               </a:defRPr>
             </a:lvl6pPr>
             <a:lvl7pPr>
+              <a:buNone/>
               <a:defRPr sz="900" b="1">
                 <a:solidFill>
                   <a:srgbClr val="B7D660"/>
@@ -4560,6 +4648,7 @@
               </a:defRPr>
             </a:lvl7pPr>
             <a:lvl8pPr>
+              <a:buNone/>
               <a:defRPr sz="900" b="1">
                 <a:solidFill>
                   <a:srgbClr val="B7D660"/>
@@ -4567,6 +4656,7 @@
               </a:defRPr>
             </a:lvl8pPr>
             <a:lvl9pPr>
+              <a:buNone/>
               <a:defRPr sz="900" b="1">
                 <a:solidFill>
                   <a:srgbClr val="B7D660"/>
@@ -4576,6 +4666,7 @@
           </a:lstStyle>
           <a:p xmlns:a="http://schemas.openxmlformats.org/drawingml/2006/main">
             <a:pPr>
+              <a:buNone/>
               <a:defRPr sz="900" b="1">
                 <a:solidFill>
                   <a:srgbClr val="B7D660"/>
@@ -4632,6 +4723,7 @@
               </a:defRPr>
             </a:defPPr>
             <a:lvl1pPr>
+              <a:buNone/>
               <a:defRPr sz="3150" b="1">
                 <a:solidFill>
                   <a:srgbClr val="F6F1E8"/>
@@ -4639,6 +4731,7 @@
               </a:defRPr>
             </a:lvl1pPr>
             <a:lvl2pPr>
+              <a:buNone/>
               <a:defRPr sz="3150" b="1">
                 <a:solidFill>
                   <a:srgbClr val="F6F1E8"/>
@@ -4646,6 +4739,7 @@
               </a:defRPr>
             </a:lvl2pPr>
             <a:lvl3pPr>
+              <a:buNone/>
               <a:defRPr sz="3150" b="1">
                 <a:solidFill>
                   <a:srgbClr val="F6F1E8"/>
@@ -4653,6 +4747,7 @@
               </a:defRPr>
             </a:lvl3pPr>
             <a:lvl4pPr>
+              <a:buNone/>
               <a:defRPr sz="3150" b="1">
                 <a:solidFill>
                   <a:srgbClr val="F6F1E8"/>
@@ -4660,6 +4755,7 @@
               </a:defRPr>
             </a:lvl4pPr>
             <a:lvl5pPr>
+              <a:buNone/>
               <a:defRPr sz="3150" b="1">
                 <a:solidFill>
                   <a:srgbClr val="F6F1E8"/>
@@ -4667,6 +4763,7 @@
               </a:defRPr>
             </a:lvl5pPr>
             <a:lvl6pPr>
+              <a:buNone/>
               <a:defRPr sz="3150" b="1">
                 <a:solidFill>
                   <a:srgbClr val="F6F1E8"/>
@@ -4674,6 +4771,7 @@
               </a:defRPr>
             </a:lvl6pPr>
             <a:lvl7pPr>
+              <a:buNone/>
               <a:defRPr sz="3150" b="1">
                 <a:solidFill>
                   <a:srgbClr val="F6F1E8"/>
@@ -4681,6 +4779,7 @@
               </a:defRPr>
             </a:lvl7pPr>
             <a:lvl8pPr>
+              <a:buNone/>
               <a:defRPr sz="3150" b="1">
                 <a:solidFill>
                   <a:srgbClr val="F6F1E8"/>
@@ -4688,6 +4787,7 @@
               </a:defRPr>
             </a:lvl8pPr>
             <a:lvl9pPr>
+              <a:buNone/>
               <a:defRPr sz="3150" b="1">
                 <a:solidFill>
                   <a:srgbClr val="F6F1E8"/>
@@ -4697,6 +4797,7 @@
           </a:lstStyle>
           <a:p xmlns:a="http://schemas.openxmlformats.org/drawingml/2006/main">
             <a:pPr>
+              <a:buNone/>
               <a:defRPr sz="3150" b="1">
                 <a:solidFill>
                   <a:srgbClr val="F6F1E8"/>
@@ -4753,6 +4854,7 @@
               </a:defRPr>
             </a:defPPr>
             <a:lvl1pPr>
+              <a:buNone/>
               <a:defRPr sz="1350" b="0">
                 <a:solidFill>
                   <a:srgbClr val="9AA2AD"/>
@@ -4760,6 +4862,7 @@
               </a:defRPr>
             </a:lvl1pPr>
             <a:lvl2pPr>
+              <a:buNone/>
               <a:defRPr sz="1350" b="0">
                 <a:solidFill>
                   <a:srgbClr val="9AA2AD"/>
@@ -4767,6 +4870,7 @@
               </a:defRPr>
             </a:lvl2pPr>
             <a:lvl3pPr>
+              <a:buNone/>
               <a:defRPr sz="1350" b="0">
                 <a:solidFill>
                   <a:srgbClr val="9AA2AD"/>
@@ -4774,6 +4878,7 @@
               </a:defRPr>
             </a:lvl3pPr>
             <a:lvl4pPr>
+              <a:buNone/>
               <a:defRPr sz="1350" b="0">
                 <a:solidFill>
                   <a:srgbClr val="9AA2AD"/>
@@ -4781,6 +4886,7 @@
               </a:defRPr>
             </a:lvl4pPr>
             <a:lvl5pPr>
+              <a:buNone/>
               <a:defRPr sz="1350" b="0">
                 <a:solidFill>
                   <a:srgbClr val="9AA2AD"/>
@@ -4788,6 +4894,7 @@
               </a:defRPr>
             </a:lvl5pPr>
             <a:lvl6pPr>
+              <a:buNone/>
               <a:defRPr sz="1350" b="0">
                 <a:solidFill>
                   <a:srgbClr val="9AA2AD"/>
@@ -4795,6 +4902,7 @@
               </a:defRPr>
             </a:lvl6pPr>
             <a:lvl7pPr>
+              <a:buNone/>
               <a:defRPr sz="1350" b="0">
                 <a:solidFill>
                   <a:srgbClr val="9AA2AD"/>
@@ -4802,6 +4910,7 @@
               </a:defRPr>
             </a:lvl7pPr>
             <a:lvl8pPr>
+              <a:buNone/>
               <a:defRPr sz="1350" b="0">
                 <a:solidFill>
                   <a:srgbClr val="9AA2AD"/>
@@ -4809,6 +4918,7 @@
               </a:defRPr>
             </a:lvl8pPr>
             <a:lvl9pPr>
+              <a:buNone/>
               <a:defRPr sz="1350" b="0">
                 <a:solidFill>
                   <a:srgbClr val="9AA2AD"/>
@@ -4818,6 +4928,7 @@
           </a:lstStyle>
           <a:p xmlns:a="http://schemas.openxmlformats.org/drawingml/2006/main">
             <a:pPr>
+              <a:buNone/>
               <a:defRPr sz="1350" b="0">
                 <a:solidFill>
                   <a:srgbClr val="9AA2AD"/>
@@ -4830,7 +4941,7 @@
                   <a:srgbClr val="9AA2AD"/>
                 </a:solidFill>
               </a:rPr>
-              <a:t>Today, officers must reconcile sources manually, even when physical and financial evidence disagree.</a:t>
+              <a:t>This prototype targets officers reviewing declarations when supporting records arrive separately.</a:t>
             </a:r>
           </a:p>
         </p:txBody>
@@ -4874,6 +4985,7 @@
               </a:defRPr>
             </a:defPPr>
             <a:lvl1pPr>
+              <a:buNone/>
               <a:defRPr sz="1650" b="1">
                 <a:solidFill>
                   <a:srgbClr val="E8418A"/>
@@ -4881,6 +4993,7 @@
               </a:defRPr>
             </a:lvl1pPr>
             <a:lvl2pPr>
+              <a:buNone/>
               <a:defRPr sz="1650" b="1">
                 <a:solidFill>
                   <a:srgbClr val="E8418A"/>
@@ -4888,6 +5001,7 @@
               </a:defRPr>
             </a:lvl2pPr>
             <a:lvl3pPr>
+              <a:buNone/>
               <a:defRPr sz="1650" b="1">
                 <a:solidFill>
                   <a:srgbClr val="E8418A"/>
@@ -4895,6 +5009,7 @@
               </a:defRPr>
             </a:lvl3pPr>
             <a:lvl4pPr>
+              <a:buNone/>
               <a:defRPr sz="1650" b="1">
                 <a:solidFill>
                   <a:srgbClr val="E8418A"/>
@@ -4902,6 +5017,7 @@
               </a:defRPr>
             </a:lvl4pPr>
             <a:lvl5pPr>
+              <a:buNone/>
               <a:defRPr sz="1650" b="1">
                 <a:solidFill>
                   <a:srgbClr val="E8418A"/>
@@ -4909,6 +5025,7 @@
               </a:defRPr>
             </a:lvl5pPr>
             <a:lvl6pPr>
+              <a:buNone/>
               <a:defRPr sz="1650" b="1">
                 <a:solidFill>
                   <a:srgbClr val="E8418A"/>
@@ -4916,6 +5033,7 @@
               </a:defRPr>
             </a:lvl6pPr>
             <a:lvl7pPr>
+              <a:buNone/>
               <a:defRPr sz="1650" b="1">
                 <a:solidFill>
                   <a:srgbClr val="E8418A"/>
@@ -4923,6 +5041,7 @@
               </a:defRPr>
             </a:lvl7pPr>
             <a:lvl8pPr>
+              <a:buNone/>
               <a:defRPr sz="1650" b="1">
                 <a:solidFill>
                   <a:srgbClr val="E8418A"/>
@@ -4930,6 +5049,7 @@
               </a:defRPr>
             </a:lvl8pPr>
             <a:lvl9pPr>
+              <a:buNone/>
               <a:defRPr sz="1650" b="1">
                 <a:solidFill>
                   <a:srgbClr val="E8418A"/>
@@ -4939,6 +5059,7 @@
           </a:lstStyle>
           <a:p xmlns:a="http://schemas.openxmlformats.org/drawingml/2006/main">
             <a:pPr>
+              <a:buNone/>
               <a:defRPr sz="1650" b="1">
                 <a:solidFill>
                   <a:srgbClr val="E8418A"/>
@@ -4995,6 +5116,7 @@
               </a:defRPr>
             </a:defPPr>
             <a:lvl1pPr>
+              <a:buNone/>
               <a:defRPr sz="1350" b="0">
                 <a:solidFill>
                   <a:srgbClr val="F6F1E8"/>
@@ -5002,6 +5124,7 @@
               </a:defRPr>
             </a:lvl1pPr>
             <a:lvl2pPr>
+              <a:buNone/>
               <a:defRPr sz="1350" b="0">
                 <a:solidFill>
                   <a:srgbClr val="F6F1E8"/>
@@ -5009,6 +5132,7 @@
               </a:defRPr>
             </a:lvl2pPr>
             <a:lvl3pPr>
+              <a:buNone/>
               <a:defRPr sz="1350" b="0">
                 <a:solidFill>
                   <a:srgbClr val="F6F1E8"/>
@@ -5016,6 +5140,7 @@
               </a:defRPr>
             </a:lvl3pPr>
             <a:lvl4pPr>
+              <a:buNone/>
               <a:defRPr sz="1350" b="0">
                 <a:solidFill>
                   <a:srgbClr val="F6F1E8"/>
@@ -5023,6 +5148,7 @@
               </a:defRPr>
             </a:lvl4pPr>
             <a:lvl5pPr>
+              <a:buNone/>
               <a:defRPr sz="1350" b="0">
                 <a:solidFill>
                   <a:srgbClr val="F6F1E8"/>
@@ -5030,6 +5156,7 @@
               </a:defRPr>
             </a:lvl5pPr>
             <a:lvl6pPr>
+              <a:buNone/>
               <a:defRPr sz="1350" b="0">
                 <a:solidFill>
                   <a:srgbClr val="F6F1E8"/>
@@ -5037,6 +5164,7 @@
               </a:defRPr>
             </a:lvl6pPr>
             <a:lvl7pPr>
+              <a:buNone/>
               <a:defRPr sz="1350" b="0">
                 <a:solidFill>
                   <a:srgbClr val="F6F1E8"/>
@@ -5044,6 +5172,7 @@
               </a:defRPr>
             </a:lvl7pPr>
             <a:lvl8pPr>
+              <a:buNone/>
               <a:defRPr sz="1350" b="0">
                 <a:solidFill>
                   <a:srgbClr val="F6F1E8"/>
@@ -5051,6 +5180,7 @@
               </a:defRPr>
             </a:lvl8pPr>
             <a:lvl9pPr>
+              <a:buNone/>
               <a:defRPr sz="1350" b="0">
                 <a:solidFill>
                   <a:srgbClr val="F6F1E8"/>
@@ -5060,6 +5190,7 @@
           </a:lstStyle>
           <a:p xmlns:a="http://schemas.openxmlformats.org/drawingml/2006/main">
             <a:pPr>
+              <a:buNone/>
               <a:defRPr sz="1350" b="0">
                 <a:solidFill>
                   <a:srgbClr val="F6F1E8"/>
@@ -5072,7 +5203,7 @@
                   <a:srgbClr val="F6F1E8"/>
                 </a:solidFill>
               </a:rPr>
-              <a:t>Invoice matching finds inconsistencies inside the tax system. It does not reconcile declarations with independent operational evidence.</a:t>
+              <a:t>Invoice matching compares tax documents. We add operational records; no benchmark of commercial fraud systems is claimed.</a:t>
             </a:r>
           </a:p>
         </p:txBody>
@@ -5116,6 +5247,7 @@
               </a:defRPr>
             </a:defPPr>
             <a:lvl1pPr>
+              <a:buNone/>
               <a:defRPr sz="1650" b="1">
                 <a:solidFill>
                   <a:srgbClr val="B7D660"/>
@@ -5123,6 +5255,7 @@
               </a:defRPr>
             </a:lvl1pPr>
             <a:lvl2pPr>
+              <a:buNone/>
               <a:defRPr sz="1650" b="1">
                 <a:solidFill>
                   <a:srgbClr val="B7D660"/>
@@ -5130,6 +5263,7 @@
               </a:defRPr>
             </a:lvl2pPr>
             <a:lvl3pPr>
+              <a:buNone/>
               <a:defRPr sz="1650" b="1">
                 <a:solidFill>
                   <a:srgbClr val="B7D660"/>
@@ -5137,6 +5271,7 @@
               </a:defRPr>
             </a:lvl3pPr>
             <a:lvl4pPr>
+              <a:buNone/>
               <a:defRPr sz="1650" b="1">
                 <a:solidFill>
                   <a:srgbClr val="B7D660"/>
@@ -5144,6 +5279,7 @@
               </a:defRPr>
             </a:lvl4pPr>
             <a:lvl5pPr>
+              <a:buNone/>
               <a:defRPr sz="1650" b="1">
                 <a:solidFill>
                   <a:srgbClr val="B7D660"/>
@@ -5151,6 +5287,7 @@
               </a:defRPr>
             </a:lvl5pPr>
             <a:lvl6pPr>
+              <a:buNone/>
               <a:defRPr sz="1650" b="1">
                 <a:solidFill>
                   <a:srgbClr val="B7D660"/>
@@ -5158,6 +5295,7 @@
               </a:defRPr>
             </a:lvl6pPr>
             <a:lvl7pPr>
+              <a:buNone/>
               <a:defRPr sz="1650" b="1">
                 <a:solidFill>
                   <a:srgbClr val="B7D660"/>
@@ -5165,6 +5303,7 @@
               </a:defRPr>
             </a:lvl7pPr>
             <a:lvl8pPr>
+              <a:buNone/>
               <a:defRPr sz="1650" b="1">
                 <a:solidFill>
                   <a:srgbClr val="B7D660"/>
@@ -5172,6 +5311,7 @@
               </a:defRPr>
             </a:lvl8pPr>
             <a:lvl9pPr>
+              <a:buNone/>
               <a:defRPr sz="1650" b="1">
                 <a:solidFill>
                   <a:srgbClr val="B7D660"/>
@@ -5181,6 +5321,7 @@
           </a:lstStyle>
           <a:p xmlns:a="http://schemas.openxmlformats.org/drawingml/2006/main">
             <a:pPr>
+              <a:buNone/>
               <a:defRPr sz="1650" b="1">
                 <a:solidFill>
                   <a:srgbClr val="B7D660"/>
@@ -5237,6 +5378,7 @@
               </a:defRPr>
             </a:defPPr>
             <a:lvl1pPr>
+              <a:buNone/>
               <a:defRPr sz="1350" b="0">
                 <a:solidFill>
                   <a:srgbClr val="F6F1E8"/>
@@ -5244,6 +5386,7 @@
               </a:defRPr>
             </a:lvl1pPr>
             <a:lvl2pPr>
+              <a:buNone/>
               <a:defRPr sz="1350" b="0">
                 <a:solidFill>
                   <a:srgbClr val="F6F1E8"/>
@@ -5251,6 +5394,7 @@
               </a:defRPr>
             </a:lvl2pPr>
             <a:lvl3pPr>
+              <a:buNone/>
               <a:defRPr sz="1350" b="0">
                 <a:solidFill>
                   <a:srgbClr val="F6F1E8"/>
@@ -5258,6 +5402,7 @@
               </a:defRPr>
             </a:lvl3pPr>
             <a:lvl4pPr>
+              <a:buNone/>
               <a:defRPr sz="1350" b="0">
                 <a:solidFill>
                   <a:srgbClr val="F6F1E8"/>
@@ -5265,6 +5410,7 @@
               </a:defRPr>
             </a:lvl4pPr>
             <a:lvl5pPr>
+              <a:buNone/>
               <a:defRPr sz="1350" b="0">
                 <a:solidFill>
                   <a:srgbClr val="F6F1E8"/>
@@ -5272,6 +5418,7 @@
               </a:defRPr>
             </a:lvl5pPr>
             <a:lvl6pPr>
+              <a:buNone/>
               <a:defRPr sz="1350" b="0">
                 <a:solidFill>
                   <a:srgbClr val="F6F1E8"/>
@@ -5279,6 +5426,7 @@
               </a:defRPr>
             </a:lvl6pPr>
             <a:lvl7pPr>
+              <a:buNone/>
               <a:defRPr sz="1350" b="0">
                 <a:solidFill>
                   <a:srgbClr val="F6F1E8"/>
@@ -5286,6 +5434,7 @@
               </a:defRPr>
             </a:lvl7pPr>
             <a:lvl8pPr>
+              <a:buNone/>
               <a:defRPr sz="1350" b="0">
                 <a:solidFill>
                   <a:srgbClr val="F6F1E8"/>
@@ -5293,6 +5442,7 @@
               </a:defRPr>
             </a:lvl8pPr>
             <a:lvl9pPr>
+              <a:buNone/>
               <a:defRPr sz="1350" b="0">
                 <a:solidFill>
                   <a:srgbClr val="F6F1E8"/>
@@ -5302,6 +5452,7 @@
           </a:lstStyle>
           <a:p xmlns:a="http://schemas.openxmlformats.org/drawingml/2006/main">
             <a:pPr>
+              <a:buNone/>
               <a:defRPr sz="1350" b="0">
                 <a:solidFill>
                   <a:srgbClr val="F6F1E8"/>
@@ -5358,6 +5509,7 @@
               </a:defRPr>
             </a:defPPr>
             <a:lvl1pPr>
+              <a:buNone/>
               <a:defRPr sz="1350" b="1">
                 <a:solidFill>
                   <a:srgbClr val="9AA2AD"/>
@@ -5365,6 +5517,7 @@
               </a:defRPr>
             </a:lvl1pPr>
             <a:lvl2pPr>
+              <a:buNone/>
               <a:defRPr sz="1350" b="1">
                 <a:solidFill>
                   <a:srgbClr val="9AA2AD"/>
@@ -5372,6 +5525,7 @@
               </a:defRPr>
             </a:lvl2pPr>
             <a:lvl3pPr>
+              <a:buNone/>
               <a:defRPr sz="1350" b="1">
                 <a:solidFill>
                   <a:srgbClr val="9AA2AD"/>
@@ -5379,6 +5533,7 @@
               </a:defRPr>
             </a:lvl3pPr>
             <a:lvl4pPr>
+              <a:buNone/>
               <a:defRPr sz="1350" b="1">
                 <a:solidFill>
                   <a:srgbClr val="9AA2AD"/>
@@ -5386,6 +5541,7 @@
               </a:defRPr>
             </a:lvl4pPr>
             <a:lvl5pPr>
+              <a:buNone/>
               <a:defRPr sz="1350" b="1">
                 <a:solidFill>
                   <a:srgbClr val="9AA2AD"/>
@@ -5393,6 +5549,7 @@
               </a:defRPr>
             </a:lvl5pPr>
             <a:lvl6pPr>
+              <a:buNone/>
               <a:defRPr sz="1350" b="1">
                 <a:solidFill>
                   <a:srgbClr val="9AA2AD"/>
@@ -5400,6 +5557,7 @@
               </a:defRPr>
             </a:lvl6pPr>
             <a:lvl7pPr>
+              <a:buNone/>
               <a:defRPr sz="1350" b="1">
                 <a:solidFill>
                   <a:srgbClr val="9AA2AD"/>
@@ -5407,6 +5565,7 @@
               </a:defRPr>
             </a:lvl7pPr>
             <a:lvl8pPr>
+              <a:buNone/>
               <a:defRPr sz="1350" b="1">
                 <a:solidFill>
                   <a:srgbClr val="9AA2AD"/>
@@ -5414,6 +5573,7 @@
               </a:defRPr>
             </a:lvl8pPr>
             <a:lvl9pPr>
+              <a:buNone/>
               <a:defRPr sz="1350" b="1">
                 <a:solidFill>
                   <a:srgbClr val="9AA2AD"/>
@@ -5423,6 +5583,7 @@
           </a:lstStyle>
           <a:p xmlns:a="http://schemas.openxmlformats.org/drawingml/2006/main">
             <a:pPr>
+              <a:buNone/>
               <a:defRPr sz="1350" b="1">
                 <a:solidFill>
                   <a:srgbClr val="9AA2AD"/>
@@ -5479,6 +5640,7 @@
               </a:defRPr>
             </a:defPPr>
             <a:lvl1pPr>
+              <a:buNone/>
               <a:defRPr sz="1500" b="0">
                 <a:solidFill>
                   <a:srgbClr val="F6F1E8"/>
@@ -5486,6 +5648,7 @@
               </a:defRPr>
             </a:lvl1pPr>
             <a:lvl2pPr>
+              <a:buNone/>
               <a:defRPr sz="1500" b="0">
                 <a:solidFill>
                   <a:srgbClr val="F6F1E8"/>
@@ -5493,6 +5656,7 @@
               </a:defRPr>
             </a:lvl2pPr>
             <a:lvl3pPr>
+              <a:buNone/>
               <a:defRPr sz="1500" b="0">
                 <a:solidFill>
                   <a:srgbClr val="F6F1E8"/>
@@ -5500,6 +5664,7 @@
               </a:defRPr>
             </a:lvl3pPr>
             <a:lvl4pPr>
+              <a:buNone/>
               <a:defRPr sz="1500" b="0">
                 <a:solidFill>
                   <a:srgbClr val="F6F1E8"/>
@@ -5507,6 +5672,7 @@
               </a:defRPr>
             </a:lvl4pPr>
             <a:lvl5pPr>
+              <a:buNone/>
               <a:defRPr sz="1500" b="0">
                 <a:solidFill>
                   <a:srgbClr val="F6F1E8"/>
@@ -5514,6 +5680,7 @@
               </a:defRPr>
             </a:lvl5pPr>
             <a:lvl6pPr>
+              <a:buNone/>
               <a:defRPr sz="1500" b="0">
                 <a:solidFill>
                   <a:srgbClr val="F6F1E8"/>
@@ -5521,6 +5688,7 @@
               </a:defRPr>
             </a:lvl6pPr>
             <a:lvl7pPr>
+              <a:buNone/>
               <a:defRPr sz="1500" b="0">
                 <a:solidFill>
                   <a:srgbClr val="F6F1E8"/>
@@ -5528,6 +5696,7 @@
               </a:defRPr>
             </a:lvl7pPr>
             <a:lvl8pPr>
+              <a:buNone/>
               <a:defRPr sz="1500" b="0">
                 <a:solidFill>
                   <a:srgbClr val="F6F1E8"/>
@@ -5535,6 +5704,7 @@
               </a:defRPr>
             </a:lvl8pPr>
             <a:lvl9pPr>
+              <a:buNone/>
               <a:defRPr sz="1500" b="0">
                 <a:solidFill>
                   <a:srgbClr val="F6F1E8"/>
@@ -5544,6 +5714,7 @@
           </a:lstStyle>
           <a:p xmlns:a="http://schemas.openxmlformats.org/drawingml/2006/main">
             <a:pPr>
+              <a:buNone/>
               <a:defRPr sz="1500" b="0">
                 <a:solidFill>
                   <a:srgbClr val="F6F1E8"/>
@@ -5600,6 +5771,7 @@
               </a:defRPr>
             </a:defPPr>
             <a:lvl1pPr>
+              <a:buNone/>
               <a:defRPr sz="750" b="1">
                 <a:solidFill>
                   <a:srgbClr val="9AA2AD"/>
@@ -5607,6 +5779,7 @@
               </a:defRPr>
             </a:lvl1pPr>
             <a:lvl2pPr>
+              <a:buNone/>
               <a:defRPr sz="750" b="1">
                 <a:solidFill>
                   <a:srgbClr val="9AA2AD"/>
@@ -5614,6 +5787,7 @@
               </a:defRPr>
             </a:lvl2pPr>
             <a:lvl3pPr>
+              <a:buNone/>
               <a:defRPr sz="750" b="1">
                 <a:solidFill>
                   <a:srgbClr val="9AA2AD"/>
@@ -5621,6 +5795,7 @@
               </a:defRPr>
             </a:lvl3pPr>
             <a:lvl4pPr>
+              <a:buNone/>
               <a:defRPr sz="750" b="1">
                 <a:solidFill>
                   <a:srgbClr val="9AA2AD"/>
@@ -5628,6 +5803,7 @@
               </a:defRPr>
             </a:lvl4pPr>
             <a:lvl5pPr>
+              <a:buNone/>
               <a:defRPr sz="750" b="1">
                 <a:solidFill>
                   <a:srgbClr val="9AA2AD"/>
@@ -5635,6 +5811,7 @@
               </a:defRPr>
             </a:lvl5pPr>
             <a:lvl6pPr>
+              <a:buNone/>
               <a:defRPr sz="750" b="1">
                 <a:solidFill>
                   <a:srgbClr val="9AA2AD"/>
@@ -5642,6 +5819,7 @@
               </a:defRPr>
             </a:lvl6pPr>
             <a:lvl7pPr>
+              <a:buNone/>
               <a:defRPr sz="750" b="1">
                 <a:solidFill>
                   <a:srgbClr val="9AA2AD"/>
@@ -5649,6 +5827,7 @@
               </a:defRPr>
             </a:lvl7pPr>
             <a:lvl8pPr>
+              <a:buNone/>
               <a:defRPr sz="750" b="1">
                 <a:solidFill>
                   <a:srgbClr val="9AA2AD"/>
@@ -5656,6 +5835,7 @@
               </a:defRPr>
             </a:lvl8pPr>
             <a:lvl9pPr>
+              <a:buNone/>
               <a:defRPr sz="750" b="1">
                 <a:solidFill>
                   <a:srgbClr val="9AA2AD"/>
@@ -5665,6 +5845,7 @@
           </a:lstStyle>
           <a:p xmlns:a="http://schemas.openxmlformats.org/drawingml/2006/main">
             <a:pPr>
+              <a:buNone/>
               <a:defRPr sz="750" b="1">
                 <a:solidFill>
                   <a:srgbClr val="9AA2AD"/>
@@ -5721,6 +5902,7 @@
               </a:defRPr>
             </a:defPPr>
             <a:lvl1pPr>
+              <a:buNone/>
               <a:defRPr sz="900" b="1">
                 <a:solidFill>
                   <a:srgbClr val="B7D660"/>
@@ -5728,6 +5910,7 @@
               </a:defRPr>
             </a:lvl1pPr>
             <a:lvl2pPr>
+              <a:buNone/>
               <a:defRPr sz="900" b="1">
                 <a:solidFill>
                   <a:srgbClr val="B7D660"/>
@@ -5735,6 +5918,7 @@
               </a:defRPr>
             </a:lvl2pPr>
             <a:lvl3pPr>
+              <a:buNone/>
               <a:defRPr sz="900" b="1">
                 <a:solidFill>
                   <a:srgbClr val="B7D660"/>
@@ -5742,6 +5926,7 @@
               </a:defRPr>
             </a:lvl3pPr>
             <a:lvl4pPr>
+              <a:buNone/>
               <a:defRPr sz="900" b="1">
                 <a:solidFill>
                   <a:srgbClr val="B7D660"/>
@@ -5749,6 +5934,7 @@
               </a:defRPr>
             </a:lvl4pPr>
             <a:lvl5pPr>
+              <a:buNone/>
               <a:defRPr sz="900" b="1">
                 <a:solidFill>
                   <a:srgbClr val="B7D660"/>
@@ -5756,6 +5942,7 @@
               </a:defRPr>
             </a:lvl5pPr>
             <a:lvl6pPr>
+              <a:buNone/>
               <a:defRPr sz="900" b="1">
                 <a:solidFill>
                   <a:srgbClr val="B7D660"/>
@@ -5763,6 +5950,7 @@
               </a:defRPr>
             </a:lvl6pPr>
             <a:lvl7pPr>
+              <a:buNone/>
               <a:defRPr sz="900" b="1">
                 <a:solidFill>
                   <a:srgbClr val="B7D660"/>
@@ -5770,6 +5958,7 @@
               </a:defRPr>
             </a:lvl7pPr>
             <a:lvl8pPr>
+              <a:buNone/>
               <a:defRPr sz="900" b="1">
                 <a:solidFill>
                   <a:srgbClr val="B7D660"/>
@@ -5777,6 +5966,7 @@
               </a:defRPr>
             </a:lvl8pPr>
             <a:lvl9pPr>
+              <a:buNone/>
               <a:defRPr sz="900" b="1">
                 <a:solidFill>
                   <a:srgbClr val="B7D660"/>
@@ -5786,6 +5976,7 @@
           </a:lstStyle>
           <a:p xmlns:a="http://schemas.openxmlformats.org/drawingml/2006/main">
             <a:pPr>
+              <a:buNone/>
               <a:defRPr sz="900" b="1">
                 <a:solidFill>
                   <a:srgbClr val="B7D660"/>
@@ -5871,6 +6062,7 @@
               </a:defRPr>
             </a:defPPr>
             <a:lvl1pPr>
+              <a:buNone/>
               <a:defRPr sz="900" b="1">
                 <a:solidFill>
                   <a:srgbClr val="B7D660"/>
@@ -5878,6 +6070,7 @@
               </a:defRPr>
             </a:lvl1pPr>
             <a:lvl2pPr>
+              <a:buNone/>
               <a:defRPr sz="900" b="1">
                 <a:solidFill>
                   <a:srgbClr val="B7D660"/>
@@ -5885,6 +6078,7 @@
               </a:defRPr>
             </a:lvl2pPr>
             <a:lvl3pPr>
+              <a:buNone/>
               <a:defRPr sz="900" b="1">
                 <a:solidFill>
                   <a:srgbClr val="B7D660"/>
@@ -5892,6 +6086,7 @@
               </a:defRPr>
             </a:lvl3pPr>
             <a:lvl4pPr>
+              <a:buNone/>
               <a:defRPr sz="900" b="1">
                 <a:solidFill>
                   <a:srgbClr val="B7D660"/>
@@ -5899,6 +6094,7 @@
               </a:defRPr>
             </a:lvl4pPr>
             <a:lvl5pPr>
+              <a:buNone/>
               <a:defRPr sz="900" b="1">
                 <a:solidFill>
                   <a:srgbClr val="B7D660"/>
@@ -5906,6 +6102,7 @@
               </a:defRPr>
             </a:lvl5pPr>
             <a:lvl6pPr>
+              <a:buNone/>
               <a:defRPr sz="900" b="1">
                 <a:solidFill>
                   <a:srgbClr val="B7D660"/>
@@ -5913,6 +6110,7 @@
               </a:defRPr>
             </a:lvl6pPr>
             <a:lvl7pPr>
+              <a:buNone/>
               <a:defRPr sz="900" b="1">
                 <a:solidFill>
                   <a:srgbClr val="B7D660"/>
@@ -5920,6 +6118,7 @@
               </a:defRPr>
             </a:lvl7pPr>
             <a:lvl8pPr>
+              <a:buNone/>
               <a:defRPr sz="900" b="1">
                 <a:solidFill>
                   <a:srgbClr val="B7D660"/>
@@ -5927,6 +6126,7 @@
               </a:defRPr>
             </a:lvl8pPr>
             <a:lvl9pPr>
+              <a:buNone/>
               <a:defRPr sz="900" b="1">
                 <a:solidFill>
                   <a:srgbClr val="B7D660"/>
@@ -5936,6 +6136,7 @@
           </a:lstStyle>
           <a:p xmlns:a="http://schemas.openxmlformats.org/drawingml/2006/main">
             <a:pPr>
+              <a:buNone/>
               <a:defRPr sz="900" b="1">
                 <a:solidFill>
                   <a:srgbClr val="B7D660"/>
@@ -5992,6 +6193,7 @@
               </a:defRPr>
             </a:defPPr>
             <a:lvl1pPr>
+              <a:buNone/>
               <a:defRPr sz="3150" b="1">
                 <a:solidFill>
                   <a:srgbClr val="F6F1E8"/>
@@ -5999,6 +6201,7 @@
               </a:defRPr>
             </a:lvl1pPr>
             <a:lvl2pPr>
+              <a:buNone/>
               <a:defRPr sz="3150" b="1">
                 <a:solidFill>
                   <a:srgbClr val="F6F1E8"/>
@@ -6006,6 +6209,7 @@
               </a:defRPr>
             </a:lvl2pPr>
             <a:lvl3pPr>
+              <a:buNone/>
               <a:defRPr sz="3150" b="1">
                 <a:solidFill>
                   <a:srgbClr val="F6F1E8"/>
@@ -6013,6 +6217,7 @@
               </a:defRPr>
             </a:lvl3pPr>
             <a:lvl4pPr>
+              <a:buNone/>
               <a:defRPr sz="3150" b="1">
                 <a:solidFill>
                   <a:srgbClr val="F6F1E8"/>
@@ -6020,6 +6225,7 @@
               </a:defRPr>
             </a:lvl4pPr>
             <a:lvl5pPr>
+              <a:buNone/>
               <a:defRPr sz="3150" b="1">
                 <a:solidFill>
                   <a:srgbClr val="F6F1E8"/>
@@ -6027,6 +6233,7 @@
               </a:defRPr>
             </a:lvl5pPr>
             <a:lvl6pPr>
+              <a:buNone/>
               <a:defRPr sz="3150" b="1">
                 <a:solidFill>
                   <a:srgbClr val="F6F1E8"/>
@@ -6034,6 +6241,7 @@
               </a:defRPr>
             </a:lvl6pPr>
             <a:lvl7pPr>
+              <a:buNone/>
               <a:defRPr sz="3150" b="1">
                 <a:solidFill>
                   <a:srgbClr val="F6F1E8"/>
@@ -6041,6 +6249,7 @@
               </a:defRPr>
             </a:lvl7pPr>
             <a:lvl8pPr>
+              <a:buNone/>
               <a:defRPr sz="3150" b="1">
                 <a:solidFill>
                   <a:srgbClr val="F6F1E8"/>
@@ -6048,6 +6257,7 @@
               </a:defRPr>
             </a:lvl8pPr>
             <a:lvl9pPr>
+              <a:buNone/>
               <a:defRPr sz="3150" b="1">
                 <a:solidFill>
                   <a:srgbClr val="F6F1E8"/>
@@ -6057,6 +6267,7 @@
           </a:lstStyle>
           <a:p xmlns:a="http://schemas.openxmlformats.org/drawingml/2006/main">
             <a:pPr>
+              <a:buNone/>
               <a:defRPr sz="3150" b="1">
                 <a:solidFill>
                   <a:srgbClr val="F6F1E8"/>
@@ -6113,6 +6324,7 @@
               </a:defRPr>
             </a:defPPr>
             <a:lvl1pPr>
+              <a:buNone/>
               <a:defRPr sz="1350" b="0">
                 <a:solidFill>
                   <a:srgbClr val="9AA2AD"/>
@@ -6120,6 +6332,7 @@
               </a:defRPr>
             </a:lvl1pPr>
             <a:lvl2pPr>
+              <a:buNone/>
               <a:defRPr sz="1350" b="0">
                 <a:solidFill>
                   <a:srgbClr val="9AA2AD"/>
@@ -6127,6 +6340,7 @@
               </a:defRPr>
             </a:lvl2pPr>
             <a:lvl3pPr>
+              <a:buNone/>
               <a:defRPr sz="1350" b="0">
                 <a:solidFill>
                   <a:srgbClr val="9AA2AD"/>
@@ -6134,6 +6348,7 @@
               </a:defRPr>
             </a:lvl3pPr>
             <a:lvl4pPr>
+              <a:buNone/>
               <a:defRPr sz="1350" b="0">
                 <a:solidFill>
                   <a:srgbClr val="9AA2AD"/>
@@ -6141,6 +6356,7 @@
               </a:defRPr>
             </a:lvl4pPr>
             <a:lvl5pPr>
+              <a:buNone/>
               <a:defRPr sz="1350" b="0">
                 <a:solidFill>
                   <a:srgbClr val="9AA2AD"/>
@@ -6148,6 +6364,7 @@
               </a:defRPr>
             </a:lvl5pPr>
             <a:lvl6pPr>
+              <a:buNone/>
               <a:defRPr sz="1350" b="0">
                 <a:solidFill>
                   <a:srgbClr val="9AA2AD"/>
@@ -6155,6 +6372,7 @@
               </a:defRPr>
             </a:lvl6pPr>
             <a:lvl7pPr>
+              <a:buNone/>
               <a:defRPr sz="1350" b="0">
                 <a:solidFill>
                   <a:srgbClr val="9AA2AD"/>
@@ -6162,6 +6380,7 @@
               </a:defRPr>
             </a:lvl7pPr>
             <a:lvl8pPr>
+              <a:buNone/>
               <a:defRPr sz="1350" b="0">
                 <a:solidFill>
                   <a:srgbClr val="9AA2AD"/>
@@ -6169,6 +6388,7 @@
               </a:defRPr>
             </a:lvl8pPr>
             <a:lvl9pPr>
+              <a:buNone/>
               <a:defRPr sz="1350" b="0">
                 <a:solidFill>
                   <a:srgbClr val="9AA2AD"/>
@@ -6178,6 +6398,7 @@
           </a:lstStyle>
           <a:p xmlns:a="http://schemas.openxmlformats.org/drawingml/2006/main">
             <a:pPr>
+              <a:buNone/>
               <a:defRPr sz="1350" b="0">
                 <a:solidFill>
                   <a:srgbClr val="9AA2AD"/>
@@ -6190,7 +6411,7 @@
                   <a:srgbClr val="9AA2AD"/>
                 </a:solidFill>
               </a:rPr>
-              <a:t>Four SQL conservation checks run in Exasol Personal. The LLM writes notes only after SQL has selected a case.</a:t>
+              <a:t>Six SQL checks form four source families. Displayed notes use a validated deterministic fallback; an LLM is optional.</a:t>
             </a:r>
           </a:p>
         </p:txBody>
@@ -6267,6 +6488,7 @@
               </a:defRPr>
             </a:defPPr>
             <a:lvl1pPr>
+              <a:buNone/>
               <a:defRPr sz="1050" b="1">
                 <a:solidFill>
                   <a:srgbClr val="E8418A"/>
@@ -6274,6 +6496,7 @@
               </a:defRPr>
             </a:lvl1pPr>
             <a:lvl2pPr>
+              <a:buNone/>
               <a:defRPr sz="1050" b="1">
                 <a:solidFill>
                   <a:srgbClr val="E8418A"/>
@@ -6281,6 +6504,7 @@
               </a:defRPr>
             </a:lvl2pPr>
             <a:lvl3pPr>
+              <a:buNone/>
               <a:defRPr sz="1050" b="1">
                 <a:solidFill>
                   <a:srgbClr val="E8418A"/>
@@ -6288,6 +6512,7 @@
               </a:defRPr>
             </a:lvl3pPr>
             <a:lvl4pPr>
+              <a:buNone/>
               <a:defRPr sz="1050" b="1">
                 <a:solidFill>
                   <a:srgbClr val="E8418A"/>
@@ -6295,6 +6520,7 @@
               </a:defRPr>
             </a:lvl4pPr>
             <a:lvl5pPr>
+              <a:buNone/>
               <a:defRPr sz="1050" b="1">
                 <a:solidFill>
                   <a:srgbClr val="E8418A"/>
@@ -6302,6 +6528,7 @@
               </a:defRPr>
             </a:lvl5pPr>
             <a:lvl6pPr>
+              <a:buNone/>
               <a:defRPr sz="1050" b="1">
                 <a:solidFill>
                   <a:srgbClr val="E8418A"/>
@@ -6309,6 +6536,7 @@
               </a:defRPr>
             </a:lvl6pPr>
             <a:lvl7pPr>
+              <a:buNone/>
               <a:defRPr sz="1050" b="1">
                 <a:solidFill>
                   <a:srgbClr val="E8418A"/>
@@ -6316,6 +6544,7 @@
               </a:defRPr>
             </a:lvl7pPr>
             <a:lvl8pPr>
+              <a:buNone/>
               <a:defRPr sz="1050" b="1">
                 <a:solidFill>
                   <a:srgbClr val="E8418A"/>
@@ -6323,6 +6552,7 @@
               </a:defRPr>
             </a:lvl8pPr>
             <a:lvl9pPr>
+              <a:buNone/>
               <a:defRPr sz="1050" b="1">
                 <a:solidFill>
                   <a:srgbClr val="E8418A"/>
@@ -6332,6 +6562,7 @@
           </a:lstStyle>
           <a:p xmlns:a="http://schemas.openxmlformats.org/drawingml/2006/main">
             <a:pPr>
+              <a:buNone/>
               <a:defRPr sz="1050" b="1">
                 <a:solidFill>
                   <a:srgbClr val="E8418A"/>
@@ -6388,6 +6619,7 @@
               </a:defRPr>
             </a:defPPr>
             <a:lvl1pPr>
+              <a:buNone/>
               <a:defRPr sz="1650" b="1">
                 <a:solidFill>
                   <a:srgbClr val="F6F1E8"/>
@@ -6395,6 +6627,7 @@
               </a:defRPr>
             </a:lvl1pPr>
             <a:lvl2pPr>
+              <a:buNone/>
               <a:defRPr sz="1650" b="1">
                 <a:solidFill>
                   <a:srgbClr val="F6F1E8"/>
@@ -6402,6 +6635,7 @@
               </a:defRPr>
             </a:lvl2pPr>
             <a:lvl3pPr>
+              <a:buNone/>
               <a:defRPr sz="1650" b="1">
                 <a:solidFill>
                   <a:srgbClr val="F6F1E8"/>
@@ -6409,6 +6643,7 @@
               </a:defRPr>
             </a:lvl3pPr>
             <a:lvl4pPr>
+              <a:buNone/>
               <a:defRPr sz="1650" b="1">
                 <a:solidFill>
                   <a:srgbClr val="F6F1E8"/>
@@ -6416,6 +6651,7 @@
               </a:defRPr>
             </a:lvl4pPr>
             <a:lvl5pPr>
+              <a:buNone/>
               <a:defRPr sz="1650" b="1">
                 <a:solidFill>
                   <a:srgbClr val="F6F1E8"/>
@@ -6423,6 +6659,7 @@
               </a:defRPr>
             </a:lvl5pPr>
             <a:lvl6pPr>
+              <a:buNone/>
               <a:defRPr sz="1650" b="1">
                 <a:solidFill>
                   <a:srgbClr val="F6F1E8"/>
@@ -6430,6 +6667,7 @@
               </a:defRPr>
             </a:lvl6pPr>
             <a:lvl7pPr>
+              <a:buNone/>
               <a:defRPr sz="1650" b="1">
                 <a:solidFill>
                   <a:srgbClr val="F6F1E8"/>
@@ -6437,6 +6675,7 @@
               </a:defRPr>
             </a:lvl7pPr>
             <a:lvl8pPr>
+              <a:buNone/>
               <a:defRPr sz="1650" b="1">
                 <a:solidFill>
                   <a:srgbClr val="F6F1E8"/>
@@ -6444,6 +6683,7 @@
               </a:defRPr>
             </a:lvl8pPr>
             <a:lvl9pPr>
+              <a:buNone/>
               <a:defRPr sz="1650" b="1">
                 <a:solidFill>
                   <a:srgbClr val="F6F1E8"/>
@@ -6453,6 +6693,7 @@
           </a:lstStyle>
           <a:p xmlns:a="http://schemas.openxmlformats.org/drawingml/2006/main">
             <a:pPr>
+              <a:buNone/>
               <a:defRPr sz="1650" b="1">
                 <a:solidFill>
                   <a:srgbClr val="F6F1E8"/>
@@ -6465,7 +6706,7 @@
                   <a:srgbClr val="F6F1E8"/>
                 </a:solidFill>
               </a:rPr>
-              <a:t>Material → output</a:t>
+              <a:t>Production</a:t>
             </a:r>
           </a:p>
         </p:txBody>
@@ -6509,6 +6750,7 @@
               </a:defRPr>
             </a:defPPr>
             <a:lvl1pPr>
+              <a:buNone/>
               <a:defRPr sz="1050" b="0">
                 <a:solidFill>
                   <a:srgbClr val="9AA2AD"/>
@@ -6516,6 +6758,7 @@
               </a:defRPr>
             </a:lvl1pPr>
             <a:lvl2pPr>
+              <a:buNone/>
               <a:defRPr sz="1050" b="0">
                 <a:solidFill>
                   <a:srgbClr val="9AA2AD"/>
@@ -6523,6 +6766,7 @@
               </a:defRPr>
             </a:lvl2pPr>
             <a:lvl3pPr>
+              <a:buNone/>
               <a:defRPr sz="1050" b="0">
                 <a:solidFill>
                   <a:srgbClr val="9AA2AD"/>
@@ -6530,6 +6774,7 @@
               </a:defRPr>
             </a:lvl3pPr>
             <a:lvl4pPr>
+              <a:buNone/>
               <a:defRPr sz="1050" b="0">
                 <a:solidFill>
                   <a:srgbClr val="9AA2AD"/>
@@ -6537,6 +6782,7 @@
               </a:defRPr>
             </a:lvl4pPr>
             <a:lvl5pPr>
+              <a:buNone/>
               <a:defRPr sz="1050" b="0">
                 <a:solidFill>
                   <a:srgbClr val="9AA2AD"/>
@@ -6544,6 +6790,7 @@
               </a:defRPr>
             </a:lvl5pPr>
             <a:lvl6pPr>
+              <a:buNone/>
               <a:defRPr sz="1050" b="0">
                 <a:solidFill>
                   <a:srgbClr val="9AA2AD"/>
@@ -6551,6 +6798,7 @@
               </a:defRPr>
             </a:lvl6pPr>
             <a:lvl7pPr>
+              <a:buNone/>
               <a:defRPr sz="1050" b="0">
                 <a:solidFill>
                   <a:srgbClr val="9AA2AD"/>
@@ -6558,6 +6806,7 @@
               </a:defRPr>
             </a:lvl7pPr>
             <a:lvl8pPr>
+              <a:buNone/>
               <a:defRPr sz="1050" b="0">
                 <a:solidFill>
                   <a:srgbClr val="9AA2AD"/>
@@ -6565,6 +6814,7 @@
               </a:defRPr>
             </a:lvl8pPr>
             <a:lvl9pPr>
+              <a:buNone/>
               <a:defRPr sz="1050" b="0">
                 <a:solidFill>
                   <a:srgbClr val="9AA2AD"/>
@@ -6574,6 +6824,7 @@
           </a:lstStyle>
           <a:p xmlns:a="http://schemas.openxmlformats.org/drawingml/2006/main">
             <a:pPr>
+              <a:buNone/>
               <a:defRPr sz="1050" b="0">
                 <a:solidFill>
                   <a:srgbClr val="9AA2AD"/>
@@ -6586,7 +6837,7 @@
                   <a:srgbClr val="9AA2AD"/>
                 </a:solidFill>
               </a:rPr>
-              <a:t>Purchased inputs and power</a:t>
+              <a:t>Material, power and stock</a:t>
             </a:r>
           </a:p>
         </p:txBody>
@@ -6663,6 +6914,7 @@
               </a:defRPr>
             </a:defPPr>
             <a:lvl1pPr>
+              <a:buNone/>
               <a:defRPr sz="1050" b="1">
                 <a:solidFill>
                   <a:srgbClr val="E8418A"/>
@@ -6670,6 +6922,7 @@
               </a:defRPr>
             </a:lvl1pPr>
             <a:lvl2pPr>
+              <a:buNone/>
               <a:defRPr sz="1050" b="1">
                 <a:solidFill>
                   <a:srgbClr val="E8418A"/>
@@ -6677,6 +6930,7 @@
               </a:defRPr>
             </a:lvl2pPr>
             <a:lvl3pPr>
+              <a:buNone/>
               <a:defRPr sz="1050" b="1">
                 <a:solidFill>
                   <a:srgbClr val="E8418A"/>
@@ -6684,6 +6938,7 @@
               </a:defRPr>
             </a:lvl3pPr>
             <a:lvl4pPr>
+              <a:buNone/>
               <a:defRPr sz="1050" b="1">
                 <a:solidFill>
                   <a:srgbClr val="E8418A"/>
@@ -6691,6 +6946,7 @@
               </a:defRPr>
             </a:lvl4pPr>
             <a:lvl5pPr>
+              <a:buNone/>
               <a:defRPr sz="1050" b="1">
                 <a:solidFill>
                   <a:srgbClr val="E8418A"/>
@@ -6698,6 +6954,7 @@
               </a:defRPr>
             </a:lvl5pPr>
             <a:lvl6pPr>
+              <a:buNone/>
               <a:defRPr sz="1050" b="1">
                 <a:solidFill>
                   <a:srgbClr val="E8418A"/>
@@ -6705,6 +6962,7 @@
               </a:defRPr>
             </a:lvl6pPr>
             <a:lvl7pPr>
+              <a:buNone/>
               <a:defRPr sz="1050" b="1">
                 <a:solidFill>
                   <a:srgbClr val="E8418A"/>
@@ -6712,6 +6970,7 @@
               </a:defRPr>
             </a:lvl7pPr>
             <a:lvl8pPr>
+              <a:buNone/>
               <a:defRPr sz="1050" b="1">
                 <a:solidFill>
                   <a:srgbClr val="E8418A"/>
@@ -6719,6 +6978,7 @@
               </a:defRPr>
             </a:lvl8pPr>
             <a:lvl9pPr>
+              <a:buNone/>
               <a:defRPr sz="1050" b="1">
                 <a:solidFill>
                   <a:srgbClr val="E8418A"/>
@@ -6728,6 +6988,7 @@
           </a:lstStyle>
           <a:p xmlns:a="http://schemas.openxmlformats.org/drawingml/2006/main">
             <a:pPr>
+              <a:buNone/>
               <a:defRPr sz="1050" b="1">
                 <a:solidFill>
                   <a:srgbClr val="E8418A"/>
@@ -6784,6 +7045,7 @@
               </a:defRPr>
             </a:defPPr>
             <a:lvl1pPr>
+              <a:buNone/>
               <a:defRPr sz="1650" b="1">
                 <a:solidFill>
                   <a:srgbClr val="F6F1E8"/>
@@ -6791,6 +7053,7 @@
               </a:defRPr>
             </a:lvl1pPr>
             <a:lvl2pPr>
+              <a:buNone/>
               <a:defRPr sz="1650" b="1">
                 <a:solidFill>
                   <a:srgbClr val="F6F1E8"/>
@@ -6798,6 +7061,7 @@
               </a:defRPr>
             </a:lvl2pPr>
             <a:lvl3pPr>
+              <a:buNone/>
               <a:defRPr sz="1650" b="1">
                 <a:solidFill>
                   <a:srgbClr val="F6F1E8"/>
@@ -6805,6 +7069,7 @@
               </a:defRPr>
             </a:lvl3pPr>
             <a:lvl4pPr>
+              <a:buNone/>
               <a:defRPr sz="1650" b="1">
                 <a:solidFill>
                   <a:srgbClr val="F6F1E8"/>
@@ -6812,6 +7077,7 @@
               </a:defRPr>
             </a:lvl4pPr>
             <a:lvl5pPr>
+              <a:buNone/>
               <a:defRPr sz="1650" b="1">
                 <a:solidFill>
                   <a:srgbClr val="F6F1E8"/>
@@ -6819,6 +7085,7 @@
               </a:defRPr>
             </a:lvl5pPr>
             <a:lvl6pPr>
+              <a:buNone/>
               <a:defRPr sz="1650" b="1">
                 <a:solidFill>
                   <a:srgbClr val="F6F1E8"/>
@@ -6826,6 +7093,7 @@
               </a:defRPr>
             </a:lvl6pPr>
             <a:lvl7pPr>
+              <a:buNone/>
               <a:defRPr sz="1650" b="1">
                 <a:solidFill>
                   <a:srgbClr val="F6F1E8"/>
@@ -6833,6 +7101,7 @@
               </a:defRPr>
             </a:lvl7pPr>
             <a:lvl8pPr>
+              <a:buNone/>
               <a:defRPr sz="1650" b="1">
                 <a:solidFill>
                   <a:srgbClr val="F6F1E8"/>
@@ -6840,6 +7109,7 @@
               </a:defRPr>
             </a:lvl8pPr>
             <a:lvl9pPr>
+              <a:buNone/>
               <a:defRPr sz="1650" b="1">
                 <a:solidFill>
                   <a:srgbClr val="F6F1E8"/>
@@ -6849,6 +7119,7 @@
           </a:lstStyle>
           <a:p xmlns:a="http://schemas.openxmlformats.org/drawingml/2006/main">
             <a:pPr>
+              <a:buNone/>
               <a:defRPr sz="1650" b="1">
                 <a:solidFill>
                   <a:srgbClr val="F6F1E8"/>
@@ -6861,7 +7132,7 @@
                   <a:srgbClr val="F6F1E8"/>
                 </a:solidFill>
               </a:rPr>
-              <a:t>Dispatch → invoice</a:t>
+              <a:t>Movement</a:t>
             </a:r>
           </a:p>
         </p:txBody>
@@ -6905,6 +7176,7 @@
               </a:defRPr>
             </a:defPPr>
             <a:lvl1pPr>
+              <a:buNone/>
               <a:defRPr sz="1050" b="0">
                 <a:solidFill>
                   <a:srgbClr val="9AA2AD"/>
@@ -6912,6 +7184,7 @@
               </a:defRPr>
             </a:lvl1pPr>
             <a:lvl2pPr>
+              <a:buNone/>
               <a:defRPr sz="1050" b="0">
                 <a:solidFill>
                   <a:srgbClr val="9AA2AD"/>
@@ -6919,6 +7192,7 @@
               </a:defRPr>
             </a:lvl2pPr>
             <a:lvl3pPr>
+              <a:buNone/>
               <a:defRPr sz="1050" b="0">
                 <a:solidFill>
                   <a:srgbClr val="9AA2AD"/>
@@ -6926,6 +7200,7 @@
               </a:defRPr>
             </a:lvl3pPr>
             <a:lvl4pPr>
+              <a:buNone/>
               <a:defRPr sz="1050" b="0">
                 <a:solidFill>
                   <a:srgbClr val="9AA2AD"/>
@@ -6933,6 +7208,7 @@
               </a:defRPr>
             </a:lvl4pPr>
             <a:lvl5pPr>
+              <a:buNone/>
               <a:defRPr sz="1050" b="0">
                 <a:solidFill>
                   <a:srgbClr val="9AA2AD"/>
@@ -6940,6 +7216,7 @@
               </a:defRPr>
             </a:lvl5pPr>
             <a:lvl6pPr>
+              <a:buNone/>
               <a:defRPr sz="1050" b="0">
                 <a:solidFill>
                   <a:srgbClr val="9AA2AD"/>
@@ -6947,6 +7224,7 @@
               </a:defRPr>
             </a:lvl6pPr>
             <a:lvl7pPr>
+              <a:buNone/>
               <a:defRPr sz="1050" b="0">
                 <a:solidFill>
                   <a:srgbClr val="9AA2AD"/>
@@ -6954,6 +7232,7 @@
               </a:defRPr>
             </a:lvl7pPr>
             <a:lvl8pPr>
+              <a:buNone/>
               <a:defRPr sz="1050" b="0">
                 <a:solidFill>
                   <a:srgbClr val="9AA2AD"/>
@@ -6961,6 +7240,7 @@
               </a:defRPr>
             </a:lvl8pPr>
             <a:lvl9pPr>
+              <a:buNone/>
               <a:defRPr sz="1050" b="0">
                 <a:solidFill>
                   <a:srgbClr val="9AA2AD"/>
@@ -6970,6 +7250,7 @@
           </a:lstStyle>
           <a:p xmlns:a="http://schemas.openxmlformats.org/drawingml/2006/main">
             <a:pPr>
+              <a:buNone/>
               <a:defRPr sz="1050" b="0">
                 <a:solidFill>
                   <a:srgbClr val="9AA2AD"/>
@@ -6982,7 +7263,7 @@
                   <a:srgbClr val="9AA2AD"/>
                 </a:solidFill>
               </a:rPr>
-              <a:t>Goods movement and invoice</a:t>
+              <a:t>Dispatch, invoice and reuse</a:t>
             </a:r>
           </a:p>
         </p:txBody>
@@ -7059,6 +7340,7 @@
               </a:defRPr>
             </a:defPPr>
             <a:lvl1pPr>
+              <a:buNone/>
               <a:defRPr sz="1050" b="1">
                 <a:solidFill>
                   <a:srgbClr val="E8418A"/>
@@ -7066,6 +7348,7 @@
               </a:defRPr>
             </a:lvl1pPr>
             <a:lvl2pPr>
+              <a:buNone/>
               <a:defRPr sz="1050" b="1">
                 <a:solidFill>
                   <a:srgbClr val="E8418A"/>
@@ -7073,6 +7356,7 @@
               </a:defRPr>
             </a:lvl2pPr>
             <a:lvl3pPr>
+              <a:buNone/>
               <a:defRPr sz="1050" b="1">
                 <a:solidFill>
                   <a:srgbClr val="E8418A"/>
@@ -7080,6 +7364,7 @@
               </a:defRPr>
             </a:lvl3pPr>
             <a:lvl4pPr>
+              <a:buNone/>
               <a:defRPr sz="1050" b="1">
                 <a:solidFill>
                   <a:srgbClr val="E8418A"/>
@@ -7087,6 +7372,7 @@
               </a:defRPr>
             </a:lvl4pPr>
             <a:lvl5pPr>
+              <a:buNone/>
               <a:defRPr sz="1050" b="1">
                 <a:solidFill>
                   <a:srgbClr val="E8418A"/>
@@ -7094,6 +7380,7 @@
               </a:defRPr>
             </a:lvl5pPr>
             <a:lvl6pPr>
+              <a:buNone/>
               <a:defRPr sz="1050" b="1">
                 <a:solidFill>
                   <a:srgbClr val="E8418A"/>
@@ -7101,6 +7388,7 @@
               </a:defRPr>
             </a:lvl6pPr>
             <a:lvl7pPr>
+              <a:buNone/>
               <a:defRPr sz="1050" b="1">
                 <a:solidFill>
                   <a:srgbClr val="E8418A"/>
@@ -7108,6 +7396,7 @@
               </a:defRPr>
             </a:lvl7pPr>
             <a:lvl8pPr>
+              <a:buNone/>
               <a:defRPr sz="1050" b="1">
                 <a:solidFill>
                   <a:srgbClr val="E8418A"/>
@@ -7115,6 +7404,7 @@
               </a:defRPr>
             </a:lvl8pPr>
             <a:lvl9pPr>
+              <a:buNone/>
               <a:defRPr sz="1050" b="1">
                 <a:solidFill>
                   <a:srgbClr val="E8418A"/>
@@ -7124,6 +7414,7 @@
           </a:lstStyle>
           <a:p xmlns:a="http://schemas.openxmlformats.org/drawingml/2006/main">
             <a:pPr>
+              <a:buNone/>
               <a:defRPr sz="1050" b="1">
                 <a:solidFill>
                   <a:srgbClr val="E8418A"/>
@@ -7180,6 +7471,7 @@
               </a:defRPr>
             </a:defPPr>
             <a:lvl1pPr>
+              <a:buNone/>
               <a:defRPr sz="1650" b="1">
                 <a:solidFill>
                   <a:srgbClr val="F6F1E8"/>
@@ -7187,6 +7479,7 @@
               </a:defRPr>
             </a:lvl1pPr>
             <a:lvl2pPr>
+              <a:buNone/>
               <a:defRPr sz="1650" b="1">
                 <a:solidFill>
                   <a:srgbClr val="F6F1E8"/>
@@ -7194,6 +7487,7 @@
               </a:defRPr>
             </a:lvl2pPr>
             <a:lvl3pPr>
+              <a:buNone/>
               <a:defRPr sz="1650" b="1">
                 <a:solidFill>
                   <a:srgbClr val="F6F1E8"/>
@@ -7201,6 +7495,7 @@
               </a:defRPr>
             </a:lvl3pPr>
             <a:lvl4pPr>
+              <a:buNone/>
               <a:defRPr sz="1650" b="1">
                 <a:solidFill>
                   <a:srgbClr val="F6F1E8"/>
@@ -7208,6 +7503,7 @@
               </a:defRPr>
             </a:lvl4pPr>
             <a:lvl5pPr>
+              <a:buNone/>
               <a:defRPr sz="1650" b="1">
                 <a:solidFill>
                   <a:srgbClr val="F6F1E8"/>
@@ -7215,6 +7511,7 @@
               </a:defRPr>
             </a:lvl5pPr>
             <a:lvl6pPr>
+              <a:buNone/>
               <a:defRPr sz="1650" b="1">
                 <a:solidFill>
                   <a:srgbClr val="F6F1E8"/>
@@ -7222,6 +7519,7 @@
               </a:defRPr>
             </a:lvl6pPr>
             <a:lvl7pPr>
+              <a:buNone/>
               <a:defRPr sz="1650" b="1">
                 <a:solidFill>
                   <a:srgbClr val="F6F1E8"/>
@@ -7229,6 +7527,7 @@
               </a:defRPr>
             </a:lvl7pPr>
             <a:lvl8pPr>
+              <a:buNone/>
               <a:defRPr sz="1650" b="1">
                 <a:solidFill>
                   <a:srgbClr val="F6F1E8"/>
@@ -7236,6 +7535,7 @@
               </a:defRPr>
             </a:lvl8pPr>
             <a:lvl9pPr>
+              <a:buNone/>
               <a:defRPr sz="1650" b="1">
                 <a:solidFill>
                   <a:srgbClr val="F6F1E8"/>
@@ -7245,6 +7545,7 @@
           </a:lstStyle>
           <a:p xmlns:a="http://schemas.openxmlformats.org/drawingml/2006/main">
             <a:pPr>
+              <a:buNone/>
               <a:defRPr sz="1650" b="1">
                 <a:solidFill>
                   <a:srgbClr val="F6F1E8"/>
@@ -7257,7 +7558,7 @@
                   <a:srgbClr val="F6F1E8"/>
                 </a:solidFill>
               </a:rPr>
-              <a:t>Stock roll-forward</a:t>
+              <a:t>Supplier</a:t>
             </a:r>
           </a:p>
         </p:txBody>
@@ -7301,6 +7602,7 @@
               </a:defRPr>
             </a:defPPr>
             <a:lvl1pPr>
+              <a:buNone/>
               <a:defRPr sz="1050" b="0">
                 <a:solidFill>
                   <a:srgbClr val="9AA2AD"/>
@@ -7308,6 +7610,7 @@
               </a:defRPr>
             </a:lvl1pPr>
             <a:lvl2pPr>
+              <a:buNone/>
               <a:defRPr sz="1050" b="0">
                 <a:solidFill>
                   <a:srgbClr val="9AA2AD"/>
@@ -7315,6 +7618,7 @@
               </a:defRPr>
             </a:lvl2pPr>
             <a:lvl3pPr>
+              <a:buNone/>
               <a:defRPr sz="1050" b="0">
                 <a:solidFill>
                   <a:srgbClr val="9AA2AD"/>
@@ -7322,6 +7626,7 @@
               </a:defRPr>
             </a:lvl3pPr>
             <a:lvl4pPr>
+              <a:buNone/>
               <a:defRPr sz="1050" b="0">
                 <a:solidFill>
                   <a:srgbClr val="9AA2AD"/>
@@ -7329,6 +7634,7 @@
               </a:defRPr>
             </a:lvl4pPr>
             <a:lvl5pPr>
+              <a:buNone/>
               <a:defRPr sz="1050" b="0">
                 <a:solidFill>
                   <a:srgbClr val="9AA2AD"/>
@@ -7336,6 +7642,7 @@
               </a:defRPr>
             </a:lvl5pPr>
             <a:lvl6pPr>
+              <a:buNone/>
               <a:defRPr sz="1050" b="0">
                 <a:solidFill>
                   <a:srgbClr val="9AA2AD"/>
@@ -7343,6 +7650,7 @@
               </a:defRPr>
             </a:lvl6pPr>
             <a:lvl7pPr>
+              <a:buNone/>
               <a:defRPr sz="1050" b="0">
                 <a:solidFill>
                   <a:srgbClr val="9AA2AD"/>
@@ -7350,6 +7658,7 @@
               </a:defRPr>
             </a:lvl7pPr>
             <a:lvl8pPr>
+              <a:buNone/>
               <a:defRPr sz="1050" b="0">
                 <a:solidFill>
                   <a:srgbClr val="9AA2AD"/>
@@ -7357,6 +7666,7 @@
               </a:defRPr>
             </a:lvl8pPr>
             <a:lvl9pPr>
+              <a:buNone/>
               <a:defRPr sz="1050" b="0">
                 <a:solidFill>
                   <a:srgbClr val="9AA2AD"/>
@@ -7366,6 +7676,7 @@
           </a:lstStyle>
           <a:p xmlns:a="http://schemas.openxmlformats.org/drawingml/2006/main">
             <a:pPr>
+              <a:buNone/>
               <a:defRPr sz="1050" b="0">
                 <a:solidFill>
                   <a:srgbClr val="9AA2AD"/>
@@ -7378,7 +7689,7 @@
                   <a:srgbClr val="9AA2AD"/>
                 </a:solidFill>
               </a:rPr>
-              <a:t>Opening, production and dispatch</a:t>
+              <a:t>Supplier returns; loop context</a:t>
             </a:r>
           </a:p>
         </p:txBody>
@@ -7455,6 +7766,7 @@
               </a:defRPr>
             </a:defPPr>
             <a:lvl1pPr>
+              <a:buNone/>
               <a:defRPr sz="1050" b="1">
                 <a:solidFill>
                   <a:srgbClr val="E8418A"/>
@@ -7462,6 +7774,7 @@
               </a:defRPr>
             </a:lvl1pPr>
             <a:lvl2pPr>
+              <a:buNone/>
               <a:defRPr sz="1050" b="1">
                 <a:solidFill>
                   <a:srgbClr val="E8418A"/>
@@ -7469,6 +7782,7 @@
               </a:defRPr>
             </a:lvl2pPr>
             <a:lvl3pPr>
+              <a:buNone/>
               <a:defRPr sz="1050" b="1">
                 <a:solidFill>
                   <a:srgbClr val="E8418A"/>
@@ -7476,6 +7790,7 @@
               </a:defRPr>
             </a:lvl3pPr>
             <a:lvl4pPr>
+              <a:buNone/>
               <a:defRPr sz="1050" b="1">
                 <a:solidFill>
                   <a:srgbClr val="E8418A"/>
@@ -7483,6 +7798,7 @@
               </a:defRPr>
             </a:lvl4pPr>
             <a:lvl5pPr>
+              <a:buNone/>
               <a:defRPr sz="1050" b="1">
                 <a:solidFill>
                   <a:srgbClr val="E8418A"/>
@@ -7490,6 +7806,7 @@
               </a:defRPr>
             </a:lvl5pPr>
             <a:lvl6pPr>
+              <a:buNone/>
               <a:defRPr sz="1050" b="1">
                 <a:solidFill>
                   <a:srgbClr val="E8418A"/>
@@ -7497,6 +7814,7 @@
               </a:defRPr>
             </a:lvl6pPr>
             <a:lvl7pPr>
+              <a:buNone/>
               <a:defRPr sz="1050" b="1">
                 <a:solidFill>
                   <a:srgbClr val="E8418A"/>
@@ -7504,6 +7822,7 @@
               </a:defRPr>
             </a:lvl7pPr>
             <a:lvl8pPr>
+              <a:buNone/>
               <a:defRPr sz="1050" b="1">
                 <a:solidFill>
                   <a:srgbClr val="E8418A"/>
@@ -7511,6 +7830,7 @@
               </a:defRPr>
             </a:lvl8pPr>
             <a:lvl9pPr>
+              <a:buNone/>
               <a:defRPr sz="1050" b="1">
                 <a:solidFill>
                   <a:srgbClr val="E8418A"/>
@@ -7520,6 +7840,7 @@
           </a:lstStyle>
           <a:p xmlns:a="http://schemas.openxmlformats.org/drawingml/2006/main">
             <a:pPr>
+              <a:buNone/>
               <a:defRPr sz="1050" b="1">
                 <a:solidFill>
                   <a:srgbClr val="E8418A"/>
@@ -7576,6 +7897,7 @@
               </a:defRPr>
             </a:defPPr>
             <a:lvl1pPr>
+              <a:buNone/>
               <a:defRPr sz="1650" b="1">
                 <a:solidFill>
                   <a:srgbClr val="F6F1E8"/>
@@ -7583,6 +7905,7 @@
               </a:defRPr>
             </a:lvl1pPr>
             <a:lvl2pPr>
+              <a:buNone/>
               <a:defRPr sz="1650" b="1">
                 <a:solidFill>
                   <a:srgbClr val="F6F1E8"/>
@@ -7590,6 +7913,7 @@
               </a:defRPr>
             </a:lvl2pPr>
             <a:lvl3pPr>
+              <a:buNone/>
               <a:defRPr sz="1650" b="1">
                 <a:solidFill>
                   <a:srgbClr val="F6F1E8"/>
@@ -7597,6 +7921,7 @@
               </a:defRPr>
             </a:lvl3pPr>
             <a:lvl4pPr>
+              <a:buNone/>
               <a:defRPr sz="1650" b="1">
                 <a:solidFill>
                   <a:srgbClr val="F6F1E8"/>
@@ -7604,6 +7929,7 @@
               </a:defRPr>
             </a:lvl4pPr>
             <a:lvl5pPr>
+              <a:buNone/>
               <a:defRPr sz="1650" b="1">
                 <a:solidFill>
                   <a:srgbClr val="F6F1E8"/>
@@ -7611,6 +7937,7 @@
               </a:defRPr>
             </a:lvl5pPr>
             <a:lvl6pPr>
+              <a:buNone/>
               <a:defRPr sz="1650" b="1">
                 <a:solidFill>
                   <a:srgbClr val="F6F1E8"/>
@@ -7618,6 +7945,7 @@
               </a:defRPr>
             </a:lvl6pPr>
             <a:lvl7pPr>
+              <a:buNone/>
               <a:defRPr sz="1650" b="1">
                 <a:solidFill>
                   <a:srgbClr val="F6F1E8"/>
@@ -7625,6 +7953,7 @@
               </a:defRPr>
             </a:lvl7pPr>
             <a:lvl8pPr>
+              <a:buNone/>
               <a:defRPr sz="1650" b="1">
                 <a:solidFill>
                   <a:srgbClr val="F6F1E8"/>
@@ -7632,6 +7961,7 @@
               </a:defRPr>
             </a:lvl8pPr>
             <a:lvl9pPr>
+              <a:buNone/>
               <a:defRPr sz="1650" b="1">
                 <a:solidFill>
                   <a:srgbClr val="F6F1E8"/>
@@ -7641,6 +7971,7 @@
           </a:lstStyle>
           <a:p xmlns:a="http://schemas.openxmlformats.org/drawingml/2006/main">
             <a:pPr>
+              <a:buNone/>
               <a:defRPr sz="1650" b="1">
                 <a:solidFill>
                   <a:srgbClr val="F6F1E8"/>
@@ -7653,7 +7984,7 @@
                   <a:srgbClr val="F6F1E8"/>
                 </a:solidFill>
               </a:rPr>
-              <a:t>Supplier chain</a:t>
+              <a:t>Financial</a:t>
             </a:r>
           </a:p>
         </p:txBody>
@@ -7697,6 +8028,7 @@
               </a:defRPr>
             </a:defPPr>
             <a:lvl1pPr>
+              <a:buNone/>
               <a:defRPr sz="1050" b="0">
                 <a:solidFill>
                   <a:srgbClr val="9AA2AD"/>
@@ -7704,6 +8036,7 @@
               </a:defRPr>
             </a:lvl1pPr>
             <a:lvl2pPr>
+              <a:buNone/>
               <a:defRPr sz="1050" b="0">
                 <a:solidFill>
                   <a:srgbClr val="9AA2AD"/>
@@ -7711,6 +8044,7 @@
               </a:defRPr>
             </a:lvl2pPr>
             <a:lvl3pPr>
+              <a:buNone/>
               <a:defRPr sz="1050" b="0">
                 <a:solidFill>
                   <a:srgbClr val="9AA2AD"/>
@@ -7718,6 +8052,7 @@
               </a:defRPr>
             </a:lvl3pPr>
             <a:lvl4pPr>
+              <a:buNone/>
               <a:defRPr sz="1050" b="0">
                 <a:solidFill>
                   <a:srgbClr val="9AA2AD"/>
@@ -7725,6 +8060,7 @@
               </a:defRPr>
             </a:lvl4pPr>
             <a:lvl5pPr>
+              <a:buNone/>
               <a:defRPr sz="1050" b="0">
                 <a:solidFill>
                   <a:srgbClr val="9AA2AD"/>
@@ -7732,6 +8068,7 @@
               </a:defRPr>
             </a:lvl5pPr>
             <a:lvl6pPr>
+              <a:buNone/>
               <a:defRPr sz="1050" b="0">
                 <a:solidFill>
                   <a:srgbClr val="9AA2AD"/>
@@ -7739,6 +8076,7 @@
               </a:defRPr>
             </a:lvl6pPr>
             <a:lvl7pPr>
+              <a:buNone/>
               <a:defRPr sz="1050" b="0">
                 <a:solidFill>
                   <a:srgbClr val="9AA2AD"/>
@@ -7746,6 +8084,7 @@
               </a:defRPr>
             </a:lvl7pPr>
             <a:lvl8pPr>
+              <a:buNone/>
               <a:defRPr sz="1050" b="0">
                 <a:solidFill>
                   <a:srgbClr val="9AA2AD"/>
@@ -7753,6 +8092,7 @@
               </a:defRPr>
             </a:lvl8pPr>
             <a:lvl9pPr>
+              <a:buNone/>
               <a:defRPr sz="1050" b="0">
                 <a:solidFill>
                   <a:srgbClr val="9AA2AD"/>
@@ -7762,6 +8102,7 @@
           </a:lstStyle>
           <a:p xmlns:a="http://schemas.openxmlformats.org/drawingml/2006/main">
             <a:pPr>
+              <a:buNone/>
               <a:defRPr sz="1050" b="0">
                 <a:solidFill>
                   <a:srgbClr val="9AA2AD"/>
@@ -7774,7 +8115,7 @@
                   <a:srgbClr val="9AA2AD"/>
                 </a:solidFill>
               </a:rPr>
-              <a:t>Returns and looping links</a:t>
+              <a:t>Bank vs sales and purchases</a:t>
             </a:r>
           </a:p>
         </p:txBody>
@@ -7851,6 +8192,7 @@
               </a:defRPr>
             </a:defPPr>
             <a:lvl1pPr>
+              <a:buNone/>
               <a:defRPr sz="1200" b="1">
                 <a:solidFill>
                   <a:srgbClr val="B7D660"/>
@@ -7858,6 +8200,7 @@
               </a:defRPr>
             </a:lvl1pPr>
             <a:lvl2pPr>
+              <a:buNone/>
               <a:defRPr sz="1200" b="1">
                 <a:solidFill>
                   <a:srgbClr val="B7D660"/>
@@ -7865,6 +8208,7 @@
               </a:defRPr>
             </a:lvl2pPr>
             <a:lvl3pPr>
+              <a:buNone/>
               <a:defRPr sz="1200" b="1">
                 <a:solidFill>
                   <a:srgbClr val="B7D660"/>
@@ -7872,6 +8216,7 @@
               </a:defRPr>
             </a:lvl3pPr>
             <a:lvl4pPr>
+              <a:buNone/>
               <a:defRPr sz="1200" b="1">
                 <a:solidFill>
                   <a:srgbClr val="B7D660"/>
@@ -7879,6 +8224,7 @@
               </a:defRPr>
             </a:lvl4pPr>
             <a:lvl5pPr>
+              <a:buNone/>
               <a:defRPr sz="1200" b="1">
                 <a:solidFill>
                   <a:srgbClr val="B7D660"/>
@@ -7886,6 +8232,7 @@
               </a:defRPr>
             </a:lvl5pPr>
             <a:lvl6pPr>
+              <a:buNone/>
               <a:defRPr sz="1200" b="1">
                 <a:solidFill>
                   <a:srgbClr val="B7D660"/>
@@ -7893,6 +8240,7 @@
               </a:defRPr>
             </a:lvl6pPr>
             <a:lvl7pPr>
+              <a:buNone/>
               <a:defRPr sz="1200" b="1">
                 <a:solidFill>
                   <a:srgbClr val="B7D660"/>
@@ -7900,6 +8248,7 @@
               </a:defRPr>
             </a:lvl7pPr>
             <a:lvl8pPr>
+              <a:buNone/>
               <a:defRPr sz="1200" b="1">
                 <a:solidFill>
                   <a:srgbClr val="B7D660"/>
@@ -7907,6 +8256,7 @@
               </a:defRPr>
             </a:lvl8pPr>
             <a:lvl9pPr>
+              <a:buNone/>
               <a:defRPr sz="1200" b="1">
                 <a:solidFill>
                   <a:srgbClr val="B7D660"/>
@@ -7916,6 +8266,7 @@
           </a:lstStyle>
           <a:p xmlns:a="http://schemas.openxmlformats.org/drawingml/2006/main">
             <a:pPr>
+              <a:buNone/>
               <a:defRPr sz="1200" b="1">
                 <a:solidFill>
                   <a:srgbClr val="B7D660"/>
@@ -7928,7 +8279,7 @@
                   <a:srgbClr val="B7D660"/>
                 </a:solidFill>
               </a:rPr>
-              <a:t>PRIORITISE ONLY WHEN TWO INDEPENDENT SOURCE FAMILIES FIRE</a:t>
+              <a:t>PRIORITISE ONLY WHEN AT LEAST TWO SOURCE FAMILIES FIRE</a:t>
             </a:r>
           </a:p>
         </p:txBody>
@@ -7949,8 +8300,8 @@
         </p:nvSpPr>
         <p:spPr>
           <a:xfrm xmlns:a="http://schemas.openxmlformats.org/drawingml/2006/main">
-            <a:off x="838200" y="5657850"/>
-            <a:ext cx="8096250" cy="171450"/>
+            <a:off x="838200" y="5581650"/>
+            <a:ext cx="8096250" cy="190500"/>
           </a:xfrm>
           <a:prstGeom xmlns:a="http://schemas.openxmlformats.org/drawingml/2006/main" prst="rect">
             <a:avLst/>
@@ -7972,6 +8323,7 @@
               </a:defRPr>
             </a:defPPr>
             <a:lvl1pPr>
+              <a:buNone/>
               <a:defRPr sz="900" b="0">
                 <a:solidFill>
                   <a:srgbClr val="F6F1E8"/>
@@ -7979,6 +8331,7 @@
               </a:defRPr>
             </a:lvl1pPr>
             <a:lvl2pPr>
+              <a:buNone/>
               <a:defRPr sz="900" b="0">
                 <a:solidFill>
                   <a:srgbClr val="F6F1E8"/>
@@ -7986,6 +8339,7 @@
               </a:defRPr>
             </a:lvl2pPr>
             <a:lvl3pPr>
+              <a:buNone/>
               <a:defRPr sz="900" b="0">
                 <a:solidFill>
                   <a:srgbClr val="F6F1E8"/>
@@ -7993,6 +8347,7 @@
               </a:defRPr>
             </a:lvl3pPr>
             <a:lvl4pPr>
+              <a:buNone/>
               <a:defRPr sz="900" b="0">
                 <a:solidFill>
                   <a:srgbClr val="F6F1E8"/>
@@ -8000,6 +8355,7 @@
               </a:defRPr>
             </a:lvl4pPr>
             <a:lvl5pPr>
+              <a:buNone/>
               <a:defRPr sz="900" b="0">
                 <a:solidFill>
                   <a:srgbClr val="F6F1E8"/>
@@ -8007,6 +8363,7 @@
               </a:defRPr>
             </a:lvl5pPr>
             <a:lvl6pPr>
+              <a:buNone/>
               <a:defRPr sz="900" b="0">
                 <a:solidFill>
                   <a:srgbClr val="F6F1E8"/>
@@ -8014,6 +8371,7 @@
               </a:defRPr>
             </a:lvl6pPr>
             <a:lvl7pPr>
+              <a:buNone/>
               <a:defRPr sz="900" b="0">
                 <a:solidFill>
                   <a:srgbClr val="F6F1E8"/>
@@ -8021,6 +8379,7 @@
               </a:defRPr>
             </a:lvl7pPr>
             <a:lvl8pPr>
+              <a:buNone/>
               <a:defRPr sz="900" b="0">
                 <a:solidFill>
                   <a:srgbClr val="F6F1E8"/>
@@ -8028,6 +8387,7 @@
               </a:defRPr>
             </a:lvl8pPr>
             <a:lvl9pPr>
+              <a:buNone/>
               <a:defRPr sz="900" b="0">
                 <a:solidFill>
                   <a:srgbClr val="F6F1E8"/>
@@ -8037,6 +8397,7 @@
           </a:lstStyle>
           <a:p xmlns:a="http://schemas.openxmlformats.org/drawingml/2006/main">
             <a:pPr>
+              <a:buNone/>
               <a:defRPr sz="900" b="0">
                 <a:solidFill>
                   <a:srgbClr val="F6F1E8"/>
@@ -8093,6 +8454,7 @@
               </a:defRPr>
             </a:defPPr>
             <a:lvl1pPr>
+              <a:buNone/>
               <a:defRPr sz="750" b="1">
                 <a:solidFill>
                   <a:srgbClr val="9AA2AD"/>
@@ -8100,6 +8462,7 @@
               </a:defRPr>
             </a:lvl1pPr>
             <a:lvl2pPr>
+              <a:buNone/>
               <a:defRPr sz="750" b="1">
                 <a:solidFill>
                   <a:srgbClr val="9AA2AD"/>
@@ -8107,6 +8470,7 @@
               </a:defRPr>
             </a:lvl2pPr>
             <a:lvl3pPr>
+              <a:buNone/>
               <a:defRPr sz="750" b="1">
                 <a:solidFill>
                   <a:srgbClr val="9AA2AD"/>
@@ -8114,6 +8478,7 @@
               </a:defRPr>
             </a:lvl3pPr>
             <a:lvl4pPr>
+              <a:buNone/>
               <a:defRPr sz="750" b="1">
                 <a:solidFill>
                   <a:srgbClr val="9AA2AD"/>
@@ -8121,6 +8486,7 @@
               </a:defRPr>
             </a:lvl4pPr>
             <a:lvl5pPr>
+              <a:buNone/>
               <a:defRPr sz="750" b="1">
                 <a:solidFill>
                   <a:srgbClr val="9AA2AD"/>
@@ -8128,6 +8494,7 @@
               </a:defRPr>
             </a:lvl5pPr>
             <a:lvl6pPr>
+              <a:buNone/>
               <a:defRPr sz="750" b="1">
                 <a:solidFill>
                   <a:srgbClr val="9AA2AD"/>
@@ -8135,6 +8502,7 @@
               </a:defRPr>
             </a:lvl6pPr>
             <a:lvl7pPr>
+              <a:buNone/>
               <a:defRPr sz="750" b="1">
                 <a:solidFill>
                   <a:srgbClr val="9AA2AD"/>
@@ -8142,6 +8510,7 @@
               </a:defRPr>
             </a:lvl7pPr>
             <a:lvl8pPr>
+              <a:buNone/>
               <a:defRPr sz="750" b="1">
                 <a:solidFill>
                   <a:srgbClr val="9AA2AD"/>
@@ -8149,6 +8518,7 @@
               </a:defRPr>
             </a:lvl8pPr>
             <a:lvl9pPr>
+              <a:buNone/>
               <a:defRPr sz="750" b="1">
                 <a:solidFill>
                   <a:srgbClr val="9AA2AD"/>
@@ -8158,6 +8528,7 @@
           </a:lstStyle>
           <a:p xmlns:a="http://schemas.openxmlformats.org/drawingml/2006/main">
             <a:pPr>
+              <a:buNone/>
               <a:defRPr sz="750" b="1">
                 <a:solidFill>
                   <a:srgbClr val="9AA2AD"/>
@@ -8214,6 +8585,7 @@
               </a:defRPr>
             </a:defPPr>
             <a:lvl1pPr>
+              <a:buNone/>
               <a:defRPr sz="900" b="1">
                 <a:solidFill>
                   <a:srgbClr val="B7D660"/>
@@ -8221,6 +8593,7 @@
               </a:defRPr>
             </a:lvl1pPr>
             <a:lvl2pPr>
+              <a:buNone/>
               <a:defRPr sz="900" b="1">
                 <a:solidFill>
                   <a:srgbClr val="B7D660"/>
@@ -8228,6 +8601,7 @@
               </a:defRPr>
             </a:lvl2pPr>
             <a:lvl3pPr>
+              <a:buNone/>
               <a:defRPr sz="900" b="1">
                 <a:solidFill>
                   <a:srgbClr val="B7D660"/>
@@ -8235,6 +8609,7 @@
               </a:defRPr>
             </a:lvl3pPr>
             <a:lvl4pPr>
+              <a:buNone/>
               <a:defRPr sz="900" b="1">
                 <a:solidFill>
                   <a:srgbClr val="B7D660"/>
@@ -8242,6 +8617,7 @@
               </a:defRPr>
             </a:lvl4pPr>
             <a:lvl5pPr>
+              <a:buNone/>
               <a:defRPr sz="900" b="1">
                 <a:solidFill>
                   <a:srgbClr val="B7D660"/>
@@ -8249,6 +8625,7 @@
               </a:defRPr>
             </a:lvl5pPr>
             <a:lvl6pPr>
+              <a:buNone/>
               <a:defRPr sz="900" b="1">
                 <a:solidFill>
                   <a:srgbClr val="B7D660"/>
@@ -8256,6 +8633,7 @@
               </a:defRPr>
             </a:lvl6pPr>
             <a:lvl7pPr>
+              <a:buNone/>
               <a:defRPr sz="900" b="1">
                 <a:solidFill>
                   <a:srgbClr val="B7D660"/>
@@ -8263,6 +8641,7 @@
               </a:defRPr>
             </a:lvl7pPr>
             <a:lvl8pPr>
+              <a:buNone/>
               <a:defRPr sz="900" b="1">
                 <a:solidFill>
                   <a:srgbClr val="B7D660"/>
@@ -8270,6 +8649,7 @@
               </a:defRPr>
             </a:lvl8pPr>
             <a:lvl9pPr>
+              <a:buNone/>
               <a:defRPr sz="900" b="1">
                 <a:solidFill>
                   <a:srgbClr val="B7D660"/>
@@ -8279,6 +8659,7 @@
           </a:lstStyle>
           <a:p xmlns:a="http://schemas.openxmlformats.org/drawingml/2006/main">
             <a:pPr>
+              <a:buNone/>
               <a:defRPr sz="900" b="1">
                 <a:solidFill>
                   <a:srgbClr val="B7D660"/>
@@ -8364,6 +8745,7 @@
               </a:defRPr>
             </a:defPPr>
             <a:lvl1pPr>
+              <a:buNone/>
               <a:defRPr sz="900" b="1">
                 <a:solidFill>
                   <a:srgbClr val="B7D660"/>
@@ -8371,6 +8753,7 @@
               </a:defRPr>
             </a:lvl1pPr>
             <a:lvl2pPr>
+              <a:buNone/>
               <a:defRPr sz="900" b="1">
                 <a:solidFill>
                   <a:srgbClr val="B7D660"/>
@@ -8378,6 +8761,7 @@
               </a:defRPr>
             </a:lvl2pPr>
             <a:lvl3pPr>
+              <a:buNone/>
               <a:defRPr sz="900" b="1">
                 <a:solidFill>
                   <a:srgbClr val="B7D660"/>
@@ -8385,6 +8769,7 @@
               </a:defRPr>
             </a:lvl3pPr>
             <a:lvl4pPr>
+              <a:buNone/>
               <a:defRPr sz="900" b="1">
                 <a:solidFill>
                   <a:srgbClr val="B7D660"/>
@@ -8392,6 +8777,7 @@
               </a:defRPr>
             </a:lvl4pPr>
             <a:lvl5pPr>
+              <a:buNone/>
               <a:defRPr sz="900" b="1">
                 <a:solidFill>
                   <a:srgbClr val="B7D660"/>
@@ -8399,6 +8785,7 @@
               </a:defRPr>
             </a:lvl5pPr>
             <a:lvl6pPr>
+              <a:buNone/>
               <a:defRPr sz="900" b="1">
                 <a:solidFill>
                   <a:srgbClr val="B7D660"/>
@@ -8406,6 +8793,7 @@
               </a:defRPr>
             </a:lvl6pPr>
             <a:lvl7pPr>
+              <a:buNone/>
               <a:defRPr sz="900" b="1">
                 <a:solidFill>
                   <a:srgbClr val="B7D660"/>
@@ -8413,6 +8801,7 @@
               </a:defRPr>
             </a:lvl7pPr>
             <a:lvl8pPr>
+              <a:buNone/>
               <a:defRPr sz="900" b="1">
                 <a:solidFill>
                   <a:srgbClr val="B7D660"/>
@@ -8420,6 +8809,7 @@
               </a:defRPr>
             </a:lvl8pPr>
             <a:lvl9pPr>
+              <a:buNone/>
               <a:defRPr sz="900" b="1">
                 <a:solidFill>
                   <a:srgbClr val="B7D660"/>
@@ -8429,6 +8819,7 @@
           </a:lstStyle>
           <a:p xmlns:a="http://schemas.openxmlformats.org/drawingml/2006/main">
             <a:pPr>
+              <a:buNone/>
               <a:defRPr sz="900" b="1">
                 <a:solidFill>
                   <a:srgbClr val="B7D660"/>
@@ -8485,6 +8876,7 @@
               </a:defRPr>
             </a:defPPr>
             <a:lvl1pPr>
+              <a:buNone/>
               <a:defRPr sz="3150" b="1">
                 <a:solidFill>
                   <a:srgbClr val="F6F1E8"/>
@@ -8492,6 +8884,7 @@
               </a:defRPr>
             </a:lvl1pPr>
             <a:lvl2pPr>
+              <a:buNone/>
               <a:defRPr sz="3150" b="1">
                 <a:solidFill>
                   <a:srgbClr val="F6F1E8"/>
@@ -8499,6 +8892,7 @@
               </a:defRPr>
             </a:lvl2pPr>
             <a:lvl3pPr>
+              <a:buNone/>
               <a:defRPr sz="3150" b="1">
                 <a:solidFill>
                   <a:srgbClr val="F6F1E8"/>
@@ -8506,6 +8900,7 @@
               </a:defRPr>
             </a:lvl3pPr>
             <a:lvl4pPr>
+              <a:buNone/>
               <a:defRPr sz="3150" b="1">
                 <a:solidFill>
                   <a:srgbClr val="F6F1E8"/>
@@ -8513,6 +8908,7 @@
               </a:defRPr>
             </a:lvl4pPr>
             <a:lvl5pPr>
+              <a:buNone/>
               <a:defRPr sz="3150" b="1">
                 <a:solidFill>
                   <a:srgbClr val="F6F1E8"/>
@@ -8520,6 +8916,7 @@
               </a:defRPr>
             </a:lvl5pPr>
             <a:lvl6pPr>
+              <a:buNone/>
               <a:defRPr sz="3150" b="1">
                 <a:solidFill>
                   <a:srgbClr val="F6F1E8"/>
@@ -8527,6 +8924,7 @@
               </a:defRPr>
             </a:lvl6pPr>
             <a:lvl7pPr>
+              <a:buNone/>
               <a:defRPr sz="3150" b="1">
                 <a:solidFill>
                   <a:srgbClr val="F6F1E8"/>
@@ -8534,6 +8932,7 @@
               </a:defRPr>
             </a:lvl7pPr>
             <a:lvl8pPr>
+              <a:buNone/>
               <a:defRPr sz="3150" b="1">
                 <a:solidFill>
                   <a:srgbClr val="F6F1E8"/>
@@ -8541,6 +8940,7 @@
               </a:defRPr>
             </a:lvl8pPr>
             <a:lvl9pPr>
+              <a:buNone/>
               <a:defRPr sz="3150" b="1">
                 <a:solidFill>
                   <a:srgbClr val="F6F1E8"/>
@@ -8550,6 +8950,7 @@
           </a:lstStyle>
           <a:p xmlns:a="http://schemas.openxmlformats.org/drawingml/2006/main">
             <a:pPr>
+              <a:buNone/>
               <a:defRPr sz="3150" b="1">
                 <a:solidFill>
                   <a:srgbClr val="F6F1E8"/>
@@ -8562,7 +8963,7 @@
                   <a:srgbClr val="F6F1E8"/>
                 </a:solidFill>
               </a:rPr>
-              <a:t>Seed C results and limits</a:t>
+              <a:t>V3 held-out results and limits</a:t>
             </a:r>
           </a:p>
         </p:txBody>
@@ -8606,6 +9007,7 @@
               </a:defRPr>
             </a:defPPr>
             <a:lvl1pPr>
+              <a:buNone/>
               <a:defRPr sz="1350" b="0">
                 <a:solidFill>
                   <a:srgbClr val="9AA2AD"/>
@@ -8613,6 +9015,7 @@
               </a:defRPr>
             </a:lvl1pPr>
             <a:lvl2pPr>
+              <a:buNone/>
               <a:defRPr sz="1350" b="0">
                 <a:solidFill>
                   <a:srgbClr val="9AA2AD"/>
@@ -8620,6 +9023,7 @@
               </a:defRPr>
             </a:lvl2pPr>
             <a:lvl3pPr>
+              <a:buNone/>
               <a:defRPr sz="1350" b="0">
                 <a:solidFill>
                   <a:srgbClr val="9AA2AD"/>
@@ -8627,6 +9031,7 @@
               </a:defRPr>
             </a:lvl3pPr>
             <a:lvl4pPr>
+              <a:buNone/>
               <a:defRPr sz="1350" b="0">
                 <a:solidFill>
                   <a:srgbClr val="9AA2AD"/>
@@ -8634,6 +9039,7 @@
               </a:defRPr>
             </a:lvl4pPr>
             <a:lvl5pPr>
+              <a:buNone/>
               <a:defRPr sz="1350" b="0">
                 <a:solidFill>
                   <a:srgbClr val="9AA2AD"/>
@@ -8641,6 +9047,7 @@
               </a:defRPr>
             </a:lvl5pPr>
             <a:lvl6pPr>
+              <a:buNone/>
               <a:defRPr sz="1350" b="0">
                 <a:solidFill>
                   <a:srgbClr val="9AA2AD"/>
@@ -8648,6 +9055,7 @@
               </a:defRPr>
             </a:lvl6pPr>
             <a:lvl7pPr>
+              <a:buNone/>
               <a:defRPr sz="1350" b="0">
                 <a:solidFill>
                   <a:srgbClr val="9AA2AD"/>
@@ -8655,6 +9063,7 @@
               </a:defRPr>
             </a:lvl7pPr>
             <a:lvl8pPr>
+              <a:buNone/>
               <a:defRPr sz="1350" b="0">
                 <a:solidFill>
                   <a:srgbClr val="9AA2AD"/>
@@ -8662,6 +9071,7 @@
               </a:defRPr>
             </a:lvl8pPr>
             <a:lvl9pPr>
+              <a:buNone/>
               <a:defRPr sz="1350" b="0">
                 <a:solidFill>
                   <a:srgbClr val="9AA2AD"/>
@@ -8671,6 +9081,7 @@
           </a:lstStyle>
           <a:p xmlns:a="http://schemas.openxmlformats.org/drawingml/2006/main">
             <a:pPr>
+              <a:buNone/>
               <a:defRPr sz="1350" b="0">
                 <a:solidFill>
                   <a:srgbClr val="9AA2AD"/>
@@ -8683,7 +9094,7 @@
                   <a:srgbClr val="9AA2AD"/>
                 </a:solidFill>
               </a:rPr>
-              <a:t>Seed A selected the threshold and factory queue rule. Seed C reports the held-out result.</a:t>
+              <a:t>V3-A selected threshold 0.05 and K=3. V3-C confirms frozen choices.</a:t>
             </a:r>
           </a:p>
         </p:txBody>
@@ -8760,6 +9171,7 @@
               </a:defRPr>
             </a:defPPr>
             <a:lvl1pPr>
+              <a:buNone/>
               <a:defRPr sz="2550" b="1">
                 <a:solidFill>
                   <a:srgbClr val="B7D660"/>
@@ -8767,6 +9179,7 @@
               </a:defRPr>
             </a:lvl1pPr>
             <a:lvl2pPr>
+              <a:buNone/>
               <a:defRPr sz="2550" b="1">
                 <a:solidFill>
                   <a:srgbClr val="B7D660"/>
@@ -8774,6 +9187,7 @@
               </a:defRPr>
             </a:lvl2pPr>
             <a:lvl3pPr>
+              <a:buNone/>
               <a:defRPr sz="2550" b="1">
                 <a:solidFill>
                   <a:srgbClr val="B7D660"/>
@@ -8781,6 +9195,7 @@
               </a:defRPr>
             </a:lvl3pPr>
             <a:lvl4pPr>
+              <a:buNone/>
               <a:defRPr sz="2550" b="1">
                 <a:solidFill>
                   <a:srgbClr val="B7D660"/>
@@ -8788,6 +9203,7 @@
               </a:defRPr>
             </a:lvl4pPr>
             <a:lvl5pPr>
+              <a:buNone/>
               <a:defRPr sz="2550" b="1">
                 <a:solidFill>
                   <a:srgbClr val="B7D660"/>
@@ -8795,6 +9211,7 @@
               </a:defRPr>
             </a:lvl5pPr>
             <a:lvl6pPr>
+              <a:buNone/>
               <a:defRPr sz="2550" b="1">
                 <a:solidFill>
                   <a:srgbClr val="B7D660"/>
@@ -8802,6 +9219,7 @@
               </a:defRPr>
             </a:lvl6pPr>
             <a:lvl7pPr>
+              <a:buNone/>
               <a:defRPr sz="2550" b="1">
                 <a:solidFill>
                   <a:srgbClr val="B7D660"/>
@@ -8809,6 +9227,7 @@
               </a:defRPr>
             </a:lvl7pPr>
             <a:lvl8pPr>
+              <a:buNone/>
               <a:defRPr sz="2550" b="1">
                 <a:solidFill>
                   <a:srgbClr val="B7D660"/>
@@ -8816,6 +9235,7 @@
               </a:defRPr>
             </a:lvl8pPr>
             <a:lvl9pPr>
+              <a:buNone/>
               <a:defRPr sz="2550" b="1">
                 <a:solidFill>
                   <a:srgbClr val="B7D660"/>
@@ -8825,6 +9245,7 @@
           </a:lstStyle>
           <a:p xmlns:a="http://schemas.openxmlformats.org/drawingml/2006/main">
             <a:pPr>
+              <a:buNone/>
               <a:defRPr sz="2550" b="1">
                 <a:solidFill>
                   <a:srgbClr val="B7D660"/>
@@ -8837,7 +9258,7 @@
                   <a:srgbClr val="B7D660"/>
                 </a:solidFill>
               </a:rPr>
-              <a:t>84.01%</a:t>
+              <a:t>81.24%</a:t>
             </a:r>
           </a:p>
         </p:txBody>
@@ -8881,6 +9302,7 @@
               </a:defRPr>
             </a:defPPr>
             <a:lvl1pPr>
+              <a:buNone/>
               <a:defRPr sz="975" b="0">
                 <a:solidFill>
                   <a:srgbClr val="F6F1E8"/>
@@ -8888,6 +9310,7 @@
               </a:defRPr>
             </a:lvl1pPr>
             <a:lvl2pPr>
+              <a:buNone/>
               <a:defRPr sz="975" b="0">
                 <a:solidFill>
                   <a:srgbClr val="F6F1E8"/>
@@ -8895,6 +9318,7 @@
               </a:defRPr>
             </a:lvl2pPr>
             <a:lvl3pPr>
+              <a:buNone/>
               <a:defRPr sz="975" b="0">
                 <a:solidFill>
                   <a:srgbClr val="F6F1E8"/>
@@ -8902,6 +9326,7 @@
               </a:defRPr>
             </a:lvl3pPr>
             <a:lvl4pPr>
+              <a:buNone/>
               <a:defRPr sz="975" b="0">
                 <a:solidFill>
                   <a:srgbClr val="F6F1E8"/>
@@ -8909,6 +9334,7 @@
               </a:defRPr>
             </a:lvl4pPr>
             <a:lvl5pPr>
+              <a:buNone/>
               <a:defRPr sz="975" b="0">
                 <a:solidFill>
                   <a:srgbClr val="F6F1E8"/>
@@ -8916,6 +9342,7 @@
               </a:defRPr>
             </a:lvl5pPr>
             <a:lvl6pPr>
+              <a:buNone/>
               <a:defRPr sz="975" b="0">
                 <a:solidFill>
                   <a:srgbClr val="F6F1E8"/>
@@ -8923,6 +9350,7 @@
               </a:defRPr>
             </a:lvl6pPr>
             <a:lvl7pPr>
+              <a:buNone/>
               <a:defRPr sz="975" b="0">
                 <a:solidFill>
                   <a:srgbClr val="F6F1E8"/>
@@ -8930,6 +9358,7 @@
               </a:defRPr>
             </a:lvl7pPr>
             <a:lvl8pPr>
+              <a:buNone/>
               <a:defRPr sz="975" b="0">
                 <a:solidFill>
                   <a:srgbClr val="F6F1E8"/>
@@ -8937,6 +9366,7 @@
               </a:defRPr>
             </a:lvl8pPr>
             <a:lvl9pPr>
+              <a:buNone/>
               <a:defRPr sz="975" b="0">
                 <a:solidFill>
                   <a:srgbClr val="F6F1E8"/>
@@ -8946,6 +9376,7 @@
           </a:lstStyle>
           <a:p xmlns:a="http://schemas.openxmlformats.org/drawingml/2006/main">
             <a:pPr>
+              <a:buNone/>
               <a:defRPr sz="975" b="0">
                 <a:solidFill>
                   <a:srgbClr val="F6F1E8"/>
@@ -9035,6 +9466,7 @@
               </a:defRPr>
             </a:defPPr>
             <a:lvl1pPr>
+              <a:buNone/>
               <a:defRPr sz="2550" b="1">
                 <a:solidFill>
                   <a:srgbClr val="B7D660"/>
@@ -9042,6 +9474,7 @@
               </a:defRPr>
             </a:lvl1pPr>
             <a:lvl2pPr>
+              <a:buNone/>
               <a:defRPr sz="2550" b="1">
                 <a:solidFill>
                   <a:srgbClr val="B7D660"/>
@@ -9049,6 +9482,7 @@
               </a:defRPr>
             </a:lvl2pPr>
             <a:lvl3pPr>
+              <a:buNone/>
               <a:defRPr sz="2550" b="1">
                 <a:solidFill>
                   <a:srgbClr val="B7D660"/>
@@ -9056,6 +9490,7 @@
               </a:defRPr>
             </a:lvl3pPr>
             <a:lvl4pPr>
+              <a:buNone/>
               <a:defRPr sz="2550" b="1">
                 <a:solidFill>
                   <a:srgbClr val="B7D660"/>
@@ -9063,6 +9498,7 @@
               </a:defRPr>
             </a:lvl4pPr>
             <a:lvl5pPr>
+              <a:buNone/>
               <a:defRPr sz="2550" b="1">
                 <a:solidFill>
                   <a:srgbClr val="B7D660"/>
@@ -9070,6 +9506,7 @@
               </a:defRPr>
             </a:lvl5pPr>
             <a:lvl6pPr>
+              <a:buNone/>
               <a:defRPr sz="2550" b="1">
                 <a:solidFill>
                   <a:srgbClr val="B7D660"/>
@@ -9077,6 +9514,7 @@
               </a:defRPr>
             </a:lvl6pPr>
             <a:lvl7pPr>
+              <a:buNone/>
               <a:defRPr sz="2550" b="1">
                 <a:solidFill>
                   <a:srgbClr val="B7D660"/>
@@ -9084,6 +9522,7 @@
               </a:defRPr>
             </a:lvl7pPr>
             <a:lvl8pPr>
+              <a:buNone/>
               <a:defRPr sz="2550" b="1">
                 <a:solidFill>
                   <a:srgbClr val="B7D660"/>
@@ -9091,6 +9530,7 @@
               </a:defRPr>
             </a:lvl8pPr>
             <a:lvl9pPr>
+              <a:buNone/>
               <a:defRPr sz="2550" b="1">
                 <a:solidFill>
                   <a:srgbClr val="B7D660"/>
@@ -9100,6 +9540,7 @@
           </a:lstStyle>
           <a:p xmlns:a="http://schemas.openxmlformats.org/drawingml/2006/main">
             <a:pPr>
+              <a:buNone/>
               <a:defRPr sz="2550" b="1">
                 <a:solidFill>
                   <a:srgbClr val="B7D660"/>
@@ -9112,7 +9553,7 @@
                   <a:srgbClr val="B7D660"/>
                 </a:solidFill>
               </a:rPr>
-              <a:t>16.58%</a:t>
+              <a:t>2.28%</a:t>
             </a:r>
           </a:p>
         </p:txBody>
@@ -9156,6 +9597,7 @@
               </a:defRPr>
             </a:defPPr>
             <a:lvl1pPr>
+              <a:buNone/>
               <a:defRPr sz="975" b="0">
                 <a:solidFill>
                   <a:srgbClr val="F6F1E8"/>
@@ -9163,6 +9605,7 @@
               </a:defRPr>
             </a:lvl1pPr>
             <a:lvl2pPr>
+              <a:buNone/>
               <a:defRPr sz="975" b="0">
                 <a:solidFill>
                   <a:srgbClr val="F6F1E8"/>
@@ -9170,6 +9613,7 @@
               </a:defRPr>
             </a:lvl2pPr>
             <a:lvl3pPr>
+              <a:buNone/>
               <a:defRPr sz="975" b="0">
                 <a:solidFill>
                   <a:srgbClr val="F6F1E8"/>
@@ -9177,6 +9621,7 @@
               </a:defRPr>
             </a:lvl3pPr>
             <a:lvl4pPr>
+              <a:buNone/>
               <a:defRPr sz="975" b="0">
                 <a:solidFill>
                   <a:srgbClr val="F6F1E8"/>
@@ -9184,6 +9629,7 @@
               </a:defRPr>
             </a:lvl4pPr>
             <a:lvl5pPr>
+              <a:buNone/>
               <a:defRPr sz="975" b="0">
                 <a:solidFill>
                   <a:srgbClr val="F6F1E8"/>
@@ -9191,6 +9637,7 @@
               </a:defRPr>
             </a:lvl5pPr>
             <a:lvl6pPr>
+              <a:buNone/>
               <a:defRPr sz="975" b="0">
                 <a:solidFill>
                   <a:srgbClr val="F6F1E8"/>
@@ -9198,6 +9645,7 @@
               </a:defRPr>
             </a:lvl6pPr>
             <a:lvl7pPr>
+              <a:buNone/>
               <a:defRPr sz="975" b="0">
                 <a:solidFill>
                   <a:srgbClr val="F6F1E8"/>
@@ -9205,6 +9653,7 @@
               </a:defRPr>
             </a:lvl7pPr>
             <a:lvl8pPr>
+              <a:buNone/>
               <a:defRPr sz="975" b="0">
                 <a:solidFill>
                   <a:srgbClr val="F6F1E8"/>
@@ -9212,6 +9661,7 @@
               </a:defRPr>
             </a:lvl8pPr>
             <a:lvl9pPr>
+              <a:buNone/>
               <a:defRPr sz="975" b="0">
                 <a:solidFill>
                   <a:srgbClr val="F6F1E8"/>
@@ -9221,6 +9671,7 @@
           </a:lstStyle>
           <a:p xmlns:a="http://schemas.openxmlformats.org/drawingml/2006/main">
             <a:pPr>
+              <a:buNone/>
               <a:defRPr sz="975" b="0">
                 <a:solidFill>
                   <a:srgbClr val="F6F1E8"/>
@@ -9310,6 +9761,7 @@
               </a:defRPr>
             </a:defPPr>
             <a:lvl1pPr>
+              <a:buNone/>
               <a:defRPr sz="2550" b="1">
                 <a:solidFill>
                   <a:srgbClr val="B7D660"/>
@@ -9317,6 +9769,7 @@
               </a:defRPr>
             </a:lvl1pPr>
             <a:lvl2pPr>
+              <a:buNone/>
               <a:defRPr sz="2550" b="1">
                 <a:solidFill>
                   <a:srgbClr val="B7D660"/>
@@ -9324,6 +9777,7 @@
               </a:defRPr>
             </a:lvl2pPr>
             <a:lvl3pPr>
+              <a:buNone/>
               <a:defRPr sz="2550" b="1">
                 <a:solidFill>
                   <a:srgbClr val="B7D660"/>
@@ -9331,6 +9785,7 @@
               </a:defRPr>
             </a:lvl3pPr>
             <a:lvl4pPr>
+              <a:buNone/>
               <a:defRPr sz="2550" b="1">
                 <a:solidFill>
                   <a:srgbClr val="B7D660"/>
@@ -9338,6 +9793,7 @@
               </a:defRPr>
             </a:lvl4pPr>
             <a:lvl5pPr>
+              <a:buNone/>
               <a:defRPr sz="2550" b="1">
                 <a:solidFill>
                   <a:srgbClr val="B7D660"/>
@@ -9345,6 +9801,7 @@
               </a:defRPr>
             </a:lvl5pPr>
             <a:lvl6pPr>
+              <a:buNone/>
               <a:defRPr sz="2550" b="1">
                 <a:solidFill>
                   <a:srgbClr val="B7D660"/>
@@ -9352,6 +9809,7 @@
               </a:defRPr>
             </a:lvl6pPr>
             <a:lvl7pPr>
+              <a:buNone/>
               <a:defRPr sz="2550" b="1">
                 <a:solidFill>
                   <a:srgbClr val="B7D660"/>
@@ -9359,6 +9817,7 @@
               </a:defRPr>
             </a:lvl7pPr>
             <a:lvl8pPr>
+              <a:buNone/>
               <a:defRPr sz="2550" b="1">
                 <a:solidFill>
                   <a:srgbClr val="B7D660"/>
@@ -9366,6 +9825,7 @@
               </a:defRPr>
             </a:lvl8pPr>
             <a:lvl9pPr>
+              <a:buNone/>
               <a:defRPr sz="2550" b="1">
                 <a:solidFill>
                   <a:srgbClr val="B7D660"/>
@@ -9375,6 +9835,7 @@
           </a:lstStyle>
           <a:p xmlns:a="http://schemas.openxmlformats.org/drawingml/2006/main">
             <a:pPr>
+              <a:buNone/>
               <a:defRPr sz="2550" b="1">
                 <a:solidFill>
                   <a:srgbClr val="B7D660"/>
@@ -9387,7 +9848,7 @@
                   <a:srgbClr val="B7D660"/>
                 </a:solidFill>
               </a:rPr>
-              <a:t>58.67%</a:t>
+              <a:t>97.52%</a:t>
             </a:r>
           </a:p>
         </p:txBody>
@@ -9431,6 +9892,7 @@
               </a:defRPr>
             </a:defPPr>
             <a:lvl1pPr>
+              <a:buNone/>
               <a:defRPr sz="975" b="0">
                 <a:solidFill>
                   <a:srgbClr val="F6F1E8"/>
@@ -9438,6 +9900,7 @@
               </a:defRPr>
             </a:lvl1pPr>
             <a:lvl2pPr>
+              <a:buNone/>
               <a:defRPr sz="975" b="0">
                 <a:solidFill>
                   <a:srgbClr val="F6F1E8"/>
@@ -9445,6 +9908,7 @@
               </a:defRPr>
             </a:lvl2pPr>
             <a:lvl3pPr>
+              <a:buNone/>
               <a:defRPr sz="975" b="0">
                 <a:solidFill>
                   <a:srgbClr val="F6F1E8"/>
@@ -9452,6 +9916,7 @@
               </a:defRPr>
             </a:lvl3pPr>
             <a:lvl4pPr>
+              <a:buNone/>
               <a:defRPr sz="975" b="0">
                 <a:solidFill>
                   <a:srgbClr val="F6F1E8"/>
@@ -9459,6 +9924,7 @@
               </a:defRPr>
             </a:lvl4pPr>
             <a:lvl5pPr>
+              <a:buNone/>
               <a:defRPr sz="975" b="0">
                 <a:solidFill>
                   <a:srgbClr val="F6F1E8"/>
@@ -9466,6 +9932,7 @@
               </a:defRPr>
             </a:lvl5pPr>
             <a:lvl6pPr>
+              <a:buNone/>
               <a:defRPr sz="975" b="0">
                 <a:solidFill>
                   <a:srgbClr val="F6F1E8"/>
@@ -9473,6 +9940,7 @@
               </a:defRPr>
             </a:lvl6pPr>
             <a:lvl7pPr>
+              <a:buNone/>
               <a:defRPr sz="975" b="0">
                 <a:solidFill>
                   <a:srgbClr val="F6F1E8"/>
@@ -9480,6 +9948,7 @@
               </a:defRPr>
             </a:lvl7pPr>
             <a:lvl8pPr>
+              <a:buNone/>
               <a:defRPr sz="975" b="0">
                 <a:solidFill>
                   <a:srgbClr val="F6F1E8"/>
@@ -9487,6 +9956,7 @@
               </a:defRPr>
             </a:lvl8pPr>
             <a:lvl9pPr>
+              <a:buNone/>
               <a:defRPr sz="975" b="0">
                 <a:solidFill>
                   <a:srgbClr val="F6F1E8"/>
@@ -9496,6 +9966,7 @@
           </a:lstStyle>
           <a:p xmlns:a="http://schemas.openxmlformats.org/drawingml/2006/main">
             <a:pPr>
+              <a:buNone/>
               <a:defRPr sz="975" b="0">
                 <a:solidFill>
                   <a:srgbClr val="F6F1E8"/>
@@ -9508,7 +9979,7 @@
                   <a:srgbClr val="F6F1E8"/>
                 </a:solidFill>
               </a:rPr>
-              <a:t>Queue precision after K=4 months</a:t>
+              <a:t>Factory queue precision, K=3</a:t>
             </a:r>
           </a:p>
         </p:txBody>
@@ -9552,6 +10023,7 @@
               </a:defRPr>
             </a:defPPr>
             <a:lvl1pPr>
+              <a:buNone/>
               <a:defRPr sz="1200" b="0">
                 <a:solidFill>
                   <a:srgbClr val="F6F1E8"/>
@@ -9559,6 +10031,7 @@
               </a:defRPr>
             </a:lvl1pPr>
             <a:lvl2pPr>
+              <a:buNone/>
               <a:defRPr sz="1200" b="0">
                 <a:solidFill>
                   <a:srgbClr val="F6F1E8"/>
@@ -9566,6 +10039,7 @@
               </a:defRPr>
             </a:lvl2pPr>
             <a:lvl3pPr>
+              <a:buNone/>
               <a:defRPr sz="1200" b="0">
                 <a:solidFill>
                   <a:srgbClr val="F6F1E8"/>
@@ -9573,6 +10047,7 @@
               </a:defRPr>
             </a:lvl3pPr>
             <a:lvl4pPr>
+              <a:buNone/>
               <a:defRPr sz="1200" b="0">
                 <a:solidFill>
                   <a:srgbClr val="F6F1E8"/>
@@ -9580,6 +10055,7 @@
               </a:defRPr>
             </a:lvl4pPr>
             <a:lvl5pPr>
+              <a:buNone/>
               <a:defRPr sz="1200" b="0">
                 <a:solidFill>
                   <a:srgbClr val="F6F1E8"/>
@@ -9587,6 +10063,7 @@
               </a:defRPr>
             </a:lvl5pPr>
             <a:lvl6pPr>
+              <a:buNone/>
               <a:defRPr sz="1200" b="0">
                 <a:solidFill>
                   <a:srgbClr val="F6F1E8"/>
@@ -9594,6 +10071,7 @@
               </a:defRPr>
             </a:lvl6pPr>
             <a:lvl7pPr>
+              <a:buNone/>
               <a:defRPr sz="1200" b="0">
                 <a:solidFill>
                   <a:srgbClr val="F6F1E8"/>
@@ -9601,6 +10079,7 @@
               </a:defRPr>
             </a:lvl7pPr>
             <a:lvl8pPr>
+              <a:buNone/>
               <a:defRPr sz="1200" b="0">
                 <a:solidFill>
                   <a:srgbClr val="F6F1E8"/>
@@ -9608,6 +10087,7 @@
               </a:defRPr>
             </a:lvl8pPr>
             <a:lvl9pPr>
+              <a:buNone/>
               <a:defRPr sz="1200" b="0">
                 <a:solidFill>
                   <a:srgbClr val="F6F1E8"/>
@@ -9617,6 +10097,7 @@
           </a:lstStyle>
           <a:p xmlns:a="http://schemas.openxmlformats.org/drawingml/2006/main">
             <a:pPr>
+              <a:buNone/>
               <a:defRPr sz="1200" b="0">
                 <a:solidFill>
                   <a:srgbClr val="F6F1E8"/>
@@ -9629,7 +10110,7 @@
                   <a:srgbClr val="F6F1E8"/>
                 </a:solidFill>
               </a:rPr>
-              <a:t>917 factories enter the K-month queue. The top 50-case snapshot has 75.00% synthetic precision.</a:t>
+              <a:t>605 factories enter the queue. Top-50 monthly macro precision: 75.00%.</a:t>
             </a:r>
           </a:p>
         </p:txBody>
@@ -9673,6 +10154,7 @@
               </a:defRPr>
             </a:defPPr>
             <a:lvl1pPr>
+              <a:buNone/>
               <a:defRPr sz="900" b="0">
                 <a:solidFill>
                   <a:srgbClr val="9AA2AD"/>
@@ -9680,6 +10162,7 @@
               </a:defRPr>
             </a:lvl1pPr>
             <a:lvl2pPr>
+              <a:buNone/>
               <a:defRPr sz="900" b="0">
                 <a:solidFill>
                   <a:srgbClr val="9AA2AD"/>
@@ -9687,6 +10170,7 @@
               </a:defRPr>
             </a:lvl2pPr>
             <a:lvl3pPr>
+              <a:buNone/>
               <a:defRPr sz="900" b="0">
                 <a:solidFill>
                   <a:srgbClr val="9AA2AD"/>
@@ -9694,6 +10178,7 @@
               </a:defRPr>
             </a:lvl3pPr>
             <a:lvl4pPr>
+              <a:buNone/>
               <a:defRPr sz="900" b="0">
                 <a:solidFill>
                   <a:srgbClr val="9AA2AD"/>
@@ -9701,6 +10186,7 @@
               </a:defRPr>
             </a:lvl4pPr>
             <a:lvl5pPr>
+              <a:buNone/>
               <a:defRPr sz="900" b="0">
                 <a:solidFill>
                   <a:srgbClr val="9AA2AD"/>
@@ -9708,6 +10194,7 @@
               </a:defRPr>
             </a:lvl5pPr>
             <a:lvl6pPr>
+              <a:buNone/>
               <a:defRPr sz="900" b="0">
                 <a:solidFill>
                   <a:srgbClr val="9AA2AD"/>
@@ -9715,6 +10202,7 @@
               </a:defRPr>
             </a:lvl6pPr>
             <a:lvl7pPr>
+              <a:buNone/>
               <a:defRPr sz="900" b="0">
                 <a:solidFill>
                   <a:srgbClr val="9AA2AD"/>
@@ -9722,6 +10210,7 @@
               </a:defRPr>
             </a:lvl7pPr>
             <a:lvl8pPr>
+              <a:buNone/>
               <a:defRPr sz="900" b="0">
                 <a:solidFill>
                   <a:srgbClr val="9AA2AD"/>
@@ -9729,6 +10218,7 @@
               </a:defRPr>
             </a:lvl8pPr>
             <a:lvl9pPr>
+              <a:buNone/>
               <a:defRPr sz="900" b="0">
                 <a:solidFill>
                   <a:srgbClr val="9AA2AD"/>
@@ -9738,6 +10228,7 @@
           </a:lstStyle>
           <a:p xmlns:a="http://schemas.openxmlformats.org/drawingml/2006/main">
             <a:pPr>
+              <a:buNone/>
               <a:defRPr sz="900" b="0">
                 <a:solidFill>
                   <a:srgbClr val="9AA2AD"/>
@@ -9750,7 +10241,7 @@
                   <a:srgbClr val="9AA2AD"/>
                 </a:solidFill>
               </a:rPr>
-              <a:t>Limits: synthetic data only. Human review remains required. Confidence intervals do not measure generator bias. Power and bank data require lawful access and privacy safeguards.</a:t>
+              <a:t>Synthetic only. Verification labels are generated. Forger test, ablation intervals and second-machine reproduction remain open. Human review required.</a:t>
             </a:r>
           </a:p>
         </p:txBody>
@@ -9794,6 +10285,7 @@
               </a:defRPr>
             </a:defPPr>
             <a:lvl1pPr>
+              <a:buNone/>
               <a:defRPr sz="750" b="1">
                 <a:solidFill>
                   <a:srgbClr val="9AA2AD"/>
@@ -9801,6 +10293,7 @@
               </a:defRPr>
             </a:lvl1pPr>
             <a:lvl2pPr>
+              <a:buNone/>
               <a:defRPr sz="750" b="1">
                 <a:solidFill>
                   <a:srgbClr val="9AA2AD"/>
@@ -9808,6 +10301,7 @@
               </a:defRPr>
             </a:lvl2pPr>
             <a:lvl3pPr>
+              <a:buNone/>
               <a:defRPr sz="750" b="1">
                 <a:solidFill>
                   <a:srgbClr val="9AA2AD"/>
@@ -9815,6 +10309,7 @@
               </a:defRPr>
             </a:lvl3pPr>
             <a:lvl4pPr>
+              <a:buNone/>
               <a:defRPr sz="750" b="1">
                 <a:solidFill>
                   <a:srgbClr val="9AA2AD"/>
@@ -9822,6 +10317,7 @@
               </a:defRPr>
             </a:lvl4pPr>
             <a:lvl5pPr>
+              <a:buNone/>
               <a:defRPr sz="750" b="1">
                 <a:solidFill>
                   <a:srgbClr val="9AA2AD"/>
@@ -9829,6 +10325,7 @@
               </a:defRPr>
             </a:lvl5pPr>
             <a:lvl6pPr>
+              <a:buNone/>
               <a:defRPr sz="750" b="1">
                 <a:solidFill>
                   <a:srgbClr val="9AA2AD"/>
@@ -9836,6 +10333,7 @@
               </a:defRPr>
             </a:lvl6pPr>
             <a:lvl7pPr>
+              <a:buNone/>
               <a:defRPr sz="750" b="1">
                 <a:solidFill>
                   <a:srgbClr val="9AA2AD"/>
@@ -9843,6 +10341,7 @@
               </a:defRPr>
             </a:lvl7pPr>
             <a:lvl8pPr>
+              <a:buNone/>
               <a:defRPr sz="750" b="1">
                 <a:solidFill>
                   <a:srgbClr val="9AA2AD"/>
@@ -9850,6 +10349,7 @@
               </a:defRPr>
             </a:lvl8pPr>
             <a:lvl9pPr>
+              <a:buNone/>
               <a:defRPr sz="750" b="1">
                 <a:solidFill>
                   <a:srgbClr val="9AA2AD"/>
@@ -9859,6 +10359,7 @@
           </a:lstStyle>
           <a:p xmlns:a="http://schemas.openxmlformats.org/drawingml/2006/main">
             <a:pPr>
+              <a:buNone/>
               <a:defRPr sz="750" b="1">
                 <a:solidFill>
                   <a:srgbClr val="9AA2AD"/>
@@ -9915,6 +10416,7 @@
               </a:defRPr>
             </a:defPPr>
             <a:lvl1pPr>
+              <a:buNone/>
               <a:defRPr sz="900" b="1">
                 <a:solidFill>
                   <a:srgbClr val="B7D660"/>
@@ -9922,6 +10424,7 @@
               </a:defRPr>
             </a:lvl1pPr>
             <a:lvl2pPr>
+              <a:buNone/>
               <a:defRPr sz="900" b="1">
                 <a:solidFill>
                   <a:srgbClr val="B7D660"/>
@@ -9929,6 +10432,7 @@
               </a:defRPr>
             </a:lvl2pPr>
             <a:lvl3pPr>
+              <a:buNone/>
               <a:defRPr sz="900" b="1">
                 <a:solidFill>
                   <a:srgbClr val="B7D660"/>
@@ -9936,6 +10440,7 @@
               </a:defRPr>
             </a:lvl3pPr>
             <a:lvl4pPr>
+              <a:buNone/>
               <a:defRPr sz="900" b="1">
                 <a:solidFill>
                   <a:srgbClr val="B7D660"/>
@@ -9943,6 +10448,7 @@
               </a:defRPr>
             </a:lvl4pPr>
             <a:lvl5pPr>
+              <a:buNone/>
               <a:defRPr sz="900" b="1">
                 <a:solidFill>
                   <a:srgbClr val="B7D660"/>
@@ -9950,6 +10456,7 @@
               </a:defRPr>
             </a:lvl5pPr>
             <a:lvl6pPr>
+              <a:buNone/>
               <a:defRPr sz="900" b="1">
                 <a:solidFill>
                   <a:srgbClr val="B7D660"/>
@@ -9957,6 +10464,7 @@
               </a:defRPr>
             </a:lvl6pPr>
             <a:lvl7pPr>
+              <a:buNone/>
               <a:defRPr sz="900" b="1">
                 <a:solidFill>
                   <a:srgbClr val="B7D660"/>
@@ -9964,6 +10472,7 @@
               </a:defRPr>
             </a:lvl7pPr>
             <a:lvl8pPr>
+              <a:buNone/>
               <a:defRPr sz="900" b="1">
                 <a:solidFill>
                   <a:srgbClr val="B7D660"/>
@@ -9971,6 +10480,7 @@
               </a:defRPr>
             </a:lvl8pPr>
             <a:lvl9pPr>
+              <a:buNone/>
               <a:defRPr sz="900" b="1">
                 <a:solidFill>
                   <a:srgbClr val="B7D660"/>
@@ -9980,6 +10490,7 @@
           </a:lstStyle>
           <a:p xmlns:a="http://schemas.openxmlformats.org/drawingml/2006/main">
             <a:pPr>
+              <a:buNone/>
               <a:defRPr sz="900" b="1">
                 <a:solidFill>
                   <a:srgbClr val="B7D660"/>
@@ -9993,6 +10504,208 @@
                 </a:solidFill>
               </a:rPr>
               <a:t>04</a:t>
+            </a:r>
+          </a:p>
+        </p:txBody>
+      </p:sp>
+      <p:sp>
+        <p:nvSpPr>
+          <p:cNvPr id="18" name="">
+            <a:extLst xmlns:a="http://schemas.openxmlformats.org/drawingml/2006/main">
+              <a:ext uri="{FF2B5EF4-FFF2-40B4-BE49-F238E27FC236}">
+                <a16:creationId xmlns:a16="http://schemas.microsoft.com/office/drawing/2014/main" id="{FCA695E1-914C-4933-BD98-8D1F8551938C}"/>
+              </a:ext>
+            </a:extLst>
+          </p:cNvPr>
+          <p:cNvSpPr>
+            <a:spLocks xmlns:a="http://schemas.openxmlformats.org/drawingml/2006/main" noGrp="1"/>
+          </p:cNvSpPr>
+          <p:nvPr/>
+        </p:nvSpPr>
+        <p:spPr>
+          <a:xfrm xmlns:a="http://schemas.openxmlformats.org/drawingml/2006/main">
+            <a:off x="609600" y="2457450"/>
+            <a:ext cx="10477500" cy="1143000"/>
+          </a:xfrm>
+          <a:prstGeom xmlns:a="http://schemas.openxmlformats.org/drawingml/2006/main" prst="rect">
+            <a:avLst/>
+          </a:prstGeom>
+          <a:noFill xmlns:a="http://schemas.openxmlformats.org/drawingml/2006/main"/>
+          <a:ln xmlns:a="http://schemas.openxmlformats.org/drawingml/2006/main" w="0">
+            <a:noFill/>
+          </a:ln>
+        </p:spPr>
+        <p:txBody>
+          <a:bodyPr xmlns:a="http://schemas.openxmlformats.org/drawingml/2006/main"/>
+          <a:lstStyle xmlns:a="http://schemas.openxmlformats.org/drawingml/2006/main">
+            <a:defPPr>
+              <a:defRPr sz="1425">
+                <a:solidFill>
+                  <a:srgbClr val="F6F1E8"/>
+                </a:solidFill>
+                <a:latin typeface="Aptos"/>
+                <a:ea typeface="Aptos"/>
+                <a:cs typeface="Aptos"/>
+              </a:defRPr>
+            </a:defPPr>
+            <a:lvl1pPr>
+              <a:defRPr sz="1425">
+                <a:solidFill>
+                  <a:srgbClr val="F6F1E8"/>
+                </a:solidFill>
+                <a:latin typeface="Aptos"/>
+                <a:ea typeface="Aptos"/>
+                <a:cs typeface="Aptos"/>
+              </a:defRPr>
+            </a:lvl1pPr>
+            <a:lvl2pPr>
+              <a:defRPr sz="1425">
+                <a:solidFill>
+                  <a:srgbClr val="F6F1E8"/>
+                </a:solidFill>
+                <a:latin typeface="Aptos"/>
+                <a:ea typeface="Aptos"/>
+                <a:cs typeface="Aptos"/>
+              </a:defRPr>
+            </a:lvl2pPr>
+            <a:lvl3pPr>
+              <a:defRPr sz="1425">
+                <a:solidFill>
+                  <a:srgbClr val="F6F1E8"/>
+                </a:solidFill>
+                <a:latin typeface="Aptos"/>
+                <a:ea typeface="Aptos"/>
+                <a:cs typeface="Aptos"/>
+              </a:defRPr>
+            </a:lvl3pPr>
+            <a:lvl4pPr>
+              <a:defRPr sz="1425">
+                <a:solidFill>
+                  <a:srgbClr val="F6F1E8"/>
+                </a:solidFill>
+                <a:latin typeface="Aptos"/>
+                <a:ea typeface="Aptos"/>
+                <a:cs typeface="Aptos"/>
+              </a:defRPr>
+            </a:lvl4pPr>
+            <a:lvl5pPr>
+              <a:defRPr sz="1425">
+                <a:solidFill>
+                  <a:srgbClr val="F6F1E8"/>
+                </a:solidFill>
+                <a:latin typeface="Aptos"/>
+                <a:ea typeface="Aptos"/>
+                <a:cs typeface="Aptos"/>
+              </a:defRPr>
+            </a:lvl5pPr>
+            <a:lvl6pPr>
+              <a:defRPr sz="1425">
+                <a:solidFill>
+                  <a:srgbClr val="F6F1E8"/>
+                </a:solidFill>
+                <a:latin typeface="Aptos"/>
+                <a:ea typeface="Aptos"/>
+                <a:cs typeface="Aptos"/>
+              </a:defRPr>
+            </a:lvl6pPr>
+            <a:lvl7pPr>
+              <a:defRPr sz="1425">
+                <a:solidFill>
+                  <a:srgbClr val="F6F1E8"/>
+                </a:solidFill>
+                <a:latin typeface="Aptos"/>
+                <a:ea typeface="Aptos"/>
+                <a:cs typeface="Aptos"/>
+              </a:defRPr>
+            </a:lvl7pPr>
+            <a:lvl8pPr>
+              <a:defRPr sz="1425">
+                <a:solidFill>
+                  <a:srgbClr val="F6F1E8"/>
+                </a:solidFill>
+                <a:latin typeface="Aptos"/>
+                <a:ea typeface="Aptos"/>
+                <a:cs typeface="Aptos"/>
+              </a:defRPr>
+            </a:lvl8pPr>
+            <a:lvl9pPr>
+              <a:defRPr sz="1425">
+                <a:solidFill>
+                  <a:srgbClr val="F6F1E8"/>
+                </a:solidFill>
+                <a:latin typeface="Aptos"/>
+                <a:ea typeface="Aptos"/>
+                <a:cs typeface="Aptos"/>
+              </a:defRPr>
+            </a:lvl9pPr>
+          </a:lstStyle>
+          <a:p xmlns:a="http://schemas.openxmlformats.org/drawingml/2006/main">
+            <a:pPr>
+              <a:defRPr sz="1425">
+                <a:solidFill>
+                  <a:srgbClr val="F6F1E8"/>
+                </a:solidFill>
+                <a:latin typeface="Aptos"/>
+                <a:ea typeface="Aptos"/>
+                <a:cs typeface="Aptos"/>
+              </a:defRPr>
+            </a:pPr>
+            <a:r>
+              <a:rPr sz="1425">
+                <a:solidFill>
+                  <a:srgbClr val="F6F1E8"/>
+                </a:solidFill>
+                <a:latin typeface="Aptos"/>
+                <a:ea typeface="Aptos"/>
+                <a:cs typeface="Aptos"/>
+              </a:rPr>
+              <a:t>V3-C 95% CIs: recall 78.88% – 83.64%; FPR 2.06% – 2.49%.</a:t>
+            </a:r>
+          </a:p>
+          <a:p xmlns:a="http://schemas.openxmlformats.org/drawingml/2006/main">
+            <a:pPr>
+              <a:defRPr sz="1425">
+                <a:solidFill>
+                  <a:srgbClr val="F6F1E8"/>
+                </a:solidFill>
+                <a:latin typeface="Aptos"/>
+                <a:ea typeface="Aptos"/>
+                <a:cs typeface="Aptos"/>
+              </a:defRPr>
+            </a:pPr>
+            <a:r>
+              <a:rPr sz="1425">
+                <a:solidFill>
+                  <a:srgbClr val="F6F1E8"/>
+                </a:solidFill>
+                <a:latin typeface="Aptos"/>
+                <a:ea typeface="Aptos"/>
+                <a:cs typeface="Aptos"/>
+              </a:rPr>
+              <a:t>V3-B primary: recall 81.14%; FPR 2.20%.</a:t>
+            </a:r>
+          </a:p>
+          <a:p xmlns:a="http://schemas.openxmlformats.org/drawingml/2006/main">
+            <a:pPr>
+              <a:defRPr sz="1425">
+                <a:solidFill>
+                  <a:srgbClr val="F6F1E8"/>
+                </a:solidFill>
+                <a:latin typeface="Aptos"/>
+                <a:ea typeface="Aptos"/>
+                <a:cs typeface="Aptos"/>
+              </a:defRPr>
+            </a:pPr>
+            <a:r>
+              <a:rPr sz="1425">
+                <a:solidFill>
+                  <a:srgbClr val="F6F1E8"/>
+                </a:solidFill>
+                <a:latin typeface="Aptos"/>
+                <a:ea typeface="Aptos"/>
+                <a:cs typeface="Aptos"/>
+              </a:rPr>
+              <a:t>Wrong-clears: 0 of 720 active-cheat factories; approximate upper bound 0.42%. Assumes independent factories.</a:t>
             </a:r>
           </a:p>
         </p:txBody>
@@ -10065,6 +10778,7 @@
               </a:defRPr>
             </a:defPPr>
             <a:lvl1pPr>
+              <a:buNone/>
               <a:defRPr sz="900" b="1">
                 <a:solidFill>
                   <a:srgbClr val="B7D660"/>
@@ -10072,6 +10786,7 @@
               </a:defRPr>
             </a:lvl1pPr>
             <a:lvl2pPr>
+              <a:buNone/>
               <a:defRPr sz="900" b="1">
                 <a:solidFill>
                   <a:srgbClr val="B7D660"/>
@@ -10079,6 +10794,7 @@
               </a:defRPr>
             </a:lvl2pPr>
             <a:lvl3pPr>
+              <a:buNone/>
               <a:defRPr sz="900" b="1">
                 <a:solidFill>
                   <a:srgbClr val="B7D660"/>
@@ -10086,6 +10802,7 @@
               </a:defRPr>
             </a:lvl3pPr>
             <a:lvl4pPr>
+              <a:buNone/>
               <a:defRPr sz="900" b="1">
                 <a:solidFill>
                   <a:srgbClr val="B7D660"/>
@@ -10093,6 +10810,7 @@
               </a:defRPr>
             </a:lvl4pPr>
             <a:lvl5pPr>
+              <a:buNone/>
               <a:defRPr sz="900" b="1">
                 <a:solidFill>
                   <a:srgbClr val="B7D660"/>
@@ -10100,6 +10818,7 @@
               </a:defRPr>
             </a:lvl5pPr>
             <a:lvl6pPr>
+              <a:buNone/>
               <a:defRPr sz="900" b="1">
                 <a:solidFill>
                   <a:srgbClr val="B7D660"/>
@@ -10107,6 +10826,7 @@
               </a:defRPr>
             </a:lvl6pPr>
             <a:lvl7pPr>
+              <a:buNone/>
               <a:defRPr sz="900" b="1">
                 <a:solidFill>
                   <a:srgbClr val="B7D660"/>
@@ -10114,6 +10834,7 @@
               </a:defRPr>
             </a:lvl7pPr>
             <a:lvl8pPr>
+              <a:buNone/>
               <a:defRPr sz="900" b="1">
                 <a:solidFill>
                   <a:srgbClr val="B7D660"/>
@@ -10121,6 +10842,7 @@
               </a:defRPr>
             </a:lvl8pPr>
             <a:lvl9pPr>
+              <a:buNone/>
               <a:defRPr sz="900" b="1">
                 <a:solidFill>
                   <a:srgbClr val="B7D660"/>
@@ -10130,6 +10852,7 @@
           </a:lstStyle>
           <a:p xmlns:a="http://schemas.openxmlformats.org/drawingml/2006/main">
             <a:pPr>
+              <a:buNone/>
               <a:defRPr sz="900" b="1">
                 <a:solidFill>
                   <a:srgbClr val="B7D660"/>
@@ -10186,6 +10909,7 @@
               </a:defRPr>
             </a:defPPr>
             <a:lvl1pPr>
+              <a:buNone/>
               <a:defRPr sz="3150" b="1">
                 <a:solidFill>
                   <a:srgbClr val="F6F1E8"/>
@@ -10193,6 +10917,7 @@
               </a:defRPr>
             </a:lvl1pPr>
             <a:lvl2pPr>
+              <a:buNone/>
               <a:defRPr sz="3150" b="1">
                 <a:solidFill>
                   <a:srgbClr val="F6F1E8"/>
@@ -10200,6 +10925,7 @@
               </a:defRPr>
             </a:lvl2pPr>
             <a:lvl3pPr>
+              <a:buNone/>
               <a:defRPr sz="3150" b="1">
                 <a:solidFill>
                   <a:srgbClr val="F6F1E8"/>
@@ -10207,6 +10933,7 @@
               </a:defRPr>
             </a:lvl3pPr>
             <a:lvl4pPr>
+              <a:buNone/>
               <a:defRPr sz="3150" b="1">
                 <a:solidFill>
                   <a:srgbClr val="F6F1E8"/>
@@ -10214,6 +10941,7 @@
               </a:defRPr>
             </a:lvl4pPr>
             <a:lvl5pPr>
+              <a:buNone/>
               <a:defRPr sz="3150" b="1">
                 <a:solidFill>
                   <a:srgbClr val="F6F1E8"/>
@@ -10221,6 +10949,7 @@
               </a:defRPr>
             </a:lvl5pPr>
             <a:lvl6pPr>
+              <a:buNone/>
               <a:defRPr sz="3150" b="1">
                 <a:solidFill>
                   <a:srgbClr val="F6F1E8"/>
@@ -10228,6 +10957,7 @@
               </a:defRPr>
             </a:lvl6pPr>
             <a:lvl7pPr>
+              <a:buNone/>
               <a:defRPr sz="3150" b="1">
                 <a:solidFill>
                   <a:srgbClr val="F6F1E8"/>
@@ -10235,6 +10965,7 @@
               </a:defRPr>
             </a:lvl7pPr>
             <a:lvl8pPr>
+              <a:buNone/>
               <a:defRPr sz="3150" b="1">
                 <a:solidFill>
                   <a:srgbClr val="F6F1E8"/>
@@ -10242,6 +10973,7 @@
               </a:defRPr>
             </a:lvl8pPr>
             <a:lvl9pPr>
+              <a:buNone/>
               <a:defRPr sz="3150" b="1">
                 <a:solidFill>
                   <a:srgbClr val="F6F1E8"/>
@@ -10251,6 +10983,7 @@
           </a:lstStyle>
           <a:p xmlns:a="http://schemas.openxmlformats.org/drawingml/2006/main">
             <a:pPr>
+              <a:buNone/>
               <a:defRPr sz="3150" b="1">
                 <a:solidFill>
                   <a:srgbClr val="F6F1E8"/>
@@ -10307,6 +11040,7 @@
               </a:defRPr>
             </a:defPPr>
             <a:lvl1pPr>
+              <a:buNone/>
               <a:defRPr sz="1350" b="0">
                 <a:solidFill>
                   <a:srgbClr val="9AA2AD"/>
@@ -10314,6 +11048,7 @@
               </a:defRPr>
             </a:lvl1pPr>
             <a:lvl2pPr>
+              <a:buNone/>
               <a:defRPr sz="1350" b="0">
                 <a:solidFill>
                   <a:srgbClr val="9AA2AD"/>
@@ -10321,6 +11056,7 @@
               </a:defRPr>
             </a:lvl2pPr>
             <a:lvl3pPr>
+              <a:buNone/>
               <a:defRPr sz="1350" b="0">
                 <a:solidFill>
                   <a:srgbClr val="9AA2AD"/>
@@ -10328,6 +11064,7 @@
               </a:defRPr>
             </a:lvl3pPr>
             <a:lvl4pPr>
+              <a:buNone/>
               <a:defRPr sz="1350" b="0">
                 <a:solidFill>
                   <a:srgbClr val="9AA2AD"/>
@@ -10335,6 +11072,7 @@
               </a:defRPr>
             </a:lvl4pPr>
             <a:lvl5pPr>
+              <a:buNone/>
               <a:defRPr sz="1350" b="0">
                 <a:solidFill>
                   <a:srgbClr val="9AA2AD"/>
@@ -10342,6 +11080,7 @@
               </a:defRPr>
             </a:lvl5pPr>
             <a:lvl6pPr>
+              <a:buNone/>
               <a:defRPr sz="1350" b="0">
                 <a:solidFill>
                   <a:srgbClr val="9AA2AD"/>
@@ -10349,6 +11088,7 @@
               </a:defRPr>
             </a:lvl6pPr>
             <a:lvl7pPr>
+              <a:buNone/>
               <a:defRPr sz="1350" b="0">
                 <a:solidFill>
                   <a:srgbClr val="9AA2AD"/>
@@ -10356,6 +11096,7 @@
               </a:defRPr>
             </a:lvl7pPr>
             <a:lvl8pPr>
+              <a:buNone/>
               <a:defRPr sz="1350" b="0">
                 <a:solidFill>
                   <a:srgbClr val="9AA2AD"/>
@@ -10363,6 +11104,7 @@
               </a:defRPr>
             </a:lvl8pPr>
             <a:lvl9pPr>
+              <a:buNone/>
               <a:defRPr sz="1350" b="0">
                 <a:solidFill>
                   <a:srgbClr val="9AA2AD"/>
@@ -10372,6 +11114,7 @@
           </a:lstStyle>
           <a:p xmlns:a="http://schemas.openxmlformats.org/drawingml/2006/main">
             <a:pPr>
+              <a:buNone/>
               <a:defRPr sz="1350" b="0">
                 <a:solidFill>
                   <a:srgbClr val="9AA2AD"/>
@@ -10428,6 +11171,7 @@
               </a:defRPr>
             </a:defPPr>
             <a:lvl1pPr>
+              <a:buNone/>
               <a:defRPr sz="2250" b="1">
                 <a:solidFill>
                   <a:srgbClr val="B7D660"/>
@@ -10435,6 +11179,7 @@
               </a:defRPr>
             </a:lvl1pPr>
             <a:lvl2pPr>
+              <a:buNone/>
               <a:defRPr sz="2250" b="1">
                 <a:solidFill>
                   <a:srgbClr val="B7D660"/>
@@ -10442,6 +11187,7 @@
               </a:defRPr>
             </a:lvl2pPr>
             <a:lvl3pPr>
+              <a:buNone/>
               <a:defRPr sz="2250" b="1">
                 <a:solidFill>
                   <a:srgbClr val="B7D660"/>
@@ -10449,6 +11195,7 @@
               </a:defRPr>
             </a:lvl3pPr>
             <a:lvl4pPr>
+              <a:buNone/>
               <a:defRPr sz="2250" b="1">
                 <a:solidFill>
                   <a:srgbClr val="B7D660"/>
@@ -10456,6 +11203,7 @@
               </a:defRPr>
             </a:lvl4pPr>
             <a:lvl5pPr>
+              <a:buNone/>
               <a:defRPr sz="2250" b="1">
                 <a:solidFill>
                   <a:srgbClr val="B7D660"/>
@@ -10463,6 +11211,7 @@
               </a:defRPr>
             </a:lvl5pPr>
             <a:lvl6pPr>
+              <a:buNone/>
               <a:defRPr sz="2250" b="1">
                 <a:solidFill>
                   <a:srgbClr val="B7D660"/>
@@ -10470,6 +11219,7 @@
               </a:defRPr>
             </a:lvl6pPr>
             <a:lvl7pPr>
+              <a:buNone/>
               <a:defRPr sz="2250" b="1">
                 <a:solidFill>
                   <a:srgbClr val="B7D660"/>
@@ -10477,6 +11227,7 @@
               </a:defRPr>
             </a:lvl7pPr>
             <a:lvl8pPr>
+              <a:buNone/>
               <a:defRPr sz="2250" b="1">
                 <a:solidFill>
                   <a:srgbClr val="B7D660"/>
@@ -10484,6 +11235,7 @@
               </a:defRPr>
             </a:lvl8pPr>
             <a:lvl9pPr>
+              <a:buNone/>
               <a:defRPr sz="2250" b="1">
                 <a:solidFill>
                   <a:srgbClr val="B7D660"/>
@@ -10493,6 +11245,7 @@
           </a:lstStyle>
           <a:p xmlns:a="http://schemas.openxmlformats.org/drawingml/2006/main">
             <a:pPr>
+              <a:buNone/>
               <a:defRPr sz="2250" b="1">
                 <a:solidFill>
                   <a:srgbClr val="B7D660"/>
@@ -10505,7 +11258,7 @@
                   <a:srgbClr val="B7D660"/>
                 </a:solidFill>
               </a:rPr>
-              <a:t>20,978,945 raw evidence rows</a:t>
+              <a:t>172,800 current V3-C feature rows</a:t>
             </a:r>
           </a:p>
         </p:txBody>
@@ -10549,6 +11302,7 @@
               </a:defRPr>
             </a:defPPr>
             <a:lvl1pPr>
+              <a:buNone/>
               <a:defRPr sz="1200" b="0">
                 <a:solidFill>
                   <a:srgbClr val="F6F1E8"/>
@@ -10556,6 +11310,7 @@
               </a:defRPr>
             </a:lvl1pPr>
             <a:lvl2pPr>
+              <a:buNone/>
               <a:defRPr sz="1200" b="0">
                 <a:solidFill>
                   <a:srgbClr val="F6F1E8"/>
@@ -10563,6 +11318,7 @@
               </a:defRPr>
             </a:lvl2pPr>
             <a:lvl3pPr>
+              <a:buNone/>
               <a:defRPr sz="1200" b="0">
                 <a:solidFill>
                   <a:srgbClr val="F6F1E8"/>
@@ -10570,6 +11326,7 @@
               </a:defRPr>
             </a:lvl3pPr>
             <a:lvl4pPr>
+              <a:buNone/>
               <a:defRPr sz="1200" b="0">
                 <a:solidFill>
                   <a:srgbClr val="F6F1E8"/>
@@ -10577,6 +11334,7 @@
               </a:defRPr>
             </a:lvl4pPr>
             <a:lvl5pPr>
+              <a:buNone/>
               <a:defRPr sz="1200" b="0">
                 <a:solidFill>
                   <a:srgbClr val="F6F1E8"/>
@@ -10584,6 +11342,7 @@
               </a:defRPr>
             </a:lvl5pPr>
             <a:lvl6pPr>
+              <a:buNone/>
               <a:defRPr sz="1200" b="0">
                 <a:solidFill>
                   <a:srgbClr val="F6F1E8"/>
@@ -10591,6 +11350,7 @@
               </a:defRPr>
             </a:lvl6pPr>
             <a:lvl7pPr>
+              <a:buNone/>
               <a:defRPr sz="1200" b="0">
                 <a:solidFill>
                   <a:srgbClr val="F6F1E8"/>
@@ -10598,6 +11358,7 @@
               </a:defRPr>
             </a:lvl7pPr>
             <a:lvl8pPr>
+              <a:buNone/>
               <a:defRPr sz="1200" b="0">
                 <a:solidFill>
                   <a:srgbClr val="F6F1E8"/>
@@ -10605,6 +11366,7 @@
               </a:defRPr>
             </a:lvl8pPr>
             <a:lvl9pPr>
+              <a:buNone/>
               <a:defRPr sz="1200" b="0">
                 <a:solidFill>
                   <a:srgbClr val="F6F1E8"/>
@@ -10614,6 +11376,7 @@
           </a:lstStyle>
           <a:p xmlns:a="http://schemas.openxmlformats.org/drawingml/2006/main">
             <a:pPr>
+              <a:buNone/>
               <a:defRPr sz="1200" b="0">
                 <a:solidFill>
                   <a:srgbClr val="F6F1E8"/>
@@ -10626,7 +11389,7 @@
                   <a:srgbClr val="F6F1E8"/>
                 </a:solidFill>
               </a:rPr>
-              <a:t>Ranked workload timing: 48.946 s raw; 6.141 s after the batch ledger refresh. Measured on a MacBook.</a:t>
+              <a:t>2,400 factories. Stock median: Exasol 0.169 s; DuckDB 0.006 s. DuckDB was faster. MacBook workload timings.</a:t>
             </a:r>
           </a:p>
         </p:txBody>
@@ -10670,6 +11433,7 @@
               </a:defRPr>
             </a:defPPr>
             <a:lvl1pPr>
+              <a:buNone/>
               <a:defRPr sz="1650" b="1">
                 <a:solidFill>
                   <a:srgbClr val="E8418A"/>
@@ -10677,6 +11441,7 @@
               </a:defRPr>
             </a:lvl1pPr>
             <a:lvl2pPr>
+              <a:buNone/>
               <a:defRPr sz="1650" b="1">
                 <a:solidFill>
                   <a:srgbClr val="E8418A"/>
@@ -10684,6 +11449,7 @@
               </a:defRPr>
             </a:lvl2pPr>
             <a:lvl3pPr>
+              <a:buNone/>
               <a:defRPr sz="1650" b="1">
                 <a:solidFill>
                   <a:srgbClr val="E8418A"/>
@@ -10691,6 +11457,7 @@
               </a:defRPr>
             </a:lvl3pPr>
             <a:lvl4pPr>
+              <a:buNone/>
               <a:defRPr sz="1650" b="1">
                 <a:solidFill>
                   <a:srgbClr val="E8418A"/>
@@ -10698,6 +11465,7 @@
               </a:defRPr>
             </a:lvl4pPr>
             <a:lvl5pPr>
+              <a:buNone/>
               <a:defRPr sz="1650" b="1">
                 <a:solidFill>
                   <a:srgbClr val="E8418A"/>
@@ -10705,6 +11473,7 @@
               </a:defRPr>
             </a:lvl5pPr>
             <a:lvl6pPr>
+              <a:buNone/>
               <a:defRPr sz="1650" b="1">
                 <a:solidFill>
                   <a:srgbClr val="E8418A"/>
@@ -10712,6 +11481,7 @@
               </a:defRPr>
             </a:lvl6pPr>
             <a:lvl7pPr>
+              <a:buNone/>
               <a:defRPr sz="1650" b="1">
                 <a:solidFill>
                   <a:srgbClr val="E8418A"/>
@@ -10719,6 +11489,7 @@
               </a:defRPr>
             </a:lvl7pPr>
             <a:lvl8pPr>
+              <a:buNone/>
               <a:defRPr sz="1650" b="1">
                 <a:solidFill>
                   <a:srgbClr val="E8418A"/>
@@ -10726,6 +11497,7 @@
               </a:defRPr>
             </a:lvl8pPr>
             <a:lvl9pPr>
+              <a:buNone/>
               <a:defRPr sz="1650" b="1">
                 <a:solidFill>
                   <a:srgbClr val="E8418A"/>
@@ -10735,6 +11507,7 @@
           </a:lstStyle>
           <a:p xmlns:a="http://schemas.openxmlformats.org/drawingml/2006/main">
             <a:pPr>
+              <a:buNone/>
               <a:defRPr sz="1650" b="1">
                 <a:solidFill>
                   <a:srgbClr val="E8418A"/>
@@ -10791,6 +11564,7 @@
               </a:defRPr>
             </a:defPPr>
             <a:lvl1pPr>
+              <a:buNone/>
               <a:defRPr sz="1350" b="0">
                 <a:solidFill>
                   <a:srgbClr val="F6F1E8"/>
@@ -10798,6 +11572,7 @@
               </a:defRPr>
             </a:lvl1pPr>
             <a:lvl2pPr>
+              <a:buNone/>
               <a:defRPr sz="1350" b="0">
                 <a:solidFill>
                   <a:srgbClr val="F6F1E8"/>
@@ -10805,6 +11580,7 @@
               </a:defRPr>
             </a:lvl2pPr>
             <a:lvl3pPr>
+              <a:buNone/>
               <a:defRPr sz="1350" b="0">
                 <a:solidFill>
                   <a:srgbClr val="F6F1E8"/>
@@ -10812,6 +11588,7 @@
               </a:defRPr>
             </a:lvl3pPr>
             <a:lvl4pPr>
+              <a:buNone/>
               <a:defRPr sz="1350" b="0">
                 <a:solidFill>
                   <a:srgbClr val="F6F1E8"/>
@@ -10819,6 +11596,7 @@
               </a:defRPr>
             </a:lvl4pPr>
             <a:lvl5pPr>
+              <a:buNone/>
               <a:defRPr sz="1350" b="0">
                 <a:solidFill>
                   <a:srgbClr val="F6F1E8"/>
@@ -10826,6 +11604,7 @@
               </a:defRPr>
             </a:lvl5pPr>
             <a:lvl6pPr>
+              <a:buNone/>
               <a:defRPr sz="1350" b="0">
                 <a:solidFill>
                   <a:srgbClr val="F6F1E8"/>
@@ -10833,6 +11612,7 @@
               </a:defRPr>
             </a:lvl6pPr>
             <a:lvl7pPr>
+              <a:buNone/>
               <a:defRPr sz="1350" b="0">
                 <a:solidFill>
                   <a:srgbClr val="F6F1E8"/>
@@ -10840,6 +11620,7 @@
               </a:defRPr>
             </a:lvl7pPr>
             <a:lvl8pPr>
+              <a:buNone/>
               <a:defRPr sz="1350" b="0">
                 <a:solidFill>
                   <a:srgbClr val="F6F1E8"/>
@@ -10847,6 +11628,7 @@
               </a:defRPr>
             </a:lvl8pPr>
             <a:lvl9pPr>
+              <a:buNone/>
               <a:defRPr sz="1350" b="0">
                 <a:solidFill>
                   <a:srgbClr val="F6F1E8"/>
@@ -10856,6 +11638,7 @@
           </a:lstStyle>
           <a:p xmlns:a="http://schemas.openxmlformats.org/drawingml/2006/main">
             <a:pPr>
+              <a:buNone/>
               <a:defRPr sz="1350" b="0">
                 <a:solidFill>
                   <a:srgbClr val="F6F1E8"/>
@@ -10873,6 +11656,7 @@
           </a:p>
           <a:p xmlns:a="http://schemas.openxmlformats.org/drawingml/2006/main">
             <a:pPr>
+              <a:buNone/>
               <a:defRPr sz="1350" b="0">
                 <a:solidFill>
                   <a:srgbClr val="F6F1E8"/>
@@ -10895,6 +11679,7 @@
           </a:p>
           <a:p xmlns:a="http://schemas.openxmlformats.org/drawingml/2006/main">
             <a:pPr>
+              <a:buNone/>
               <a:defRPr sz="1350" b="0">
                 <a:solidFill>
                   <a:srgbClr val="F6F1E8"/>
@@ -10912,6 +11697,7 @@
           </a:p>
           <a:p xmlns:a="http://schemas.openxmlformats.org/drawingml/2006/main">
             <a:pPr>
+              <a:buNone/>
               <a:defRPr sz="1350" b="0">
                 <a:solidFill>
                   <a:srgbClr val="F6F1E8"/>
@@ -10968,6 +11754,7 @@
               </a:defRPr>
             </a:defPPr>
             <a:lvl1pPr>
+              <a:buNone/>
               <a:defRPr sz="1050" b="0">
                 <a:solidFill>
                   <a:srgbClr val="9AA2AD"/>
@@ -10975,6 +11762,7 @@
               </a:defRPr>
             </a:lvl1pPr>
             <a:lvl2pPr>
+              <a:buNone/>
               <a:defRPr sz="1050" b="0">
                 <a:solidFill>
                   <a:srgbClr val="9AA2AD"/>
@@ -10982,6 +11770,7 @@
               </a:defRPr>
             </a:lvl2pPr>
             <a:lvl3pPr>
+              <a:buNone/>
               <a:defRPr sz="1050" b="0">
                 <a:solidFill>
                   <a:srgbClr val="9AA2AD"/>
@@ -10989,6 +11778,7 @@
               </a:defRPr>
             </a:lvl3pPr>
             <a:lvl4pPr>
+              <a:buNone/>
               <a:defRPr sz="1050" b="0">
                 <a:solidFill>
                   <a:srgbClr val="9AA2AD"/>
@@ -10996,6 +11786,7 @@
               </a:defRPr>
             </a:lvl4pPr>
             <a:lvl5pPr>
+              <a:buNone/>
               <a:defRPr sz="1050" b="0">
                 <a:solidFill>
                   <a:srgbClr val="9AA2AD"/>
@@ -11003,6 +11794,7 @@
               </a:defRPr>
             </a:lvl5pPr>
             <a:lvl6pPr>
+              <a:buNone/>
               <a:defRPr sz="1050" b="0">
                 <a:solidFill>
                   <a:srgbClr val="9AA2AD"/>
@@ -11010,6 +11802,7 @@
               </a:defRPr>
             </a:lvl6pPr>
             <a:lvl7pPr>
+              <a:buNone/>
               <a:defRPr sz="1050" b="0">
                 <a:solidFill>
                   <a:srgbClr val="9AA2AD"/>
@@ -11017,6 +11810,7 @@
               </a:defRPr>
             </a:lvl7pPr>
             <a:lvl8pPr>
+              <a:buNone/>
               <a:defRPr sz="1050" b="0">
                 <a:solidFill>
                   <a:srgbClr val="9AA2AD"/>
@@ -11024,6 +11818,7 @@
               </a:defRPr>
             </a:lvl8pPr>
             <a:lvl9pPr>
+              <a:buNone/>
               <a:defRPr sz="1050" b="0">
                 <a:solidFill>
                   <a:srgbClr val="9AA2AD"/>
@@ -11033,6 +11828,7 @@
           </a:lstStyle>
           <a:p xmlns:a="http://schemas.openxmlformats.org/drawingml/2006/main">
             <a:pPr>
+              <a:buNone/>
               <a:defRPr sz="1050" b="0">
                 <a:solidFill>
                   <a:srgbClr val="9AA2AD"/>
@@ -11045,7 +11841,7 @@
                   <a:srgbClr val="9AA2AD"/>
                 </a:solidFill>
               </a:rPr>
-              <a:t>Germany: the same reconciliation pattern would need local tax rules, lawful data access and independent validation. This deck claims no German deployment or statistic.</a:t>
+              <a:t>The 20.98M-row run is historical DEV, not fresh. Current timings exclude Exasol ingestion; DuckDB load is separate. No German deployment is claimed.</a:t>
             </a:r>
           </a:p>
         </p:txBody>
@@ -11089,6 +11885,7 @@
               </a:defRPr>
             </a:defPPr>
             <a:lvl1pPr>
+              <a:buNone/>
               <a:defRPr sz="750" b="1">
                 <a:solidFill>
                   <a:srgbClr val="9AA2AD"/>
@@ -11096,6 +11893,7 @@
               </a:defRPr>
             </a:lvl1pPr>
             <a:lvl2pPr>
+              <a:buNone/>
               <a:defRPr sz="750" b="1">
                 <a:solidFill>
                   <a:srgbClr val="9AA2AD"/>
@@ -11103,6 +11901,7 @@
               </a:defRPr>
             </a:lvl2pPr>
             <a:lvl3pPr>
+              <a:buNone/>
               <a:defRPr sz="750" b="1">
                 <a:solidFill>
                   <a:srgbClr val="9AA2AD"/>
@@ -11110,6 +11909,7 @@
               </a:defRPr>
             </a:lvl3pPr>
             <a:lvl4pPr>
+              <a:buNone/>
               <a:defRPr sz="750" b="1">
                 <a:solidFill>
                   <a:srgbClr val="9AA2AD"/>
@@ -11117,6 +11917,7 @@
               </a:defRPr>
             </a:lvl4pPr>
             <a:lvl5pPr>
+              <a:buNone/>
               <a:defRPr sz="750" b="1">
                 <a:solidFill>
                   <a:srgbClr val="9AA2AD"/>
@@ -11124,6 +11925,7 @@
               </a:defRPr>
             </a:lvl5pPr>
             <a:lvl6pPr>
+              <a:buNone/>
               <a:defRPr sz="750" b="1">
                 <a:solidFill>
                   <a:srgbClr val="9AA2AD"/>
@@ -11131,6 +11933,7 @@
               </a:defRPr>
             </a:lvl6pPr>
             <a:lvl7pPr>
+              <a:buNone/>
               <a:defRPr sz="750" b="1">
                 <a:solidFill>
                   <a:srgbClr val="9AA2AD"/>
@@ -11138,6 +11941,7 @@
               </a:defRPr>
             </a:lvl7pPr>
             <a:lvl8pPr>
+              <a:buNone/>
               <a:defRPr sz="750" b="1">
                 <a:solidFill>
                   <a:srgbClr val="9AA2AD"/>
@@ -11145,6 +11949,7 @@
               </a:defRPr>
             </a:lvl8pPr>
             <a:lvl9pPr>
+              <a:buNone/>
               <a:defRPr sz="750" b="1">
                 <a:solidFill>
                   <a:srgbClr val="9AA2AD"/>
@@ -11154,6 +11959,7 @@
           </a:lstStyle>
           <a:p xmlns:a="http://schemas.openxmlformats.org/drawingml/2006/main">
             <a:pPr>
+              <a:buNone/>
               <a:defRPr sz="750" b="1">
                 <a:solidFill>
                   <a:srgbClr val="9AA2AD"/>
@@ -11210,6 +12016,7 @@
               </a:defRPr>
             </a:defPPr>
             <a:lvl1pPr>
+              <a:buNone/>
               <a:defRPr sz="900" b="1">
                 <a:solidFill>
                   <a:srgbClr val="B7D660"/>
@@ -11217,6 +12024,7 @@
               </a:defRPr>
             </a:lvl1pPr>
             <a:lvl2pPr>
+              <a:buNone/>
               <a:defRPr sz="900" b="1">
                 <a:solidFill>
                   <a:srgbClr val="B7D660"/>
@@ -11224,6 +12032,7 @@
               </a:defRPr>
             </a:lvl2pPr>
             <a:lvl3pPr>
+              <a:buNone/>
               <a:defRPr sz="900" b="1">
                 <a:solidFill>
                   <a:srgbClr val="B7D660"/>
@@ -11231,6 +12040,7 @@
               </a:defRPr>
             </a:lvl3pPr>
             <a:lvl4pPr>
+              <a:buNone/>
               <a:defRPr sz="900" b="1">
                 <a:solidFill>
                   <a:srgbClr val="B7D660"/>
@@ -11238,6 +12048,7 @@
               </a:defRPr>
             </a:lvl4pPr>
             <a:lvl5pPr>
+              <a:buNone/>
               <a:defRPr sz="900" b="1">
                 <a:solidFill>
                   <a:srgbClr val="B7D660"/>
@@ -11245,6 +12056,7 @@
               </a:defRPr>
             </a:lvl5pPr>
             <a:lvl6pPr>
+              <a:buNone/>
               <a:defRPr sz="900" b="1">
                 <a:solidFill>
                   <a:srgbClr val="B7D660"/>
@@ -11252,6 +12064,7 @@
               </a:defRPr>
             </a:lvl6pPr>
             <a:lvl7pPr>
+              <a:buNone/>
               <a:defRPr sz="900" b="1">
                 <a:solidFill>
                   <a:srgbClr val="B7D660"/>
@@ -11259,6 +12072,7 @@
               </a:defRPr>
             </a:lvl7pPr>
             <a:lvl8pPr>
+              <a:buNone/>
               <a:defRPr sz="900" b="1">
                 <a:solidFill>
                   <a:srgbClr val="B7D660"/>
@@ -11266,6 +12080,7 @@
               </a:defRPr>
             </a:lvl8pPr>
             <a:lvl9pPr>
+              <a:buNone/>
               <a:defRPr sz="900" b="1">
                 <a:solidFill>
                   <a:srgbClr val="B7D660"/>
@@ -11275,6 +12090,7 @@
           </a:lstStyle>
           <a:p xmlns:a="http://schemas.openxmlformats.org/drawingml/2006/main">
             <a:pPr>
+              <a:buNone/>
               <a:defRPr sz="900" b="1">
                 <a:solidFill>
                   <a:srgbClr val="B7D660"/>
